--- a/refactoring.pptx
+++ b/refactoring.pptx
@@ -5,10 +5,10 @@
     <p:sldMasterId id="2147483935" r:id="rId4"/>
   </p:sldMasterIdLst>
   <p:notesMasterIdLst>
-    <p:notesMasterId r:id="rId46"/>
+    <p:notesMasterId r:id="rId36"/>
   </p:notesMasterIdLst>
   <p:handoutMasterIdLst>
-    <p:handoutMasterId r:id="rId47"/>
+    <p:handoutMasterId r:id="rId37"/>
   </p:handoutMasterIdLst>
   <p:sldIdLst>
     <p:sldId id="661" r:id="rId5"/>
@@ -20,38 +20,28 @@
     <p:sldId id="639" r:id="rId11"/>
     <p:sldId id="640" r:id="rId12"/>
     <p:sldId id="603" r:id="rId13"/>
-    <p:sldId id="607" r:id="rId14"/>
-    <p:sldId id="586" r:id="rId15"/>
-    <p:sldId id="297" r:id="rId16"/>
-    <p:sldId id="628" r:id="rId17"/>
-    <p:sldId id="633" r:id="rId18"/>
-    <p:sldId id="605" r:id="rId19"/>
-    <p:sldId id="624" r:id="rId20"/>
-    <p:sldId id="641" r:id="rId21"/>
-    <p:sldId id="618" r:id="rId22"/>
-    <p:sldId id="623" r:id="rId23"/>
-    <p:sldId id="651" r:id="rId24"/>
-    <p:sldId id="650" r:id="rId25"/>
-    <p:sldId id="619" r:id="rId26"/>
-    <p:sldId id="652" r:id="rId27"/>
-    <p:sldId id="644" r:id="rId28"/>
-    <p:sldId id="653" r:id="rId29"/>
-    <p:sldId id="643" r:id="rId30"/>
-    <p:sldId id="658" r:id="rId31"/>
-    <p:sldId id="659" r:id="rId32"/>
-    <p:sldId id="654" r:id="rId33"/>
-    <p:sldId id="655" r:id="rId34"/>
-    <p:sldId id="656" r:id="rId35"/>
-    <p:sldId id="266" r:id="rId36"/>
-    <p:sldId id="660" r:id="rId37"/>
-    <p:sldId id="629" r:id="rId38"/>
-    <p:sldId id="647" r:id="rId39"/>
-    <p:sldId id="648" r:id="rId40"/>
-    <p:sldId id="630" r:id="rId41"/>
-    <p:sldId id="631" r:id="rId42"/>
-    <p:sldId id="649" r:id="rId43"/>
-    <p:sldId id="632" r:id="rId44"/>
-    <p:sldId id="634" r:id="rId45"/>
+    <p:sldId id="665" r:id="rId14"/>
+    <p:sldId id="667" r:id="rId15"/>
+    <p:sldId id="666" r:id="rId16"/>
+    <p:sldId id="652" r:id="rId17"/>
+    <p:sldId id="644" r:id="rId18"/>
+    <p:sldId id="653" r:id="rId19"/>
+    <p:sldId id="643" r:id="rId20"/>
+    <p:sldId id="658" r:id="rId21"/>
+    <p:sldId id="659" r:id="rId22"/>
+    <p:sldId id="654" r:id="rId23"/>
+    <p:sldId id="655" r:id="rId24"/>
+    <p:sldId id="656" r:id="rId25"/>
+    <p:sldId id="266" r:id="rId26"/>
+    <p:sldId id="660" r:id="rId27"/>
+    <p:sldId id="629" r:id="rId28"/>
+    <p:sldId id="647" r:id="rId29"/>
+    <p:sldId id="648" r:id="rId30"/>
+    <p:sldId id="630" r:id="rId31"/>
+    <p:sldId id="631" r:id="rId32"/>
+    <p:sldId id="649" r:id="rId33"/>
+    <p:sldId id="632" r:id="rId34"/>
+    <p:sldId id="634" r:id="rId35"/>
   </p:sldIdLst>
   <p:sldSz cx="12188825" cy="6858000"/>
   <p:notesSz cx="7010400" cy="9296400"/>
@@ -295,7 +285,7 @@
           <a:p>
             <a:fld id="{0B842F42-2CE9-4E35-95C1-410DC08A50B1}" type="datetimeFigureOut">
               <a:rPr lang="en-US" smtClean="0"/>
-              <a:t>7/26/2024</a:t>
+              <a:t>8/5/25</a:t>
             </a:fld>
             <a:endParaRPr lang="en-US"/>
           </a:p>
@@ -460,7 +450,7 @@
           <a:p>
             <a:fld id="{6F282904-F315-4730-8D91-37D99E141A6F}" type="datetimeFigureOut">
               <a:rPr lang="en-US" smtClean="0"/>
-              <a:t>7/26/2024</a:t>
+              <a:t>8/5/25</a:t>
             </a:fld>
             <a:endParaRPr lang="en-US"/>
           </a:p>
@@ -1130,12 +1120,7 @@
             <p:ph type="sldImg"/>
           </p:nvPr>
         </p:nvSpPr>
-        <p:spPr>
-          <a:xfrm>
-            <a:off x="407988" y="696913"/>
-            <a:ext cx="6194425" cy="3486150"/>
-          </a:xfrm>
-        </p:spPr>
+        <p:spPr/>
       </p:sp>
       <p:sp>
         <p:nvSpPr>
@@ -1152,7 +1137,10 @@
           <a:bodyPr/>
           <a:lstStyle/>
           <a:p>
-            <a:endParaRPr lang="en-US" dirty="0"/>
+            <a:r>
+              <a:rPr lang="en-US" dirty="0"/>
+              <a:t>Can point out that this graphic show the need to update the tree - two AMR implementations required a new AMR subfolder.</a:t>
+            </a:r>
           </a:p>
         </p:txBody>
       </p:sp>
@@ -1163,7 +1151,7 @@
             <a:spLocks noGrp="1"/>
           </p:cNvSpPr>
           <p:nvPr>
-            <p:ph type="sldNum" sz="quarter" idx="10"/>
+            <p:ph type="sldNum" sz="quarter" idx="5"/>
           </p:nvPr>
         </p:nvSpPr>
         <p:spPr/>
@@ -1171,9 +1159,9 @@
           <a:bodyPr/>
           <a:lstStyle/>
           <a:p>
-            <a:fld id="{A546EF7F-2180-5947-8246-D3E867E2B048}" type="slidenum">
+            <a:fld id="{3EAA7A1A-8011-3A42-91B8-EE1BD44E4455}" type="slidenum">
               <a:rPr lang="en-US" smtClean="0"/>
-              <a:t>12</a:t>
+              <a:t>22</a:t>
             </a:fld>
             <a:endParaRPr lang="en-US"/>
           </a:p>
@@ -1182,7 +1170,7 @@
     </p:spTree>
     <p:extLst>
       <p:ext uri="{BB962C8B-B14F-4D97-AF65-F5344CB8AC3E}">
-        <p14:creationId xmlns:p14="http://schemas.microsoft.com/office/powerpoint/2010/main" val="840805771"/>
+        <p14:creationId xmlns:p14="http://schemas.microsoft.com/office/powerpoint/2010/main" val="3940970343"/>
       </p:ext>
     </p:extLst>
   </p:cSld>
@@ -1193,184 +1181,6 @@
 </file>
 
 <file path=ppt/notesSlides/notesSlide6.xml><?xml version="1.0" encoding="utf-8"?>
-<p:notes xmlns:a="http://schemas.openxmlformats.org/drawingml/2006/main" xmlns:r="http://schemas.openxmlformats.org/officeDocument/2006/relationships" xmlns:p="http://schemas.openxmlformats.org/presentationml/2006/main">
-  <p:cSld>
-    <p:spTree>
-      <p:nvGrpSpPr>
-        <p:cNvPr id="1" name=""/>
-        <p:cNvGrpSpPr/>
-        <p:nvPr/>
-      </p:nvGrpSpPr>
-      <p:grpSpPr>
-        <a:xfrm>
-          <a:off x="0" y="0"/>
-          <a:ext cx="0" cy="0"/>
-          <a:chOff x="0" y="0"/>
-          <a:chExt cx="0" cy="0"/>
-        </a:xfrm>
-      </p:grpSpPr>
-      <p:sp>
-        <p:nvSpPr>
-          <p:cNvPr id="2" name="Slide Image Placeholder 1"/>
-          <p:cNvSpPr>
-            <a:spLocks noGrp="1" noRot="1" noChangeAspect="1"/>
-          </p:cNvSpPr>
-          <p:nvPr>
-            <p:ph type="sldImg"/>
-          </p:nvPr>
-        </p:nvSpPr>
-        <p:spPr>
-          <a:xfrm>
-            <a:off x="407988" y="696913"/>
-            <a:ext cx="6194425" cy="3486150"/>
-          </a:xfrm>
-        </p:spPr>
-      </p:sp>
-      <p:sp>
-        <p:nvSpPr>
-          <p:cNvPr id="3" name="Notes Placeholder 2"/>
-          <p:cNvSpPr>
-            <a:spLocks noGrp="1"/>
-          </p:cNvSpPr>
-          <p:nvPr>
-            <p:ph type="body" idx="1"/>
-          </p:nvPr>
-        </p:nvSpPr>
-        <p:spPr/>
-        <p:txBody>
-          <a:bodyPr/>
-          <a:lstStyle/>
-          <a:p>
-            <a:endParaRPr lang="en-US" dirty="0"/>
-          </a:p>
-        </p:txBody>
-      </p:sp>
-      <p:sp>
-        <p:nvSpPr>
-          <p:cNvPr id="4" name="Slide Number Placeholder 3"/>
-          <p:cNvSpPr>
-            <a:spLocks noGrp="1"/>
-          </p:cNvSpPr>
-          <p:nvPr>
-            <p:ph type="sldNum" sz="quarter" idx="10"/>
-          </p:nvPr>
-        </p:nvSpPr>
-        <p:spPr/>
-        <p:txBody>
-          <a:bodyPr/>
-          <a:lstStyle/>
-          <a:p>
-            <a:fld id="{A546EF7F-2180-5947-8246-D3E867E2B048}" type="slidenum">
-              <a:rPr lang="en-US" smtClean="0"/>
-              <a:t>13</a:t>
-            </a:fld>
-            <a:endParaRPr lang="en-US"/>
-          </a:p>
-        </p:txBody>
-      </p:sp>
-    </p:spTree>
-    <p:extLst>
-      <p:ext uri="{BB962C8B-B14F-4D97-AF65-F5344CB8AC3E}">
-        <p14:creationId xmlns:p14="http://schemas.microsoft.com/office/powerpoint/2010/main" val="1009731641"/>
-      </p:ext>
-    </p:extLst>
-  </p:cSld>
-  <p:clrMapOvr>
-    <a:masterClrMapping/>
-  </p:clrMapOvr>
-</p:notes>
-</file>
-
-<file path=ppt/notesSlides/notesSlide7.xml><?xml version="1.0" encoding="utf-8"?>
-<p:notes xmlns:a="http://schemas.openxmlformats.org/drawingml/2006/main" xmlns:r="http://schemas.openxmlformats.org/officeDocument/2006/relationships" xmlns:p="http://schemas.openxmlformats.org/presentationml/2006/main">
-  <p:cSld>
-    <p:spTree>
-      <p:nvGrpSpPr>
-        <p:cNvPr id="1" name=""/>
-        <p:cNvGrpSpPr/>
-        <p:nvPr/>
-      </p:nvGrpSpPr>
-      <p:grpSpPr>
-        <a:xfrm>
-          <a:off x="0" y="0"/>
-          <a:ext cx="0" cy="0"/>
-          <a:chOff x="0" y="0"/>
-          <a:chExt cx="0" cy="0"/>
-        </a:xfrm>
-      </p:grpSpPr>
-      <p:sp>
-        <p:nvSpPr>
-          <p:cNvPr id="2" name="Slide Image Placeholder 1"/>
-          <p:cNvSpPr>
-            <a:spLocks noGrp="1" noRot="1" noChangeAspect="1"/>
-          </p:cNvSpPr>
-          <p:nvPr>
-            <p:ph type="sldImg"/>
-          </p:nvPr>
-        </p:nvSpPr>
-        <p:spPr>
-          <a:xfrm>
-            <a:off x="407988" y="696913"/>
-            <a:ext cx="6194425" cy="3486150"/>
-          </a:xfrm>
-        </p:spPr>
-      </p:sp>
-      <p:sp>
-        <p:nvSpPr>
-          <p:cNvPr id="3" name="Notes Placeholder 2"/>
-          <p:cNvSpPr>
-            <a:spLocks noGrp="1"/>
-          </p:cNvSpPr>
-          <p:nvPr>
-            <p:ph type="body" idx="1"/>
-          </p:nvPr>
-        </p:nvSpPr>
-        <p:spPr/>
-        <p:txBody>
-          <a:bodyPr/>
-          <a:lstStyle/>
-          <a:p>
-            <a:endParaRPr lang="en-US" dirty="0"/>
-          </a:p>
-        </p:txBody>
-      </p:sp>
-      <p:sp>
-        <p:nvSpPr>
-          <p:cNvPr id="4" name="Slide Number Placeholder 3"/>
-          <p:cNvSpPr>
-            <a:spLocks noGrp="1"/>
-          </p:cNvSpPr>
-          <p:nvPr>
-            <p:ph type="sldNum" sz="quarter" idx="10"/>
-          </p:nvPr>
-        </p:nvSpPr>
-        <p:spPr/>
-        <p:txBody>
-          <a:bodyPr/>
-          <a:lstStyle/>
-          <a:p>
-            <a:fld id="{A546EF7F-2180-5947-8246-D3E867E2B048}" type="slidenum">
-              <a:rPr lang="en-US" smtClean="0"/>
-              <a:t>14</a:t>
-            </a:fld>
-            <a:endParaRPr lang="en-US"/>
-          </a:p>
-        </p:txBody>
-      </p:sp>
-    </p:spTree>
-    <p:extLst>
-      <p:ext uri="{BB962C8B-B14F-4D97-AF65-F5344CB8AC3E}">
-        <p14:creationId xmlns:p14="http://schemas.microsoft.com/office/powerpoint/2010/main" val="1417273929"/>
-      </p:ext>
-    </p:extLst>
-  </p:cSld>
-  <p:clrMapOvr>
-    <a:masterClrMapping/>
-  </p:clrMapOvr>
-</p:notes>
-</file>
-
-<file path=ppt/notesSlides/notesSlide8.xml><?xml version="1.0" encoding="utf-8"?>
 <p:notes xmlns:a="http://schemas.openxmlformats.org/drawingml/2006/main" xmlns:r="http://schemas.openxmlformats.org/officeDocument/2006/relationships" xmlns:p="http://schemas.openxmlformats.org/presentationml/2006/main">
   <p:cSld>
     <p:spTree>
@@ -1438,94 +1248,7 @@
           <a:p>
             <a:fld id="{3EAA7A1A-8011-3A42-91B8-EE1BD44E4455}" type="slidenum">
               <a:rPr lang="en-US" smtClean="0"/>
-              <a:t>32</a:t>
-            </a:fld>
-            <a:endParaRPr lang="en-US"/>
-          </a:p>
-        </p:txBody>
-      </p:sp>
-    </p:spTree>
-    <p:extLst>
-      <p:ext uri="{BB962C8B-B14F-4D97-AF65-F5344CB8AC3E}">
-        <p14:creationId xmlns:p14="http://schemas.microsoft.com/office/powerpoint/2010/main" val="3940970343"/>
-      </p:ext>
-    </p:extLst>
-  </p:cSld>
-  <p:clrMapOvr>
-    <a:masterClrMapping/>
-  </p:clrMapOvr>
-</p:notes>
-</file>
-
-<file path=ppt/notesSlides/notesSlide9.xml><?xml version="1.0" encoding="utf-8"?>
-<p:notes xmlns:a="http://schemas.openxmlformats.org/drawingml/2006/main" xmlns:r="http://schemas.openxmlformats.org/officeDocument/2006/relationships" xmlns:p="http://schemas.openxmlformats.org/presentationml/2006/main">
-  <p:cSld>
-    <p:spTree>
-      <p:nvGrpSpPr>
-        <p:cNvPr id="1" name=""/>
-        <p:cNvGrpSpPr/>
-        <p:nvPr/>
-      </p:nvGrpSpPr>
-      <p:grpSpPr>
-        <a:xfrm>
-          <a:off x="0" y="0"/>
-          <a:ext cx="0" cy="0"/>
-          <a:chOff x="0" y="0"/>
-          <a:chExt cx="0" cy="0"/>
-        </a:xfrm>
-      </p:grpSpPr>
-      <p:sp>
-        <p:nvSpPr>
-          <p:cNvPr id="2" name="Slide Image Placeholder 1"/>
-          <p:cNvSpPr>
-            <a:spLocks noGrp="1" noRot="1" noChangeAspect="1"/>
-          </p:cNvSpPr>
-          <p:nvPr>
-            <p:ph type="sldImg"/>
-          </p:nvPr>
-        </p:nvSpPr>
-        <p:spPr/>
-      </p:sp>
-      <p:sp>
-        <p:nvSpPr>
-          <p:cNvPr id="3" name="Notes Placeholder 2"/>
-          <p:cNvSpPr>
-            <a:spLocks noGrp="1"/>
-          </p:cNvSpPr>
-          <p:nvPr>
-            <p:ph type="body" idx="1"/>
-          </p:nvPr>
-        </p:nvSpPr>
-        <p:spPr/>
-        <p:txBody>
-          <a:bodyPr/>
-          <a:lstStyle/>
-          <a:p>
-            <a:r>
-              <a:rPr lang="en-US" dirty="0"/>
-              <a:t>Can point out that this graphic show the need to update the tree - two AMR implementations required a new AMR subfolder.</a:t>
-            </a:r>
-          </a:p>
-        </p:txBody>
-      </p:sp>
-      <p:sp>
-        <p:nvSpPr>
-          <p:cNvPr id="4" name="Slide Number Placeholder 3"/>
-          <p:cNvSpPr>
-            <a:spLocks noGrp="1"/>
-          </p:cNvSpPr>
-          <p:nvPr>
-            <p:ph type="sldNum" sz="quarter" idx="5"/>
-          </p:nvPr>
-        </p:nvSpPr>
-        <p:spPr/>
-        <p:txBody>
-          <a:bodyPr/>
-          <a:lstStyle/>
-          <a:p>
-            <a:fld id="{3EAA7A1A-8011-3A42-91B8-EE1BD44E4455}" type="slidenum">
-              <a:rPr lang="en-US" smtClean="0"/>
-              <a:t>33</a:t>
+              <a:t>23</a:t>
             </a:fld>
             <a:endParaRPr lang="en-US"/>
           </a:p>
@@ -6016,7 +5739,7 @@
           <a:p>
             <a:r>
               <a:rPr lang="en-US" sz="2000" dirty="0"/>
-              <a:t>Contributors: Anshu Dubey (ANL), Mark C. Miller (LLNL), Jared O’Neal</a:t>
+              <a:t>Contributors: Anshu Dubey (ANL), Jared O’Neal</a:t>
             </a:r>
           </a:p>
         </p:txBody>
@@ -6124,51 +5847,6 @@
       </p:grpSpPr>
       <p:sp>
         <p:nvSpPr>
-          <p:cNvPr id="3" name="Content Placeholder 2"/>
-          <p:cNvSpPr>
-            <a:spLocks noGrp="1"/>
-          </p:cNvSpPr>
-          <p:nvPr>
-            <p:ph idx="1"/>
-          </p:nvPr>
-        </p:nvSpPr>
-        <p:spPr>
-          <a:xfrm>
-            <a:off x="609442" y="1309227"/>
-            <a:ext cx="11160961" cy="4422776"/>
-          </a:xfrm>
-        </p:spPr>
-        <p:txBody>
-          <a:bodyPr/>
-          <a:lstStyle/>
-          <a:p>
-            <a:r>
-              <a:rPr lang="en-US" dirty="0"/>
-              <a:t>Know why you are refactoring</a:t>
-            </a:r>
-          </a:p>
-          <a:p>
-            <a:pPr lvl="1"/>
-            <a:r>
-              <a:rPr lang="en-US" dirty="0"/>
-              <a:t>Is it necessary </a:t>
-            </a:r>
-          </a:p>
-          <a:p>
-            <a:pPr lvl="1"/>
-            <a:r>
-              <a:rPr lang="en-US" dirty="0"/>
-              <a:t>Where should the code be after refactoring</a:t>
-            </a:r>
-          </a:p>
-          <a:p>
-            <a:pPr lvl="2"/>
-            <a:endParaRPr lang="en-US" dirty="0"/>
-          </a:p>
-        </p:txBody>
-      </p:sp>
-      <p:sp>
-        <p:nvSpPr>
           <p:cNvPr id="2" name="Title 1"/>
           <p:cNvSpPr>
             <a:spLocks noGrp="1"/>
@@ -6205,422 +5883,8 @@
         </p:nvSpPr>
         <p:spPr bwMode="auto">
           <a:xfrm>
-            <a:off x="703690" y="2559949"/>
-            <a:ext cx="7886517" cy="3016603"/>
-          </a:xfrm>
-          <a:prstGeom prst="rect">
-            <a:avLst/>
-          </a:prstGeom>
-          <a:noFill/>
-          <a:ln w="9525">
-            <a:noFill/>
-            <a:miter lim="800000"/>
-            <a:headEnd/>
-            <a:tailEnd/>
-          </a:ln>
-        </p:spPr>
-        <p:txBody>
-          <a:bodyPr vert="horz" wrap="square" lIns="91440" tIns="45720" rIns="91440" bIns="45720" numCol="1" anchor="t" anchorCtr="0" compatLnSpc="1">
-            <a:prstTxWarp prst="textNoShape">
-              <a:avLst/>
-            </a:prstTxWarp>
-            <a:normAutofit fontScale="92500" lnSpcReduction="10000"/>
-          </a:bodyPr>
-          <a:lstStyle>
-            <a:lvl1pPr marL="230188" indent="-230188" algn="l" rtl="0" eaLnBrk="1" fontAlgn="base" hangingPunct="1">
-              <a:lnSpc>
-                <a:spcPct val="90000"/>
-              </a:lnSpc>
-              <a:spcBef>
-                <a:spcPts val="1400"/>
-              </a:spcBef>
-              <a:spcAft>
-                <a:spcPct val="0"/>
-              </a:spcAft>
-              <a:buClr>
-                <a:schemeClr val="tx1"/>
-              </a:buClr>
-              <a:buFont typeface="Arial" charset="0"/>
-              <a:buChar char="•"/>
-              <a:defRPr sz="2400" kern="1200" baseline="0">
-                <a:solidFill>
-                  <a:schemeClr val="tx1"/>
-                </a:solidFill>
-                <a:latin typeface="+mn-lt"/>
-                <a:ea typeface="+mn-ea"/>
-                <a:cs typeface="+mn-cs"/>
-              </a:defRPr>
-            </a:lvl1pPr>
-            <a:lvl2pPr marL="625475" indent="-279400" algn="l" rtl="0" eaLnBrk="1" fontAlgn="base" hangingPunct="1">
-              <a:lnSpc>
-                <a:spcPct val="90000"/>
-              </a:lnSpc>
-              <a:spcBef>
-                <a:spcPts val="800"/>
-              </a:spcBef>
-              <a:spcAft>
-                <a:spcPct val="0"/>
-              </a:spcAft>
-              <a:buClr>
-                <a:schemeClr val="tx1"/>
-              </a:buClr>
-              <a:buFont typeface="Arial" charset="0"/>
-              <a:buChar char="–"/>
-              <a:defRPr sz="2000" kern="1200">
-                <a:solidFill>
-                  <a:schemeClr val="tx1"/>
-                </a:solidFill>
-                <a:latin typeface="+mn-lt"/>
-                <a:ea typeface="+mn-ea"/>
-                <a:cs typeface="+mn-cs"/>
-              </a:defRPr>
-            </a:lvl2pPr>
-            <a:lvl3pPr marL="914400" indent="-230188" algn="l" rtl="0" eaLnBrk="1" fontAlgn="base" hangingPunct="1">
-              <a:lnSpc>
-                <a:spcPct val="90000"/>
-              </a:lnSpc>
-              <a:spcBef>
-                <a:spcPts val="800"/>
-              </a:spcBef>
-              <a:spcAft>
-                <a:spcPct val="0"/>
-              </a:spcAft>
-              <a:buClr>
-                <a:schemeClr val="tx1"/>
-              </a:buClr>
-              <a:buFont typeface="Arial" charset="0"/>
-              <a:buChar char="•"/>
-              <a:defRPr sz="1800" kern="1200">
-                <a:solidFill>
-                  <a:schemeClr val="tx1"/>
-                </a:solidFill>
-                <a:latin typeface="+mn-lt"/>
-                <a:ea typeface="+mn-ea"/>
-                <a:cs typeface="+mn-cs"/>
-              </a:defRPr>
-            </a:lvl3pPr>
-            <a:lvl4pPr marL="1144588" indent="-173038" algn="l" rtl="0" eaLnBrk="1" fontAlgn="base" hangingPunct="1">
-              <a:lnSpc>
-                <a:spcPct val="90000"/>
-              </a:lnSpc>
-              <a:spcBef>
-                <a:spcPts val="800"/>
-              </a:spcBef>
-              <a:spcAft>
-                <a:spcPct val="0"/>
-              </a:spcAft>
-              <a:buClr>
-                <a:schemeClr val="tx1"/>
-              </a:buClr>
-              <a:buFont typeface="Arial" charset="0"/>
-              <a:buChar char="–"/>
-              <a:defRPr sz="1600" kern="1200">
-                <a:solidFill>
-                  <a:schemeClr val="tx1"/>
-                </a:solidFill>
-                <a:latin typeface="+mn-lt"/>
-                <a:ea typeface="+mn-ea"/>
-                <a:cs typeface="+mn-cs"/>
-              </a:defRPr>
-            </a:lvl4pPr>
-            <a:lvl5pPr marL="1482725" indent="-222250" algn="l" rtl="0" eaLnBrk="1" fontAlgn="base" hangingPunct="1">
-              <a:lnSpc>
-                <a:spcPct val="90000"/>
-              </a:lnSpc>
-              <a:spcBef>
-                <a:spcPts val="600"/>
-              </a:spcBef>
-              <a:spcAft>
-                <a:spcPct val="0"/>
-              </a:spcAft>
-              <a:buClr>
-                <a:schemeClr val="tx1"/>
-              </a:buClr>
-              <a:buFont typeface="Arial" charset="0"/>
-              <a:buChar char="»"/>
-              <a:defRPr sz="1600" kern="1200">
-                <a:solidFill>
-                  <a:schemeClr val="tx1"/>
-                </a:solidFill>
-                <a:latin typeface="+mn-lt"/>
-                <a:ea typeface="+mn-ea"/>
-                <a:cs typeface="+mn-cs"/>
-              </a:defRPr>
-            </a:lvl5pPr>
-            <a:lvl6pPr marL="2514600" indent="-228600" algn="l" defTabSz="914400" rtl="0" eaLnBrk="1" latinLnBrk="0" hangingPunct="1">
-              <a:spcBef>
-                <a:spcPct val="20000"/>
-              </a:spcBef>
-              <a:buFont typeface="Arial" pitchFamily="34" charset="0"/>
-              <a:buChar char="•"/>
-              <a:defRPr sz="2000" kern="1200">
-                <a:solidFill>
-                  <a:schemeClr val="tx1"/>
-                </a:solidFill>
-                <a:latin typeface="+mn-lt"/>
-                <a:ea typeface="+mn-ea"/>
-                <a:cs typeface="+mn-cs"/>
-              </a:defRPr>
-            </a:lvl6pPr>
-            <a:lvl7pPr marL="2971800" indent="-228600" algn="l" defTabSz="914400" rtl="0" eaLnBrk="1" latinLnBrk="0" hangingPunct="1">
-              <a:spcBef>
-                <a:spcPct val="20000"/>
-              </a:spcBef>
-              <a:buFont typeface="Arial" pitchFamily="34" charset="0"/>
-              <a:buChar char="•"/>
-              <a:defRPr sz="2000" kern="1200">
-                <a:solidFill>
-                  <a:schemeClr val="tx1"/>
-                </a:solidFill>
-                <a:latin typeface="+mn-lt"/>
-                <a:ea typeface="+mn-ea"/>
-                <a:cs typeface="+mn-cs"/>
-              </a:defRPr>
-            </a:lvl7pPr>
-            <a:lvl8pPr marL="3429000" indent="-228600" algn="l" defTabSz="914400" rtl="0" eaLnBrk="1" latinLnBrk="0" hangingPunct="1">
-              <a:spcBef>
-                <a:spcPct val="20000"/>
-              </a:spcBef>
-              <a:buFont typeface="Arial" pitchFamily="34" charset="0"/>
-              <a:buChar char="•"/>
-              <a:defRPr sz="2000" kern="1200">
-                <a:solidFill>
-                  <a:schemeClr val="tx1"/>
-                </a:solidFill>
-                <a:latin typeface="+mn-lt"/>
-                <a:ea typeface="+mn-ea"/>
-                <a:cs typeface="+mn-cs"/>
-              </a:defRPr>
-            </a:lvl8pPr>
-            <a:lvl9pPr marL="3886200" indent="-228600" algn="l" defTabSz="914400" rtl="0" eaLnBrk="1" latinLnBrk="0" hangingPunct="1">
-              <a:spcBef>
-                <a:spcPct val="20000"/>
-              </a:spcBef>
-              <a:buFont typeface="Arial" pitchFamily="34" charset="0"/>
-              <a:buChar char="•"/>
-              <a:defRPr sz="2000" kern="1200">
-                <a:solidFill>
-                  <a:schemeClr val="tx1"/>
-                </a:solidFill>
-                <a:latin typeface="+mn-lt"/>
-                <a:ea typeface="+mn-ea"/>
-                <a:cs typeface="+mn-cs"/>
-              </a:defRPr>
-            </a:lvl9pPr>
-          </a:lstStyle>
-          <a:p>
-            <a:r>
-              <a:rPr lang="en-US" dirty="0"/>
-              <a:t>In heat example version 1</a:t>
-            </a:r>
-          </a:p>
-          <a:p>
-            <a:pPr lvl="1"/>
-            <a:r>
-              <a:rPr lang="en-US" dirty="0"/>
-              <a:t>It is necessary because</a:t>
-            </a:r>
-          </a:p>
-          <a:p>
-            <a:pPr lvl="2"/>
-            <a:r>
-              <a:rPr lang="en-US" dirty="0"/>
-              <a:t>It is a monolithic code</a:t>
-            </a:r>
-          </a:p>
-          <a:p>
-            <a:pPr lvl="2"/>
-            <a:r>
-              <a:rPr lang="en-US" dirty="0"/>
-              <a:t>No reusability of any part of the code</a:t>
-            </a:r>
-          </a:p>
-          <a:p>
-            <a:pPr lvl="2"/>
-            <a:r>
-              <a:rPr lang="en-US" dirty="0"/>
-              <a:t>Devising tests is hard</a:t>
-            </a:r>
-          </a:p>
-          <a:p>
-            <a:pPr lvl="2"/>
-            <a:r>
-              <a:rPr lang="en-US" dirty="0"/>
-              <a:t>Limited extensibility</a:t>
-            </a:r>
-          </a:p>
-          <a:p>
-            <a:pPr lvl="1"/>
-            <a:r>
-              <a:rPr lang="en-US" dirty="0"/>
-              <a:t>Where do we want to be after refactoring</a:t>
-            </a:r>
-          </a:p>
-          <a:p>
-            <a:pPr lvl="2"/>
-            <a:r>
-              <a:rPr lang="en-US" dirty="0"/>
-              <a:t>Closer to the second version</a:t>
-            </a:r>
-          </a:p>
-          <a:p>
-            <a:pPr lvl="2"/>
-            <a:r>
-              <a:rPr lang="en-US" dirty="0"/>
-              <a:t>More modular, maintainable and extensible</a:t>
-            </a:r>
-          </a:p>
-        </p:txBody>
-      </p:sp>
-    </p:spTree>
-    <p:extLst>
-      <p:ext uri="{BB962C8B-B14F-4D97-AF65-F5344CB8AC3E}">
-        <p14:creationId xmlns:p14="http://schemas.microsoft.com/office/powerpoint/2010/main" val="513062928"/>
-      </p:ext>
-    </p:extLst>
-  </p:cSld>
-  <p:clrMapOvr>
-    <a:masterClrMapping/>
-  </p:clrMapOvr>
-  <mc:AlternateContent xmlns:mc="http://schemas.openxmlformats.org/markup-compatibility/2006" xmlns:p14="http://schemas.microsoft.com/office/powerpoint/2010/main">
-    <mc:Choice Requires="p14">
-      <p:transition p14:dur="250">
-        <p:fade/>
-      </p:transition>
-    </mc:Choice>
-    <mc:Fallback xmlns="">
-      <p:transition>
-        <p:fade/>
-      </p:transition>
-    </mc:Fallback>
-  </mc:AlternateContent>
-</p:sld>
-</file>
-
-<file path=ppt/slides/slide11.xml><?xml version="1.0" encoding="utf-8"?>
-<p:sld xmlns:a="http://schemas.openxmlformats.org/drawingml/2006/main" xmlns:r="http://schemas.openxmlformats.org/officeDocument/2006/relationships" xmlns:p="http://schemas.openxmlformats.org/presentationml/2006/main">
-  <p:cSld>
-    <p:spTree>
-      <p:nvGrpSpPr>
-        <p:cNvPr id="1" name=""/>
-        <p:cNvGrpSpPr/>
-        <p:nvPr/>
-      </p:nvGrpSpPr>
-      <p:grpSpPr>
-        <a:xfrm>
-          <a:off x="0" y="0"/>
-          <a:ext cx="0" cy="0"/>
-          <a:chOff x="0" y="0"/>
-          <a:chExt cx="0" cy="0"/>
-        </a:xfrm>
-      </p:grpSpPr>
-      <p:sp>
-        <p:nvSpPr>
-          <p:cNvPr id="3" name="Content Placeholder 2"/>
-          <p:cNvSpPr>
-            <a:spLocks noGrp="1"/>
-          </p:cNvSpPr>
-          <p:nvPr>
-            <p:ph idx="1"/>
-          </p:nvPr>
-        </p:nvSpPr>
-        <p:spPr/>
-        <p:txBody>
-          <a:bodyPr/>
-          <a:lstStyle/>
-          <a:p>
-            <a:r>
-              <a:rPr lang="en-US" dirty="0"/>
-              <a:t>Know the scope of refactoring</a:t>
-            </a:r>
-          </a:p>
-          <a:p>
-            <a:pPr lvl="1"/>
-            <a:r>
-              <a:rPr lang="en-US" dirty="0"/>
-              <a:t>How deep a change</a:t>
-            </a:r>
-          </a:p>
-          <a:p>
-            <a:pPr lvl="1"/>
-            <a:r>
-              <a:rPr lang="en-US" dirty="0"/>
-              <a:t>How much code will be affected</a:t>
-            </a:r>
-          </a:p>
-          <a:p>
-            <a:r>
-              <a:rPr lang="en-US" dirty="0"/>
-              <a:t>In heat example</a:t>
-            </a:r>
-          </a:p>
-          <a:p>
-            <a:pPr lvl="1"/>
-            <a:r>
-              <a:rPr lang="en-US" dirty="0"/>
-              <a:t>No capability extension</a:t>
-            </a:r>
-          </a:p>
-          <a:p>
-            <a:pPr lvl="1"/>
-            <a:r>
-              <a:rPr lang="en-US" dirty="0"/>
-              <a:t>No performance consideration</a:t>
-            </a:r>
-          </a:p>
-          <a:p>
-            <a:pPr lvl="1"/>
-            <a:r>
-              <a:rPr lang="en-US" dirty="0"/>
-              <a:t>Cleaner, more maintainable code</a:t>
-            </a:r>
-          </a:p>
-          <a:p>
-            <a:pPr lvl="2"/>
-            <a:endParaRPr lang="en-US" dirty="0"/>
-          </a:p>
-        </p:txBody>
-      </p:sp>
-      <p:sp>
-        <p:nvSpPr>
-          <p:cNvPr id="2" name="Title 1"/>
-          <p:cNvSpPr>
-            <a:spLocks noGrp="1"/>
-          </p:cNvSpPr>
-          <p:nvPr>
-            <p:ph type="title"/>
-          </p:nvPr>
-        </p:nvSpPr>
-        <p:spPr/>
-        <p:txBody>
-          <a:bodyPr/>
-          <a:lstStyle/>
-          <a:p>
-            <a:r>
-              <a:rPr lang="en-US" dirty="0"/>
-              <a:t>Considerations for Refactoring</a:t>
-            </a:r>
-          </a:p>
-        </p:txBody>
-      </p:sp>
-      <p:sp>
-        <p:nvSpPr>
-          <p:cNvPr id="6" name="Content Placeholder 2">
-            <a:extLst>
-              <a:ext uri="{FF2B5EF4-FFF2-40B4-BE49-F238E27FC236}">
-                <a16:creationId xmlns:a16="http://schemas.microsoft.com/office/drawing/2014/main" id="{FF06DE31-D9D1-7F47-B3C0-6D0E91DA550C}"/>
-              </a:ext>
-            </a:extLst>
-          </p:cNvPr>
-          <p:cNvSpPr txBox="1">
-            <a:spLocks/>
-          </p:cNvSpPr>
-          <p:nvPr/>
-        </p:nvSpPr>
-        <p:spPr bwMode="auto">
-          <a:xfrm>
-            <a:off x="5869757" y="666934"/>
-            <a:ext cx="5953308" cy="5232034"/>
+            <a:off x="365760" y="1027954"/>
+            <a:ext cx="5905658" cy="5241053"/>
           </a:xfrm>
           <a:prstGeom prst="rect">
             <a:avLst/>
@@ -6823,61 +6087,366 @@
             </a:lvl9pPr>
           </a:lstStyle>
           <a:p>
-            <a:pPr marL="0" indent="0">
+            <a:r>
+              <a:rPr lang="en-US" dirty="0"/>
+              <a:t>Know why you are refactoring</a:t>
+            </a:r>
+          </a:p>
+          <a:p>
+            <a:pPr lvl="1"/>
+            <a:r>
+              <a:rPr lang="en-US" dirty="0"/>
+              <a:t>Is it necessary?</a:t>
+            </a:r>
+          </a:p>
+          <a:p>
+            <a:pPr lvl="1"/>
+            <a:r>
+              <a:rPr lang="en-US" dirty="0"/>
+              <a:t>Where should the code be after refactoring.</a:t>
+            </a:r>
+          </a:p>
+          <a:p>
+            <a:r>
+              <a:rPr lang="en-US" dirty="0"/>
+              <a:t>Here we have two reasons</a:t>
+            </a:r>
+          </a:p>
+          <a:p>
+            <a:pPr lvl="1"/>
+            <a:r>
+              <a:rPr lang="en-US" dirty="0"/>
+              <a:t>One is enhancing flexibility</a:t>
+            </a:r>
+          </a:p>
+          <a:p>
+            <a:pPr lvl="1"/>
+            <a:r>
+              <a:rPr lang="en-US" dirty="0"/>
+              <a:t>The other is adding capability</a:t>
+            </a:r>
+          </a:p>
+          <a:p>
+            <a:r>
+              <a:rPr lang="en-US" dirty="0"/>
+              <a:t>Know your cost estimates</a:t>
+            </a:r>
+          </a:p>
+          <a:p>
+            <a:r>
+              <a:rPr lang="en-US" dirty="0"/>
+              <a:t>Know your bounds</a:t>
+            </a:r>
+          </a:p>
+          <a:p>
+            <a:pPr lvl="1"/>
+            <a:r>
+              <a:rPr lang="en-US" dirty="0"/>
+              <a:t>on acceptable behavior change</a:t>
+            </a:r>
+          </a:p>
+          <a:p>
+            <a:pPr lvl="1"/>
+            <a:r>
+              <a:rPr lang="en-US" dirty="0"/>
+              <a:t>error bounds</a:t>
+            </a:r>
+          </a:p>
+          <a:p>
+            <a:pPr lvl="2"/>
+            <a:r>
+              <a:rPr lang="en-US" dirty="0"/>
+              <a:t>bitwise reproduction of results unlikely after transition </a:t>
+            </a:r>
+          </a:p>
+          <a:p>
+            <a:endParaRPr lang="en-US" dirty="0"/>
+          </a:p>
+          <a:p>
+            <a:endParaRPr lang="en-US" dirty="0"/>
+          </a:p>
+        </p:txBody>
+      </p:sp>
+      <p:sp>
+        <p:nvSpPr>
+          <p:cNvPr id="5" name="Content Placeholder 2">
+            <a:extLst>
+              <a:ext uri="{FF2B5EF4-FFF2-40B4-BE49-F238E27FC236}">
+                <a16:creationId xmlns:a16="http://schemas.microsoft.com/office/drawing/2014/main" id="{F0225219-7EC1-12AC-4F1E-67B8209B977D}"/>
+              </a:ext>
+            </a:extLst>
+          </p:cNvPr>
+          <p:cNvSpPr txBox="1">
+            <a:spLocks/>
+          </p:cNvSpPr>
+          <p:nvPr/>
+        </p:nvSpPr>
+        <p:spPr bwMode="auto">
+          <a:xfrm>
+            <a:off x="6453525" y="1118527"/>
+            <a:ext cx="5106570" cy="4690271"/>
+          </a:xfrm>
+          <a:prstGeom prst="rect">
+            <a:avLst/>
+          </a:prstGeom>
+          <a:noFill/>
+          <a:ln w="9525">
+            <a:noFill/>
+            <a:miter lim="800000"/>
+            <a:headEnd/>
+            <a:tailEnd/>
+          </a:ln>
+        </p:spPr>
+        <p:txBody>
+          <a:bodyPr vert="horz" wrap="square" lIns="91440" tIns="45720" rIns="91440" bIns="45720" numCol="1" anchor="t" anchorCtr="0" compatLnSpc="1">
+            <a:prstTxWarp prst="textNoShape">
+              <a:avLst/>
+            </a:prstTxWarp>
+            <a:normAutofit lnSpcReduction="10000"/>
+          </a:bodyPr>
+          <a:lstStyle>
+            <a:lvl1pPr marL="230188" indent="-230188" algn="l" rtl="0" eaLnBrk="1" fontAlgn="base" hangingPunct="1">
+              <a:lnSpc>
+                <a:spcPct val="90000"/>
+              </a:lnSpc>
+              <a:spcBef>
+                <a:spcPts val="1400"/>
+              </a:spcBef>
+              <a:spcAft>
+                <a:spcPct val="0"/>
+              </a:spcAft>
+              <a:buClr>
+                <a:schemeClr val="tx1"/>
+              </a:buClr>
               <a:buFont typeface="Arial" charset="0"/>
-              <a:buNone/>
-            </a:pPr>
-            <a:endParaRPr lang="en-US" dirty="0"/>
-          </a:p>
-          <a:p>
-            <a:pPr marL="0" indent="0">
-              <a:buNone/>
-            </a:pPr>
-            <a:endParaRPr lang="en-US" dirty="0"/>
-          </a:p>
-          <a:p>
-            <a:pPr marL="0" indent="0">
-              <a:buNone/>
-            </a:pPr>
+              <a:buChar char="•"/>
+              <a:defRPr sz="2400" kern="1200" baseline="0">
+                <a:solidFill>
+                  <a:schemeClr val="tx1"/>
+                </a:solidFill>
+                <a:latin typeface="+mn-lt"/>
+                <a:ea typeface="+mn-ea"/>
+                <a:cs typeface="+mn-cs"/>
+              </a:defRPr>
+            </a:lvl1pPr>
+            <a:lvl2pPr marL="625475" indent="-279400" algn="l" rtl="0" eaLnBrk="1" fontAlgn="base" hangingPunct="1">
+              <a:lnSpc>
+                <a:spcPct val="90000"/>
+              </a:lnSpc>
+              <a:spcBef>
+                <a:spcPts val="800"/>
+              </a:spcBef>
+              <a:spcAft>
+                <a:spcPct val="0"/>
+              </a:spcAft>
+              <a:buClr>
+                <a:schemeClr val="tx1"/>
+              </a:buClr>
+              <a:buFont typeface="Arial" charset="0"/>
+              <a:buChar char="–"/>
+              <a:defRPr sz="2000" kern="1200">
+                <a:solidFill>
+                  <a:schemeClr val="tx1"/>
+                </a:solidFill>
+                <a:latin typeface="+mn-lt"/>
+                <a:ea typeface="+mn-ea"/>
+                <a:cs typeface="+mn-cs"/>
+              </a:defRPr>
+            </a:lvl2pPr>
+            <a:lvl3pPr marL="914400" indent="-230188" algn="l" rtl="0" eaLnBrk="1" fontAlgn="base" hangingPunct="1">
+              <a:lnSpc>
+                <a:spcPct val="90000"/>
+              </a:lnSpc>
+              <a:spcBef>
+                <a:spcPts val="800"/>
+              </a:spcBef>
+              <a:spcAft>
+                <a:spcPct val="0"/>
+              </a:spcAft>
+              <a:buClr>
+                <a:schemeClr val="tx1"/>
+              </a:buClr>
+              <a:buFont typeface="Arial" charset="0"/>
+              <a:buChar char="•"/>
+              <a:defRPr sz="1800" kern="1200">
+                <a:solidFill>
+                  <a:schemeClr val="tx1"/>
+                </a:solidFill>
+                <a:latin typeface="+mn-lt"/>
+                <a:ea typeface="+mn-ea"/>
+                <a:cs typeface="+mn-cs"/>
+              </a:defRPr>
+            </a:lvl3pPr>
+            <a:lvl4pPr marL="1144588" indent="-173038" algn="l" rtl="0" eaLnBrk="1" fontAlgn="base" hangingPunct="1">
+              <a:lnSpc>
+                <a:spcPct val="90000"/>
+              </a:lnSpc>
+              <a:spcBef>
+                <a:spcPts val="800"/>
+              </a:spcBef>
+              <a:spcAft>
+                <a:spcPct val="0"/>
+              </a:spcAft>
+              <a:buClr>
+                <a:schemeClr val="tx1"/>
+              </a:buClr>
+              <a:buFont typeface="Arial" charset="0"/>
+              <a:buChar char="–"/>
+              <a:defRPr sz="1600" kern="1200">
+                <a:solidFill>
+                  <a:schemeClr val="tx1"/>
+                </a:solidFill>
+                <a:latin typeface="+mn-lt"/>
+                <a:ea typeface="+mn-ea"/>
+                <a:cs typeface="+mn-cs"/>
+              </a:defRPr>
+            </a:lvl4pPr>
+            <a:lvl5pPr marL="1482725" indent="-222250" algn="l" rtl="0" eaLnBrk="1" fontAlgn="base" hangingPunct="1">
+              <a:lnSpc>
+                <a:spcPct val="90000"/>
+              </a:lnSpc>
+              <a:spcBef>
+                <a:spcPts val="600"/>
+              </a:spcBef>
+              <a:spcAft>
+                <a:spcPct val="0"/>
+              </a:spcAft>
+              <a:buClr>
+                <a:schemeClr val="tx1"/>
+              </a:buClr>
+              <a:buFont typeface="Arial" charset="0"/>
+              <a:buChar char="»"/>
+              <a:defRPr sz="1600" kern="1200">
+                <a:solidFill>
+                  <a:schemeClr val="tx1"/>
+                </a:solidFill>
+                <a:latin typeface="+mn-lt"/>
+                <a:ea typeface="+mn-ea"/>
+                <a:cs typeface="+mn-cs"/>
+              </a:defRPr>
+            </a:lvl5pPr>
+            <a:lvl6pPr marL="2514600" indent="-228600" algn="l" defTabSz="914400" rtl="0" eaLnBrk="1" latinLnBrk="0" hangingPunct="1">
+              <a:spcBef>
+                <a:spcPct val="20000"/>
+              </a:spcBef>
+              <a:buFont typeface="Arial" pitchFamily="34" charset="0"/>
+              <a:buChar char="•"/>
+              <a:defRPr sz="2000" kern="1200">
+                <a:solidFill>
+                  <a:schemeClr val="tx1"/>
+                </a:solidFill>
+                <a:latin typeface="+mn-lt"/>
+                <a:ea typeface="+mn-ea"/>
+                <a:cs typeface="+mn-cs"/>
+              </a:defRPr>
+            </a:lvl6pPr>
+            <a:lvl7pPr marL="2971800" indent="-228600" algn="l" defTabSz="914400" rtl="0" eaLnBrk="1" latinLnBrk="0" hangingPunct="1">
+              <a:spcBef>
+                <a:spcPct val="20000"/>
+              </a:spcBef>
+              <a:buFont typeface="Arial" pitchFamily="34" charset="0"/>
+              <a:buChar char="•"/>
+              <a:defRPr sz="2000" kern="1200">
+                <a:solidFill>
+                  <a:schemeClr val="tx1"/>
+                </a:solidFill>
+                <a:latin typeface="+mn-lt"/>
+                <a:ea typeface="+mn-ea"/>
+                <a:cs typeface="+mn-cs"/>
+              </a:defRPr>
+            </a:lvl7pPr>
+            <a:lvl8pPr marL="3429000" indent="-228600" algn="l" defTabSz="914400" rtl="0" eaLnBrk="1" latinLnBrk="0" hangingPunct="1">
+              <a:spcBef>
+                <a:spcPct val="20000"/>
+              </a:spcBef>
+              <a:buFont typeface="Arial" pitchFamily="34" charset="0"/>
+              <a:buChar char="•"/>
+              <a:defRPr sz="2000" kern="1200">
+                <a:solidFill>
+                  <a:schemeClr val="tx1"/>
+                </a:solidFill>
+                <a:latin typeface="+mn-lt"/>
+                <a:ea typeface="+mn-ea"/>
+                <a:cs typeface="+mn-cs"/>
+              </a:defRPr>
+            </a:lvl8pPr>
+            <a:lvl9pPr marL="3886200" indent="-228600" algn="l" defTabSz="914400" rtl="0" eaLnBrk="1" latinLnBrk="0" hangingPunct="1">
+              <a:spcBef>
+                <a:spcPct val="20000"/>
+              </a:spcBef>
+              <a:buFont typeface="Arial" pitchFamily="34" charset="0"/>
+              <a:buChar char="•"/>
+              <a:defRPr sz="2000" kern="1200">
+                <a:solidFill>
+                  <a:schemeClr val="tx1"/>
+                </a:solidFill>
+                <a:latin typeface="+mn-lt"/>
+                <a:ea typeface="+mn-ea"/>
+                <a:cs typeface="+mn-cs"/>
+              </a:defRPr>
+            </a:lvl9pPr>
+          </a:lstStyle>
+          <a:p>
             <a:r>
               <a:rPr lang="en-US" dirty="0"/>
-              <a:t>To modularize the monolithic code…</a:t>
-            </a:r>
-          </a:p>
-          <a:p>
+              <a:t>Verification</a:t>
+            </a:r>
+          </a:p>
+          <a:p>
+            <a:pPr lvl="1"/>
             <a:r>
               <a:rPr lang="en-US" dirty="0"/>
-              <a:t>Separate out utilities, generalize interfaces</a:t>
-            </a:r>
-          </a:p>
-          <a:p>
+              <a:t>Check for coverage provided by existing tests</a:t>
+            </a:r>
+          </a:p>
+          <a:p>
+            <a:pPr lvl="1"/>
             <a:r>
               <a:rPr lang="en-US" dirty="0"/>
-              <a:t>Put global definitions in a header file</a:t>
-            </a:r>
-          </a:p>
-          <a:p>
+              <a:t>Develop new tests where there are gaps</a:t>
+            </a:r>
+          </a:p>
+          <a:p>
+            <a:pPr lvl="1"/>
             <a:r>
               <a:rPr lang="en-US" dirty="0"/>
-              <a:t>Create a general build function</a:t>
-            </a:r>
-          </a:p>
-          <a:p>
+              <a:t>Here we need two new tests. </a:t>
+            </a:r>
+          </a:p>
+          <a:p>
+            <a:pPr lvl="2"/>
             <a:r>
               <a:rPr lang="en-US" dirty="0"/>
-              <a:t>No new code or intrusive changes</a:t>
+              <a:t>One to ensure that behavior does not change when we put the method for moving particles into a new function</a:t>
             </a:r>
           </a:p>
           <a:p>
             <a:pPr lvl="2"/>
-            <a:endParaRPr lang="en-US" dirty="0"/>
+            <a:r>
+              <a:rPr lang="en-US" dirty="0"/>
+              <a:t>Another one to ensure that boundary conditions are applied correctly</a:t>
+            </a:r>
+          </a:p>
+          <a:p>
+            <a:pPr lvl="1"/>
+            <a:r>
+              <a:rPr lang="en-US" dirty="0"/>
+              <a:t>Make sure tests exist at different granularities</a:t>
+            </a:r>
+          </a:p>
+          <a:p>
+            <a:pPr lvl="2"/>
+            <a:r>
+              <a:rPr lang="en-US" dirty="0"/>
+              <a:t>There should be demanding integration and system level tests</a:t>
+            </a:r>
           </a:p>
         </p:txBody>
       </p:sp>
     </p:spTree>
     <p:extLst>
       <p:ext uri="{BB962C8B-B14F-4D97-AF65-F5344CB8AC3E}">
-        <p14:creationId xmlns:p14="http://schemas.microsoft.com/office/powerpoint/2010/main" val="496874910"/>
+        <p14:creationId xmlns:p14="http://schemas.microsoft.com/office/powerpoint/2010/main" val="2520720320"/>
       </p:ext>
     </p:extLst>
   </p:cSld>
@@ -6899,7 +6468,7 @@
 </p:sld>
 </file>
 
-<file path=ppt/slides/slide12.xml><?xml version="1.0" encoding="utf-8"?>
+<file path=ppt/slides/slide11.xml><?xml version="1.0" encoding="utf-8"?>
 <p:sld xmlns:a="http://schemas.openxmlformats.org/drawingml/2006/main" xmlns:r="http://schemas.openxmlformats.org/officeDocument/2006/relationships" xmlns:p="http://schemas.openxmlformats.org/presentationml/2006/main">
   <p:cSld>
     <p:spTree>
@@ -6918,77 +6487,7 @@
       </p:grpSpPr>
       <p:sp>
         <p:nvSpPr>
-          <p:cNvPr id="3" name="Content Placeholder 2"/>
-          <p:cNvSpPr>
-            <a:spLocks noGrp="1"/>
-          </p:cNvSpPr>
-          <p:nvPr>
-            <p:ph idx="1"/>
-          </p:nvPr>
-        </p:nvSpPr>
-        <p:spPr>
-          <a:xfrm>
-            <a:off x="609442" y="1301408"/>
-            <a:ext cx="5166127" cy="4422776"/>
-          </a:xfrm>
-        </p:spPr>
-        <p:txBody>
-          <a:bodyPr/>
-          <a:lstStyle/>
-          <a:p>
-            <a:r>
-              <a:rPr lang="en-US" dirty="0"/>
-              <a:t>Know your cost estimates</a:t>
-            </a:r>
-          </a:p>
-          <a:p>
-            <a:r>
-              <a:rPr lang="en-US" dirty="0"/>
-              <a:t>Verification</a:t>
-            </a:r>
-          </a:p>
-          <a:p>
-            <a:pPr lvl="1"/>
-            <a:r>
-              <a:rPr lang="en-US" dirty="0"/>
-              <a:t>Check for coverage provided by existing tests</a:t>
-            </a:r>
-          </a:p>
-          <a:p>
-            <a:pPr lvl="1"/>
-            <a:r>
-              <a:rPr lang="en-US" dirty="0"/>
-              <a:t>Develop new tests where there are gaps</a:t>
-            </a:r>
-          </a:p>
-          <a:p>
-            <a:pPr lvl="1"/>
-            <a:r>
-              <a:rPr lang="en-US" dirty="0"/>
-              <a:t>Make sure tests exist at different granularities</a:t>
-            </a:r>
-          </a:p>
-          <a:p>
-            <a:pPr lvl="2"/>
-            <a:r>
-              <a:rPr lang="en-US" dirty="0"/>
-              <a:t>There should be demanding integration and system level tests</a:t>
-            </a:r>
-          </a:p>
-          <a:p>
-            <a:endParaRPr lang="en-US" dirty="0"/>
-          </a:p>
-        </p:txBody>
-      </p:sp>
-      <p:sp>
-        <p:nvSpPr>
-          <p:cNvPr id="11" name="Title 10">
-            <a:extLst>
-              <a:ext uri="{FF2B5EF4-FFF2-40B4-BE49-F238E27FC236}">
-                <a16:creationId xmlns:a16="http://schemas.microsoft.com/office/drawing/2014/main" id="{9FFD9CD1-CB20-401F-B512-EEEA727ADB32}"/>
-              </a:ext>
-            </a:extLst>
-          </p:cNvPr>
+          <p:cNvPr id="2" name="Title 1"/>
           <p:cNvSpPr>
             <a:spLocks noGrp="1"/>
           </p:cNvSpPr>
@@ -7003,151 +6502,17 @@
           <a:p>
             <a:r>
               <a:rPr lang="en-US" dirty="0"/>
-              <a:t>Before Starting</a:t>
-            </a:r>
-          </a:p>
-        </p:txBody>
-      </p:sp>
-    </p:spTree>
-    <p:extLst>
-      <p:ext uri="{BB962C8B-B14F-4D97-AF65-F5344CB8AC3E}">
-        <p14:creationId xmlns:p14="http://schemas.microsoft.com/office/powerpoint/2010/main" val="1423201334"/>
-      </p:ext>
-    </p:extLst>
-  </p:cSld>
-  <p:clrMapOvr>
-    <a:masterClrMapping/>
-  </p:clrMapOvr>
-  <mc:AlternateContent xmlns:mc="http://schemas.openxmlformats.org/markup-compatibility/2006" xmlns:p14="http://schemas.microsoft.com/office/powerpoint/2010/main">
-    <mc:Choice Requires="p14">
-      <p:transition p14:dur="250">
-        <p:fade/>
-      </p:transition>
-    </mc:Choice>
-    <mc:Fallback xmlns="">
-      <p:transition>
-        <p:fade/>
-      </p:transition>
-    </mc:Fallback>
-  </mc:AlternateContent>
-</p:sld>
-</file>
-
-<file path=ppt/slides/slide13.xml><?xml version="1.0" encoding="utf-8"?>
-<p:sld xmlns:a="http://schemas.openxmlformats.org/drawingml/2006/main" xmlns:r="http://schemas.openxmlformats.org/officeDocument/2006/relationships" xmlns:p="http://schemas.openxmlformats.org/presentationml/2006/main">
-  <p:cSld>
-    <p:spTree>
-      <p:nvGrpSpPr>
-        <p:cNvPr id="1" name=""/>
-        <p:cNvGrpSpPr/>
-        <p:nvPr/>
-      </p:nvGrpSpPr>
-      <p:grpSpPr>
-        <a:xfrm>
-          <a:off x="0" y="0"/>
-          <a:ext cx="0" cy="0"/>
-          <a:chOff x="0" y="0"/>
-          <a:chExt cx="0" cy="0"/>
-        </a:xfrm>
-      </p:grpSpPr>
-      <p:sp>
-        <p:nvSpPr>
-          <p:cNvPr id="3" name="Content Placeholder 2"/>
-          <p:cNvSpPr>
-            <a:spLocks noGrp="1"/>
-          </p:cNvSpPr>
-          <p:nvPr>
-            <p:ph idx="1"/>
-          </p:nvPr>
-        </p:nvSpPr>
-        <p:spPr>
-          <a:xfrm>
-            <a:off x="609442" y="1301408"/>
-            <a:ext cx="5166127" cy="4422776"/>
-          </a:xfrm>
-        </p:spPr>
-        <p:txBody>
-          <a:bodyPr/>
-          <a:lstStyle/>
-          <a:p>
-            <a:r>
-              <a:rPr lang="en-US" dirty="0"/>
-              <a:t>Know your cost estimates</a:t>
-            </a:r>
-          </a:p>
-          <a:p>
-            <a:r>
-              <a:rPr lang="en-US" dirty="0"/>
-              <a:t>Verification</a:t>
-            </a:r>
-          </a:p>
-          <a:p>
-            <a:pPr lvl="1"/>
-            <a:r>
-              <a:rPr lang="en-US" dirty="0"/>
-              <a:t>Check for coverage provided by existing tests</a:t>
-            </a:r>
-          </a:p>
-          <a:p>
-            <a:pPr lvl="1"/>
-            <a:r>
-              <a:rPr lang="en-US" dirty="0"/>
-              <a:t>Develop new tests where there are gaps</a:t>
-            </a:r>
-          </a:p>
-          <a:p>
-            <a:pPr lvl="1"/>
-            <a:r>
-              <a:rPr lang="en-US" dirty="0"/>
-              <a:t>Make sure tests exist at different granularities</a:t>
-            </a:r>
-          </a:p>
-          <a:p>
-            <a:pPr lvl="2"/>
-            <a:r>
-              <a:rPr lang="en-US" dirty="0"/>
-              <a:t>There should be demanding integration and system level tests</a:t>
-            </a:r>
-          </a:p>
-          <a:p>
-            <a:endParaRPr lang="en-US" dirty="0"/>
+              <a:t>Considerations for Refactoring</a:t>
+            </a:r>
           </a:p>
         </p:txBody>
       </p:sp>
       <p:sp>
         <p:nvSpPr>
-          <p:cNvPr id="11" name="Title 10">
+          <p:cNvPr id="16" name="Content Placeholder 2">
             <a:extLst>
               <a:ext uri="{FF2B5EF4-FFF2-40B4-BE49-F238E27FC236}">
-                <a16:creationId xmlns:a16="http://schemas.microsoft.com/office/drawing/2014/main" id="{9FFD9CD1-CB20-401F-B512-EEEA727ADB32}"/>
-              </a:ext>
-            </a:extLst>
-          </p:cNvPr>
-          <p:cNvSpPr>
-            <a:spLocks noGrp="1"/>
-          </p:cNvSpPr>
-          <p:nvPr>
-            <p:ph type="title"/>
-          </p:nvPr>
-        </p:nvSpPr>
-        <p:spPr/>
-        <p:txBody>
-          <a:bodyPr/>
-          <a:lstStyle/>
-          <a:p>
-            <a:r>
-              <a:rPr lang="en-US" dirty="0"/>
-              <a:t>Before Starting</a:t>
-            </a:r>
-          </a:p>
-        </p:txBody>
-      </p:sp>
-      <p:sp>
-        <p:nvSpPr>
-          <p:cNvPr id="5" name="Content Placeholder 2">
-            <a:extLst>
-              <a:ext uri="{FF2B5EF4-FFF2-40B4-BE49-F238E27FC236}">
-                <a16:creationId xmlns:a16="http://schemas.microsoft.com/office/drawing/2014/main" id="{9880F94E-35BF-204A-9D74-FAC1DA4C1624}"/>
+                <a16:creationId xmlns:a16="http://schemas.microsoft.com/office/drawing/2014/main" id="{FFC7FCAD-8E94-314F-B0F0-99AD91CFCBE4}"/>
               </a:ext>
             </a:extLst>
           </p:cNvPr>
@@ -7158,8 +6523,8 @@
         </p:nvSpPr>
         <p:spPr bwMode="auto">
           <a:xfrm>
-            <a:off x="5838327" y="1301408"/>
-            <a:ext cx="5106570" cy="4170386"/>
+            <a:off x="365760" y="1027954"/>
+            <a:ext cx="5905658" cy="5241053"/>
           </a:xfrm>
           <a:prstGeom prst="rect">
             <a:avLst/>
@@ -7364,6 +6729,52 @@
           <a:p>
             <a:r>
               <a:rPr lang="en-US" dirty="0"/>
+              <a:t>Know why you are refactoring</a:t>
+            </a:r>
+          </a:p>
+          <a:p>
+            <a:pPr lvl="1"/>
+            <a:r>
+              <a:rPr lang="en-US" dirty="0"/>
+              <a:t>Is it necessary?</a:t>
+            </a:r>
+          </a:p>
+          <a:p>
+            <a:pPr lvl="1"/>
+            <a:r>
+              <a:rPr lang="en-US" dirty="0"/>
+              <a:t>Where should the code be after refactoring.</a:t>
+            </a:r>
+          </a:p>
+          <a:p>
+            <a:r>
+              <a:rPr lang="en-US" dirty="0"/>
+              <a:t>Here we have two reasons</a:t>
+            </a:r>
+          </a:p>
+          <a:p>
+            <a:pPr lvl="1"/>
+            <a:r>
+              <a:rPr lang="en-US" dirty="0"/>
+              <a:t>One is enhancing flexibility</a:t>
+            </a:r>
+          </a:p>
+          <a:p>
+            <a:pPr lvl="1"/>
+            <a:r>
+              <a:rPr lang="en-US" dirty="0"/>
+              <a:t>The other is adding capability</a:t>
+            </a:r>
+          </a:p>
+          <a:p>
+            <a:r>
+              <a:rPr lang="en-US" dirty="0"/>
+              <a:t>Know your cost estimates</a:t>
+            </a:r>
+          </a:p>
+          <a:p>
+            <a:r>
+              <a:rPr lang="en-US" dirty="0"/>
               <a:t>Know your bounds</a:t>
             </a:r>
           </a:p>
@@ -7389,24 +6800,534 @@
             </a:r>
           </a:p>
           <a:p>
+            <a:endParaRPr lang="en-US" dirty="0"/>
+          </a:p>
+          <a:p>
+            <a:endParaRPr lang="en-US" dirty="0"/>
+          </a:p>
+        </p:txBody>
+      </p:sp>
+      <p:sp>
+        <p:nvSpPr>
+          <p:cNvPr id="5" name="Content Placeholder 2">
+            <a:extLst>
+              <a:ext uri="{FF2B5EF4-FFF2-40B4-BE49-F238E27FC236}">
+                <a16:creationId xmlns:a16="http://schemas.microsoft.com/office/drawing/2014/main" id="{F0225219-7EC1-12AC-4F1E-67B8209B977D}"/>
+              </a:ext>
+            </a:extLst>
+          </p:cNvPr>
+          <p:cNvSpPr txBox="1">
+            <a:spLocks/>
+          </p:cNvSpPr>
+          <p:nvPr/>
+        </p:nvSpPr>
+        <p:spPr bwMode="auto">
+          <a:xfrm>
+            <a:off x="6453525" y="1118527"/>
+            <a:ext cx="5106570" cy="4690271"/>
+          </a:xfrm>
+          <a:prstGeom prst="rect">
+            <a:avLst/>
+          </a:prstGeom>
+          <a:noFill/>
+          <a:ln w="9525">
+            <a:noFill/>
+            <a:miter lim="800000"/>
+            <a:headEnd/>
+            <a:tailEnd/>
+          </a:ln>
+        </p:spPr>
+        <p:txBody>
+          <a:bodyPr vert="horz" wrap="square" lIns="91440" tIns="45720" rIns="91440" bIns="45720" numCol="1" anchor="t" anchorCtr="0" compatLnSpc="1">
+            <a:prstTxWarp prst="textNoShape">
+              <a:avLst/>
+            </a:prstTxWarp>
+            <a:normAutofit lnSpcReduction="10000"/>
+          </a:bodyPr>
+          <a:lstStyle>
+            <a:lvl1pPr marL="230188" indent="-230188" algn="l" rtl="0" eaLnBrk="1" fontAlgn="base" hangingPunct="1">
+              <a:lnSpc>
+                <a:spcPct val="90000"/>
+              </a:lnSpc>
+              <a:spcBef>
+                <a:spcPts val="1400"/>
+              </a:spcBef>
+              <a:spcAft>
+                <a:spcPct val="0"/>
+              </a:spcAft>
+              <a:buClr>
+                <a:schemeClr val="tx1"/>
+              </a:buClr>
+              <a:buFont typeface="Arial" charset="0"/>
+              <a:buChar char="•"/>
+              <a:defRPr sz="2400" kern="1200" baseline="0">
+                <a:solidFill>
+                  <a:schemeClr val="tx1"/>
+                </a:solidFill>
+                <a:latin typeface="+mn-lt"/>
+                <a:ea typeface="+mn-ea"/>
+                <a:cs typeface="+mn-cs"/>
+              </a:defRPr>
+            </a:lvl1pPr>
+            <a:lvl2pPr marL="625475" indent="-279400" algn="l" rtl="0" eaLnBrk="1" fontAlgn="base" hangingPunct="1">
+              <a:lnSpc>
+                <a:spcPct val="90000"/>
+              </a:lnSpc>
+              <a:spcBef>
+                <a:spcPts val="800"/>
+              </a:spcBef>
+              <a:spcAft>
+                <a:spcPct val="0"/>
+              </a:spcAft>
+              <a:buClr>
+                <a:schemeClr val="tx1"/>
+              </a:buClr>
+              <a:buFont typeface="Arial" charset="0"/>
+              <a:buChar char="–"/>
+              <a:defRPr sz="2000" kern="1200">
+                <a:solidFill>
+                  <a:schemeClr val="tx1"/>
+                </a:solidFill>
+                <a:latin typeface="+mn-lt"/>
+                <a:ea typeface="+mn-ea"/>
+                <a:cs typeface="+mn-cs"/>
+              </a:defRPr>
+            </a:lvl2pPr>
+            <a:lvl3pPr marL="914400" indent="-230188" algn="l" rtl="0" eaLnBrk="1" fontAlgn="base" hangingPunct="1">
+              <a:lnSpc>
+                <a:spcPct val="90000"/>
+              </a:lnSpc>
+              <a:spcBef>
+                <a:spcPts val="800"/>
+              </a:spcBef>
+              <a:spcAft>
+                <a:spcPct val="0"/>
+              </a:spcAft>
+              <a:buClr>
+                <a:schemeClr val="tx1"/>
+              </a:buClr>
+              <a:buFont typeface="Arial" charset="0"/>
+              <a:buChar char="•"/>
+              <a:defRPr sz="1800" kern="1200">
+                <a:solidFill>
+                  <a:schemeClr val="tx1"/>
+                </a:solidFill>
+                <a:latin typeface="+mn-lt"/>
+                <a:ea typeface="+mn-ea"/>
+                <a:cs typeface="+mn-cs"/>
+              </a:defRPr>
+            </a:lvl3pPr>
+            <a:lvl4pPr marL="1144588" indent="-173038" algn="l" rtl="0" eaLnBrk="1" fontAlgn="base" hangingPunct="1">
+              <a:lnSpc>
+                <a:spcPct val="90000"/>
+              </a:lnSpc>
+              <a:spcBef>
+                <a:spcPts val="800"/>
+              </a:spcBef>
+              <a:spcAft>
+                <a:spcPct val="0"/>
+              </a:spcAft>
+              <a:buClr>
+                <a:schemeClr val="tx1"/>
+              </a:buClr>
+              <a:buFont typeface="Arial" charset="0"/>
+              <a:buChar char="–"/>
+              <a:defRPr sz="1600" kern="1200">
+                <a:solidFill>
+                  <a:schemeClr val="tx1"/>
+                </a:solidFill>
+                <a:latin typeface="+mn-lt"/>
+                <a:ea typeface="+mn-ea"/>
+                <a:cs typeface="+mn-cs"/>
+              </a:defRPr>
+            </a:lvl4pPr>
+            <a:lvl5pPr marL="1482725" indent="-222250" algn="l" rtl="0" eaLnBrk="1" fontAlgn="base" hangingPunct="1">
+              <a:lnSpc>
+                <a:spcPct val="90000"/>
+              </a:lnSpc>
+              <a:spcBef>
+                <a:spcPts val="600"/>
+              </a:spcBef>
+              <a:spcAft>
+                <a:spcPct val="0"/>
+              </a:spcAft>
+              <a:buClr>
+                <a:schemeClr val="tx1"/>
+              </a:buClr>
+              <a:buFont typeface="Arial" charset="0"/>
+              <a:buChar char="»"/>
+              <a:defRPr sz="1600" kern="1200">
+                <a:solidFill>
+                  <a:schemeClr val="tx1"/>
+                </a:solidFill>
+                <a:latin typeface="+mn-lt"/>
+                <a:ea typeface="+mn-ea"/>
+                <a:cs typeface="+mn-cs"/>
+              </a:defRPr>
+            </a:lvl5pPr>
+            <a:lvl6pPr marL="2514600" indent="-228600" algn="l" defTabSz="914400" rtl="0" eaLnBrk="1" latinLnBrk="0" hangingPunct="1">
+              <a:spcBef>
+                <a:spcPct val="20000"/>
+              </a:spcBef>
+              <a:buFont typeface="Arial" pitchFamily="34" charset="0"/>
+              <a:buChar char="•"/>
+              <a:defRPr sz="2000" kern="1200">
+                <a:solidFill>
+                  <a:schemeClr val="tx1"/>
+                </a:solidFill>
+                <a:latin typeface="+mn-lt"/>
+                <a:ea typeface="+mn-ea"/>
+                <a:cs typeface="+mn-cs"/>
+              </a:defRPr>
+            </a:lvl6pPr>
+            <a:lvl7pPr marL="2971800" indent="-228600" algn="l" defTabSz="914400" rtl="0" eaLnBrk="1" latinLnBrk="0" hangingPunct="1">
+              <a:spcBef>
+                <a:spcPct val="20000"/>
+              </a:spcBef>
+              <a:buFont typeface="Arial" pitchFamily="34" charset="0"/>
+              <a:buChar char="•"/>
+              <a:defRPr sz="2000" kern="1200">
+                <a:solidFill>
+                  <a:schemeClr val="tx1"/>
+                </a:solidFill>
+                <a:latin typeface="+mn-lt"/>
+                <a:ea typeface="+mn-ea"/>
+                <a:cs typeface="+mn-cs"/>
+              </a:defRPr>
+            </a:lvl7pPr>
+            <a:lvl8pPr marL="3429000" indent="-228600" algn="l" defTabSz="914400" rtl="0" eaLnBrk="1" latinLnBrk="0" hangingPunct="1">
+              <a:spcBef>
+                <a:spcPct val="20000"/>
+              </a:spcBef>
+              <a:buFont typeface="Arial" pitchFamily="34" charset="0"/>
+              <a:buChar char="•"/>
+              <a:defRPr sz="2000" kern="1200">
+                <a:solidFill>
+                  <a:schemeClr val="tx1"/>
+                </a:solidFill>
+                <a:latin typeface="+mn-lt"/>
+                <a:ea typeface="+mn-ea"/>
+                <a:cs typeface="+mn-cs"/>
+              </a:defRPr>
+            </a:lvl8pPr>
+            <a:lvl9pPr marL="3886200" indent="-228600" algn="l" defTabSz="914400" rtl="0" eaLnBrk="1" latinLnBrk="0" hangingPunct="1">
+              <a:spcBef>
+                <a:spcPct val="20000"/>
+              </a:spcBef>
+              <a:buFont typeface="Arial" pitchFamily="34" charset="0"/>
+              <a:buChar char="•"/>
+              <a:defRPr sz="2000" kern="1200">
+                <a:solidFill>
+                  <a:schemeClr val="tx1"/>
+                </a:solidFill>
+                <a:latin typeface="+mn-lt"/>
+                <a:ea typeface="+mn-ea"/>
+                <a:cs typeface="+mn-cs"/>
+              </a:defRPr>
+            </a:lvl9pPr>
+          </a:lstStyle>
+          <a:p>
             <a:r>
               <a:rPr lang="en-US" dirty="0"/>
-              <a:t>Map from here to there</a:t>
+              <a:t>Verification</a:t>
             </a:r>
           </a:p>
           <a:p>
             <a:pPr lvl="1"/>
+            <a:r>
+              <a:rPr lang="en-US" dirty="0"/>
+              <a:t>Check for coverage provided by existing tests</a:t>
+            </a:r>
+          </a:p>
+          <a:p>
+            <a:pPr lvl="1"/>
+            <a:r>
+              <a:rPr lang="en-US" dirty="0"/>
+              <a:t>Develop new tests where there are gaps</a:t>
+            </a:r>
+          </a:p>
+          <a:p>
+            <a:pPr lvl="1"/>
+            <a:r>
+              <a:rPr lang="en-US" dirty="0"/>
+              <a:t>Here we need two new tests. </a:t>
+            </a:r>
+          </a:p>
+          <a:p>
+            <a:pPr lvl="2"/>
+            <a:r>
+              <a:rPr lang="en-US" dirty="0"/>
+              <a:t>One to ensure that behavior does not change when we put the method for moving particles into a new function</a:t>
+            </a:r>
+          </a:p>
+          <a:p>
+            <a:pPr lvl="2"/>
+            <a:r>
+              <a:rPr lang="en-US" dirty="0"/>
+              <a:t>Another one to ensure that boundary conditions are applied correctly</a:t>
+            </a:r>
+          </a:p>
+          <a:p>
+            <a:pPr lvl="1"/>
+            <a:r>
+              <a:rPr lang="en-US" dirty="0"/>
+              <a:t>Make sure tests exist at different granularities</a:t>
+            </a:r>
+          </a:p>
+          <a:p>
+            <a:pPr lvl="2"/>
+            <a:r>
+              <a:rPr lang="en-US" dirty="0"/>
+              <a:t>There should be demanding integration and system level tests</a:t>
+            </a:r>
+          </a:p>
+        </p:txBody>
+      </p:sp>
+      <p:sp>
+        <p:nvSpPr>
+          <p:cNvPr id="8" name="Content Placeholder 2">
+            <a:extLst>
+              <a:ext uri="{FF2B5EF4-FFF2-40B4-BE49-F238E27FC236}">
+                <a16:creationId xmlns:a16="http://schemas.microsoft.com/office/drawing/2014/main" id="{A1DA427C-A026-392E-0256-4EE6BD32F460}"/>
+              </a:ext>
+            </a:extLst>
+          </p:cNvPr>
+          <p:cNvSpPr txBox="1">
+            <a:spLocks/>
+          </p:cNvSpPr>
+          <p:nvPr/>
+        </p:nvSpPr>
+        <p:spPr bwMode="auto">
+          <a:xfrm>
+            <a:off x="6453525" y="5602311"/>
+            <a:ext cx="4907835" cy="1120141"/>
+          </a:xfrm>
+          <a:prstGeom prst="rect">
+            <a:avLst/>
+          </a:prstGeom>
+          <a:noFill/>
+          <a:ln w="9525">
+            <a:noFill/>
+            <a:miter lim="800000"/>
+            <a:headEnd/>
+            <a:tailEnd/>
+          </a:ln>
+        </p:spPr>
+        <p:txBody>
+          <a:bodyPr vert="horz" wrap="square" lIns="91440" tIns="45720" rIns="91440" bIns="45720" numCol="1" anchor="t" anchorCtr="0" compatLnSpc="1">
+            <a:prstTxWarp prst="textNoShape">
+              <a:avLst/>
+            </a:prstTxWarp>
+            <a:normAutofit lnSpcReduction="10000"/>
+          </a:bodyPr>
+          <a:lstStyle>
+            <a:lvl1pPr marL="230188" indent="-230188" algn="l" rtl="0" eaLnBrk="1" fontAlgn="base" hangingPunct="1">
+              <a:lnSpc>
+                <a:spcPct val="90000"/>
+              </a:lnSpc>
+              <a:spcBef>
+                <a:spcPts val="1400"/>
+              </a:spcBef>
+              <a:spcAft>
+                <a:spcPct val="0"/>
+              </a:spcAft>
+              <a:buClr>
+                <a:schemeClr val="tx1"/>
+              </a:buClr>
+              <a:buFont typeface="Arial" charset="0"/>
+              <a:buChar char="•"/>
+              <a:defRPr sz="2400" kern="1200" baseline="0">
+                <a:solidFill>
+                  <a:schemeClr val="tx1"/>
+                </a:solidFill>
+                <a:latin typeface="+mn-lt"/>
+                <a:ea typeface="+mn-ea"/>
+                <a:cs typeface="+mn-cs"/>
+              </a:defRPr>
+            </a:lvl1pPr>
+            <a:lvl2pPr marL="625475" indent="-279400" algn="l" rtl="0" eaLnBrk="1" fontAlgn="base" hangingPunct="1">
+              <a:lnSpc>
+                <a:spcPct val="90000"/>
+              </a:lnSpc>
+              <a:spcBef>
+                <a:spcPts val="800"/>
+              </a:spcBef>
+              <a:spcAft>
+                <a:spcPct val="0"/>
+              </a:spcAft>
+              <a:buClr>
+                <a:schemeClr val="tx1"/>
+              </a:buClr>
+              <a:buFont typeface="Arial" charset="0"/>
+              <a:buChar char="–"/>
+              <a:defRPr sz="2000" kern="1200">
+                <a:solidFill>
+                  <a:schemeClr val="tx1"/>
+                </a:solidFill>
+                <a:latin typeface="+mn-lt"/>
+                <a:ea typeface="+mn-ea"/>
+                <a:cs typeface="+mn-cs"/>
+              </a:defRPr>
+            </a:lvl2pPr>
+            <a:lvl3pPr marL="914400" indent="-230188" algn="l" rtl="0" eaLnBrk="1" fontAlgn="base" hangingPunct="1">
+              <a:lnSpc>
+                <a:spcPct val="90000"/>
+              </a:lnSpc>
+              <a:spcBef>
+                <a:spcPts val="800"/>
+              </a:spcBef>
+              <a:spcAft>
+                <a:spcPct val="0"/>
+              </a:spcAft>
+              <a:buClr>
+                <a:schemeClr val="tx1"/>
+              </a:buClr>
+              <a:buFont typeface="Arial" charset="0"/>
+              <a:buChar char="•"/>
+              <a:defRPr sz="1800" kern="1200">
+                <a:solidFill>
+                  <a:schemeClr val="tx1"/>
+                </a:solidFill>
+                <a:latin typeface="+mn-lt"/>
+                <a:ea typeface="+mn-ea"/>
+                <a:cs typeface="+mn-cs"/>
+              </a:defRPr>
+            </a:lvl3pPr>
+            <a:lvl4pPr marL="1144588" indent="-173038" algn="l" rtl="0" eaLnBrk="1" fontAlgn="base" hangingPunct="1">
+              <a:lnSpc>
+                <a:spcPct val="90000"/>
+              </a:lnSpc>
+              <a:spcBef>
+                <a:spcPts val="800"/>
+              </a:spcBef>
+              <a:spcAft>
+                <a:spcPct val="0"/>
+              </a:spcAft>
+              <a:buClr>
+                <a:schemeClr val="tx1"/>
+              </a:buClr>
+              <a:buFont typeface="Arial" charset="0"/>
+              <a:buChar char="–"/>
+              <a:defRPr sz="1600" kern="1200">
+                <a:solidFill>
+                  <a:schemeClr val="tx1"/>
+                </a:solidFill>
+                <a:latin typeface="+mn-lt"/>
+                <a:ea typeface="+mn-ea"/>
+                <a:cs typeface="+mn-cs"/>
+              </a:defRPr>
+            </a:lvl4pPr>
+            <a:lvl5pPr marL="1482725" indent="-222250" algn="l" rtl="0" eaLnBrk="1" fontAlgn="base" hangingPunct="1">
+              <a:lnSpc>
+                <a:spcPct val="90000"/>
+              </a:lnSpc>
+              <a:spcBef>
+                <a:spcPts val="600"/>
+              </a:spcBef>
+              <a:spcAft>
+                <a:spcPct val="0"/>
+              </a:spcAft>
+              <a:buClr>
+                <a:schemeClr val="tx1"/>
+              </a:buClr>
+              <a:buFont typeface="Arial" charset="0"/>
+              <a:buChar char="»"/>
+              <a:defRPr sz="1600" kern="1200">
+                <a:solidFill>
+                  <a:schemeClr val="tx1"/>
+                </a:solidFill>
+                <a:latin typeface="+mn-lt"/>
+                <a:ea typeface="+mn-ea"/>
+                <a:cs typeface="+mn-cs"/>
+              </a:defRPr>
+            </a:lvl5pPr>
+            <a:lvl6pPr marL="2514600" indent="-228600" algn="l" defTabSz="914400" rtl="0" eaLnBrk="1" latinLnBrk="0" hangingPunct="1">
+              <a:spcBef>
+                <a:spcPct val="20000"/>
+              </a:spcBef>
+              <a:buFont typeface="Arial" pitchFamily="34" charset="0"/>
+              <a:buChar char="•"/>
+              <a:defRPr sz="2000" kern="1200">
+                <a:solidFill>
+                  <a:schemeClr val="tx1"/>
+                </a:solidFill>
+                <a:latin typeface="+mn-lt"/>
+                <a:ea typeface="+mn-ea"/>
+                <a:cs typeface="+mn-cs"/>
+              </a:defRPr>
+            </a:lvl6pPr>
+            <a:lvl7pPr marL="2971800" indent="-228600" algn="l" defTabSz="914400" rtl="0" eaLnBrk="1" latinLnBrk="0" hangingPunct="1">
+              <a:spcBef>
+                <a:spcPct val="20000"/>
+              </a:spcBef>
+              <a:buFont typeface="Arial" pitchFamily="34" charset="0"/>
+              <a:buChar char="•"/>
+              <a:defRPr sz="2000" kern="1200">
+                <a:solidFill>
+                  <a:schemeClr val="tx1"/>
+                </a:solidFill>
+                <a:latin typeface="+mn-lt"/>
+                <a:ea typeface="+mn-ea"/>
+                <a:cs typeface="+mn-cs"/>
+              </a:defRPr>
+            </a:lvl7pPr>
+            <a:lvl8pPr marL="3429000" indent="-228600" algn="l" defTabSz="914400" rtl="0" eaLnBrk="1" latinLnBrk="0" hangingPunct="1">
+              <a:spcBef>
+                <a:spcPct val="20000"/>
+              </a:spcBef>
+              <a:buFont typeface="Arial" pitchFamily="34" charset="0"/>
+              <a:buChar char="•"/>
+              <a:defRPr sz="2000" kern="1200">
+                <a:solidFill>
+                  <a:schemeClr val="tx1"/>
+                </a:solidFill>
+                <a:latin typeface="+mn-lt"/>
+                <a:ea typeface="+mn-ea"/>
+                <a:cs typeface="+mn-cs"/>
+              </a:defRPr>
+            </a:lvl8pPr>
+            <a:lvl9pPr marL="3886200" indent="-228600" algn="l" defTabSz="914400" rtl="0" eaLnBrk="1" latinLnBrk="0" hangingPunct="1">
+              <a:spcBef>
+                <a:spcPct val="20000"/>
+              </a:spcBef>
+              <a:buFont typeface="Arial" pitchFamily="34" charset="0"/>
+              <a:buChar char="•"/>
+              <a:defRPr sz="2000" kern="1200">
+                <a:solidFill>
+                  <a:schemeClr val="tx1"/>
+                </a:solidFill>
+                <a:latin typeface="+mn-lt"/>
+                <a:ea typeface="+mn-ea"/>
+                <a:cs typeface="+mn-cs"/>
+              </a:defRPr>
+            </a:lvl9pPr>
+          </a:lstStyle>
+          <a:p>
+            <a:pPr marL="346075" lvl="1" indent="0">
+              <a:buNone/>
+            </a:pPr>
             <a:endParaRPr lang="en-US" dirty="0"/>
           </a:p>
           <a:p>
-            <a:endParaRPr lang="en-US" dirty="0"/>
+            <a:pPr marL="0" indent="0" algn="ctr">
+              <a:buFont typeface="Arial" charset="0"/>
+              <a:buNone/>
+            </a:pPr>
+            <a:r>
+              <a:rPr lang="en-US" dirty="0">
+                <a:solidFill>
+                  <a:srgbClr val="00B050"/>
+                </a:solidFill>
+              </a:rPr>
+              <a:t>Incorporate verification overheads into refactoring cost estimates</a:t>
+            </a:r>
           </a:p>
         </p:txBody>
       </p:sp>
     </p:spTree>
     <p:extLst>
       <p:ext uri="{BB962C8B-B14F-4D97-AF65-F5344CB8AC3E}">
-        <p14:creationId xmlns:p14="http://schemas.microsoft.com/office/powerpoint/2010/main" val="1602079529"/>
+        <p14:creationId xmlns:p14="http://schemas.microsoft.com/office/powerpoint/2010/main" val="1030485234"/>
       </p:ext>
     </p:extLst>
   </p:cSld>
@@ -7428,7 +7349,7 @@
 </p:sld>
 </file>
 
-<file path=ppt/slides/slide14.xml><?xml version="1.0" encoding="utf-8"?>
+<file path=ppt/slides/slide12.xml><?xml version="1.0" encoding="utf-8"?>
 <p:sld xmlns:a="http://schemas.openxmlformats.org/drawingml/2006/main" xmlns:r="http://schemas.openxmlformats.org/officeDocument/2006/relationships" xmlns:p="http://schemas.openxmlformats.org/presentationml/2006/main">
   <p:cSld>
     <p:spTree>
@@ -7447,77 +7368,7 @@
       </p:grpSpPr>
       <p:sp>
         <p:nvSpPr>
-          <p:cNvPr id="3" name="Content Placeholder 2"/>
-          <p:cNvSpPr>
-            <a:spLocks noGrp="1"/>
-          </p:cNvSpPr>
-          <p:nvPr>
-            <p:ph idx="1"/>
-          </p:nvPr>
-        </p:nvSpPr>
-        <p:spPr>
-          <a:xfrm>
-            <a:off x="609442" y="1301408"/>
-            <a:ext cx="5166127" cy="4422776"/>
-          </a:xfrm>
-        </p:spPr>
-        <p:txBody>
-          <a:bodyPr/>
-          <a:lstStyle/>
-          <a:p>
-            <a:r>
-              <a:rPr lang="en-US" dirty="0"/>
-              <a:t>Know your cost estimates</a:t>
-            </a:r>
-          </a:p>
-          <a:p>
-            <a:r>
-              <a:rPr lang="en-US" dirty="0"/>
-              <a:t>Verification</a:t>
-            </a:r>
-          </a:p>
-          <a:p>
-            <a:pPr lvl="1"/>
-            <a:r>
-              <a:rPr lang="en-US" dirty="0"/>
-              <a:t>Check for coverage provided by existing tests</a:t>
-            </a:r>
-          </a:p>
-          <a:p>
-            <a:pPr lvl="1"/>
-            <a:r>
-              <a:rPr lang="en-US" dirty="0"/>
-              <a:t>Develop new tests where there are gaps</a:t>
-            </a:r>
-          </a:p>
-          <a:p>
-            <a:pPr lvl="1"/>
-            <a:r>
-              <a:rPr lang="en-US" dirty="0"/>
-              <a:t>Make sure tests exist at different granularities</a:t>
-            </a:r>
-          </a:p>
-          <a:p>
-            <a:pPr lvl="2"/>
-            <a:r>
-              <a:rPr lang="en-US" dirty="0"/>
-              <a:t>There should be demanding integration and system level tests</a:t>
-            </a:r>
-          </a:p>
-          <a:p>
-            <a:endParaRPr lang="en-US" dirty="0"/>
-          </a:p>
-        </p:txBody>
-      </p:sp>
-      <p:sp>
-        <p:nvSpPr>
-          <p:cNvPr id="11" name="Title 10">
-            <a:extLst>
-              <a:ext uri="{FF2B5EF4-FFF2-40B4-BE49-F238E27FC236}">
-                <a16:creationId xmlns:a16="http://schemas.microsoft.com/office/drawing/2014/main" id="{9FFD9CD1-CB20-401F-B512-EEEA727ADB32}"/>
-              </a:ext>
-            </a:extLst>
-          </p:cNvPr>
+          <p:cNvPr id="2" name="Title 1"/>
           <p:cNvSpPr>
             <a:spLocks noGrp="1"/>
           </p:cNvSpPr>
@@ -7532,17 +7383,17 @@
           <a:p>
             <a:r>
               <a:rPr lang="en-US" dirty="0"/>
-              <a:t>Before Starting</a:t>
+              <a:t>Considerations for Refactoring</a:t>
             </a:r>
           </a:p>
         </p:txBody>
       </p:sp>
       <p:sp>
         <p:nvSpPr>
-          <p:cNvPr id="5" name="Content Placeholder 2">
+          <p:cNvPr id="16" name="Content Placeholder 2">
             <a:extLst>
               <a:ext uri="{FF2B5EF4-FFF2-40B4-BE49-F238E27FC236}">
-                <a16:creationId xmlns:a16="http://schemas.microsoft.com/office/drawing/2014/main" id="{9880F94E-35BF-204A-9D74-FAC1DA4C1624}"/>
+                <a16:creationId xmlns:a16="http://schemas.microsoft.com/office/drawing/2014/main" id="{FFC7FCAD-8E94-314F-B0F0-99AD91CFCBE4}"/>
               </a:ext>
             </a:extLst>
           </p:cNvPr>
@@ -7553,8 +7404,8 @@
         </p:nvSpPr>
         <p:spPr bwMode="auto">
           <a:xfrm>
-            <a:off x="5838327" y="1301408"/>
-            <a:ext cx="5106570" cy="4170386"/>
+            <a:off x="365760" y="1027954"/>
+            <a:ext cx="5905658" cy="5241053"/>
           </a:xfrm>
           <a:prstGeom prst="rect">
             <a:avLst/>
@@ -7759,6 +7610,52 @@
           <a:p>
             <a:r>
               <a:rPr lang="en-US" dirty="0"/>
+              <a:t>Know why you are refactoring</a:t>
+            </a:r>
+          </a:p>
+          <a:p>
+            <a:pPr lvl="1"/>
+            <a:r>
+              <a:rPr lang="en-US" dirty="0"/>
+              <a:t>Is it necessary?</a:t>
+            </a:r>
+          </a:p>
+          <a:p>
+            <a:pPr lvl="1"/>
+            <a:r>
+              <a:rPr lang="en-US" dirty="0"/>
+              <a:t>Where should the code be after refactoring.</a:t>
+            </a:r>
+          </a:p>
+          <a:p>
+            <a:r>
+              <a:rPr lang="en-US" dirty="0"/>
+              <a:t>Here we have two reasons</a:t>
+            </a:r>
+          </a:p>
+          <a:p>
+            <a:pPr lvl="1"/>
+            <a:r>
+              <a:rPr lang="en-US" dirty="0"/>
+              <a:t>One is enhancing flexibility</a:t>
+            </a:r>
+          </a:p>
+          <a:p>
+            <a:pPr lvl="1"/>
+            <a:r>
+              <a:rPr lang="en-US" dirty="0"/>
+              <a:t>The other is adding capability</a:t>
+            </a:r>
+          </a:p>
+          <a:p>
+            <a:r>
+              <a:rPr lang="en-US" dirty="0"/>
+              <a:t>Know your cost estimates</a:t>
+            </a:r>
+          </a:p>
+          <a:p>
+            <a:r>
+              <a:rPr lang="en-US" dirty="0"/>
               <a:t>Know your bounds</a:t>
             </a:r>
           </a:p>
@@ -7784,13 +7681,6 @@
             </a:r>
           </a:p>
           <a:p>
-            <a:r>
-              <a:rPr lang="en-US" dirty="0"/>
-              <a:t>Map from here to there</a:t>
-            </a:r>
-          </a:p>
-          <a:p>
-            <a:pPr lvl="1"/>
             <a:endParaRPr lang="en-US" dirty="0"/>
           </a:p>
           <a:p>
@@ -7800,10 +7690,10 @@
       </p:sp>
       <p:sp>
         <p:nvSpPr>
-          <p:cNvPr id="6" name="Content Placeholder 2">
+          <p:cNvPr id="5" name="Content Placeholder 2">
             <a:extLst>
               <a:ext uri="{FF2B5EF4-FFF2-40B4-BE49-F238E27FC236}">
-                <a16:creationId xmlns:a16="http://schemas.microsoft.com/office/drawing/2014/main" id="{B16C07C3-A711-3341-A0D0-97F8B0897BD3}"/>
+                <a16:creationId xmlns:a16="http://schemas.microsoft.com/office/drawing/2014/main" id="{F0225219-7EC1-12AC-4F1E-67B8209B977D}"/>
               </a:ext>
             </a:extLst>
           </p:cNvPr>
@@ -7814,820 +7704,8 @@
         </p:nvSpPr>
         <p:spPr bwMode="auto">
           <a:xfrm>
-            <a:off x="365761" y="4610637"/>
-            <a:ext cx="10156278" cy="2090072"/>
-          </a:xfrm>
-          <a:prstGeom prst="rect">
-            <a:avLst/>
-          </a:prstGeom>
-          <a:noFill/>
-          <a:ln w="9525">
-            <a:noFill/>
-            <a:miter lim="800000"/>
-            <a:headEnd/>
-            <a:tailEnd/>
-          </a:ln>
-        </p:spPr>
-        <p:txBody>
-          <a:bodyPr vert="horz" wrap="square" lIns="91440" tIns="45720" rIns="91440" bIns="45720" numCol="1" anchor="t" anchorCtr="0" compatLnSpc="1">
-            <a:prstTxWarp prst="textNoShape">
-              <a:avLst/>
-            </a:prstTxWarp>
-            <a:normAutofit/>
-          </a:bodyPr>
-          <a:lstStyle>
-            <a:lvl1pPr marL="230188" indent="-230188" algn="l" rtl="0" eaLnBrk="1" fontAlgn="base" hangingPunct="1">
-              <a:lnSpc>
-                <a:spcPct val="90000"/>
-              </a:lnSpc>
-              <a:spcBef>
-                <a:spcPts val="1400"/>
-              </a:spcBef>
-              <a:spcAft>
-                <a:spcPct val="0"/>
-              </a:spcAft>
-              <a:buClr>
-                <a:schemeClr val="tx1"/>
-              </a:buClr>
-              <a:buFont typeface="Arial" charset="0"/>
-              <a:buChar char="•"/>
-              <a:defRPr sz="2400" kern="1200" baseline="0">
-                <a:solidFill>
-                  <a:schemeClr val="tx1"/>
-                </a:solidFill>
-                <a:latin typeface="+mn-lt"/>
-                <a:ea typeface="+mn-ea"/>
-                <a:cs typeface="+mn-cs"/>
-              </a:defRPr>
-            </a:lvl1pPr>
-            <a:lvl2pPr marL="625475" indent="-279400" algn="l" rtl="0" eaLnBrk="1" fontAlgn="base" hangingPunct="1">
-              <a:lnSpc>
-                <a:spcPct val="90000"/>
-              </a:lnSpc>
-              <a:spcBef>
-                <a:spcPts val="800"/>
-              </a:spcBef>
-              <a:spcAft>
-                <a:spcPct val="0"/>
-              </a:spcAft>
-              <a:buClr>
-                <a:schemeClr val="tx1"/>
-              </a:buClr>
-              <a:buFont typeface="Arial" charset="0"/>
-              <a:buChar char="–"/>
-              <a:defRPr sz="2000" kern="1200">
-                <a:solidFill>
-                  <a:schemeClr val="tx1"/>
-                </a:solidFill>
-                <a:latin typeface="+mn-lt"/>
-                <a:ea typeface="+mn-ea"/>
-                <a:cs typeface="+mn-cs"/>
-              </a:defRPr>
-            </a:lvl2pPr>
-            <a:lvl3pPr marL="914400" indent="-230188" algn="l" rtl="0" eaLnBrk="1" fontAlgn="base" hangingPunct="1">
-              <a:lnSpc>
-                <a:spcPct val="90000"/>
-              </a:lnSpc>
-              <a:spcBef>
-                <a:spcPts val="800"/>
-              </a:spcBef>
-              <a:spcAft>
-                <a:spcPct val="0"/>
-              </a:spcAft>
-              <a:buClr>
-                <a:schemeClr val="tx1"/>
-              </a:buClr>
-              <a:buFont typeface="Arial" charset="0"/>
-              <a:buChar char="•"/>
-              <a:defRPr sz="1800" kern="1200">
-                <a:solidFill>
-                  <a:schemeClr val="tx1"/>
-                </a:solidFill>
-                <a:latin typeface="+mn-lt"/>
-                <a:ea typeface="+mn-ea"/>
-                <a:cs typeface="+mn-cs"/>
-              </a:defRPr>
-            </a:lvl3pPr>
-            <a:lvl4pPr marL="1144588" indent="-173038" algn="l" rtl="0" eaLnBrk="1" fontAlgn="base" hangingPunct="1">
-              <a:lnSpc>
-                <a:spcPct val="90000"/>
-              </a:lnSpc>
-              <a:spcBef>
-                <a:spcPts val="800"/>
-              </a:spcBef>
-              <a:spcAft>
-                <a:spcPct val="0"/>
-              </a:spcAft>
-              <a:buClr>
-                <a:schemeClr val="tx1"/>
-              </a:buClr>
-              <a:buFont typeface="Arial" charset="0"/>
-              <a:buChar char="–"/>
-              <a:defRPr sz="1600" kern="1200">
-                <a:solidFill>
-                  <a:schemeClr val="tx1"/>
-                </a:solidFill>
-                <a:latin typeface="+mn-lt"/>
-                <a:ea typeface="+mn-ea"/>
-                <a:cs typeface="+mn-cs"/>
-              </a:defRPr>
-            </a:lvl4pPr>
-            <a:lvl5pPr marL="1482725" indent="-222250" algn="l" rtl="0" eaLnBrk="1" fontAlgn="base" hangingPunct="1">
-              <a:lnSpc>
-                <a:spcPct val="90000"/>
-              </a:lnSpc>
-              <a:spcBef>
-                <a:spcPts val="600"/>
-              </a:spcBef>
-              <a:spcAft>
-                <a:spcPct val="0"/>
-              </a:spcAft>
-              <a:buClr>
-                <a:schemeClr val="tx1"/>
-              </a:buClr>
-              <a:buFont typeface="Arial" charset="0"/>
-              <a:buChar char="»"/>
-              <a:defRPr sz="1600" kern="1200">
-                <a:solidFill>
-                  <a:schemeClr val="tx1"/>
-                </a:solidFill>
-                <a:latin typeface="+mn-lt"/>
-                <a:ea typeface="+mn-ea"/>
-                <a:cs typeface="+mn-cs"/>
-              </a:defRPr>
-            </a:lvl5pPr>
-            <a:lvl6pPr marL="2514600" indent="-228600" algn="l" defTabSz="914400" rtl="0" eaLnBrk="1" latinLnBrk="0" hangingPunct="1">
-              <a:spcBef>
-                <a:spcPct val="20000"/>
-              </a:spcBef>
-              <a:buFont typeface="Arial" pitchFamily="34" charset="0"/>
-              <a:buChar char="•"/>
-              <a:defRPr sz="2000" kern="1200">
-                <a:solidFill>
-                  <a:schemeClr val="tx1"/>
-                </a:solidFill>
-                <a:latin typeface="+mn-lt"/>
-                <a:ea typeface="+mn-ea"/>
-                <a:cs typeface="+mn-cs"/>
-              </a:defRPr>
-            </a:lvl6pPr>
-            <a:lvl7pPr marL="2971800" indent="-228600" algn="l" defTabSz="914400" rtl="0" eaLnBrk="1" latinLnBrk="0" hangingPunct="1">
-              <a:spcBef>
-                <a:spcPct val="20000"/>
-              </a:spcBef>
-              <a:buFont typeface="Arial" pitchFamily="34" charset="0"/>
-              <a:buChar char="•"/>
-              <a:defRPr sz="2000" kern="1200">
-                <a:solidFill>
-                  <a:schemeClr val="tx1"/>
-                </a:solidFill>
-                <a:latin typeface="+mn-lt"/>
-                <a:ea typeface="+mn-ea"/>
-                <a:cs typeface="+mn-cs"/>
-              </a:defRPr>
-            </a:lvl7pPr>
-            <a:lvl8pPr marL="3429000" indent="-228600" algn="l" defTabSz="914400" rtl="0" eaLnBrk="1" latinLnBrk="0" hangingPunct="1">
-              <a:spcBef>
-                <a:spcPct val="20000"/>
-              </a:spcBef>
-              <a:buFont typeface="Arial" pitchFamily="34" charset="0"/>
-              <a:buChar char="•"/>
-              <a:defRPr sz="2000" kern="1200">
-                <a:solidFill>
-                  <a:schemeClr val="tx1"/>
-                </a:solidFill>
-                <a:latin typeface="+mn-lt"/>
-                <a:ea typeface="+mn-ea"/>
-                <a:cs typeface="+mn-cs"/>
-              </a:defRPr>
-            </a:lvl8pPr>
-            <a:lvl9pPr marL="3886200" indent="-228600" algn="l" defTabSz="914400" rtl="0" eaLnBrk="1" latinLnBrk="0" hangingPunct="1">
-              <a:spcBef>
-                <a:spcPct val="20000"/>
-              </a:spcBef>
-              <a:buFont typeface="Arial" pitchFamily="34" charset="0"/>
-              <a:buChar char="•"/>
-              <a:defRPr sz="2000" kern="1200">
-                <a:solidFill>
-                  <a:schemeClr val="tx1"/>
-                </a:solidFill>
-                <a:latin typeface="+mn-lt"/>
-                <a:ea typeface="+mn-ea"/>
-                <a:cs typeface="+mn-cs"/>
-              </a:defRPr>
-            </a:lvl9pPr>
-          </a:lstStyle>
-          <a:p>
-            <a:pPr marL="346075" lvl="1" indent="0">
-              <a:buNone/>
-            </a:pPr>
-            <a:endParaRPr lang="en-US" dirty="0"/>
-          </a:p>
-          <a:p>
-            <a:pPr marL="0" indent="0" algn="ctr">
-              <a:buFont typeface="Arial" charset="0"/>
-              <a:buNone/>
-            </a:pPr>
-            <a:r>
-              <a:rPr lang="en-US" dirty="0">
-                <a:solidFill>
-                  <a:srgbClr val="00B050"/>
-                </a:solidFill>
-              </a:rPr>
-              <a:t>Incorporate testing overheads into refactoring cost estimates</a:t>
-            </a:r>
-          </a:p>
-        </p:txBody>
-      </p:sp>
-    </p:spTree>
-    <p:extLst>
-      <p:ext uri="{BB962C8B-B14F-4D97-AF65-F5344CB8AC3E}">
-        <p14:creationId xmlns:p14="http://schemas.microsoft.com/office/powerpoint/2010/main" val="673155382"/>
-      </p:ext>
-    </p:extLst>
-  </p:cSld>
-  <p:clrMapOvr>
-    <a:masterClrMapping/>
-  </p:clrMapOvr>
-  <mc:AlternateContent xmlns:mc="http://schemas.openxmlformats.org/markup-compatibility/2006" xmlns:p14="http://schemas.microsoft.com/office/powerpoint/2010/main">
-    <mc:Choice Requires="p14">
-      <p:transition p14:dur="250">
-        <p:fade/>
-      </p:transition>
-    </mc:Choice>
-    <mc:Fallback xmlns="">
-      <p:transition>
-        <p:fade/>
-      </p:transition>
-    </mc:Fallback>
-  </mc:AlternateContent>
-</p:sld>
-</file>
-
-<file path=ppt/slides/slide15.xml><?xml version="1.0" encoding="utf-8"?>
-<p:sld xmlns:a="http://schemas.openxmlformats.org/drawingml/2006/main" xmlns:r="http://schemas.openxmlformats.org/officeDocument/2006/relationships" xmlns:p="http://schemas.openxmlformats.org/presentationml/2006/main">
-  <p:cSld>
-    <p:spTree>
-      <p:nvGrpSpPr>
-        <p:cNvPr id="1" name=""/>
-        <p:cNvGrpSpPr/>
-        <p:nvPr/>
-      </p:nvGrpSpPr>
-      <p:grpSpPr>
-        <a:xfrm>
-          <a:off x="0" y="0"/>
-          <a:ext cx="0" cy="0"/>
-          <a:chOff x="0" y="0"/>
-          <a:chExt cx="0" cy="0"/>
-        </a:xfrm>
-      </p:grpSpPr>
-      <p:sp>
-        <p:nvSpPr>
-          <p:cNvPr id="2" name="Title 1">
-            <a:extLst>
-              <a:ext uri="{FF2B5EF4-FFF2-40B4-BE49-F238E27FC236}">
-                <a16:creationId xmlns:a16="http://schemas.microsoft.com/office/drawing/2014/main" id="{A96326D6-BE43-F24E-9571-E7D5F8289BBA}"/>
-              </a:ext>
-            </a:extLst>
-          </p:cNvPr>
-          <p:cNvSpPr>
-            <a:spLocks noGrp="1"/>
-          </p:cNvSpPr>
-          <p:nvPr>
-            <p:ph type="title"/>
-          </p:nvPr>
-        </p:nvSpPr>
-        <p:spPr/>
-        <p:txBody>
-          <a:bodyPr/>
-          <a:lstStyle/>
-          <a:p>
-            <a:r>
-              <a:rPr lang="en-US" dirty="0"/>
-              <a:t>Exercise: </a:t>
-            </a:r>
-            <a:r>
-              <a:rPr lang="en-US" b="0" dirty="0"/>
-              <a:t>Refactoring</a:t>
-            </a:r>
-            <a:r>
-              <a:rPr lang="en-US" dirty="0"/>
-              <a:t> </a:t>
-            </a:r>
-            <a:r>
-              <a:rPr lang="en-US" b="0" dirty="0" err="1">
-                <a:latin typeface="Consolas" panose="020B0609020204030204" pitchFamily="49" charset="0"/>
-                <a:cs typeface="Consolas" panose="020B0609020204030204" pitchFamily="49" charset="0"/>
-                <a:hlinkClick r:id="rId2"/>
-              </a:rPr>
-              <a:t>bssw</a:t>
-            </a:r>
-            <a:r>
-              <a:rPr lang="en-US" b="0" dirty="0">
-                <a:latin typeface="Consolas" panose="020B0609020204030204" pitchFamily="49" charset="0"/>
-                <a:cs typeface="Consolas" panose="020B0609020204030204" pitchFamily="49" charset="0"/>
-                <a:hlinkClick r:id="rId2"/>
-              </a:rPr>
-              <a:t>-tutorial/hello-numerical-world</a:t>
-            </a:r>
-            <a:endParaRPr lang="en-US" b="0" dirty="0">
-              <a:latin typeface="Consolas" panose="020B0609020204030204" pitchFamily="49" charset="0"/>
-              <a:cs typeface="Consolas" panose="020B0609020204030204" pitchFamily="49" charset="0"/>
-            </a:endParaRPr>
-          </a:p>
-        </p:txBody>
-      </p:sp>
-      <p:sp>
-        <p:nvSpPr>
-          <p:cNvPr id="3" name="Content Placeholder 2">
-            <a:extLst>
-              <a:ext uri="{FF2B5EF4-FFF2-40B4-BE49-F238E27FC236}">
-                <a16:creationId xmlns:a16="http://schemas.microsoft.com/office/drawing/2014/main" id="{1F25DAE9-E8E7-5547-A182-7A6D23995DA5}"/>
-              </a:ext>
-            </a:extLst>
-          </p:cNvPr>
-          <p:cNvSpPr>
-            <a:spLocks noGrp="1"/>
-          </p:cNvSpPr>
-          <p:nvPr>
-            <p:ph idx="1"/>
-          </p:nvPr>
-        </p:nvSpPr>
-        <p:spPr>
-          <a:xfrm>
-            <a:off x="409508" y="1510747"/>
-            <a:ext cx="11139025" cy="2902227"/>
-          </a:xfrm>
-        </p:spPr>
-        <p:txBody>
-          <a:bodyPr>
-            <a:normAutofit/>
-          </a:bodyPr>
-          <a:lstStyle/>
-          <a:p>
-            <a:pPr lvl="1"/>
-            <a:endParaRPr lang="en-US" dirty="0"/>
-          </a:p>
-          <a:p>
-            <a:pPr lvl="1"/>
-            <a:endParaRPr lang="en-US" dirty="0"/>
-          </a:p>
-          <a:p>
-            <a:r>
-              <a:rPr lang="en-US" dirty="0"/>
-              <a:t>I am taking the clean solution and generalizing the </a:t>
-            </a:r>
-            <a:r>
-              <a:rPr lang="en-US" dirty="0" err="1"/>
-              <a:t>update_solution</a:t>
-            </a:r>
-            <a:r>
-              <a:rPr lang="en-US" dirty="0"/>
-              <a:t> interface</a:t>
-            </a:r>
-          </a:p>
-          <a:p>
-            <a:pPr lvl="1"/>
-            <a:r>
-              <a:rPr lang="en-US" dirty="0"/>
-              <a:t>Motivation: Do not want to change </a:t>
-            </a:r>
-            <a:r>
-              <a:rPr lang="en-US" dirty="0" err="1"/>
-              <a:t>heat.C</a:t>
-            </a:r>
-            <a:r>
-              <a:rPr lang="en-US" dirty="0"/>
-              <a:t> for adding another method</a:t>
-            </a:r>
-          </a:p>
-          <a:p>
-            <a:pPr lvl="1"/>
-            <a:r>
-              <a:rPr lang="en-US" dirty="0"/>
-              <a:t>For this exercise we will use “</a:t>
-            </a:r>
-            <a:r>
-              <a:rPr lang="en-US" dirty="0" err="1"/>
-              <a:t>ftcs</a:t>
-            </a:r>
-            <a:r>
-              <a:rPr lang="en-US" dirty="0"/>
-              <a:t>” and “upwind15” as alternative options</a:t>
-            </a:r>
-          </a:p>
-        </p:txBody>
-      </p:sp>
-    </p:spTree>
-    <p:extLst>
-      <p:ext uri="{BB962C8B-B14F-4D97-AF65-F5344CB8AC3E}">
-        <p14:creationId xmlns:p14="http://schemas.microsoft.com/office/powerpoint/2010/main" val="2431711824"/>
-      </p:ext>
-    </p:extLst>
-  </p:cSld>
-  <p:clrMapOvr>
-    <a:masterClrMapping/>
-  </p:clrMapOvr>
-</p:sld>
-</file>
-
-<file path=ppt/slides/slide16.xml><?xml version="1.0" encoding="utf-8"?>
-<p:sld xmlns:a="http://schemas.openxmlformats.org/drawingml/2006/main" xmlns:r="http://schemas.openxmlformats.org/officeDocument/2006/relationships" xmlns:p="http://schemas.openxmlformats.org/presentationml/2006/main">
-  <p:cSld>
-    <p:spTree>
-      <p:nvGrpSpPr>
-        <p:cNvPr id="1" name=""/>
-        <p:cNvGrpSpPr/>
-        <p:nvPr/>
-      </p:nvGrpSpPr>
-      <p:grpSpPr>
-        <a:xfrm>
-          <a:off x="0" y="0"/>
-          <a:ext cx="0" cy="0"/>
-          <a:chOff x="0" y="0"/>
-          <a:chExt cx="0" cy="0"/>
-        </a:xfrm>
-      </p:grpSpPr>
-      <p:pic>
-        <p:nvPicPr>
-          <p:cNvPr id="7" name="Picture 6" descr="A screenshot of a cell phone&#10;&#10;Description automatically generated">
-            <a:extLst>
-              <a:ext uri="{FF2B5EF4-FFF2-40B4-BE49-F238E27FC236}">
-                <a16:creationId xmlns:a16="http://schemas.microsoft.com/office/drawing/2014/main" id="{A118D715-0962-0743-95A9-DFAF97E858C9}"/>
-              </a:ext>
-            </a:extLst>
-          </p:cNvPr>
-          <p:cNvPicPr>
-            <a:picLocks noChangeAspect="1"/>
-          </p:cNvPicPr>
-          <p:nvPr/>
-        </p:nvPicPr>
-        <p:blipFill>
-          <a:blip r:embed="rId2" cstate="print">
-            <a:extLst>
-              <a:ext uri="{28A0092B-C50C-407E-A947-70E740481C1C}">
-                <a14:useLocalDpi xmlns:a14="http://schemas.microsoft.com/office/drawing/2010/main" val="0"/>
-              </a:ext>
-            </a:extLst>
-          </a:blip>
-          <a:stretch>
-            <a:fillRect/>
-          </a:stretch>
-        </p:blipFill>
-        <p:spPr>
-          <a:xfrm>
-            <a:off x="199730" y="3099848"/>
-            <a:ext cx="4720590" cy="2602189"/>
-          </a:xfrm>
-          <a:prstGeom prst="rect">
-            <a:avLst/>
-          </a:prstGeom>
-        </p:spPr>
-      </p:pic>
-      <p:pic>
-        <p:nvPicPr>
-          <p:cNvPr id="12" name="Picture 11">
-            <a:extLst>
-              <a:ext uri="{FF2B5EF4-FFF2-40B4-BE49-F238E27FC236}">
-                <a16:creationId xmlns:a16="http://schemas.microsoft.com/office/drawing/2014/main" id="{B2C0FA68-A2C4-BD4D-B6C9-1B8088DEEBC6}"/>
-              </a:ext>
-            </a:extLst>
-          </p:cNvPr>
-          <p:cNvPicPr>
-            <a:picLocks noChangeAspect="1"/>
-          </p:cNvPicPr>
-          <p:nvPr/>
-        </p:nvPicPr>
-        <p:blipFill>
-          <a:blip r:embed="rId3" cstate="print">
-            <a:extLst>
-              <a:ext uri="{28A0092B-C50C-407E-A947-70E740481C1C}">
-                <a14:useLocalDpi xmlns:a14="http://schemas.microsoft.com/office/drawing/2010/main" val="0"/>
-              </a:ext>
-            </a:extLst>
-          </a:blip>
-          <a:stretch>
-            <a:fillRect/>
-          </a:stretch>
-        </p:blipFill>
-        <p:spPr>
-          <a:xfrm>
-            <a:off x="4949531" y="2837998"/>
-            <a:ext cx="6788702" cy="3110613"/>
-          </a:xfrm>
-          <a:prstGeom prst="rect">
-            <a:avLst/>
-          </a:prstGeom>
-        </p:spPr>
-      </p:pic>
-      <p:sp>
-        <p:nvSpPr>
-          <p:cNvPr id="13" name="Content Placeholder 2">
-            <a:extLst>
-              <a:ext uri="{FF2B5EF4-FFF2-40B4-BE49-F238E27FC236}">
-                <a16:creationId xmlns:a16="http://schemas.microsoft.com/office/drawing/2014/main" id="{6F999DBB-12B1-1841-9D89-7EE1B1D8B648}"/>
-              </a:ext>
-            </a:extLst>
-          </p:cNvPr>
-          <p:cNvSpPr txBox="1">
-            <a:spLocks/>
-          </p:cNvSpPr>
-          <p:nvPr/>
-        </p:nvSpPr>
-        <p:spPr bwMode="auto">
-          <a:xfrm>
-            <a:off x="199730" y="1035852"/>
-            <a:ext cx="5000663" cy="1878797"/>
-          </a:xfrm>
-          <a:prstGeom prst="rect">
-            <a:avLst/>
-          </a:prstGeom>
-          <a:noFill/>
-          <a:ln w="9525">
-            <a:noFill/>
-            <a:miter lim="800000"/>
-            <a:headEnd/>
-            <a:tailEnd/>
-          </a:ln>
-        </p:spPr>
-        <p:txBody>
-          <a:bodyPr vert="horz" wrap="square" lIns="91440" tIns="45720" rIns="91440" bIns="45720" numCol="1" anchor="t" anchorCtr="0" compatLnSpc="1">
-            <a:prstTxWarp prst="textNoShape">
-              <a:avLst/>
-            </a:prstTxWarp>
-            <a:normAutofit/>
-          </a:bodyPr>
-          <a:lstStyle>
-            <a:lvl1pPr marL="230188" indent="-230188" algn="l" rtl="0" eaLnBrk="1" fontAlgn="base" hangingPunct="1">
-              <a:lnSpc>
-                <a:spcPct val="90000"/>
-              </a:lnSpc>
-              <a:spcBef>
-                <a:spcPts val="1400"/>
-              </a:spcBef>
-              <a:spcAft>
-                <a:spcPct val="0"/>
-              </a:spcAft>
-              <a:buClr>
-                <a:schemeClr val="tx1"/>
-              </a:buClr>
-              <a:buFont typeface="Arial" charset="0"/>
-              <a:buChar char="•"/>
-              <a:defRPr sz="2400" kern="1200" baseline="0">
-                <a:solidFill>
-                  <a:schemeClr val="tx1"/>
-                </a:solidFill>
-                <a:latin typeface="+mn-lt"/>
-                <a:ea typeface="+mn-ea"/>
-                <a:cs typeface="+mn-cs"/>
-              </a:defRPr>
-            </a:lvl1pPr>
-            <a:lvl2pPr marL="625475" indent="-279400" algn="l" rtl="0" eaLnBrk="1" fontAlgn="base" hangingPunct="1">
-              <a:lnSpc>
-                <a:spcPct val="90000"/>
-              </a:lnSpc>
-              <a:spcBef>
-                <a:spcPts val="800"/>
-              </a:spcBef>
-              <a:spcAft>
-                <a:spcPct val="0"/>
-              </a:spcAft>
-              <a:buClr>
-                <a:schemeClr val="tx1"/>
-              </a:buClr>
-              <a:buFont typeface="Arial" charset="0"/>
-              <a:buChar char="–"/>
-              <a:defRPr sz="2000" kern="1200">
-                <a:solidFill>
-                  <a:schemeClr val="tx1"/>
-                </a:solidFill>
-                <a:latin typeface="+mn-lt"/>
-                <a:ea typeface="+mn-ea"/>
-                <a:cs typeface="+mn-cs"/>
-              </a:defRPr>
-            </a:lvl2pPr>
-            <a:lvl3pPr marL="914400" indent="-230188" algn="l" rtl="0" eaLnBrk="1" fontAlgn="base" hangingPunct="1">
-              <a:lnSpc>
-                <a:spcPct val="90000"/>
-              </a:lnSpc>
-              <a:spcBef>
-                <a:spcPts val="800"/>
-              </a:spcBef>
-              <a:spcAft>
-                <a:spcPct val="0"/>
-              </a:spcAft>
-              <a:buClr>
-                <a:schemeClr val="tx1"/>
-              </a:buClr>
-              <a:buFont typeface="Arial" charset="0"/>
-              <a:buChar char="•"/>
-              <a:defRPr sz="1800" kern="1200">
-                <a:solidFill>
-                  <a:schemeClr val="tx1"/>
-                </a:solidFill>
-                <a:latin typeface="+mn-lt"/>
-                <a:ea typeface="+mn-ea"/>
-                <a:cs typeface="+mn-cs"/>
-              </a:defRPr>
-            </a:lvl3pPr>
-            <a:lvl4pPr marL="1144588" indent="-173038" algn="l" rtl="0" eaLnBrk="1" fontAlgn="base" hangingPunct="1">
-              <a:lnSpc>
-                <a:spcPct val="90000"/>
-              </a:lnSpc>
-              <a:spcBef>
-                <a:spcPts val="800"/>
-              </a:spcBef>
-              <a:spcAft>
-                <a:spcPct val="0"/>
-              </a:spcAft>
-              <a:buClr>
-                <a:schemeClr val="tx1"/>
-              </a:buClr>
-              <a:buFont typeface="Arial" charset="0"/>
-              <a:buChar char="–"/>
-              <a:defRPr sz="1600" kern="1200">
-                <a:solidFill>
-                  <a:schemeClr val="tx1"/>
-                </a:solidFill>
-                <a:latin typeface="+mn-lt"/>
-                <a:ea typeface="+mn-ea"/>
-                <a:cs typeface="+mn-cs"/>
-              </a:defRPr>
-            </a:lvl4pPr>
-            <a:lvl5pPr marL="1482725" indent="-222250" algn="l" rtl="0" eaLnBrk="1" fontAlgn="base" hangingPunct="1">
-              <a:lnSpc>
-                <a:spcPct val="90000"/>
-              </a:lnSpc>
-              <a:spcBef>
-                <a:spcPts val="600"/>
-              </a:spcBef>
-              <a:spcAft>
-                <a:spcPct val="0"/>
-              </a:spcAft>
-              <a:buClr>
-                <a:schemeClr val="tx1"/>
-              </a:buClr>
-              <a:buFont typeface="Arial" charset="0"/>
-              <a:buChar char="»"/>
-              <a:defRPr sz="1600" kern="1200">
-                <a:solidFill>
-                  <a:schemeClr val="tx1"/>
-                </a:solidFill>
-                <a:latin typeface="+mn-lt"/>
-                <a:ea typeface="+mn-ea"/>
-                <a:cs typeface="+mn-cs"/>
-              </a:defRPr>
-            </a:lvl5pPr>
-            <a:lvl6pPr marL="2514600" indent="-228600" algn="l" defTabSz="914400" rtl="0" eaLnBrk="1" latinLnBrk="0" hangingPunct="1">
-              <a:spcBef>
-                <a:spcPct val="20000"/>
-              </a:spcBef>
-              <a:buFont typeface="Arial" pitchFamily="34" charset="0"/>
-              <a:buChar char="•"/>
-              <a:defRPr sz="2000" kern="1200">
-                <a:solidFill>
-                  <a:schemeClr val="tx1"/>
-                </a:solidFill>
-                <a:latin typeface="+mn-lt"/>
-                <a:ea typeface="+mn-ea"/>
-                <a:cs typeface="+mn-cs"/>
-              </a:defRPr>
-            </a:lvl6pPr>
-            <a:lvl7pPr marL="2971800" indent="-228600" algn="l" defTabSz="914400" rtl="0" eaLnBrk="1" latinLnBrk="0" hangingPunct="1">
-              <a:spcBef>
-                <a:spcPct val="20000"/>
-              </a:spcBef>
-              <a:buFont typeface="Arial" pitchFamily="34" charset="0"/>
-              <a:buChar char="•"/>
-              <a:defRPr sz="2000" kern="1200">
-                <a:solidFill>
-                  <a:schemeClr val="tx1"/>
-                </a:solidFill>
-                <a:latin typeface="+mn-lt"/>
-                <a:ea typeface="+mn-ea"/>
-                <a:cs typeface="+mn-cs"/>
-              </a:defRPr>
-            </a:lvl7pPr>
-            <a:lvl8pPr marL="3429000" indent="-228600" algn="l" defTabSz="914400" rtl="0" eaLnBrk="1" latinLnBrk="0" hangingPunct="1">
-              <a:spcBef>
-                <a:spcPct val="20000"/>
-              </a:spcBef>
-              <a:buFont typeface="Arial" pitchFamily="34" charset="0"/>
-              <a:buChar char="•"/>
-              <a:defRPr sz="2000" kern="1200">
-                <a:solidFill>
-                  <a:schemeClr val="tx1"/>
-                </a:solidFill>
-                <a:latin typeface="+mn-lt"/>
-                <a:ea typeface="+mn-ea"/>
-                <a:cs typeface="+mn-cs"/>
-              </a:defRPr>
-            </a:lvl8pPr>
-            <a:lvl9pPr marL="3886200" indent="-228600" algn="l" defTabSz="914400" rtl="0" eaLnBrk="1" latinLnBrk="0" hangingPunct="1">
-              <a:spcBef>
-                <a:spcPct val="20000"/>
-              </a:spcBef>
-              <a:buFont typeface="Arial" pitchFamily="34" charset="0"/>
-              <a:buChar char="•"/>
-              <a:defRPr sz="2000" kern="1200">
-                <a:solidFill>
-                  <a:schemeClr val="tx1"/>
-                </a:solidFill>
-                <a:latin typeface="+mn-lt"/>
-                <a:ea typeface="+mn-ea"/>
-                <a:cs typeface="+mn-cs"/>
-              </a:defRPr>
-            </a:lvl9pPr>
-          </a:lstStyle>
-          <a:p>
-            <a:r>
-              <a:rPr lang="en-US" dirty="0"/>
-              <a:t>Run ./heat </a:t>
-            </a:r>
-            <a:r>
-              <a:rPr lang="en-US" dirty="0" err="1"/>
-              <a:t>runame</a:t>
-            </a:r>
-            <a:r>
-              <a:rPr lang="en-US" dirty="0"/>
-              <a:t>=“</a:t>
-            </a:r>
-            <a:r>
-              <a:rPr lang="en-US" dirty="0" err="1"/>
-              <a:t>ftcs_results</a:t>
-            </a:r>
-            <a:r>
-              <a:rPr lang="en-US" dirty="0"/>
-              <a:t>”</a:t>
-            </a:r>
-          </a:p>
-          <a:p>
-            <a:r>
-              <a:rPr lang="en-US" dirty="0"/>
-              <a:t>Run </a:t>
-            </a:r>
-            <a:r>
-              <a:rPr lang="en-US" dirty="0" err="1"/>
-              <a:t>gcov</a:t>
-            </a:r>
-            <a:r>
-              <a:rPr lang="en-US" dirty="0"/>
-              <a:t> </a:t>
-            </a:r>
-            <a:r>
-              <a:rPr lang="en-US" dirty="0" err="1"/>
-              <a:t>heat.C</a:t>
-            </a:r>
-            <a:endParaRPr lang="en-US" dirty="0"/>
-          </a:p>
-          <a:p>
-            <a:r>
-              <a:rPr lang="en-US" dirty="0"/>
-              <a:t>Examine </a:t>
-            </a:r>
-            <a:r>
-              <a:rPr lang="en-US" dirty="0" err="1"/>
-              <a:t>heat.C.gcov</a:t>
-            </a:r>
-            <a:endParaRPr lang="en-US" dirty="0"/>
-          </a:p>
-          <a:p>
-            <a:endParaRPr lang="en-US" dirty="0"/>
-          </a:p>
-          <a:p>
-            <a:pPr lvl="1"/>
-            <a:endParaRPr lang="en-US" dirty="0"/>
-          </a:p>
-          <a:p>
-            <a:pPr lvl="1"/>
-            <a:endParaRPr lang="en-US" b="1" dirty="0">
-              <a:solidFill>
-                <a:schemeClr val="accent6">
-                  <a:lumMod val="75000"/>
-                </a:schemeClr>
-              </a:solidFill>
-            </a:endParaRPr>
-          </a:p>
-        </p:txBody>
-      </p:sp>
-      <p:sp>
-        <p:nvSpPr>
-          <p:cNvPr id="15" name="Content Placeholder 2">
-            <a:extLst>
-              <a:ext uri="{FF2B5EF4-FFF2-40B4-BE49-F238E27FC236}">
-                <a16:creationId xmlns:a16="http://schemas.microsoft.com/office/drawing/2014/main" id="{F6D4692D-62D5-7C41-A0F1-C8834FE69CF0}"/>
-              </a:ext>
-            </a:extLst>
-          </p:cNvPr>
-          <p:cNvSpPr txBox="1">
-            <a:spLocks/>
-          </p:cNvSpPr>
-          <p:nvPr/>
-        </p:nvSpPr>
-        <p:spPr bwMode="auto">
-          <a:xfrm>
-            <a:off x="5743280" y="1029766"/>
-            <a:ext cx="5994953" cy="1681770"/>
+            <a:off x="6453525" y="1118527"/>
+            <a:ext cx="5106570" cy="4690271"/>
           </a:xfrm>
           <a:prstGeom prst="rect">
             <a:avLst/>
@@ -8832,134 +7910,66 @@
           <a:p>
             <a:r>
               <a:rPr lang="en-US" dirty="0"/>
-              <a:t>A dash indicates non-executable line</a:t>
-            </a:r>
-          </a:p>
-          <a:p>
+              <a:t>Verification</a:t>
+            </a:r>
+          </a:p>
+          <a:p>
+            <a:pPr lvl="1"/>
             <a:r>
               <a:rPr lang="en-US" dirty="0"/>
-              <a:t>A number indicated the times the line was called</a:t>
-            </a:r>
-          </a:p>
-          <a:p>
+              <a:t>Check for coverage provided by existing tests</a:t>
+            </a:r>
+          </a:p>
+          <a:p>
+            <a:pPr lvl="1"/>
             <a:r>
               <a:rPr lang="en-US" dirty="0"/>
-              <a:t>##### indicates line wasn’t exercised</a:t>
+              <a:t>Develop new tests where there are gaps</a:t>
             </a:r>
           </a:p>
           <a:p>
             <a:pPr lvl="1"/>
-            <a:endParaRPr lang="en-US" dirty="0"/>
+            <a:r>
+              <a:rPr lang="en-US" dirty="0"/>
+              <a:t>Here we need two new tests. </a:t>
+            </a:r>
+          </a:p>
+          <a:p>
+            <a:pPr lvl="2"/>
+            <a:r>
+              <a:rPr lang="en-US" dirty="0"/>
+              <a:t>One to ensure that behavior does not change when we put the method for moving particles into a new function</a:t>
+            </a:r>
+          </a:p>
+          <a:p>
+            <a:pPr lvl="2"/>
+            <a:r>
+              <a:rPr lang="en-US" dirty="0"/>
+              <a:t>Another one to ensure that boundary conditions are applied correctly</a:t>
+            </a:r>
           </a:p>
           <a:p>
             <a:pPr lvl="1"/>
-            <a:endParaRPr lang="en-US" b="1" dirty="0">
-              <a:solidFill>
-                <a:schemeClr val="accent6">
-                  <a:lumMod val="75000"/>
-                </a:schemeClr>
-              </a:solidFill>
-            </a:endParaRPr>
+            <a:r>
+              <a:rPr lang="en-US" dirty="0"/>
+              <a:t>Make sure tests exist at different granularities</a:t>
+            </a:r>
+          </a:p>
+          <a:p>
+            <a:pPr lvl="2"/>
+            <a:r>
+              <a:rPr lang="en-US" dirty="0"/>
+              <a:t>There should be demanding integration and system level tests</a:t>
+            </a:r>
           </a:p>
         </p:txBody>
       </p:sp>
       <p:sp>
         <p:nvSpPr>
-          <p:cNvPr id="14" name="Title 1">
+          <p:cNvPr id="8" name="Content Placeholder 2">
             <a:extLst>
               <a:ext uri="{FF2B5EF4-FFF2-40B4-BE49-F238E27FC236}">
-                <a16:creationId xmlns:a16="http://schemas.microsoft.com/office/drawing/2014/main" id="{2F506FA7-26D4-9C48-99BC-EF935F79E651}"/>
-              </a:ext>
-            </a:extLst>
-          </p:cNvPr>
-          <p:cNvSpPr>
-            <a:spLocks noGrp="1"/>
-          </p:cNvSpPr>
-          <p:nvPr>
-            <p:ph type="title"/>
-          </p:nvPr>
-        </p:nvSpPr>
-        <p:spPr>
-          <a:xfrm>
-            <a:off x="365760" y="411480"/>
-            <a:ext cx="11372473" cy="914400"/>
-          </a:xfrm>
-        </p:spPr>
-        <p:txBody>
-          <a:bodyPr/>
-          <a:lstStyle/>
-          <a:p>
-            <a:r>
-              <a:rPr lang="en-US" dirty="0"/>
-              <a:t>Preparing for Refactoring – check coverage</a:t>
-            </a:r>
-          </a:p>
-        </p:txBody>
-      </p:sp>
-    </p:spTree>
-    <p:extLst>
-      <p:ext uri="{BB962C8B-B14F-4D97-AF65-F5344CB8AC3E}">
-        <p14:creationId xmlns:p14="http://schemas.microsoft.com/office/powerpoint/2010/main" val="486124488"/>
-      </p:ext>
-    </p:extLst>
-  </p:cSld>
-  <p:clrMapOvr>
-    <a:masterClrMapping/>
-  </p:clrMapOvr>
-</p:sld>
-</file>
-
-<file path=ppt/slides/slide17.xml><?xml version="1.0" encoding="utf-8"?>
-<p:sld xmlns:a="http://schemas.openxmlformats.org/drawingml/2006/main" xmlns:r="http://schemas.openxmlformats.org/officeDocument/2006/relationships" xmlns:p="http://schemas.openxmlformats.org/presentationml/2006/main">
-  <p:cSld>
-    <p:spTree>
-      <p:nvGrpSpPr>
-        <p:cNvPr id="1" name=""/>
-        <p:cNvGrpSpPr/>
-        <p:nvPr/>
-      </p:nvGrpSpPr>
-      <p:grpSpPr>
-        <a:xfrm>
-          <a:off x="0" y="0"/>
-          <a:ext cx="0" cy="0"/>
-          <a:chOff x="0" y="0"/>
-          <a:chExt cx="0" cy="0"/>
-        </a:xfrm>
-      </p:grpSpPr>
-      <p:sp>
-        <p:nvSpPr>
-          <p:cNvPr id="2" name="Title 1">
-            <a:extLst>
-              <a:ext uri="{FF2B5EF4-FFF2-40B4-BE49-F238E27FC236}">
-                <a16:creationId xmlns:a16="http://schemas.microsoft.com/office/drawing/2014/main" id="{B64A94EE-67F8-3F47-B702-5C0362F4F942}"/>
-              </a:ext>
-            </a:extLst>
-          </p:cNvPr>
-          <p:cNvSpPr>
-            <a:spLocks noGrp="1"/>
-          </p:cNvSpPr>
-          <p:nvPr>
-            <p:ph type="title"/>
-          </p:nvPr>
-        </p:nvSpPr>
-        <p:spPr/>
-        <p:txBody>
-          <a:bodyPr/>
-          <a:lstStyle/>
-          <a:p>
-            <a:r>
-              <a:rPr lang="en-US" dirty="0"/>
-              <a:t>Preparing for Refactoring – get baselines</a:t>
-            </a:r>
-          </a:p>
-        </p:txBody>
-      </p:sp>
-      <p:sp>
-        <p:nvSpPr>
-          <p:cNvPr id="13" name="Content Placeholder 2">
-            <a:extLst>
-              <a:ext uri="{FF2B5EF4-FFF2-40B4-BE49-F238E27FC236}">
-                <a16:creationId xmlns:a16="http://schemas.microsoft.com/office/drawing/2014/main" id="{6F999DBB-12B1-1841-9D89-7EE1B1D8B648}"/>
+                <a16:creationId xmlns:a16="http://schemas.microsoft.com/office/drawing/2014/main" id="{A1DA427C-A026-392E-0256-4EE6BD32F460}"/>
               </a:ext>
             </a:extLst>
           </p:cNvPr>
@@ -8970,8 +7980,8 @@
         </p:nvSpPr>
         <p:spPr bwMode="auto">
           <a:xfrm>
-            <a:off x="365760" y="1032934"/>
-            <a:ext cx="6932507" cy="914400"/>
+            <a:off x="6453525" y="5602311"/>
+            <a:ext cx="4907835" cy="1120141"/>
           </a:xfrm>
           <a:prstGeom prst="rect">
             <a:avLst/>
@@ -8989,7 +7999,7 @@
             <a:prstTxWarp prst="textNoShape">
               <a:avLst/>
             </a:prstTxWarp>
-            <a:normAutofit fontScale="92500"/>
+            <a:normAutofit lnSpcReduction="10000"/>
           </a:bodyPr>
           <a:lstStyle>
             <a:lvl1pPr marL="230188" indent="-230188" algn="l" rtl="0" eaLnBrk="1" fontAlgn="base" hangingPunct="1">
@@ -9174,2800 +8184,127 @@
             </a:lvl9pPr>
           </a:lstStyle>
           <a:p>
-            <a:r>
-              <a:rPr lang="en-US" dirty="0"/>
-              <a:t>Call to upwind15 not exercised</a:t>
-            </a:r>
-          </a:p>
-          <a:p>
-            <a:r>
-              <a:rPr lang="en-US" dirty="0"/>
-              <a:t>Run ./heat </a:t>
-            </a:r>
-            <a:r>
-              <a:rPr lang="en-US" dirty="0" err="1"/>
-              <a:t>alg</a:t>
-            </a:r>
-            <a:r>
-              <a:rPr lang="en-US" dirty="0"/>
-              <a:t>=“upwind15” </a:t>
-            </a:r>
-            <a:r>
-              <a:rPr lang="en-US" dirty="0" err="1"/>
-              <a:t>runame</a:t>
-            </a:r>
-            <a:r>
-              <a:rPr lang="en-US" dirty="0"/>
-              <a:t>=“</a:t>
-            </a:r>
-            <a:r>
-              <a:rPr lang="en-US" dirty="0" err="1"/>
-              <a:t>upwind_results</a:t>
-            </a:r>
-            <a:endParaRPr lang="en-US" dirty="0"/>
-          </a:p>
-          <a:p>
-            <a:pPr marL="0" indent="0">
+            <a:pPr marL="346075" lvl="1" indent="0">
               <a:buNone/>
             </a:pPr>
             <a:endParaRPr lang="en-US" dirty="0"/>
           </a:p>
           <a:p>
-            <a:endParaRPr lang="en-US" dirty="0"/>
-          </a:p>
-          <a:p>
-            <a:pPr lvl="1"/>
-            <a:endParaRPr lang="en-US" dirty="0"/>
-          </a:p>
-          <a:p>
-            <a:pPr marL="346075" lvl="1" indent="0">
+            <a:pPr marL="0" indent="0" algn="ctr">
+              <a:buFont typeface="Arial" charset="0"/>
               <a:buNone/>
             </a:pPr>
-            <a:endParaRPr lang="en-US" b="1" dirty="0">
-              <a:solidFill>
-                <a:schemeClr val="accent6">
-                  <a:lumMod val="75000"/>
-                </a:schemeClr>
-              </a:solidFill>
-            </a:endParaRPr>
+            <a:r>
+              <a:rPr lang="en-US" dirty="0">
+                <a:solidFill>
+                  <a:srgbClr val="00B050"/>
+                </a:solidFill>
+              </a:rPr>
+              <a:t>Incorporate verification overheads into refactoring cost estimates</a:t>
+            </a:r>
           </a:p>
         </p:txBody>
       </p:sp>
-      <p:pic>
-        <p:nvPicPr>
-          <p:cNvPr id="4" name="Picture 3" descr="A picture containing sitting, green, table, computer&#10;&#10;Description automatically generated">
+      <p:sp>
+        <p:nvSpPr>
+          <p:cNvPr id="11" name="Rounded Rectangle 10">
             <a:extLst>
               <a:ext uri="{FF2B5EF4-FFF2-40B4-BE49-F238E27FC236}">
-                <a16:creationId xmlns:a16="http://schemas.microsoft.com/office/drawing/2014/main" id="{5DA37E29-A5C2-3E4E-82BE-684D49F38818}"/>
+                <a16:creationId xmlns:a16="http://schemas.microsoft.com/office/drawing/2014/main" id="{D4055A57-C6B7-B1D2-5C5B-4B5CAD3A88A3}"/>
               </a:ext>
             </a:extLst>
           </p:cNvPr>
-          <p:cNvPicPr>
-            <a:picLocks noChangeAspect="1"/>
-          </p:cNvPicPr>
+          <p:cNvSpPr/>
           <p:nvPr/>
-        </p:nvPicPr>
-        <p:blipFill>
-          <a:blip r:embed="rId2">
-            <a:extLst>
-              <a:ext uri="{28A0092B-C50C-407E-A947-70E740481C1C}">
-                <a14:useLocalDpi xmlns:a14="http://schemas.microsoft.com/office/drawing/2010/main" val="0"/>
-              </a:ext>
-            </a:extLst>
-          </a:blip>
-          <a:stretch>
-            <a:fillRect/>
-          </a:stretch>
-        </p:blipFill>
+        </p:nvSpPr>
         <p:spPr>
           <a:xfrm>
-            <a:off x="365759" y="1947334"/>
-            <a:ext cx="9822323" cy="2358832"/>
+            <a:off x="1051559" y="5808798"/>
+            <a:ext cx="4103371" cy="913654"/>
           </a:xfrm>
-          <a:prstGeom prst="rect">
+          <a:prstGeom prst="roundRect">
             <a:avLst/>
           </a:prstGeom>
-        </p:spPr>
-      </p:pic>
-      <p:sp>
-        <p:nvSpPr>
-          <p:cNvPr id="8" name="Content Placeholder 2">
-            <a:extLst>
-              <a:ext uri="{FF2B5EF4-FFF2-40B4-BE49-F238E27FC236}">
-                <a16:creationId xmlns:a16="http://schemas.microsoft.com/office/drawing/2014/main" id="{32696C72-6800-2243-8F9D-C3CB80D7EA66}"/>
-              </a:ext>
-            </a:extLst>
-          </p:cNvPr>
-          <p:cNvSpPr txBox="1">
-            <a:spLocks/>
-          </p:cNvSpPr>
-          <p:nvPr/>
-        </p:nvSpPr>
-        <p:spPr bwMode="auto">
-          <a:xfrm>
-            <a:off x="365760" y="4306166"/>
-            <a:ext cx="6932507" cy="914400"/>
-          </a:xfrm>
-          <a:prstGeom prst="rect">
-            <a:avLst/>
-          </a:prstGeom>
-          <a:noFill/>
-          <a:ln w="9525">
+          <a:solidFill>
+            <a:schemeClr val="accent3"/>
+          </a:solidFill>
+          <a:ln>
             <a:noFill/>
-            <a:miter lim="800000"/>
-            <a:headEnd/>
-            <a:tailEnd/>
           </a:ln>
+          <a:effectLst>
+            <a:outerShdw blurRad="44450" dist="27940" dir="5400000" algn="ctr">
+              <a:srgbClr val="000000">
+                <a:alpha val="32000"/>
+              </a:srgbClr>
+            </a:outerShdw>
+          </a:effectLst>
         </p:spPr>
         <p:txBody>
-          <a:bodyPr vert="horz" wrap="square" lIns="91440" tIns="45720" rIns="91440" bIns="45720" numCol="1" anchor="t" anchorCtr="0" compatLnSpc="1">
+          <a:bodyPr rot="0" spcFirstLastPara="0" vertOverflow="overflow" horzOverflow="overflow" vert="horz" wrap="square" lIns="121851" tIns="60925" rIns="121851" bIns="60925" numCol="1" spcCol="0" rtlCol="0" fromWordArt="0" anchor="ctr" anchorCtr="0" forceAA="0" compatLnSpc="1">
             <a:prstTxWarp prst="textNoShape">
               <a:avLst/>
             </a:prstTxWarp>
-            <a:normAutofit/>
+            <a:noAutofit/>
           </a:bodyPr>
-          <a:lstStyle>
-            <a:lvl1pPr marL="230188" indent="-230188" algn="l" rtl="0" eaLnBrk="1" fontAlgn="base" hangingPunct="1">
+          <a:lstStyle/>
+          <a:p>
+            <a:pPr algn="ctr">
               <a:lnSpc>
                 <a:spcPct val="90000"/>
               </a:lnSpc>
-              <a:spcBef>
-                <a:spcPts val="1400"/>
-              </a:spcBef>
-              <a:spcAft>
-                <a:spcPct val="0"/>
-              </a:spcAft>
-              <a:buClr>
-                <a:schemeClr val="tx1"/>
-              </a:buClr>
-              <a:buFont typeface="Arial" charset="0"/>
-              <a:buChar char="•"/>
-              <a:defRPr sz="2400" kern="1200" baseline="0">
-                <a:solidFill>
-                  <a:schemeClr val="tx1"/>
-                </a:solidFill>
-                <a:latin typeface="+mn-lt"/>
-                <a:ea typeface="+mn-ea"/>
-                <a:cs typeface="+mn-cs"/>
-              </a:defRPr>
-            </a:lvl1pPr>
-            <a:lvl2pPr marL="625475" indent="-279400" algn="l" rtl="0" eaLnBrk="1" fontAlgn="base" hangingPunct="1">
+            </a:pPr>
+            <a:r>
+              <a:rPr lang="en-US" sz="2000" dirty="0"/>
+              <a:t>We go back to AI and look at the next set of prompts</a:t>
+            </a:r>
+          </a:p>
+          <a:p>
+            <a:pPr algn="ctr">
               <a:lnSpc>
                 <a:spcPct val="90000"/>
               </a:lnSpc>
-              <a:spcBef>
-                <a:spcPts val="800"/>
-              </a:spcBef>
-              <a:spcAft>
-                <a:spcPct val="0"/>
-              </a:spcAft>
-              <a:buClr>
-                <a:schemeClr val="tx1"/>
-              </a:buClr>
-              <a:buFont typeface="Arial" charset="0"/>
-              <a:buChar char="–"/>
-              <a:defRPr sz="2000" kern="1200">
-                <a:solidFill>
-                  <a:schemeClr val="tx1"/>
-                </a:solidFill>
-                <a:latin typeface="+mn-lt"/>
-                <a:ea typeface="+mn-ea"/>
-                <a:cs typeface="+mn-cs"/>
-              </a:defRPr>
-            </a:lvl2pPr>
-            <a:lvl3pPr marL="914400" indent="-230188" algn="l" rtl="0" eaLnBrk="1" fontAlgn="base" hangingPunct="1">
-              <a:lnSpc>
-                <a:spcPct val="90000"/>
-              </a:lnSpc>
-              <a:spcBef>
-                <a:spcPts val="800"/>
-              </a:spcBef>
-              <a:spcAft>
-                <a:spcPct val="0"/>
-              </a:spcAft>
-              <a:buClr>
-                <a:schemeClr val="tx1"/>
-              </a:buClr>
-              <a:buFont typeface="Arial" charset="0"/>
-              <a:buChar char="•"/>
-              <a:defRPr sz="1800" kern="1200">
-                <a:solidFill>
-                  <a:schemeClr val="tx1"/>
-                </a:solidFill>
-                <a:latin typeface="+mn-lt"/>
-                <a:ea typeface="+mn-ea"/>
-                <a:cs typeface="+mn-cs"/>
-              </a:defRPr>
-            </a:lvl3pPr>
-            <a:lvl4pPr marL="1144588" indent="-173038" algn="l" rtl="0" eaLnBrk="1" fontAlgn="base" hangingPunct="1">
-              <a:lnSpc>
-                <a:spcPct val="90000"/>
-              </a:lnSpc>
-              <a:spcBef>
-                <a:spcPts val="800"/>
-              </a:spcBef>
-              <a:spcAft>
-                <a:spcPct val="0"/>
-              </a:spcAft>
-              <a:buClr>
-                <a:schemeClr val="tx1"/>
-              </a:buClr>
-              <a:buFont typeface="Arial" charset="0"/>
-              <a:buChar char="–"/>
-              <a:defRPr sz="1600" kern="1200">
-                <a:solidFill>
-                  <a:schemeClr val="tx1"/>
-                </a:solidFill>
-                <a:latin typeface="+mn-lt"/>
-                <a:ea typeface="+mn-ea"/>
-                <a:cs typeface="+mn-cs"/>
-              </a:defRPr>
-            </a:lvl4pPr>
-            <a:lvl5pPr marL="1482725" indent="-222250" algn="l" rtl="0" eaLnBrk="1" fontAlgn="base" hangingPunct="1">
-              <a:lnSpc>
-                <a:spcPct val="90000"/>
-              </a:lnSpc>
-              <a:spcBef>
-                <a:spcPts val="600"/>
-              </a:spcBef>
-              <a:spcAft>
-                <a:spcPct val="0"/>
-              </a:spcAft>
-              <a:buClr>
-                <a:schemeClr val="tx1"/>
-              </a:buClr>
-              <a:buFont typeface="Arial" charset="0"/>
-              <a:buChar char="»"/>
-              <a:defRPr sz="1600" kern="1200">
-                <a:solidFill>
-                  <a:schemeClr val="tx1"/>
-                </a:solidFill>
-                <a:latin typeface="+mn-lt"/>
-                <a:ea typeface="+mn-ea"/>
-                <a:cs typeface="+mn-cs"/>
-              </a:defRPr>
-            </a:lvl5pPr>
-            <a:lvl6pPr marL="2514600" indent="-228600" algn="l" defTabSz="914400" rtl="0" eaLnBrk="1" latinLnBrk="0" hangingPunct="1">
-              <a:spcBef>
-                <a:spcPct val="20000"/>
-              </a:spcBef>
-              <a:buFont typeface="Arial" pitchFamily="34" charset="0"/>
-              <a:buChar char="•"/>
-              <a:defRPr sz="2000" kern="1200">
-                <a:solidFill>
-                  <a:schemeClr val="tx1"/>
-                </a:solidFill>
-                <a:latin typeface="+mn-lt"/>
-                <a:ea typeface="+mn-ea"/>
-                <a:cs typeface="+mn-cs"/>
-              </a:defRPr>
-            </a:lvl6pPr>
-            <a:lvl7pPr marL="2971800" indent="-228600" algn="l" defTabSz="914400" rtl="0" eaLnBrk="1" latinLnBrk="0" hangingPunct="1">
-              <a:spcBef>
-                <a:spcPct val="20000"/>
-              </a:spcBef>
-              <a:buFont typeface="Arial" pitchFamily="34" charset="0"/>
-              <a:buChar char="•"/>
-              <a:defRPr sz="2000" kern="1200">
-                <a:solidFill>
-                  <a:schemeClr val="tx1"/>
-                </a:solidFill>
-                <a:latin typeface="+mn-lt"/>
-                <a:ea typeface="+mn-ea"/>
-                <a:cs typeface="+mn-cs"/>
-              </a:defRPr>
-            </a:lvl7pPr>
-            <a:lvl8pPr marL="3429000" indent="-228600" algn="l" defTabSz="914400" rtl="0" eaLnBrk="1" latinLnBrk="0" hangingPunct="1">
-              <a:spcBef>
-                <a:spcPct val="20000"/>
-              </a:spcBef>
-              <a:buFont typeface="Arial" pitchFamily="34" charset="0"/>
-              <a:buChar char="•"/>
-              <a:defRPr sz="2000" kern="1200">
-                <a:solidFill>
-                  <a:schemeClr val="tx1"/>
-                </a:solidFill>
-                <a:latin typeface="+mn-lt"/>
-                <a:ea typeface="+mn-ea"/>
-                <a:cs typeface="+mn-cs"/>
-              </a:defRPr>
-            </a:lvl8pPr>
-            <a:lvl9pPr marL="3886200" indent="-228600" algn="l" defTabSz="914400" rtl="0" eaLnBrk="1" latinLnBrk="0" hangingPunct="1">
-              <a:spcBef>
-                <a:spcPct val="20000"/>
-              </a:spcBef>
-              <a:buFont typeface="Arial" pitchFamily="34" charset="0"/>
-              <a:buChar char="•"/>
-              <a:defRPr sz="2000" kern="1200">
-                <a:solidFill>
-                  <a:schemeClr val="tx1"/>
-                </a:solidFill>
-                <a:latin typeface="+mn-lt"/>
-                <a:ea typeface="+mn-ea"/>
-                <a:cs typeface="+mn-cs"/>
-              </a:defRPr>
-            </a:lvl9pPr>
-          </a:lstStyle>
-          <a:p>
-            <a:r>
-              <a:rPr lang="en-US" dirty="0"/>
-              <a:t>We have baselines for </a:t>
-            </a:r>
-            <a:r>
-              <a:rPr lang="en-US" dirty="0" err="1"/>
-              <a:t>ftcs</a:t>
-            </a:r>
-            <a:r>
-              <a:rPr lang="en-US" dirty="0"/>
-              <a:t> and upwind</a:t>
-            </a:r>
-          </a:p>
-          <a:p>
-            <a:endParaRPr lang="en-US" dirty="0"/>
-          </a:p>
-          <a:p>
-            <a:pPr lvl="1"/>
-            <a:endParaRPr lang="en-US" dirty="0"/>
-          </a:p>
-          <a:p>
-            <a:pPr marL="346075" lvl="1" indent="0">
-              <a:buNone/>
             </a:pPr>
-            <a:endParaRPr lang="en-US" b="1" dirty="0">
-              <a:solidFill>
-                <a:schemeClr val="accent6">
-                  <a:lumMod val="75000"/>
-                </a:schemeClr>
-              </a:solidFill>
-            </a:endParaRPr>
+            <a:r>
+              <a:rPr lang="en-US" sz="2000" dirty="0"/>
+              <a:t>https://</a:t>
+            </a:r>
+            <a:r>
+              <a:rPr lang="en-US" sz="2000" dirty="0" err="1"/>
+              <a:t>tinyurl.com</a:t>
+            </a:r>
+            <a:r>
+              <a:rPr lang="en-US" sz="2000" dirty="0"/>
+              <a:t>/yfxtf89t</a:t>
+            </a:r>
           </a:p>
         </p:txBody>
       </p:sp>
-      <p:pic>
-        <p:nvPicPr>
-          <p:cNvPr id="6" name="Picture 5" descr="A picture containing indoor, sitting, dark, front&#10;&#10;Description automatically generated">
-            <a:extLst>
-              <a:ext uri="{FF2B5EF4-FFF2-40B4-BE49-F238E27FC236}">
-                <a16:creationId xmlns:a16="http://schemas.microsoft.com/office/drawing/2014/main" id="{EC4CE2B4-3BC3-8B47-B6B4-57C8C6CD1397}"/>
-              </a:ext>
-            </a:extLst>
-          </p:cNvPr>
-          <p:cNvPicPr>
-            <a:picLocks noChangeAspect="1"/>
-          </p:cNvPicPr>
-          <p:nvPr/>
-        </p:nvPicPr>
-        <p:blipFill>
-          <a:blip r:embed="rId3">
-            <a:extLst>
-              <a:ext uri="{28A0092B-C50C-407E-A947-70E740481C1C}">
-                <a14:useLocalDpi xmlns:a14="http://schemas.microsoft.com/office/drawing/2010/main" val="0"/>
-              </a:ext>
-            </a:extLst>
-          </a:blip>
-          <a:stretch>
-            <a:fillRect/>
-          </a:stretch>
-        </p:blipFill>
-        <p:spPr>
-          <a:xfrm>
-            <a:off x="365759" y="4763366"/>
-            <a:ext cx="10618741" cy="1350934"/>
-          </a:xfrm>
-          <a:prstGeom prst="rect">
-            <a:avLst/>
-          </a:prstGeom>
-        </p:spPr>
-      </p:pic>
     </p:spTree>
     <p:extLst>
       <p:ext uri="{BB962C8B-B14F-4D97-AF65-F5344CB8AC3E}">
-        <p14:creationId xmlns:p14="http://schemas.microsoft.com/office/powerpoint/2010/main" val="1447768480"/>
+        <p14:creationId xmlns:p14="http://schemas.microsoft.com/office/powerpoint/2010/main" val="397084483"/>
       </p:ext>
     </p:extLst>
   </p:cSld>
   <p:clrMapOvr>
     <a:masterClrMapping/>
   </p:clrMapOvr>
+  <mc:AlternateContent xmlns:mc="http://schemas.openxmlformats.org/markup-compatibility/2006" xmlns:p14="http://schemas.microsoft.com/office/powerpoint/2010/main">
+    <mc:Choice Requires="p14">
+      <p:transition p14:dur="250">
+        <p:fade/>
+      </p:transition>
+    </mc:Choice>
+    <mc:Fallback xmlns="">
+      <p:transition>
+        <p:fade/>
+      </p:transition>
+    </mc:Fallback>
+  </mc:AlternateContent>
 </p:sld>
 </file>
 
-<file path=ppt/slides/slide18.xml><?xml version="1.0" encoding="utf-8"?>
-<p:sld xmlns:a="http://schemas.openxmlformats.org/drawingml/2006/main" xmlns:r="http://schemas.openxmlformats.org/officeDocument/2006/relationships" xmlns:p="http://schemas.openxmlformats.org/presentationml/2006/main">
-  <p:cSld>
-    <p:spTree>
-      <p:nvGrpSpPr>
-        <p:cNvPr id="1" name=""/>
-        <p:cNvGrpSpPr/>
-        <p:nvPr/>
-      </p:nvGrpSpPr>
-      <p:grpSpPr>
-        <a:xfrm>
-          <a:off x="0" y="0"/>
-          <a:ext cx="0" cy="0"/>
-          <a:chOff x="0" y="0"/>
-          <a:chExt cx="0" cy="0"/>
-        </a:xfrm>
-      </p:grpSpPr>
-      <p:sp>
-        <p:nvSpPr>
-          <p:cNvPr id="2" name="Title 1">
-            <a:extLst>
-              <a:ext uri="{FF2B5EF4-FFF2-40B4-BE49-F238E27FC236}">
-                <a16:creationId xmlns:a16="http://schemas.microsoft.com/office/drawing/2014/main" id="{0BB0AF74-266F-A348-B126-9D41A04D15B5}"/>
-              </a:ext>
-            </a:extLst>
-          </p:cNvPr>
-          <p:cNvSpPr>
-            <a:spLocks noGrp="1"/>
-          </p:cNvSpPr>
-          <p:nvPr>
-            <p:ph type="title"/>
-          </p:nvPr>
-        </p:nvSpPr>
-        <p:spPr/>
-        <p:txBody>
-          <a:bodyPr/>
-          <a:lstStyle/>
-          <a:p>
-            <a:r>
-              <a:rPr lang="en-US" dirty="0"/>
-              <a:t>Refactoring – The starting code </a:t>
-            </a:r>
-          </a:p>
-        </p:txBody>
-      </p:sp>
-      <p:pic>
-        <p:nvPicPr>
-          <p:cNvPr id="5" name="Picture 4" descr="A screenshot of a cell phone&#10;&#10;Description automatically generated">
-            <a:extLst>
-              <a:ext uri="{FF2B5EF4-FFF2-40B4-BE49-F238E27FC236}">
-                <a16:creationId xmlns:a16="http://schemas.microsoft.com/office/drawing/2014/main" id="{E7DC770A-DBE2-E14C-89DF-F403678E30D4}"/>
-              </a:ext>
-            </a:extLst>
-          </p:cNvPr>
-          <p:cNvPicPr>
-            <a:picLocks noChangeAspect="1"/>
-          </p:cNvPicPr>
-          <p:nvPr/>
-        </p:nvPicPr>
-        <p:blipFill rotWithShape="1">
-          <a:blip r:embed="rId2">
-            <a:extLst>
-              <a:ext uri="{28A0092B-C50C-407E-A947-70E740481C1C}">
-                <a14:useLocalDpi xmlns:a14="http://schemas.microsoft.com/office/drawing/2010/main" val="0"/>
-              </a:ext>
-            </a:extLst>
-          </a:blip>
-          <a:srcRect l="1046" r="-1046"/>
-          <a:stretch/>
-        </p:blipFill>
-        <p:spPr>
-          <a:xfrm>
-            <a:off x="338328" y="868680"/>
-            <a:ext cx="5490104" cy="5308613"/>
-          </a:xfrm>
-          <a:prstGeom prst="rect">
-            <a:avLst/>
-          </a:prstGeom>
-        </p:spPr>
-      </p:pic>
-      <p:sp>
-        <p:nvSpPr>
-          <p:cNvPr id="12" name="Content Placeholder 2">
-            <a:extLst>
-              <a:ext uri="{FF2B5EF4-FFF2-40B4-BE49-F238E27FC236}">
-                <a16:creationId xmlns:a16="http://schemas.microsoft.com/office/drawing/2014/main" id="{62845947-6633-7549-B91C-E3D53BD2A820}"/>
-              </a:ext>
-            </a:extLst>
-          </p:cNvPr>
-          <p:cNvSpPr txBox="1">
-            <a:spLocks/>
-          </p:cNvSpPr>
-          <p:nvPr/>
-        </p:nvSpPr>
-        <p:spPr bwMode="auto">
-          <a:xfrm>
-            <a:off x="5771031" y="2912533"/>
-            <a:ext cx="5818758" cy="3076787"/>
-          </a:xfrm>
-          <a:prstGeom prst="rect">
-            <a:avLst/>
-          </a:prstGeom>
-          <a:noFill/>
-          <a:ln w="9525">
-            <a:noFill/>
-            <a:miter lim="800000"/>
-            <a:headEnd/>
-            <a:tailEnd/>
-          </a:ln>
-        </p:spPr>
-        <p:txBody>
-          <a:bodyPr vert="horz" wrap="square" lIns="91440" tIns="45720" rIns="91440" bIns="45720" numCol="1" anchor="t" anchorCtr="0" compatLnSpc="1">
-            <a:prstTxWarp prst="textNoShape">
-              <a:avLst/>
-            </a:prstTxWarp>
-            <a:normAutofit/>
-          </a:bodyPr>
-          <a:lstStyle>
-            <a:lvl1pPr marL="230188" indent="-230188" algn="l" rtl="0" eaLnBrk="1" fontAlgn="base" hangingPunct="1">
-              <a:lnSpc>
-                <a:spcPct val="90000"/>
-              </a:lnSpc>
-              <a:spcBef>
-                <a:spcPts val="1400"/>
-              </a:spcBef>
-              <a:spcAft>
-                <a:spcPct val="0"/>
-              </a:spcAft>
-              <a:buClr>
-                <a:schemeClr val="tx1"/>
-              </a:buClr>
-              <a:buFont typeface="Arial" charset="0"/>
-              <a:buChar char="•"/>
-              <a:defRPr sz="2400" kern="1200" baseline="0">
-                <a:solidFill>
-                  <a:schemeClr val="tx1"/>
-                </a:solidFill>
-                <a:latin typeface="+mn-lt"/>
-                <a:ea typeface="+mn-ea"/>
-                <a:cs typeface="+mn-cs"/>
-              </a:defRPr>
-            </a:lvl1pPr>
-            <a:lvl2pPr marL="625475" indent="-279400" algn="l" rtl="0" eaLnBrk="1" fontAlgn="base" hangingPunct="1">
-              <a:lnSpc>
-                <a:spcPct val="90000"/>
-              </a:lnSpc>
-              <a:spcBef>
-                <a:spcPts val="800"/>
-              </a:spcBef>
-              <a:spcAft>
-                <a:spcPct val="0"/>
-              </a:spcAft>
-              <a:buClr>
-                <a:schemeClr val="tx1"/>
-              </a:buClr>
-              <a:buFont typeface="Arial" charset="0"/>
-              <a:buChar char="–"/>
-              <a:defRPr sz="2000" kern="1200">
-                <a:solidFill>
-                  <a:schemeClr val="tx1"/>
-                </a:solidFill>
-                <a:latin typeface="+mn-lt"/>
-                <a:ea typeface="+mn-ea"/>
-                <a:cs typeface="+mn-cs"/>
-              </a:defRPr>
-            </a:lvl2pPr>
-            <a:lvl3pPr marL="914400" indent="-230188" algn="l" rtl="0" eaLnBrk="1" fontAlgn="base" hangingPunct="1">
-              <a:lnSpc>
-                <a:spcPct val="90000"/>
-              </a:lnSpc>
-              <a:spcBef>
-                <a:spcPts val="800"/>
-              </a:spcBef>
-              <a:spcAft>
-                <a:spcPct val="0"/>
-              </a:spcAft>
-              <a:buClr>
-                <a:schemeClr val="tx1"/>
-              </a:buClr>
-              <a:buFont typeface="Arial" charset="0"/>
-              <a:buChar char="•"/>
-              <a:defRPr sz="1800" kern="1200">
-                <a:solidFill>
-                  <a:schemeClr val="tx1"/>
-                </a:solidFill>
-                <a:latin typeface="+mn-lt"/>
-                <a:ea typeface="+mn-ea"/>
-                <a:cs typeface="+mn-cs"/>
-              </a:defRPr>
-            </a:lvl3pPr>
-            <a:lvl4pPr marL="1144588" indent="-173038" algn="l" rtl="0" eaLnBrk="1" fontAlgn="base" hangingPunct="1">
-              <a:lnSpc>
-                <a:spcPct val="90000"/>
-              </a:lnSpc>
-              <a:spcBef>
-                <a:spcPts val="800"/>
-              </a:spcBef>
-              <a:spcAft>
-                <a:spcPct val="0"/>
-              </a:spcAft>
-              <a:buClr>
-                <a:schemeClr val="tx1"/>
-              </a:buClr>
-              <a:buFont typeface="Arial" charset="0"/>
-              <a:buChar char="–"/>
-              <a:defRPr sz="1600" kern="1200">
-                <a:solidFill>
-                  <a:schemeClr val="tx1"/>
-                </a:solidFill>
-                <a:latin typeface="+mn-lt"/>
-                <a:ea typeface="+mn-ea"/>
-                <a:cs typeface="+mn-cs"/>
-              </a:defRPr>
-            </a:lvl4pPr>
-            <a:lvl5pPr marL="1482725" indent="-222250" algn="l" rtl="0" eaLnBrk="1" fontAlgn="base" hangingPunct="1">
-              <a:lnSpc>
-                <a:spcPct val="90000"/>
-              </a:lnSpc>
-              <a:spcBef>
-                <a:spcPts val="600"/>
-              </a:spcBef>
-              <a:spcAft>
-                <a:spcPct val="0"/>
-              </a:spcAft>
-              <a:buClr>
-                <a:schemeClr val="tx1"/>
-              </a:buClr>
-              <a:buFont typeface="Arial" charset="0"/>
-              <a:buChar char="»"/>
-              <a:defRPr sz="1600" kern="1200">
-                <a:solidFill>
-                  <a:schemeClr val="tx1"/>
-                </a:solidFill>
-                <a:latin typeface="+mn-lt"/>
-                <a:ea typeface="+mn-ea"/>
-                <a:cs typeface="+mn-cs"/>
-              </a:defRPr>
-            </a:lvl5pPr>
-            <a:lvl6pPr marL="2514600" indent="-228600" algn="l" defTabSz="914400" rtl="0" eaLnBrk="1" latinLnBrk="0" hangingPunct="1">
-              <a:spcBef>
-                <a:spcPct val="20000"/>
-              </a:spcBef>
-              <a:buFont typeface="Arial" pitchFamily="34" charset="0"/>
-              <a:buChar char="•"/>
-              <a:defRPr sz="2000" kern="1200">
-                <a:solidFill>
-                  <a:schemeClr val="tx1"/>
-                </a:solidFill>
-                <a:latin typeface="+mn-lt"/>
-                <a:ea typeface="+mn-ea"/>
-                <a:cs typeface="+mn-cs"/>
-              </a:defRPr>
-            </a:lvl6pPr>
-            <a:lvl7pPr marL="2971800" indent="-228600" algn="l" defTabSz="914400" rtl="0" eaLnBrk="1" latinLnBrk="0" hangingPunct="1">
-              <a:spcBef>
-                <a:spcPct val="20000"/>
-              </a:spcBef>
-              <a:buFont typeface="Arial" pitchFamily="34" charset="0"/>
-              <a:buChar char="•"/>
-              <a:defRPr sz="2000" kern="1200">
-                <a:solidFill>
-                  <a:schemeClr val="tx1"/>
-                </a:solidFill>
-                <a:latin typeface="+mn-lt"/>
-                <a:ea typeface="+mn-ea"/>
-                <a:cs typeface="+mn-cs"/>
-              </a:defRPr>
-            </a:lvl7pPr>
-            <a:lvl8pPr marL="3429000" indent="-228600" algn="l" defTabSz="914400" rtl="0" eaLnBrk="1" latinLnBrk="0" hangingPunct="1">
-              <a:spcBef>
-                <a:spcPct val="20000"/>
-              </a:spcBef>
-              <a:buFont typeface="Arial" pitchFamily="34" charset="0"/>
-              <a:buChar char="•"/>
-              <a:defRPr sz="2000" kern="1200">
-                <a:solidFill>
-                  <a:schemeClr val="tx1"/>
-                </a:solidFill>
-                <a:latin typeface="+mn-lt"/>
-                <a:ea typeface="+mn-ea"/>
-                <a:cs typeface="+mn-cs"/>
-              </a:defRPr>
-            </a:lvl8pPr>
-            <a:lvl9pPr marL="3886200" indent="-228600" algn="l" defTabSz="914400" rtl="0" eaLnBrk="1" latinLnBrk="0" hangingPunct="1">
-              <a:spcBef>
-                <a:spcPct val="20000"/>
-              </a:spcBef>
-              <a:buFont typeface="Arial" pitchFamily="34" charset="0"/>
-              <a:buChar char="•"/>
-              <a:defRPr sz="2000" kern="1200">
-                <a:solidFill>
-                  <a:schemeClr val="tx1"/>
-                </a:solidFill>
-                <a:latin typeface="+mn-lt"/>
-                <a:ea typeface="+mn-ea"/>
-                <a:cs typeface="+mn-cs"/>
-              </a:defRPr>
-            </a:lvl9pPr>
-          </a:lstStyle>
-          <a:p>
-            <a:r>
-              <a:rPr lang="en-US" dirty="0"/>
-              <a:t>Interfaces are not identical</a:t>
-            </a:r>
-          </a:p>
-          <a:p>
-            <a:r>
-              <a:rPr lang="en-US" dirty="0" err="1"/>
-              <a:t>crankn</a:t>
-            </a:r>
-            <a:r>
-              <a:rPr lang="en-US" dirty="0"/>
-              <a:t>  has an extra argument</a:t>
-            </a:r>
-          </a:p>
-          <a:p>
-            <a:r>
-              <a:rPr lang="en-US" dirty="0"/>
-              <a:t>It also has an extra step in initialization</a:t>
-            </a:r>
-          </a:p>
-          <a:p>
-            <a:pPr lvl="1"/>
-            <a:endParaRPr lang="en-US" dirty="0"/>
-          </a:p>
-          <a:p>
-            <a:pPr lvl="1"/>
-            <a:endParaRPr lang="en-US" b="1" dirty="0">
-              <a:solidFill>
-                <a:schemeClr val="accent6">
-                  <a:lumMod val="75000"/>
-                </a:schemeClr>
-              </a:solidFill>
-            </a:endParaRPr>
-          </a:p>
-        </p:txBody>
-      </p:sp>
-      <p:pic>
-        <p:nvPicPr>
-          <p:cNvPr id="14" name="Picture 13" descr="A close up of a logo&#10;&#10;Description automatically generated">
-            <a:extLst>
-              <a:ext uri="{FF2B5EF4-FFF2-40B4-BE49-F238E27FC236}">
-                <a16:creationId xmlns:a16="http://schemas.microsoft.com/office/drawing/2014/main" id="{2DCE68C5-08C9-DA41-9AE1-A05B8E10243B}"/>
-              </a:ext>
-            </a:extLst>
-          </p:cNvPr>
-          <p:cNvPicPr>
-            <a:picLocks noChangeAspect="1"/>
-          </p:cNvPicPr>
-          <p:nvPr/>
-        </p:nvPicPr>
-        <p:blipFill>
-          <a:blip r:embed="rId3">
-            <a:extLst>
-              <a:ext uri="{28A0092B-C50C-407E-A947-70E740481C1C}">
-                <a14:useLocalDpi xmlns:a14="http://schemas.microsoft.com/office/drawing/2010/main" val="0"/>
-              </a:ext>
-            </a:extLst>
-          </a:blip>
-          <a:stretch>
-            <a:fillRect/>
-          </a:stretch>
-        </p:blipFill>
-        <p:spPr>
-          <a:xfrm>
-            <a:off x="4899025" y="1018117"/>
-            <a:ext cx="7289800" cy="977900"/>
-          </a:xfrm>
-          <a:prstGeom prst="rect">
-            <a:avLst/>
-          </a:prstGeom>
-        </p:spPr>
-      </p:pic>
-    </p:spTree>
-    <p:extLst>
-      <p:ext uri="{BB962C8B-B14F-4D97-AF65-F5344CB8AC3E}">
-        <p14:creationId xmlns:p14="http://schemas.microsoft.com/office/powerpoint/2010/main" val="2316625328"/>
-      </p:ext>
-    </p:extLst>
-  </p:cSld>
-  <p:clrMapOvr>
-    <a:masterClrMapping/>
-  </p:clrMapOvr>
-</p:sld>
-</file>
-
-<file path=ppt/slides/slide19.xml><?xml version="1.0" encoding="utf-8"?>
-<p:sld xmlns:a="http://schemas.openxmlformats.org/drawingml/2006/main" xmlns:r="http://schemas.openxmlformats.org/officeDocument/2006/relationships" xmlns:p="http://schemas.openxmlformats.org/presentationml/2006/main">
-  <p:cSld>
-    <p:spTree>
-      <p:nvGrpSpPr>
-        <p:cNvPr id="1" name=""/>
-        <p:cNvGrpSpPr/>
-        <p:nvPr/>
-      </p:nvGrpSpPr>
-      <p:grpSpPr>
-        <a:xfrm>
-          <a:off x="0" y="0"/>
-          <a:ext cx="0" cy="0"/>
-          <a:chOff x="0" y="0"/>
-          <a:chExt cx="0" cy="0"/>
-        </a:xfrm>
-      </p:grpSpPr>
-      <p:sp>
-        <p:nvSpPr>
-          <p:cNvPr id="2" name="Title 1">
-            <a:extLst>
-              <a:ext uri="{FF2B5EF4-FFF2-40B4-BE49-F238E27FC236}">
-                <a16:creationId xmlns:a16="http://schemas.microsoft.com/office/drawing/2014/main" id="{0BB0AF74-266F-A348-B126-9D41A04D15B5}"/>
-              </a:ext>
-            </a:extLst>
-          </p:cNvPr>
-          <p:cNvSpPr>
-            <a:spLocks noGrp="1"/>
-          </p:cNvSpPr>
-          <p:nvPr>
-            <p:ph type="title"/>
-          </p:nvPr>
-        </p:nvSpPr>
-        <p:spPr/>
-        <p:txBody>
-          <a:bodyPr/>
-          <a:lstStyle/>
-          <a:p>
-            <a:r>
-              <a:rPr lang="en-US" dirty="0"/>
-              <a:t>Refactoring </a:t>
-            </a:r>
-          </a:p>
-        </p:txBody>
-      </p:sp>
-      <p:pic>
-        <p:nvPicPr>
-          <p:cNvPr id="9" name="Picture 8" descr="A screenshot of a cell phone&#10;&#10;Description automatically generated">
-            <a:extLst>
-              <a:ext uri="{FF2B5EF4-FFF2-40B4-BE49-F238E27FC236}">
-                <a16:creationId xmlns:a16="http://schemas.microsoft.com/office/drawing/2014/main" id="{3B5F1D7B-EF1D-224E-92A7-1E859DF918AE}"/>
-              </a:ext>
-            </a:extLst>
-          </p:cNvPr>
-          <p:cNvPicPr>
-            <a:picLocks noChangeAspect="1"/>
-          </p:cNvPicPr>
-          <p:nvPr/>
-        </p:nvPicPr>
-        <p:blipFill>
-          <a:blip r:embed="rId2">
-            <a:extLst>
-              <a:ext uri="{28A0092B-C50C-407E-A947-70E740481C1C}">
-                <a14:useLocalDpi xmlns:a14="http://schemas.microsoft.com/office/drawing/2010/main" val="0"/>
-              </a:ext>
-            </a:extLst>
-          </a:blip>
-          <a:stretch>
-            <a:fillRect/>
-          </a:stretch>
-        </p:blipFill>
-        <p:spPr>
-          <a:xfrm>
-            <a:off x="365760" y="1731649"/>
-            <a:ext cx="5435600" cy="2260600"/>
-          </a:xfrm>
-          <a:prstGeom prst="rect">
-            <a:avLst/>
-          </a:prstGeom>
-        </p:spPr>
-      </p:pic>
-      <p:sp>
-        <p:nvSpPr>
-          <p:cNvPr id="8" name="Content Placeholder 2">
-            <a:extLst>
-              <a:ext uri="{FF2B5EF4-FFF2-40B4-BE49-F238E27FC236}">
-                <a16:creationId xmlns:a16="http://schemas.microsoft.com/office/drawing/2014/main" id="{19CD30F3-7E39-014B-A374-9F7BD7F6003E}"/>
-              </a:ext>
-            </a:extLst>
-          </p:cNvPr>
-          <p:cNvSpPr txBox="1">
-            <a:spLocks/>
-          </p:cNvSpPr>
-          <p:nvPr/>
-        </p:nvSpPr>
-        <p:spPr bwMode="auto">
-          <a:xfrm>
-            <a:off x="467525" y="1280160"/>
-            <a:ext cx="4764876" cy="4748107"/>
-          </a:xfrm>
-          <a:prstGeom prst="rect">
-            <a:avLst/>
-          </a:prstGeom>
-          <a:noFill/>
-          <a:ln w="9525">
-            <a:noFill/>
-            <a:miter lim="800000"/>
-            <a:headEnd/>
-            <a:tailEnd/>
-          </a:ln>
-        </p:spPr>
-        <p:txBody>
-          <a:bodyPr vert="horz" wrap="square" lIns="91440" tIns="45720" rIns="91440" bIns="45720" numCol="1" anchor="t" anchorCtr="0" compatLnSpc="1">
-            <a:prstTxWarp prst="textNoShape">
-              <a:avLst/>
-            </a:prstTxWarp>
-            <a:normAutofit/>
-          </a:bodyPr>
-          <a:lstStyle>
-            <a:lvl1pPr marL="230188" indent="-230188" algn="l" rtl="0" eaLnBrk="1" fontAlgn="base" hangingPunct="1">
-              <a:lnSpc>
-                <a:spcPct val="90000"/>
-              </a:lnSpc>
-              <a:spcBef>
-                <a:spcPts val="1400"/>
-              </a:spcBef>
-              <a:spcAft>
-                <a:spcPct val="0"/>
-              </a:spcAft>
-              <a:buClr>
-                <a:schemeClr val="tx1"/>
-              </a:buClr>
-              <a:buFont typeface="Arial" charset="0"/>
-              <a:buChar char="•"/>
-              <a:defRPr sz="2400" kern="1200" baseline="0">
-                <a:solidFill>
-                  <a:schemeClr val="tx1"/>
-                </a:solidFill>
-                <a:latin typeface="+mn-lt"/>
-                <a:ea typeface="+mn-ea"/>
-                <a:cs typeface="+mn-cs"/>
-              </a:defRPr>
-            </a:lvl1pPr>
-            <a:lvl2pPr marL="625475" indent="-279400" algn="l" rtl="0" eaLnBrk="1" fontAlgn="base" hangingPunct="1">
-              <a:lnSpc>
-                <a:spcPct val="90000"/>
-              </a:lnSpc>
-              <a:spcBef>
-                <a:spcPts val="800"/>
-              </a:spcBef>
-              <a:spcAft>
-                <a:spcPct val="0"/>
-              </a:spcAft>
-              <a:buClr>
-                <a:schemeClr val="tx1"/>
-              </a:buClr>
-              <a:buFont typeface="Arial" charset="0"/>
-              <a:buChar char="–"/>
-              <a:defRPr sz="2000" kern="1200">
-                <a:solidFill>
-                  <a:schemeClr val="tx1"/>
-                </a:solidFill>
-                <a:latin typeface="+mn-lt"/>
-                <a:ea typeface="+mn-ea"/>
-                <a:cs typeface="+mn-cs"/>
-              </a:defRPr>
-            </a:lvl2pPr>
-            <a:lvl3pPr marL="914400" indent="-230188" algn="l" rtl="0" eaLnBrk="1" fontAlgn="base" hangingPunct="1">
-              <a:lnSpc>
-                <a:spcPct val="90000"/>
-              </a:lnSpc>
-              <a:spcBef>
-                <a:spcPts val="800"/>
-              </a:spcBef>
-              <a:spcAft>
-                <a:spcPct val="0"/>
-              </a:spcAft>
-              <a:buClr>
-                <a:schemeClr val="tx1"/>
-              </a:buClr>
-              <a:buFont typeface="Arial" charset="0"/>
-              <a:buChar char="•"/>
-              <a:defRPr sz="1800" kern="1200">
-                <a:solidFill>
-                  <a:schemeClr val="tx1"/>
-                </a:solidFill>
-                <a:latin typeface="+mn-lt"/>
-                <a:ea typeface="+mn-ea"/>
-                <a:cs typeface="+mn-cs"/>
-              </a:defRPr>
-            </a:lvl3pPr>
-            <a:lvl4pPr marL="1144588" indent="-173038" algn="l" rtl="0" eaLnBrk="1" fontAlgn="base" hangingPunct="1">
-              <a:lnSpc>
-                <a:spcPct val="90000"/>
-              </a:lnSpc>
-              <a:spcBef>
-                <a:spcPts val="800"/>
-              </a:spcBef>
-              <a:spcAft>
-                <a:spcPct val="0"/>
-              </a:spcAft>
-              <a:buClr>
-                <a:schemeClr val="tx1"/>
-              </a:buClr>
-              <a:buFont typeface="Arial" charset="0"/>
-              <a:buChar char="–"/>
-              <a:defRPr sz="1600" kern="1200">
-                <a:solidFill>
-                  <a:schemeClr val="tx1"/>
-                </a:solidFill>
-                <a:latin typeface="+mn-lt"/>
-                <a:ea typeface="+mn-ea"/>
-                <a:cs typeface="+mn-cs"/>
-              </a:defRPr>
-            </a:lvl4pPr>
-            <a:lvl5pPr marL="1482725" indent="-222250" algn="l" rtl="0" eaLnBrk="1" fontAlgn="base" hangingPunct="1">
-              <a:lnSpc>
-                <a:spcPct val="90000"/>
-              </a:lnSpc>
-              <a:spcBef>
-                <a:spcPts val="600"/>
-              </a:spcBef>
-              <a:spcAft>
-                <a:spcPct val="0"/>
-              </a:spcAft>
-              <a:buClr>
-                <a:schemeClr val="tx1"/>
-              </a:buClr>
-              <a:buFont typeface="Arial" charset="0"/>
-              <a:buChar char="»"/>
-              <a:defRPr sz="1600" kern="1200">
-                <a:solidFill>
-                  <a:schemeClr val="tx1"/>
-                </a:solidFill>
-                <a:latin typeface="+mn-lt"/>
-                <a:ea typeface="+mn-ea"/>
-                <a:cs typeface="+mn-cs"/>
-              </a:defRPr>
-            </a:lvl5pPr>
-            <a:lvl6pPr marL="2514600" indent="-228600" algn="l" defTabSz="914400" rtl="0" eaLnBrk="1" latinLnBrk="0" hangingPunct="1">
-              <a:spcBef>
-                <a:spcPct val="20000"/>
-              </a:spcBef>
-              <a:buFont typeface="Arial" pitchFamily="34" charset="0"/>
-              <a:buChar char="•"/>
-              <a:defRPr sz="2000" kern="1200">
-                <a:solidFill>
-                  <a:schemeClr val="tx1"/>
-                </a:solidFill>
-                <a:latin typeface="+mn-lt"/>
-                <a:ea typeface="+mn-ea"/>
-                <a:cs typeface="+mn-cs"/>
-              </a:defRPr>
-            </a:lvl6pPr>
-            <a:lvl7pPr marL="2971800" indent="-228600" algn="l" defTabSz="914400" rtl="0" eaLnBrk="1" latinLnBrk="0" hangingPunct="1">
-              <a:spcBef>
-                <a:spcPct val="20000"/>
-              </a:spcBef>
-              <a:buFont typeface="Arial" pitchFamily="34" charset="0"/>
-              <a:buChar char="•"/>
-              <a:defRPr sz="2000" kern="1200">
-                <a:solidFill>
-                  <a:schemeClr val="tx1"/>
-                </a:solidFill>
-                <a:latin typeface="+mn-lt"/>
-                <a:ea typeface="+mn-ea"/>
-                <a:cs typeface="+mn-cs"/>
-              </a:defRPr>
-            </a:lvl7pPr>
-            <a:lvl8pPr marL="3429000" indent="-228600" algn="l" defTabSz="914400" rtl="0" eaLnBrk="1" latinLnBrk="0" hangingPunct="1">
-              <a:spcBef>
-                <a:spcPct val="20000"/>
-              </a:spcBef>
-              <a:buFont typeface="Arial" pitchFamily="34" charset="0"/>
-              <a:buChar char="•"/>
-              <a:defRPr sz="2000" kern="1200">
-                <a:solidFill>
-                  <a:schemeClr val="tx1"/>
-                </a:solidFill>
-                <a:latin typeface="+mn-lt"/>
-                <a:ea typeface="+mn-ea"/>
-                <a:cs typeface="+mn-cs"/>
-              </a:defRPr>
-            </a:lvl8pPr>
-            <a:lvl9pPr marL="3886200" indent="-228600" algn="l" defTabSz="914400" rtl="0" eaLnBrk="1" latinLnBrk="0" hangingPunct="1">
-              <a:spcBef>
-                <a:spcPct val="20000"/>
-              </a:spcBef>
-              <a:buFont typeface="Arial" pitchFamily="34" charset="0"/>
-              <a:buChar char="•"/>
-              <a:defRPr sz="2000" kern="1200">
-                <a:solidFill>
-                  <a:schemeClr val="tx1"/>
-                </a:solidFill>
-                <a:latin typeface="+mn-lt"/>
-                <a:ea typeface="+mn-ea"/>
-                <a:cs typeface="+mn-cs"/>
-              </a:defRPr>
-            </a:lvl9pPr>
-          </a:lstStyle>
-          <a:p>
-            <a:r>
-              <a:rPr lang="en-US" dirty="0"/>
-              <a:t>Generalize the interface</a:t>
-            </a:r>
-          </a:p>
-          <a:p>
-            <a:pPr lvl="1"/>
-            <a:endParaRPr lang="en-US" dirty="0"/>
-          </a:p>
-          <a:p>
-            <a:pPr lvl="1"/>
-            <a:endParaRPr lang="en-US" dirty="0"/>
-          </a:p>
-          <a:p>
-            <a:pPr lvl="1"/>
-            <a:endParaRPr lang="en-US" dirty="0"/>
-          </a:p>
-          <a:p>
-            <a:pPr lvl="1"/>
-            <a:endParaRPr lang="en-US" dirty="0"/>
-          </a:p>
-          <a:p>
-            <a:pPr lvl="1"/>
-            <a:endParaRPr lang="en-US" dirty="0"/>
-          </a:p>
-          <a:p>
-            <a:pPr lvl="1"/>
-            <a:endParaRPr lang="en-US" dirty="0"/>
-          </a:p>
-          <a:p>
-            <a:pPr lvl="1"/>
-            <a:endParaRPr lang="en-US" dirty="0"/>
-          </a:p>
-          <a:p>
-            <a:r>
-              <a:rPr lang="en-US" dirty="0"/>
-              <a:t>Modify the </a:t>
-            </a:r>
-            <a:r>
-              <a:rPr lang="en-US" dirty="0" err="1"/>
-              <a:t>makefile</a:t>
-            </a:r>
-            <a:r>
-              <a:rPr lang="en-US" dirty="0"/>
-              <a:t> </a:t>
-            </a:r>
-          </a:p>
-          <a:p>
-            <a:pPr marL="0" indent="0">
-              <a:buNone/>
-            </a:pPr>
-            <a:endParaRPr lang="en-US" dirty="0"/>
-          </a:p>
-          <a:p>
-            <a:pPr lvl="1"/>
-            <a:endParaRPr lang="en-US" dirty="0"/>
-          </a:p>
-          <a:p>
-            <a:pPr lvl="1"/>
-            <a:endParaRPr lang="en-US" dirty="0"/>
-          </a:p>
-          <a:p>
-            <a:pPr lvl="1"/>
-            <a:endParaRPr lang="en-US" dirty="0"/>
-          </a:p>
-          <a:p>
-            <a:pPr lvl="1"/>
-            <a:endParaRPr lang="en-US" dirty="0"/>
-          </a:p>
-          <a:p>
-            <a:pPr lvl="1"/>
-            <a:endParaRPr lang="en-US" dirty="0"/>
-          </a:p>
-          <a:p>
-            <a:pPr lvl="1"/>
-            <a:endParaRPr lang="en-US" b="1" dirty="0">
-              <a:solidFill>
-                <a:schemeClr val="accent6">
-                  <a:lumMod val="75000"/>
-                </a:schemeClr>
-              </a:solidFill>
-            </a:endParaRPr>
-          </a:p>
-        </p:txBody>
-      </p:sp>
-    </p:spTree>
-    <p:extLst>
-      <p:ext uri="{BB962C8B-B14F-4D97-AF65-F5344CB8AC3E}">
-        <p14:creationId xmlns:p14="http://schemas.microsoft.com/office/powerpoint/2010/main" val="173853161"/>
-      </p:ext>
-    </p:extLst>
-  </p:cSld>
-  <p:clrMapOvr>
-    <a:masterClrMapping/>
-  </p:clrMapOvr>
-</p:sld>
-</file>
-
-<file path=ppt/slides/slide2.xml><?xml version="1.0" encoding="utf-8"?>
-<p:sld xmlns:a="http://schemas.openxmlformats.org/drawingml/2006/main" xmlns:r="http://schemas.openxmlformats.org/officeDocument/2006/relationships" xmlns:p="http://schemas.openxmlformats.org/presentationml/2006/main">
-  <p:cSld>
-    <p:spTree>
-      <p:nvGrpSpPr>
-        <p:cNvPr id="1" name=""/>
-        <p:cNvGrpSpPr/>
-        <p:nvPr/>
-      </p:nvGrpSpPr>
-      <p:grpSpPr>
-        <a:xfrm>
-          <a:off x="0" y="0"/>
-          <a:ext cx="0" cy="0"/>
-          <a:chOff x="0" y="0"/>
-          <a:chExt cx="0" cy="0"/>
-        </a:xfrm>
-      </p:grpSpPr>
-      <p:sp>
-        <p:nvSpPr>
-          <p:cNvPr id="2" name="Title 1">
-            <a:extLst>
-              <a:ext uri="{FF2B5EF4-FFF2-40B4-BE49-F238E27FC236}">
-                <a16:creationId xmlns:a16="http://schemas.microsoft.com/office/drawing/2014/main" id="{6442C24D-D970-4D40-8F14-D70C10A96304}"/>
-              </a:ext>
-            </a:extLst>
-          </p:cNvPr>
-          <p:cNvSpPr>
-            <a:spLocks noGrp="1"/>
-          </p:cNvSpPr>
-          <p:nvPr>
-            <p:ph type="title"/>
-          </p:nvPr>
-        </p:nvSpPr>
-        <p:spPr>
-          <a:xfrm>
-            <a:off x="363096" y="112911"/>
-            <a:ext cx="11372473" cy="914400"/>
-          </a:xfrm>
-        </p:spPr>
-        <p:txBody>
-          <a:bodyPr/>
-          <a:lstStyle/>
-          <a:p>
-            <a:r>
-              <a:rPr lang="en-US" dirty="0"/>
-              <a:t>License, Citation and Acknowledgements</a:t>
-            </a:r>
-          </a:p>
-        </p:txBody>
-      </p:sp>
-      <p:sp>
-        <p:nvSpPr>
-          <p:cNvPr id="3" name="Content Placeholder 2">
-            <a:extLst>
-              <a:ext uri="{FF2B5EF4-FFF2-40B4-BE49-F238E27FC236}">
-                <a16:creationId xmlns:a16="http://schemas.microsoft.com/office/drawing/2014/main" id="{0385A3AB-B258-4D59-B407-F7D57545A163}"/>
-              </a:ext>
-            </a:extLst>
-          </p:cNvPr>
-          <p:cNvSpPr>
-            <a:spLocks noGrp="1"/>
-          </p:cNvSpPr>
-          <p:nvPr>
-            <p:ph idx="1"/>
-          </p:nvPr>
-        </p:nvSpPr>
-        <p:spPr>
-          <a:xfrm>
-            <a:off x="409507" y="570111"/>
-            <a:ext cx="11369809" cy="4047778"/>
-          </a:xfrm>
-        </p:spPr>
-        <p:txBody>
-          <a:bodyPr/>
-          <a:lstStyle/>
-          <a:p>
-            <a:pPr marL="0" indent="0">
-              <a:buNone/>
-            </a:pPr>
-            <a:r>
-              <a:rPr lang="en-US" sz="2000" b="1" dirty="0"/>
-              <a:t>License and Citation</a:t>
-            </a:r>
-          </a:p>
-          <a:p>
-            <a:pPr>
-              <a:spcBef>
-                <a:spcPts val="400"/>
-              </a:spcBef>
-            </a:pPr>
-            <a:r>
-              <a:rPr lang="en-US" sz="1600" dirty="0"/>
-              <a:t>This work is licensed under a </a:t>
-            </a:r>
-            <a:r>
-              <a:rPr lang="en-US" sz="1600" dirty="0">
-                <a:hlinkClick r:id="rId2"/>
-              </a:rPr>
-              <a:t>Creative</a:t>
-            </a:r>
-            <a:r>
-              <a:rPr lang="en-US" sz="1600" dirty="0">
-                <a:hlinkClick r:id="rId3"/>
-              </a:rPr>
-              <a:t> Commons Attribution 4.0 International License</a:t>
-            </a:r>
-            <a:r>
-              <a:rPr lang="en-US" sz="1600" dirty="0"/>
-              <a:t> (CC BY 4.0).</a:t>
-            </a:r>
-          </a:p>
-          <a:p>
-            <a:pPr>
-              <a:spcBef>
-                <a:spcPts val="400"/>
-              </a:spcBef>
-            </a:pPr>
-            <a:r>
-              <a:rPr lang="en-US" sz="1600" b="1" dirty="0"/>
-              <a:t>The requested citation the overall tutorial is: </a:t>
-            </a:r>
-            <a:r>
-              <a:rPr lang="en-US" sz="1600" dirty="0"/>
-              <a:t>Anshu Dubey, David E. Bernholdt, Todd Gamblin, and Jared O’Neal, Software Productivity and Sustainability track, in Argonne Training Program on Extreme-Scale Computing, St. Charles, Illinois, 2024. DOI: </a:t>
-            </a:r>
-            <a:r>
-              <a:rPr lang="en-US" sz="1600" dirty="0">
-                <a:hlinkClick r:id="rId4"/>
-              </a:rPr>
-              <a:t>10.6084/m9.figshare.26384188</a:t>
-            </a:r>
-            <a:r>
-              <a:rPr lang="en-US" sz="1600" dirty="0"/>
-              <a:t>.</a:t>
-            </a:r>
-            <a:endParaRPr lang="en-US" sz="1600" b="0" i="0" dirty="0">
-              <a:solidFill>
-                <a:srgbClr val="111111"/>
-              </a:solidFill>
-              <a:effectLst/>
-              <a:latin typeface="+mn-lt"/>
-            </a:endParaRPr>
-          </a:p>
-          <a:p>
-            <a:pPr>
-              <a:spcBef>
-                <a:spcPts val="400"/>
-              </a:spcBef>
-            </a:pPr>
-            <a:r>
-              <a:rPr lang="en-US" sz="1600" dirty="0"/>
-              <a:t>Individual modules may be cited as </a:t>
-            </a:r>
-            <a:r>
-              <a:rPr lang="en-US" sz="1600" i="1" dirty="0"/>
-              <a:t>Speaker, Module Title</a:t>
-            </a:r>
-            <a:r>
-              <a:rPr lang="en-US" sz="1600" dirty="0"/>
-              <a:t>, in </a:t>
-            </a:r>
-            <a:r>
-              <a:rPr lang="en-US" sz="1600" b="0" i="1" dirty="0">
-                <a:solidFill>
-                  <a:srgbClr val="111111"/>
-                </a:solidFill>
-                <a:effectLst/>
-                <a:latin typeface="+mn-lt"/>
-              </a:rPr>
-              <a:t>Tutorial Title</a:t>
-            </a:r>
-            <a:r>
-              <a:rPr lang="en-US" sz="1600" dirty="0"/>
-              <a:t>, …</a:t>
-            </a:r>
-          </a:p>
-          <a:p>
-            <a:pPr marL="0" indent="0">
-              <a:spcBef>
-                <a:spcPts val="800"/>
-              </a:spcBef>
-              <a:buNone/>
-            </a:pPr>
-            <a:r>
-              <a:rPr lang="en-US" sz="2000" b="1" dirty="0"/>
-              <a:t>Acknowledgements</a:t>
-            </a:r>
-          </a:p>
-          <a:p>
-            <a:pPr>
-              <a:spcBef>
-                <a:spcPts val="400"/>
-              </a:spcBef>
-            </a:pPr>
-            <a:r>
-              <a:rPr lang="en-US" sz="1400" dirty="0"/>
-              <a:t>This work was supported by the U.S. Department of Energy Office of Science, Office of Advanced Scientific Computing Research (ASCR), and by the Exascale Computing Project (17-SC-20-SC), a collaborative effort of the U.S. Department of Energy Office of Science and the National Nuclear Security Administration</a:t>
-            </a:r>
-            <a:r>
-              <a:rPr lang="en-US" sz="1400" i="1" dirty="0"/>
-              <a:t>.</a:t>
-            </a:r>
-          </a:p>
-          <a:p>
-            <a:pPr>
-              <a:spcBef>
-                <a:spcPts val="400"/>
-              </a:spcBef>
-            </a:pPr>
-            <a:r>
-              <a:rPr lang="en-US" sz="1400" b="0" i="0" dirty="0">
-                <a:effectLst/>
-                <a:latin typeface="+mn-lt"/>
-              </a:rPr>
-              <a:t>This work was supported by the U.S. Department of Energy, Office of Science, Office of Advanced Scientific Computing Research, Next-Generation Scientific Software Technologies (NGSST) program.</a:t>
-            </a:r>
-          </a:p>
-          <a:p>
-            <a:pPr>
-              <a:spcBef>
-                <a:spcPts val="400"/>
-              </a:spcBef>
-            </a:pPr>
-            <a:r>
-              <a:rPr lang="en-US" sz="1400" dirty="0"/>
-              <a:t>This work was performed in part at the Argonne National Laboratory, which is managed by UChicago Argonne, LLC for the U.S. Department of Energy under Contract No. DE-AC02-06CH11357.</a:t>
-            </a:r>
-          </a:p>
-          <a:p>
-            <a:pPr>
-              <a:spcBef>
-                <a:spcPts val="400"/>
-              </a:spcBef>
-            </a:pPr>
-            <a:r>
-              <a:rPr lang="en-US" sz="1400" dirty="0"/>
-              <a:t>This work was performed in part at the Lawrence Livermore National Laboratory, which is managed by Lawrence Livermore National Security, LLC for the U.S. Department of Energy under Contract No. DE-AC52-07NA27344.</a:t>
-            </a:r>
-          </a:p>
-          <a:p>
-            <a:pPr>
-              <a:spcBef>
-                <a:spcPts val="400"/>
-              </a:spcBef>
-            </a:pPr>
-            <a:r>
-              <a:rPr lang="en-US" sz="1400" dirty="0"/>
-              <a:t>This work was performed in part at the Los Alamos National Laboratory, which is managed by Triad National Security, LLC for the U.S. Department of Energy under Contract No.89233218CNA000001</a:t>
-            </a:r>
-          </a:p>
-          <a:p>
-            <a:pPr>
-              <a:spcBef>
-                <a:spcPts val="400"/>
-              </a:spcBef>
-            </a:pPr>
-            <a:r>
-              <a:rPr lang="en-US" sz="1400" dirty="0"/>
-              <a:t>This work was performed in part at the Oak Ridge National Laboratory, which is managed by UT-Battelle, LLC for the U.S. Department of Energy under Contract No. DE-AC05-00OR22725.</a:t>
-            </a:r>
-          </a:p>
-          <a:p>
-            <a:pPr>
-              <a:spcBef>
-                <a:spcPts val="400"/>
-              </a:spcBef>
-            </a:pPr>
-            <a:r>
-              <a:rPr lang="en-US" sz="1400" dirty="0"/>
-              <a:t>This work was performed in part at Sandia National Laboratories. Sandia National Laboratories is a multi-mission laboratory managed and operated by National Technology and Engineering Solutions of Sandia, LLC., a wholly owned subsidiary of Honeywell International, Inc., for the U.S. Department of Energy’s National Nuclear Security Administration under contract DE-NA0003525.</a:t>
-            </a:r>
-          </a:p>
-        </p:txBody>
-      </p:sp>
-      <p:pic>
-        <p:nvPicPr>
-          <p:cNvPr id="4" name="Picture 2" descr="https://licensebuttons.net/l/by/4.0/88x31.png">
-            <a:extLst>
-              <a:ext uri="{FF2B5EF4-FFF2-40B4-BE49-F238E27FC236}">
-                <a16:creationId xmlns:a16="http://schemas.microsoft.com/office/drawing/2014/main" id="{61840015-22A0-4634-A2DE-AA05F998FD3A}"/>
-              </a:ext>
-            </a:extLst>
-          </p:cNvPr>
-          <p:cNvPicPr>
-            <a:picLocks noChangeAspect="1" noChangeArrowheads="1"/>
-          </p:cNvPicPr>
-          <p:nvPr/>
-        </p:nvPicPr>
-        <p:blipFill>
-          <a:blip r:embed="rId5">
-            <a:extLst>
-              <a:ext uri="{28A0092B-C50C-407E-A947-70E740481C1C}">
-                <a14:useLocalDpi xmlns:a14="http://schemas.microsoft.com/office/drawing/2010/main" val="0"/>
-              </a:ext>
-            </a:extLst>
-          </a:blip>
-          <a:srcRect/>
-          <a:stretch>
-            <a:fillRect/>
-          </a:stretch>
-        </p:blipFill>
-        <p:spPr bwMode="auto">
-          <a:xfrm>
-            <a:off x="10230336" y="879673"/>
-            <a:ext cx="838200" cy="295275"/>
-          </a:xfrm>
-          <a:prstGeom prst="rect">
-            <a:avLst/>
-          </a:prstGeom>
-          <a:noFill/>
-          <a:extLst>
-            <a:ext uri="{909E8E84-426E-40DD-AFC4-6F175D3DCCD1}">
-              <a14:hiddenFill xmlns:a14="http://schemas.microsoft.com/office/drawing/2010/main">
-                <a:solidFill>
-                  <a:srgbClr val="FFFFFF"/>
-                </a:solidFill>
-              </a14:hiddenFill>
-            </a:ext>
-          </a:extLst>
-        </p:spPr>
-      </p:pic>
-    </p:spTree>
-    <p:extLst>
-      <p:ext uri="{BB962C8B-B14F-4D97-AF65-F5344CB8AC3E}">
-        <p14:creationId xmlns:p14="http://schemas.microsoft.com/office/powerpoint/2010/main" val="688247269"/>
-      </p:ext>
-    </p:extLst>
-  </p:cSld>
-  <p:clrMapOvr>
-    <a:masterClrMapping/>
-  </p:clrMapOvr>
-</p:sld>
-</file>
-
-<file path=ppt/slides/slide20.xml><?xml version="1.0" encoding="utf-8"?>
-<p:sld xmlns:a="http://schemas.openxmlformats.org/drawingml/2006/main" xmlns:r="http://schemas.openxmlformats.org/officeDocument/2006/relationships" xmlns:p="http://schemas.openxmlformats.org/presentationml/2006/main">
-  <p:cSld>
-    <p:spTree>
-      <p:nvGrpSpPr>
-        <p:cNvPr id="1" name=""/>
-        <p:cNvGrpSpPr/>
-        <p:nvPr/>
-      </p:nvGrpSpPr>
-      <p:grpSpPr>
-        <a:xfrm>
-          <a:off x="0" y="0"/>
-          <a:ext cx="0" cy="0"/>
-          <a:chOff x="0" y="0"/>
-          <a:chExt cx="0" cy="0"/>
-        </a:xfrm>
-      </p:grpSpPr>
-      <p:sp>
-        <p:nvSpPr>
-          <p:cNvPr id="2" name="Title 1">
-            <a:extLst>
-              <a:ext uri="{FF2B5EF4-FFF2-40B4-BE49-F238E27FC236}">
-                <a16:creationId xmlns:a16="http://schemas.microsoft.com/office/drawing/2014/main" id="{0BB0AF74-266F-A348-B126-9D41A04D15B5}"/>
-              </a:ext>
-            </a:extLst>
-          </p:cNvPr>
-          <p:cNvSpPr>
-            <a:spLocks noGrp="1"/>
-          </p:cNvSpPr>
-          <p:nvPr>
-            <p:ph type="title"/>
-          </p:nvPr>
-        </p:nvSpPr>
-        <p:spPr/>
-        <p:txBody>
-          <a:bodyPr/>
-          <a:lstStyle/>
-          <a:p>
-            <a:r>
-              <a:rPr lang="en-US" dirty="0"/>
-              <a:t>Refactoring </a:t>
-            </a:r>
-          </a:p>
-        </p:txBody>
-      </p:sp>
-      <p:pic>
-        <p:nvPicPr>
-          <p:cNvPr id="9" name="Picture 8" descr="A screenshot of a cell phone&#10;&#10;Description automatically generated">
-            <a:extLst>
-              <a:ext uri="{FF2B5EF4-FFF2-40B4-BE49-F238E27FC236}">
-                <a16:creationId xmlns:a16="http://schemas.microsoft.com/office/drawing/2014/main" id="{3B5F1D7B-EF1D-224E-92A7-1E859DF918AE}"/>
-              </a:ext>
-            </a:extLst>
-          </p:cNvPr>
-          <p:cNvPicPr>
-            <a:picLocks noChangeAspect="1"/>
-          </p:cNvPicPr>
-          <p:nvPr/>
-        </p:nvPicPr>
-        <p:blipFill>
-          <a:blip r:embed="rId2">
-            <a:extLst>
-              <a:ext uri="{28A0092B-C50C-407E-A947-70E740481C1C}">
-                <a14:useLocalDpi xmlns:a14="http://schemas.microsoft.com/office/drawing/2010/main" val="0"/>
-              </a:ext>
-            </a:extLst>
-          </a:blip>
-          <a:stretch>
-            <a:fillRect/>
-          </a:stretch>
-        </p:blipFill>
-        <p:spPr>
-          <a:xfrm>
-            <a:off x="365760" y="1731649"/>
-            <a:ext cx="5435600" cy="2260600"/>
-          </a:xfrm>
-          <a:prstGeom prst="rect">
-            <a:avLst/>
-          </a:prstGeom>
-        </p:spPr>
-      </p:pic>
-      <p:sp>
-        <p:nvSpPr>
-          <p:cNvPr id="8" name="Content Placeholder 2">
-            <a:extLst>
-              <a:ext uri="{FF2B5EF4-FFF2-40B4-BE49-F238E27FC236}">
-                <a16:creationId xmlns:a16="http://schemas.microsoft.com/office/drawing/2014/main" id="{19CD30F3-7E39-014B-A374-9F7BD7F6003E}"/>
-              </a:ext>
-            </a:extLst>
-          </p:cNvPr>
-          <p:cNvSpPr txBox="1">
-            <a:spLocks/>
-          </p:cNvSpPr>
-          <p:nvPr/>
-        </p:nvSpPr>
-        <p:spPr bwMode="auto">
-          <a:xfrm>
-            <a:off x="467525" y="1280160"/>
-            <a:ext cx="4764876" cy="4748107"/>
-          </a:xfrm>
-          <a:prstGeom prst="rect">
-            <a:avLst/>
-          </a:prstGeom>
-          <a:noFill/>
-          <a:ln w="9525">
-            <a:noFill/>
-            <a:miter lim="800000"/>
-            <a:headEnd/>
-            <a:tailEnd/>
-          </a:ln>
-        </p:spPr>
-        <p:txBody>
-          <a:bodyPr vert="horz" wrap="square" lIns="91440" tIns="45720" rIns="91440" bIns="45720" numCol="1" anchor="t" anchorCtr="0" compatLnSpc="1">
-            <a:prstTxWarp prst="textNoShape">
-              <a:avLst/>
-            </a:prstTxWarp>
-            <a:normAutofit/>
-          </a:bodyPr>
-          <a:lstStyle>
-            <a:lvl1pPr marL="230188" indent="-230188" algn="l" rtl="0" eaLnBrk="1" fontAlgn="base" hangingPunct="1">
-              <a:lnSpc>
-                <a:spcPct val="90000"/>
-              </a:lnSpc>
-              <a:spcBef>
-                <a:spcPts val="1400"/>
-              </a:spcBef>
-              <a:spcAft>
-                <a:spcPct val="0"/>
-              </a:spcAft>
-              <a:buClr>
-                <a:schemeClr val="tx1"/>
-              </a:buClr>
-              <a:buFont typeface="Arial" charset="0"/>
-              <a:buChar char="•"/>
-              <a:defRPr sz="2400" kern="1200" baseline="0">
-                <a:solidFill>
-                  <a:schemeClr val="tx1"/>
-                </a:solidFill>
-                <a:latin typeface="+mn-lt"/>
-                <a:ea typeface="+mn-ea"/>
-                <a:cs typeface="+mn-cs"/>
-              </a:defRPr>
-            </a:lvl1pPr>
-            <a:lvl2pPr marL="625475" indent="-279400" algn="l" rtl="0" eaLnBrk="1" fontAlgn="base" hangingPunct="1">
-              <a:lnSpc>
-                <a:spcPct val="90000"/>
-              </a:lnSpc>
-              <a:spcBef>
-                <a:spcPts val="800"/>
-              </a:spcBef>
-              <a:spcAft>
-                <a:spcPct val="0"/>
-              </a:spcAft>
-              <a:buClr>
-                <a:schemeClr val="tx1"/>
-              </a:buClr>
-              <a:buFont typeface="Arial" charset="0"/>
-              <a:buChar char="–"/>
-              <a:defRPr sz="2000" kern="1200">
-                <a:solidFill>
-                  <a:schemeClr val="tx1"/>
-                </a:solidFill>
-                <a:latin typeface="+mn-lt"/>
-                <a:ea typeface="+mn-ea"/>
-                <a:cs typeface="+mn-cs"/>
-              </a:defRPr>
-            </a:lvl2pPr>
-            <a:lvl3pPr marL="914400" indent="-230188" algn="l" rtl="0" eaLnBrk="1" fontAlgn="base" hangingPunct="1">
-              <a:lnSpc>
-                <a:spcPct val="90000"/>
-              </a:lnSpc>
-              <a:spcBef>
-                <a:spcPts val="800"/>
-              </a:spcBef>
-              <a:spcAft>
-                <a:spcPct val="0"/>
-              </a:spcAft>
-              <a:buClr>
-                <a:schemeClr val="tx1"/>
-              </a:buClr>
-              <a:buFont typeface="Arial" charset="0"/>
-              <a:buChar char="•"/>
-              <a:defRPr sz="1800" kern="1200">
-                <a:solidFill>
-                  <a:schemeClr val="tx1"/>
-                </a:solidFill>
-                <a:latin typeface="+mn-lt"/>
-                <a:ea typeface="+mn-ea"/>
-                <a:cs typeface="+mn-cs"/>
-              </a:defRPr>
-            </a:lvl3pPr>
-            <a:lvl4pPr marL="1144588" indent="-173038" algn="l" rtl="0" eaLnBrk="1" fontAlgn="base" hangingPunct="1">
-              <a:lnSpc>
-                <a:spcPct val="90000"/>
-              </a:lnSpc>
-              <a:spcBef>
-                <a:spcPts val="800"/>
-              </a:spcBef>
-              <a:spcAft>
-                <a:spcPct val="0"/>
-              </a:spcAft>
-              <a:buClr>
-                <a:schemeClr val="tx1"/>
-              </a:buClr>
-              <a:buFont typeface="Arial" charset="0"/>
-              <a:buChar char="–"/>
-              <a:defRPr sz="1600" kern="1200">
-                <a:solidFill>
-                  <a:schemeClr val="tx1"/>
-                </a:solidFill>
-                <a:latin typeface="+mn-lt"/>
-                <a:ea typeface="+mn-ea"/>
-                <a:cs typeface="+mn-cs"/>
-              </a:defRPr>
-            </a:lvl4pPr>
-            <a:lvl5pPr marL="1482725" indent="-222250" algn="l" rtl="0" eaLnBrk="1" fontAlgn="base" hangingPunct="1">
-              <a:lnSpc>
-                <a:spcPct val="90000"/>
-              </a:lnSpc>
-              <a:spcBef>
-                <a:spcPts val="600"/>
-              </a:spcBef>
-              <a:spcAft>
-                <a:spcPct val="0"/>
-              </a:spcAft>
-              <a:buClr>
-                <a:schemeClr val="tx1"/>
-              </a:buClr>
-              <a:buFont typeface="Arial" charset="0"/>
-              <a:buChar char="»"/>
-              <a:defRPr sz="1600" kern="1200">
-                <a:solidFill>
-                  <a:schemeClr val="tx1"/>
-                </a:solidFill>
-                <a:latin typeface="+mn-lt"/>
-                <a:ea typeface="+mn-ea"/>
-                <a:cs typeface="+mn-cs"/>
-              </a:defRPr>
-            </a:lvl5pPr>
-            <a:lvl6pPr marL="2514600" indent="-228600" algn="l" defTabSz="914400" rtl="0" eaLnBrk="1" latinLnBrk="0" hangingPunct="1">
-              <a:spcBef>
-                <a:spcPct val="20000"/>
-              </a:spcBef>
-              <a:buFont typeface="Arial" pitchFamily="34" charset="0"/>
-              <a:buChar char="•"/>
-              <a:defRPr sz="2000" kern="1200">
-                <a:solidFill>
-                  <a:schemeClr val="tx1"/>
-                </a:solidFill>
-                <a:latin typeface="+mn-lt"/>
-                <a:ea typeface="+mn-ea"/>
-                <a:cs typeface="+mn-cs"/>
-              </a:defRPr>
-            </a:lvl6pPr>
-            <a:lvl7pPr marL="2971800" indent="-228600" algn="l" defTabSz="914400" rtl="0" eaLnBrk="1" latinLnBrk="0" hangingPunct="1">
-              <a:spcBef>
-                <a:spcPct val="20000"/>
-              </a:spcBef>
-              <a:buFont typeface="Arial" pitchFamily="34" charset="0"/>
-              <a:buChar char="•"/>
-              <a:defRPr sz="2000" kern="1200">
-                <a:solidFill>
-                  <a:schemeClr val="tx1"/>
-                </a:solidFill>
-                <a:latin typeface="+mn-lt"/>
-                <a:ea typeface="+mn-ea"/>
-                <a:cs typeface="+mn-cs"/>
-              </a:defRPr>
-            </a:lvl7pPr>
-            <a:lvl8pPr marL="3429000" indent="-228600" algn="l" defTabSz="914400" rtl="0" eaLnBrk="1" latinLnBrk="0" hangingPunct="1">
-              <a:spcBef>
-                <a:spcPct val="20000"/>
-              </a:spcBef>
-              <a:buFont typeface="Arial" pitchFamily="34" charset="0"/>
-              <a:buChar char="•"/>
-              <a:defRPr sz="2000" kern="1200">
-                <a:solidFill>
-                  <a:schemeClr val="tx1"/>
-                </a:solidFill>
-                <a:latin typeface="+mn-lt"/>
-                <a:ea typeface="+mn-ea"/>
-                <a:cs typeface="+mn-cs"/>
-              </a:defRPr>
-            </a:lvl8pPr>
-            <a:lvl9pPr marL="3886200" indent="-228600" algn="l" defTabSz="914400" rtl="0" eaLnBrk="1" latinLnBrk="0" hangingPunct="1">
-              <a:spcBef>
-                <a:spcPct val="20000"/>
-              </a:spcBef>
-              <a:buFont typeface="Arial" pitchFamily="34" charset="0"/>
-              <a:buChar char="•"/>
-              <a:defRPr sz="2000" kern="1200">
-                <a:solidFill>
-                  <a:schemeClr val="tx1"/>
-                </a:solidFill>
-                <a:latin typeface="+mn-lt"/>
-                <a:ea typeface="+mn-ea"/>
-                <a:cs typeface="+mn-cs"/>
-              </a:defRPr>
-            </a:lvl9pPr>
-          </a:lstStyle>
-          <a:p>
-            <a:r>
-              <a:rPr lang="en-US" dirty="0"/>
-              <a:t>Generalize the interface</a:t>
-            </a:r>
-          </a:p>
-          <a:p>
-            <a:pPr lvl="1"/>
-            <a:endParaRPr lang="en-US" dirty="0"/>
-          </a:p>
-          <a:p>
-            <a:pPr lvl="1"/>
-            <a:endParaRPr lang="en-US" dirty="0"/>
-          </a:p>
-          <a:p>
-            <a:pPr lvl="1"/>
-            <a:endParaRPr lang="en-US" dirty="0"/>
-          </a:p>
-          <a:p>
-            <a:pPr lvl="1"/>
-            <a:endParaRPr lang="en-US" dirty="0"/>
-          </a:p>
-          <a:p>
-            <a:pPr lvl="1"/>
-            <a:endParaRPr lang="en-US" dirty="0"/>
-          </a:p>
-          <a:p>
-            <a:pPr lvl="1"/>
-            <a:endParaRPr lang="en-US" dirty="0"/>
-          </a:p>
-          <a:p>
-            <a:pPr lvl="1"/>
-            <a:endParaRPr lang="en-US" dirty="0"/>
-          </a:p>
-          <a:p>
-            <a:r>
-              <a:rPr lang="en-US" dirty="0"/>
-              <a:t>Modify the </a:t>
-            </a:r>
-            <a:r>
-              <a:rPr lang="en-US" dirty="0" err="1"/>
-              <a:t>makefile</a:t>
-            </a:r>
-            <a:r>
-              <a:rPr lang="en-US" dirty="0"/>
-              <a:t> </a:t>
-            </a:r>
-          </a:p>
-          <a:p>
-            <a:pPr marL="0" indent="0">
-              <a:buNone/>
-            </a:pPr>
-            <a:endParaRPr lang="en-US" dirty="0"/>
-          </a:p>
-          <a:p>
-            <a:pPr lvl="1"/>
-            <a:endParaRPr lang="en-US" dirty="0"/>
-          </a:p>
-          <a:p>
-            <a:pPr lvl="1"/>
-            <a:endParaRPr lang="en-US" dirty="0"/>
-          </a:p>
-          <a:p>
-            <a:pPr lvl="1"/>
-            <a:endParaRPr lang="en-US" dirty="0"/>
-          </a:p>
-          <a:p>
-            <a:pPr lvl="1"/>
-            <a:endParaRPr lang="en-US" dirty="0"/>
-          </a:p>
-          <a:p>
-            <a:pPr lvl="1"/>
-            <a:endParaRPr lang="en-US" dirty="0"/>
-          </a:p>
-          <a:p>
-            <a:pPr lvl="1"/>
-            <a:endParaRPr lang="en-US" b="1" dirty="0">
-              <a:solidFill>
-                <a:schemeClr val="accent6">
-                  <a:lumMod val="75000"/>
-                </a:schemeClr>
-              </a:solidFill>
-            </a:endParaRPr>
-          </a:p>
-        </p:txBody>
-      </p:sp>
-      <p:pic>
-        <p:nvPicPr>
-          <p:cNvPr id="4" name="Picture 3" descr="A picture containing bird&#10;&#10;Description automatically generated">
-            <a:extLst>
-              <a:ext uri="{FF2B5EF4-FFF2-40B4-BE49-F238E27FC236}">
-                <a16:creationId xmlns:a16="http://schemas.microsoft.com/office/drawing/2014/main" id="{43F8C72C-5560-A04C-A680-0A9F3E203EC5}"/>
-              </a:ext>
-            </a:extLst>
-          </p:cNvPr>
-          <p:cNvPicPr>
-            <a:picLocks noChangeAspect="1"/>
-          </p:cNvPicPr>
-          <p:nvPr/>
-        </p:nvPicPr>
-        <p:blipFill rotWithShape="1">
-          <a:blip r:embed="rId3">
-            <a:extLst>
-              <a:ext uri="{28A0092B-C50C-407E-A947-70E740481C1C}">
-                <a14:useLocalDpi xmlns:a14="http://schemas.microsoft.com/office/drawing/2010/main" val="0"/>
-              </a:ext>
-            </a:extLst>
-          </a:blip>
-          <a:srcRect l="1112" t="-33" r="1908" b="33"/>
-          <a:stretch/>
-        </p:blipFill>
-        <p:spPr>
-          <a:xfrm>
-            <a:off x="5801360" y="1731649"/>
-            <a:ext cx="6035040" cy="3606800"/>
-          </a:xfrm>
-          <a:prstGeom prst="rect">
-            <a:avLst/>
-          </a:prstGeom>
-        </p:spPr>
-      </p:pic>
-    </p:spTree>
-    <p:extLst>
-      <p:ext uri="{BB962C8B-B14F-4D97-AF65-F5344CB8AC3E}">
-        <p14:creationId xmlns:p14="http://schemas.microsoft.com/office/powerpoint/2010/main" val="3142693795"/>
-      </p:ext>
-    </p:extLst>
-  </p:cSld>
-  <p:clrMapOvr>
-    <a:masterClrMapping/>
-  </p:clrMapOvr>
-</p:sld>
-</file>
-
-<file path=ppt/slides/slide21.xml><?xml version="1.0" encoding="utf-8"?>
-<p:sld xmlns:a="http://schemas.openxmlformats.org/drawingml/2006/main" xmlns:r="http://schemas.openxmlformats.org/officeDocument/2006/relationships" xmlns:p="http://schemas.openxmlformats.org/presentationml/2006/main">
-  <p:cSld>
-    <p:spTree>
-      <p:nvGrpSpPr>
-        <p:cNvPr id="1" name=""/>
-        <p:cNvGrpSpPr/>
-        <p:nvPr/>
-      </p:nvGrpSpPr>
-      <p:grpSpPr>
-        <a:xfrm>
-          <a:off x="0" y="0"/>
-          <a:ext cx="0" cy="0"/>
-          <a:chOff x="0" y="0"/>
-          <a:chExt cx="0" cy="0"/>
-        </a:xfrm>
-      </p:grpSpPr>
-      <p:sp>
-        <p:nvSpPr>
-          <p:cNvPr id="2" name="Title 1">
-            <a:extLst>
-              <a:ext uri="{FF2B5EF4-FFF2-40B4-BE49-F238E27FC236}">
-                <a16:creationId xmlns:a16="http://schemas.microsoft.com/office/drawing/2014/main" id="{0BB0AF74-266F-A348-B126-9D41A04D15B5}"/>
-              </a:ext>
-            </a:extLst>
-          </p:cNvPr>
-          <p:cNvSpPr>
-            <a:spLocks noGrp="1"/>
-          </p:cNvSpPr>
-          <p:nvPr>
-            <p:ph type="title"/>
-          </p:nvPr>
-        </p:nvSpPr>
-        <p:spPr/>
-        <p:txBody>
-          <a:bodyPr/>
-          <a:lstStyle/>
-          <a:p>
-            <a:r>
-              <a:rPr lang="en-US" dirty="0"/>
-              <a:t>Refactoring </a:t>
-            </a:r>
-          </a:p>
-        </p:txBody>
-      </p:sp>
-      <p:pic>
-        <p:nvPicPr>
-          <p:cNvPr id="9" name="Picture 8" descr="A screenshot of a cell phone&#10;&#10;Description automatically generated">
-            <a:extLst>
-              <a:ext uri="{FF2B5EF4-FFF2-40B4-BE49-F238E27FC236}">
-                <a16:creationId xmlns:a16="http://schemas.microsoft.com/office/drawing/2014/main" id="{3B5F1D7B-EF1D-224E-92A7-1E859DF918AE}"/>
-              </a:ext>
-            </a:extLst>
-          </p:cNvPr>
-          <p:cNvPicPr>
-            <a:picLocks noChangeAspect="1"/>
-          </p:cNvPicPr>
-          <p:nvPr/>
-        </p:nvPicPr>
-        <p:blipFill>
-          <a:blip r:embed="rId2">
-            <a:extLst>
-              <a:ext uri="{28A0092B-C50C-407E-A947-70E740481C1C}">
-                <a14:useLocalDpi xmlns:a14="http://schemas.microsoft.com/office/drawing/2010/main" val="0"/>
-              </a:ext>
-            </a:extLst>
-          </a:blip>
-          <a:stretch>
-            <a:fillRect/>
-          </a:stretch>
-        </p:blipFill>
-        <p:spPr>
-          <a:xfrm>
-            <a:off x="365760" y="1731649"/>
-            <a:ext cx="5435600" cy="2260600"/>
-          </a:xfrm>
-          <a:prstGeom prst="rect">
-            <a:avLst/>
-          </a:prstGeom>
-        </p:spPr>
-      </p:pic>
-      <p:sp>
-        <p:nvSpPr>
-          <p:cNvPr id="8" name="Content Placeholder 2">
-            <a:extLst>
-              <a:ext uri="{FF2B5EF4-FFF2-40B4-BE49-F238E27FC236}">
-                <a16:creationId xmlns:a16="http://schemas.microsoft.com/office/drawing/2014/main" id="{19CD30F3-7E39-014B-A374-9F7BD7F6003E}"/>
-              </a:ext>
-            </a:extLst>
-          </p:cNvPr>
-          <p:cNvSpPr txBox="1">
-            <a:spLocks/>
-          </p:cNvSpPr>
-          <p:nvPr/>
-        </p:nvSpPr>
-        <p:spPr bwMode="auto">
-          <a:xfrm>
-            <a:off x="467525" y="1280160"/>
-            <a:ext cx="4764876" cy="4748107"/>
-          </a:xfrm>
-          <a:prstGeom prst="rect">
-            <a:avLst/>
-          </a:prstGeom>
-          <a:noFill/>
-          <a:ln w="9525">
-            <a:noFill/>
-            <a:miter lim="800000"/>
-            <a:headEnd/>
-            <a:tailEnd/>
-          </a:ln>
-        </p:spPr>
-        <p:txBody>
-          <a:bodyPr vert="horz" wrap="square" lIns="91440" tIns="45720" rIns="91440" bIns="45720" numCol="1" anchor="t" anchorCtr="0" compatLnSpc="1">
-            <a:prstTxWarp prst="textNoShape">
-              <a:avLst/>
-            </a:prstTxWarp>
-            <a:normAutofit/>
-          </a:bodyPr>
-          <a:lstStyle>
-            <a:lvl1pPr marL="230188" indent="-230188" algn="l" rtl="0" eaLnBrk="1" fontAlgn="base" hangingPunct="1">
-              <a:lnSpc>
-                <a:spcPct val="90000"/>
-              </a:lnSpc>
-              <a:spcBef>
-                <a:spcPts val="1400"/>
-              </a:spcBef>
-              <a:spcAft>
-                <a:spcPct val="0"/>
-              </a:spcAft>
-              <a:buClr>
-                <a:schemeClr val="tx1"/>
-              </a:buClr>
-              <a:buFont typeface="Arial" charset="0"/>
-              <a:buChar char="•"/>
-              <a:defRPr sz="2400" kern="1200" baseline="0">
-                <a:solidFill>
-                  <a:schemeClr val="tx1"/>
-                </a:solidFill>
-                <a:latin typeface="+mn-lt"/>
-                <a:ea typeface="+mn-ea"/>
-                <a:cs typeface="+mn-cs"/>
-              </a:defRPr>
-            </a:lvl1pPr>
-            <a:lvl2pPr marL="625475" indent="-279400" algn="l" rtl="0" eaLnBrk="1" fontAlgn="base" hangingPunct="1">
-              <a:lnSpc>
-                <a:spcPct val="90000"/>
-              </a:lnSpc>
-              <a:spcBef>
-                <a:spcPts val="800"/>
-              </a:spcBef>
-              <a:spcAft>
-                <a:spcPct val="0"/>
-              </a:spcAft>
-              <a:buClr>
-                <a:schemeClr val="tx1"/>
-              </a:buClr>
-              <a:buFont typeface="Arial" charset="0"/>
-              <a:buChar char="–"/>
-              <a:defRPr sz="2000" kern="1200">
-                <a:solidFill>
-                  <a:schemeClr val="tx1"/>
-                </a:solidFill>
-                <a:latin typeface="+mn-lt"/>
-                <a:ea typeface="+mn-ea"/>
-                <a:cs typeface="+mn-cs"/>
-              </a:defRPr>
-            </a:lvl2pPr>
-            <a:lvl3pPr marL="914400" indent="-230188" algn="l" rtl="0" eaLnBrk="1" fontAlgn="base" hangingPunct="1">
-              <a:lnSpc>
-                <a:spcPct val="90000"/>
-              </a:lnSpc>
-              <a:spcBef>
-                <a:spcPts val="800"/>
-              </a:spcBef>
-              <a:spcAft>
-                <a:spcPct val="0"/>
-              </a:spcAft>
-              <a:buClr>
-                <a:schemeClr val="tx1"/>
-              </a:buClr>
-              <a:buFont typeface="Arial" charset="0"/>
-              <a:buChar char="•"/>
-              <a:defRPr sz="1800" kern="1200">
-                <a:solidFill>
-                  <a:schemeClr val="tx1"/>
-                </a:solidFill>
-                <a:latin typeface="+mn-lt"/>
-                <a:ea typeface="+mn-ea"/>
-                <a:cs typeface="+mn-cs"/>
-              </a:defRPr>
-            </a:lvl3pPr>
-            <a:lvl4pPr marL="1144588" indent="-173038" algn="l" rtl="0" eaLnBrk="1" fontAlgn="base" hangingPunct="1">
-              <a:lnSpc>
-                <a:spcPct val="90000"/>
-              </a:lnSpc>
-              <a:spcBef>
-                <a:spcPts val="800"/>
-              </a:spcBef>
-              <a:spcAft>
-                <a:spcPct val="0"/>
-              </a:spcAft>
-              <a:buClr>
-                <a:schemeClr val="tx1"/>
-              </a:buClr>
-              <a:buFont typeface="Arial" charset="0"/>
-              <a:buChar char="–"/>
-              <a:defRPr sz="1600" kern="1200">
-                <a:solidFill>
-                  <a:schemeClr val="tx1"/>
-                </a:solidFill>
-                <a:latin typeface="+mn-lt"/>
-                <a:ea typeface="+mn-ea"/>
-                <a:cs typeface="+mn-cs"/>
-              </a:defRPr>
-            </a:lvl4pPr>
-            <a:lvl5pPr marL="1482725" indent="-222250" algn="l" rtl="0" eaLnBrk="1" fontAlgn="base" hangingPunct="1">
-              <a:lnSpc>
-                <a:spcPct val="90000"/>
-              </a:lnSpc>
-              <a:spcBef>
-                <a:spcPts val="600"/>
-              </a:spcBef>
-              <a:spcAft>
-                <a:spcPct val="0"/>
-              </a:spcAft>
-              <a:buClr>
-                <a:schemeClr val="tx1"/>
-              </a:buClr>
-              <a:buFont typeface="Arial" charset="0"/>
-              <a:buChar char="»"/>
-              <a:defRPr sz="1600" kern="1200">
-                <a:solidFill>
-                  <a:schemeClr val="tx1"/>
-                </a:solidFill>
-                <a:latin typeface="+mn-lt"/>
-                <a:ea typeface="+mn-ea"/>
-                <a:cs typeface="+mn-cs"/>
-              </a:defRPr>
-            </a:lvl5pPr>
-            <a:lvl6pPr marL="2514600" indent="-228600" algn="l" defTabSz="914400" rtl="0" eaLnBrk="1" latinLnBrk="0" hangingPunct="1">
-              <a:spcBef>
-                <a:spcPct val="20000"/>
-              </a:spcBef>
-              <a:buFont typeface="Arial" pitchFamily="34" charset="0"/>
-              <a:buChar char="•"/>
-              <a:defRPr sz="2000" kern="1200">
-                <a:solidFill>
-                  <a:schemeClr val="tx1"/>
-                </a:solidFill>
-                <a:latin typeface="+mn-lt"/>
-                <a:ea typeface="+mn-ea"/>
-                <a:cs typeface="+mn-cs"/>
-              </a:defRPr>
-            </a:lvl6pPr>
-            <a:lvl7pPr marL="2971800" indent="-228600" algn="l" defTabSz="914400" rtl="0" eaLnBrk="1" latinLnBrk="0" hangingPunct="1">
-              <a:spcBef>
-                <a:spcPct val="20000"/>
-              </a:spcBef>
-              <a:buFont typeface="Arial" pitchFamily="34" charset="0"/>
-              <a:buChar char="•"/>
-              <a:defRPr sz="2000" kern="1200">
-                <a:solidFill>
-                  <a:schemeClr val="tx1"/>
-                </a:solidFill>
-                <a:latin typeface="+mn-lt"/>
-                <a:ea typeface="+mn-ea"/>
-                <a:cs typeface="+mn-cs"/>
-              </a:defRPr>
-            </a:lvl7pPr>
-            <a:lvl8pPr marL="3429000" indent="-228600" algn="l" defTabSz="914400" rtl="0" eaLnBrk="1" latinLnBrk="0" hangingPunct="1">
-              <a:spcBef>
-                <a:spcPct val="20000"/>
-              </a:spcBef>
-              <a:buFont typeface="Arial" pitchFamily="34" charset="0"/>
-              <a:buChar char="•"/>
-              <a:defRPr sz="2000" kern="1200">
-                <a:solidFill>
-                  <a:schemeClr val="tx1"/>
-                </a:solidFill>
-                <a:latin typeface="+mn-lt"/>
-                <a:ea typeface="+mn-ea"/>
-                <a:cs typeface="+mn-cs"/>
-              </a:defRPr>
-            </a:lvl8pPr>
-            <a:lvl9pPr marL="3886200" indent="-228600" algn="l" defTabSz="914400" rtl="0" eaLnBrk="1" latinLnBrk="0" hangingPunct="1">
-              <a:spcBef>
-                <a:spcPct val="20000"/>
-              </a:spcBef>
-              <a:buFont typeface="Arial" pitchFamily="34" charset="0"/>
-              <a:buChar char="•"/>
-              <a:defRPr sz="2000" kern="1200">
-                <a:solidFill>
-                  <a:schemeClr val="tx1"/>
-                </a:solidFill>
-                <a:latin typeface="+mn-lt"/>
-                <a:ea typeface="+mn-ea"/>
-                <a:cs typeface="+mn-cs"/>
-              </a:defRPr>
-            </a:lvl9pPr>
-          </a:lstStyle>
-          <a:p>
-            <a:r>
-              <a:rPr lang="en-US" dirty="0"/>
-              <a:t>Generalize the interface</a:t>
-            </a:r>
-          </a:p>
-          <a:p>
-            <a:pPr lvl="1"/>
-            <a:endParaRPr lang="en-US" dirty="0"/>
-          </a:p>
-          <a:p>
-            <a:pPr lvl="1"/>
-            <a:endParaRPr lang="en-US" dirty="0"/>
-          </a:p>
-          <a:p>
-            <a:pPr lvl="1"/>
-            <a:endParaRPr lang="en-US" dirty="0"/>
-          </a:p>
-          <a:p>
-            <a:pPr lvl="1"/>
-            <a:endParaRPr lang="en-US" dirty="0"/>
-          </a:p>
-          <a:p>
-            <a:pPr lvl="1"/>
-            <a:endParaRPr lang="en-US" dirty="0"/>
-          </a:p>
-          <a:p>
-            <a:pPr lvl="1"/>
-            <a:endParaRPr lang="en-US" dirty="0"/>
-          </a:p>
-          <a:p>
-            <a:pPr lvl="1"/>
-            <a:endParaRPr lang="en-US" dirty="0"/>
-          </a:p>
-          <a:p>
-            <a:r>
-              <a:rPr lang="en-US" dirty="0"/>
-              <a:t>Modify the </a:t>
-            </a:r>
-            <a:r>
-              <a:rPr lang="en-US" dirty="0" err="1"/>
-              <a:t>makefile</a:t>
-            </a:r>
-            <a:r>
-              <a:rPr lang="en-US" dirty="0"/>
-              <a:t> </a:t>
-            </a:r>
-          </a:p>
-          <a:p>
-            <a:r>
-              <a:rPr lang="en-US" dirty="0"/>
-              <a:t>Add null implementations of </a:t>
-            </a:r>
-            <a:r>
-              <a:rPr lang="en-US" dirty="0" err="1"/>
-              <a:t>initialize_crank</a:t>
-            </a:r>
-            <a:r>
-              <a:rPr lang="en-US" dirty="0"/>
-              <a:t> in </a:t>
-            </a:r>
-            <a:r>
-              <a:rPr lang="en-US" dirty="0" err="1"/>
-              <a:t>ftcs</a:t>
-            </a:r>
-            <a:r>
-              <a:rPr lang="en-US" dirty="0"/>
-              <a:t> and upwind15</a:t>
-            </a:r>
-          </a:p>
-          <a:p>
-            <a:endParaRPr lang="en-US" dirty="0"/>
-          </a:p>
-          <a:p>
-            <a:pPr lvl="1"/>
-            <a:endParaRPr lang="en-US" dirty="0"/>
-          </a:p>
-          <a:p>
-            <a:pPr lvl="1"/>
-            <a:endParaRPr lang="en-US" dirty="0"/>
-          </a:p>
-          <a:p>
-            <a:pPr lvl="1"/>
-            <a:endParaRPr lang="en-US" dirty="0"/>
-          </a:p>
-          <a:p>
-            <a:pPr lvl="1"/>
-            <a:endParaRPr lang="en-US" dirty="0"/>
-          </a:p>
-          <a:p>
-            <a:pPr lvl="1"/>
-            <a:endParaRPr lang="en-US" dirty="0"/>
-          </a:p>
-          <a:p>
-            <a:pPr lvl="1"/>
-            <a:endParaRPr lang="en-US" b="1" dirty="0">
-              <a:solidFill>
-                <a:schemeClr val="accent6">
-                  <a:lumMod val="75000"/>
-                </a:schemeClr>
-              </a:solidFill>
-            </a:endParaRPr>
-          </a:p>
-        </p:txBody>
-      </p:sp>
-      <p:pic>
-        <p:nvPicPr>
-          <p:cNvPr id="4" name="Picture 3" descr="A picture containing bird&#10;&#10;Description automatically generated">
-            <a:extLst>
-              <a:ext uri="{FF2B5EF4-FFF2-40B4-BE49-F238E27FC236}">
-                <a16:creationId xmlns:a16="http://schemas.microsoft.com/office/drawing/2014/main" id="{43F8C72C-5560-A04C-A680-0A9F3E203EC5}"/>
-              </a:ext>
-            </a:extLst>
-          </p:cNvPr>
-          <p:cNvPicPr>
-            <a:picLocks noChangeAspect="1"/>
-          </p:cNvPicPr>
-          <p:nvPr/>
-        </p:nvPicPr>
-        <p:blipFill rotWithShape="1">
-          <a:blip r:embed="rId3">
-            <a:extLst>
-              <a:ext uri="{28A0092B-C50C-407E-A947-70E740481C1C}">
-                <a14:useLocalDpi xmlns:a14="http://schemas.microsoft.com/office/drawing/2010/main" val="0"/>
-              </a:ext>
-            </a:extLst>
-          </a:blip>
-          <a:srcRect l="1112" t="-33" r="1908" b="33"/>
-          <a:stretch/>
-        </p:blipFill>
-        <p:spPr>
-          <a:xfrm>
-            <a:off x="5801360" y="1731649"/>
-            <a:ext cx="6035040" cy="3606800"/>
-          </a:xfrm>
-          <a:prstGeom prst="rect">
-            <a:avLst/>
-          </a:prstGeom>
-        </p:spPr>
-      </p:pic>
-    </p:spTree>
-    <p:extLst>
-      <p:ext uri="{BB962C8B-B14F-4D97-AF65-F5344CB8AC3E}">
-        <p14:creationId xmlns:p14="http://schemas.microsoft.com/office/powerpoint/2010/main" val="2738917169"/>
-      </p:ext>
-    </p:extLst>
-  </p:cSld>
-  <p:clrMapOvr>
-    <a:masterClrMapping/>
-  </p:clrMapOvr>
-</p:sld>
-</file>
-
-<file path=ppt/slides/slide22.xml><?xml version="1.0" encoding="utf-8"?>
-<p:sld xmlns:a="http://schemas.openxmlformats.org/drawingml/2006/main" xmlns:r="http://schemas.openxmlformats.org/officeDocument/2006/relationships" xmlns:p="http://schemas.openxmlformats.org/presentationml/2006/main">
-  <p:cSld>
-    <p:spTree>
-      <p:nvGrpSpPr>
-        <p:cNvPr id="1" name=""/>
-        <p:cNvGrpSpPr/>
-        <p:nvPr/>
-      </p:nvGrpSpPr>
-      <p:grpSpPr>
-        <a:xfrm>
-          <a:off x="0" y="0"/>
-          <a:ext cx="0" cy="0"/>
-          <a:chOff x="0" y="0"/>
-          <a:chExt cx="0" cy="0"/>
-        </a:xfrm>
-      </p:grpSpPr>
-      <p:sp>
-        <p:nvSpPr>
-          <p:cNvPr id="2" name="Title 1">
-            <a:extLst>
-              <a:ext uri="{FF2B5EF4-FFF2-40B4-BE49-F238E27FC236}">
-                <a16:creationId xmlns:a16="http://schemas.microsoft.com/office/drawing/2014/main" id="{0BB0AF74-266F-A348-B126-9D41A04D15B5}"/>
-              </a:ext>
-            </a:extLst>
-          </p:cNvPr>
-          <p:cNvSpPr>
-            <a:spLocks noGrp="1"/>
-          </p:cNvSpPr>
-          <p:nvPr>
-            <p:ph type="title"/>
-          </p:nvPr>
-        </p:nvSpPr>
-        <p:spPr/>
-        <p:txBody>
-          <a:bodyPr/>
-          <a:lstStyle/>
-          <a:p>
-            <a:r>
-              <a:rPr lang="en-US" dirty="0"/>
-              <a:t>Refactoring </a:t>
-            </a:r>
-          </a:p>
-        </p:txBody>
-      </p:sp>
-      <p:pic>
-        <p:nvPicPr>
-          <p:cNvPr id="11" name="Picture 10">
-            <a:extLst>
-              <a:ext uri="{FF2B5EF4-FFF2-40B4-BE49-F238E27FC236}">
-                <a16:creationId xmlns:a16="http://schemas.microsoft.com/office/drawing/2014/main" id="{12CF33BF-7DBF-FB4E-8A97-CC0DB40A6F9B}"/>
-              </a:ext>
-            </a:extLst>
-          </p:cNvPr>
-          <p:cNvPicPr>
-            <a:picLocks noChangeAspect="1"/>
-          </p:cNvPicPr>
-          <p:nvPr/>
-        </p:nvPicPr>
-        <p:blipFill rotWithShape="1">
-          <a:blip r:embed="rId2">
-            <a:extLst>
-              <a:ext uri="{28A0092B-C50C-407E-A947-70E740481C1C}">
-                <a14:useLocalDpi xmlns:a14="http://schemas.microsoft.com/office/drawing/2010/main" val="0"/>
-              </a:ext>
-            </a:extLst>
-          </a:blip>
-          <a:srcRect l="333" r="-522"/>
-          <a:stretch/>
-        </p:blipFill>
-        <p:spPr>
-          <a:xfrm>
-            <a:off x="475488" y="971556"/>
-            <a:ext cx="7491929" cy="5091716"/>
-          </a:xfrm>
-          <a:prstGeom prst="rect">
-            <a:avLst/>
-          </a:prstGeom>
-        </p:spPr>
-      </p:pic>
-      <p:sp>
-        <p:nvSpPr>
-          <p:cNvPr id="8" name="Content Placeholder 2">
-            <a:extLst>
-              <a:ext uri="{FF2B5EF4-FFF2-40B4-BE49-F238E27FC236}">
-                <a16:creationId xmlns:a16="http://schemas.microsoft.com/office/drawing/2014/main" id="{695E2922-B9CB-D046-B17C-38C8DFE203E8}"/>
-              </a:ext>
-            </a:extLst>
-          </p:cNvPr>
-          <p:cNvSpPr txBox="1">
-            <a:spLocks/>
-          </p:cNvSpPr>
-          <p:nvPr/>
-        </p:nvSpPr>
-        <p:spPr bwMode="auto">
-          <a:xfrm>
-            <a:off x="6837788" y="971556"/>
-            <a:ext cx="4900445" cy="2097804"/>
-          </a:xfrm>
-          <a:prstGeom prst="rect">
-            <a:avLst/>
-          </a:prstGeom>
-          <a:noFill/>
-          <a:ln w="9525">
-            <a:noFill/>
-            <a:miter lim="800000"/>
-            <a:headEnd/>
-            <a:tailEnd/>
-          </a:ln>
-        </p:spPr>
-        <p:txBody>
-          <a:bodyPr vert="horz" wrap="square" lIns="91440" tIns="45720" rIns="91440" bIns="45720" numCol="1" anchor="t" anchorCtr="0" compatLnSpc="1">
-            <a:prstTxWarp prst="textNoShape">
-              <a:avLst/>
-            </a:prstTxWarp>
-            <a:normAutofit fontScale="85000" lnSpcReduction="10000"/>
-          </a:bodyPr>
-          <a:lstStyle>
-            <a:lvl1pPr marL="230188" indent="-230188" algn="l" rtl="0" eaLnBrk="1" fontAlgn="base" hangingPunct="1">
-              <a:lnSpc>
-                <a:spcPct val="90000"/>
-              </a:lnSpc>
-              <a:spcBef>
-                <a:spcPts val="1400"/>
-              </a:spcBef>
-              <a:spcAft>
-                <a:spcPct val="0"/>
-              </a:spcAft>
-              <a:buClr>
-                <a:schemeClr val="tx1"/>
-              </a:buClr>
-              <a:buFont typeface="Arial" charset="0"/>
-              <a:buChar char="•"/>
-              <a:defRPr sz="2400" kern="1200" baseline="0">
-                <a:solidFill>
-                  <a:schemeClr val="tx1"/>
-                </a:solidFill>
-                <a:latin typeface="+mn-lt"/>
-                <a:ea typeface="+mn-ea"/>
-                <a:cs typeface="+mn-cs"/>
-              </a:defRPr>
-            </a:lvl1pPr>
-            <a:lvl2pPr marL="625475" indent="-279400" algn="l" rtl="0" eaLnBrk="1" fontAlgn="base" hangingPunct="1">
-              <a:lnSpc>
-                <a:spcPct val="90000"/>
-              </a:lnSpc>
-              <a:spcBef>
-                <a:spcPts val="800"/>
-              </a:spcBef>
-              <a:spcAft>
-                <a:spcPct val="0"/>
-              </a:spcAft>
-              <a:buClr>
-                <a:schemeClr val="tx1"/>
-              </a:buClr>
-              <a:buFont typeface="Arial" charset="0"/>
-              <a:buChar char="–"/>
-              <a:defRPr sz="2000" kern="1200">
-                <a:solidFill>
-                  <a:schemeClr val="tx1"/>
-                </a:solidFill>
-                <a:latin typeface="+mn-lt"/>
-                <a:ea typeface="+mn-ea"/>
-                <a:cs typeface="+mn-cs"/>
-              </a:defRPr>
-            </a:lvl2pPr>
-            <a:lvl3pPr marL="914400" indent="-230188" algn="l" rtl="0" eaLnBrk="1" fontAlgn="base" hangingPunct="1">
-              <a:lnSpc>
-                <a:spcPct val="90000"/>
-              </a:lnSpc>
-              <a:spcBef>
-                <a:spcPts val="800"/>
-              </a:spcBef>
-              <a:spcAft>
-                <a:spcPct val="0"/>
-              </a:spcAft>
-              <a:buClr>
-                <a:schemeClr val="tx1"/>
-              </a:buClr>
-              <a:buFont typeface="Arial" charset="0"/>
-              <a:buChar char="•"/>
-              <a:defRPr sz="1800" kern="1200">
-                <a:solidFill>
-                  <a:schemeClr val="tx1"/>
-                </a:solidFill>
-                <a:latin typeface="+mn-lt"/>
-                <a:ea typeface="+mn-ea"/>
-                <a:cs typeface="+mn-cs"/>
-              </a:defRPr>
-            </a:lvl3pPr>
-            <a:lvl4pPr marL="1144588" indent="-173038" algn="l" rtl="0" eaLnBrk="1" fontAlgn="base" hangingPunct="1">
-              <a:lnSpc>
-                <a:spcPct val="90000"/>
-              </a:lnSpc>
-              <a:spcBef>
-                <a:spcPts val="800"/>
-              </a:spcBef>
-              <a:spcAft>
-                <a:spcPct val="0"/>
-              </a:spcAft>
-              <a:buClr>
-                <a:schemeClr val="tx1"/>
-              </a:buClr>
-              <a:buFont typeface="Arial" charset="0"/>
-              <a:buChar char="–"/>
-              <a:defRPr sz="1600" kern="1200">
-                <a:solidFill>
-                  <a:schemeClr val="tx1"/>
-                </a:solidFill>
-                <a:latin typeface="+mn-lt"/>
-                <a:ea typeface="+mn-ea"/>
-                <a:cs typeface="+mn-cs"/>
-              </a:defRPr>
-            </a:lvl4pPr>
-            <a:lvl5pPr marL="1482725" indent="-222250" algn="l" rtl="0" eaLnBrk="1" fontAlgn="base" hangingPunct="1">
-              <a:lnSpc>
-                <a:spcPct val="90000"/>
-              </a:lnSpc>
-              <a:spcBef>
-                <a:spcPts val="600"/>
-              </a:spcBef>
-              <a:spcAft>
-                <a:spcPct val="0"/>
-              </a:spcAft>
-              <a:buClr>
-                <a:schemeClr val="tx1"/>
-              </a:buClr>
-              <a:buFont typeface="Arial" charset="0"/>
-              <a:buChar char="»"/>
-              <a:defRPr sz="1600" kern="1200">
-                <a:solidFill>
-                  <a:schemeClr val="tx1"/>
-                </a:solidFill>
-                <a:latin typeface="+mn-lt"/>
-                <a:ea typeface="+mn-ea"/>
-                <a:cs typeface="+mn-cs"/>
-              </a:defRPr>
-            </a:lvl5pPr>
-            <a:lvl6pPr marL="2514600" indent="-228600" algn="l" defTabSz="914400" rtl="0" eaLnBrk="1" latinLnBrk="0" hangingPunct="1">
-              <a:spcBef>
-                <a:spcPct val="20000"/>
-              </a:spcBef>
-              <a:buFont typeface="Arial" pitchFamily="34" charset="0"/>
-              <a:buChar char="•"/>
-              <a:defRPr sz="2000" kern="1200">
-                <a:solidFill>
-                  <a:schemeClr val="tx1"/>
-                </a:solidFill>
-                <a:latin typeface="+mn-lt"/>
-                <a:ea typeface="+mn-ea"/>
-                <a:cs typeface="+mn-cs"/>
-              </a:defRPr>
-            </a:lvl6pPr>
-            <a:lvl7pPr marL="2971800" indent="-228600" algn="l" defTabSz="914400" rtl="0" eaLnBrk="1" latinLnBrk="0" hangingPunct="1">
-              <a:spcBef>
-                <a:spcPct val="20000"/>
-              </a:spcBef>
-              <a:buFont typeface="Arial" pitchFamily="34" charset="0"/>
-              <a:buChar char="•"/>
-              <a:defRPr sz="2000" kern="1200">
-                <a:solidFill>
-                  <a:schemeClr val="tx1"/>
-                </a:solidFill>
-                <a:latin typeface="+mn-lt"/>
-                <a:ea typeface="+mn-ea"/>
-                <a:cs typeface="+mn-cs"/>
-              </a:defRPr>
-            </a:lvl7pPr>
-            <a:lvl8pPr marL="3429000" indent="-228600" algn="l" defTabSz="914400" rtl="0" eaLnBrk="1" latinLnBrk="0" hangingPunct="1">
-              <a:spcBef>
-                <a:spcPct val="20000"/>
-              </a:spcBef>
-              <a:buFont typeface="Arial" pitchFamily="34" charset="0"/>
-              <a:buChar char="•"/>
-              <a:defRPr sz="2000" kern="1200">
-                <a:solidFill>
-                  <a:schemeClr val="tx1"/>
-                </a:solidFill>
-                <a:latin typeface="+mn-lt"/>
-                <a:ea typeface="+mn-ea"/>
-                <a:cs typeface="+mn-cs"/>
-              </a:defRPr>
-            </a:lvl8pPr>
-            <a:lvl9pPr marL="3886200" indent="-228600" algn="l" defTabSz="914400" rtl="0" eaLnBrk="1" latinLnBrk="0" hangingPunct="1">
-              <a:spcBef>
-                <a:spcPct val="20000"/>
-              </a:spcBef>
-              <a:buFont typeface="Arial" pitchFamily="34" charset="0"/>
-              <a:buChar char="•"/>
-              <a:defRPr sz="2000" kern="1200">
-                <a:solidFill>
-                  <a:schemeClr val="tx1"/>
-                </a:solidFill>
-                <a:latin typeface="+mn-lt"/>
-                <a:ea typeface="+mn-ea"/>
-                <a:cs typeface="+mn-cs"/>
-              </a:defRPr>
-            </a:lvl9pPr>
-          </a:lstStyle>
-          <a:p>
-            <a:r>
-              <a:rPr lang="en-US" dirty="0"/>
-              <a:t>make heat1</a:t>
-            </a:r>
-          </a:p>
-          <a:p>
-            <a:r>
-              <a:rPr lang="en-US" dirty="0"/>
-              <a:t>Run ./heat </a:t>
-            </a:r>
-            <a:r>
-              <a:rPr lang="en-US" dirty="0" err="1"/>
-              <a:t>runame</a:t>
-            </a:r>
-            <a:r>
-              <a:rPr lang="en-US" dirty="0"/>
-              <a:t>=“</a:t>
-            </a:r>
-            <a:r>
-              <a:rPr lang="en-US" dirty="0" err="1"/>
-              <a:t>ftcs_results</a:t>
-            </a:r>
-            <a:r>
-              <a:rPr lang="en-US" dirty="0"/>
-              <a:t>”</a:t>
-            </a:r>
-          </a:p>
-          <a:p>
-            <a:r>
-              <a:rPr lang="en-US" dirty="0"/>
-              <a:t>Make heat2</a:t>
-            </a:r>
-          </a:p>
-          <a:p>
-            <a:r>
-              <a:rPr lang="en-US" dirty="0"/>
-              <a:t>Run ./heat </a:t>
-            </a:r>
-            <a:r>
-              <a:rPr lang="en-US" dirty="0" err="1"/>
-              <a:t>runame</a:t>
-            </a:r>
-            <a:r>
-              <a:rPr lang="en-US" dirty="0"/>
-              <a:t>=“</a:t>
-            </a:r>
-            <a:r>
-              <a:rPr lang="en-US" dirty="0" err="1"/>
-              <a:t>upwind_results</a:t>
-            </a:r>
-            <a:r>
-              <a:rPr lang="en-US" dirty="0"/>
-              <a:t>”</a:t>
-            </a:r>
-          </a:p>
-          <a:p>
-            <a:r>
-              <a:rPr lang="en-US" dirty="0"/>
-              <a:t>Verify against baselines</a:t>
-            </a:r>
-          </a:p>
-          <a:p>
-            <a:endParaRPr lang="en-US" dirty="0"/>
-          </a:p>
-          <a:p>
-            <a:pPr lvl="1"/>
-            <a:endParaRPr lang="en-US" b="1" dirty="0">
-              <a:solidFill>
-                <a:schemeClr val="accent6">
-                  <a:lumMod val="75000"/>
-                </a:schemeClr>
-              </a:solidFill>
-            </a:endParaRPr>
-          </a:p>
-        </p:txBody>
-      </p:sp>
-    </p:spTree>
-    <p:extLst>
-      <p:ext uri="{BB962C8B-B14F-4D97-AF65-F5344CB8AC3E}">
-        <p14:creationId xmlns:p14="http://schemas.microsoft.com/office/powerpoint/2010/main" val="1170639419"/>
-      </p:ext>
-    </p:extLst>
-  </p:cSld>
-  <p:clrMapOvr>
-    <a:masterClrMapping/>
-  </p:clrMapOvr>
-</p:sld>
-</file>
-
-<file path=ppt/slides/slide23.xml><?xml version="1.0" encoding="utf-8"?>
+<file path=ppt/slides/slide13.xml><?xml version="1.0" encoding="utf-8"?>
 <p:sld xmlns:a="http://schemas.openxmlformats.org/drawingml/2006/main" xmlns:r="http://schemas.openxmlformats.org/officeDocument/2006/relationships" xmlns:p="http://schemas.openxmlformats.org/presentationml/2006/main">
   <p:cSld>
     <p:spTree>
@@ -13188,7 +9525,7 @@
 </p:sld>
 </file>
 
-<file path=ppt/slides/slide24.xml><?xml version="1.0" encoding="utf-8"?>
+<file path=ppt/slides/slide14.xml><?xml version="1.0" encoding="utf-8"?>
 <p:sld xmlns:a="http://schemas.openxmlformats.org/drawingml/2006/main" xmlns:r="http://schemas.openxmlformats.org/officeDocument/2006/relationships" xmlns:p="http://schemas.openxmlformats.org/presentationml/2006/main">
   <p:cSld>
     <p:spTree>
@@ -14559,7 +10896,7 @@
 </p:sld>
 </file>
 
-<file path=ppt/slides/slide25.xml><?xml version="1.0" encoding="utf-8"?>
+<file path=ppt/slides/slide15.xml><?xml version="1.0" encoding="utf-8"?>
 <p:sld xmlns:a="http://schemas.openxmlformats.org/drawingml/2006/main" xmlns:r="http://schemas.openxmlformats.org/officeDocument/2006/relationships" xmlns:p="http://schemas.openxmlformats.org/presentationml/2006/main">
   <p:cSld>
     <p:spTree>
@@ -16674,7 +13011,7 @@
 </p:sld>
 </file>
 
-<file path=ppt/slides/slide26.xml><?xml version="1.0" encoding="utf-8"?>
+<file path=ppt/slides/slide16.xml><?xml version="1.0" encoding="utf-8"?>
 <p:sld xmlns:a="http://schemas.openxmlformats.org/drawingml/2006/main" xmlns:r="http://schemas.openxmlformats.org/officeDocument/2006/relationships" xmlns:p="http://schemas.openxmlformats.org/presentationml/2006/main">
   <p:cSld>
     <p:spTree>
@@ -17179,7 +13516,7 @@
 </p:sld>
 </file>
 
-<file path=ppt/slides/slide27.xml><?xml version="1.0" encoding="utf-8"?>
+<file path=ppt/slides/slide17.xml><?xml version="1.0" encoding="utf-8"?>
 <p:sld xmlns:a="http://schemas.openxmlformats.org/drawingml/2006/main" xmlns:r="http://schemas.openxmlformats.org/officeDocument/2006/relationships" xmlns:p="http://schemas.openxmlformats.org/presentationml/2006/main">
   <p:cSld>
     <p:spTree>
@@ -18003,7 +14340,7 @@
 </p:sld>
 </file>
 
-<file path=ppt/slides/slide28.xml><?xml version="1.0" encoding="utf-8"?>
+<file path=ppt/slides/slide18.xml><?xml version="1.0" encoding="utf-8"?>
 <p:sld xmlns:a="http://schemas.openxmlformats.org/drawingml/2006/main" xmlns:r="http://schemas.openxmlformats.org/officeDocument/2006/relationships" xmlns:p="http://schemas.openxmlformats.org/presentationml/2006/main">
   <p:cSld>
     <p:spTree>
@@ -18915,7 +15252,7 @@
 </p:sld>
 </file>
 
-<file path=ppt/slides/slide29.xml><?xml version="1.0" encoding="utf-8"?>
+<file path=ppt/slides/slide19.xml><?xml version="1.0" encoding="utf-8"?>
 <p:sld xmlns:a="http://schemas.openxmlformats.org/drawingml/2006/main" xmlns:r="http://schemas.openxmlformats.org/officeDocument/2006/relationships" xmlns:p="http://schemas.openxmlformats.org/presentationml/2006/main">
   <p:cSld>
     <p:spTree>
@@ -20224,7 +16561,7 @@
 </p:sld>
 </file>
 
-<file path=ppt/slides/slide3.xml><?xml version="1.0" encoding="utf-8"?>
+<file path=ppt/slides/slide2.xml><?xml version="1.0" encoding="utf-8"?>
 <p:sld xmlns:a="http://schemas.openxmlformats.org/drawingml/2006/main" xmlns:r="http://schemas.openxmlformats.org/officeDocument/2006/relationships" xmlns:p="http://schemas.openxmlformats.org/presentationml/2006/main">
   <p:cSld>
     <p:spTree>
@@ -20243,10 +16580,43 @@
       </p:grpSpPr>
       <p:sp>
         <p:nvSpPr>
-          <p:cNvPr id="8" name="Content Placeholder 2">
+          <p:cNvPr id="2" name="Title 1">
             <a:extLst>
               <a:ext uri="{FF2B5EF4-FFF2-40B4-BE49-F238E27FC236}">
-                <a16:creationId xmlns:a16="http://schemas.microsoft.com/office/drawing/2014/main" id="{5D30512F-71BE-C842-A3D2-4229E91863BB}"/>
+                <a16:creationId xmlns:a16="http://schemas.microsoft.com/office/drawing/2014/main" id="{6442C24D-D970-4D40-8F14-D70C10A96304}"/>
+              </a:ext>
+            </a:extLst>
+          </p:cNvPr>
+          <p:cNvSpPr>
+            <a:spLocks noGrp="1"/>
+          </p:cNvSpPr>
+          <p:nvPr>
+            <p:ph type="title"/>
+          </p:nvPr>
+        </p:nvSpPr>
+        <p:spPr>
+          <a:xfrm>
+            <a:off x="363096" y="112911"/>
+            <a:ext cx="11372473" cy="914400"/>
+          </a:xfrm>
+        </p:spPr>
+        <p:txBody>
+          <a:bodyPr/>
+          <a:lstStyle/>
+          <a:p>
+            <a:r>
+              <a:rPr lang="en-US" dirty="0"/>
+              <a:t>License, Citation and Acknowledgements</a:t>
+            </a:r>
+          </a:p>
+        </p:txBody>
+      </p:sp>
+      <p:sp>
+        <p:nvSpPr>
+          <p:cNvPr id="3" name="Content Placeholder 2">
+            <a:extLst>
+              <a:ext uri="{FF2B5EF4-FFF2-40B4-BE49-F238E27FC236}">
+                <a16:creationId xmlns:a16="http://schemas.microsoft.com/office/drawing/2014/main" id="{0385A3AB-B258-4D59-B407-F7D57545A163}"/>
               </a:ext>
             </a:extLst>
           </p:cNvPr>
@@ -20259,8 +16629,8 @@
         </p:nvSpPr>
         <p:spPr>
           <a:xfrm>
-            <a:off x="609443" y="1699995"/>
-            <a:ext cx="5881298" cy="4422776"/>
+            <a:off x="409507" y="570111"/>
+            <a:ext cx="11369809" cy="4047778"/>
           </a:xfrm>
         </p:spPr>
         <p:txBody>
@@ -20271,106 +16641,261 @@
               <a:buNone/>
             </a:pPr>
             <a:r>
-              <a:rPr lang="en-US" dirty="0">
+              <a:rPr lang="en-US" sz="2000" b="1" dirty="0"/>
+              <a:t>License and Citation</a:t>
+            </a:r>
+          </a:p>
+          <a:p>
+            <a:pPr>
+              <a:spcBef>
+                <a:spcPts val="400"/>
+              </a:spcBef>
+            </a:pPr>
+            <a:r>
+              <a:rPr lang="en-US" sz="1600" dirty="0"/>
+              <a:t>This work is licensed under a </a:t>
+            </a:r>
+            <a:r>
+              <a:rPr lang="en-US" sz="1600" dirty="0">
+                <a:hlinkClick r:id="rId2"/>
+              </a:rPr>
+              <a:t>Creative</a:t>
+            </a:r>
+            <a:r>
+              <a:rPr lang="en-US" sz="1600" dirty="0">
+                <a:hlinkClick r:id="rId3"/>
+              </a:rPr>
+              <a:t> Commons Attribution 4.0 International License</a:t>
+            </a:r>
+            <a:r>
+              <a:rPr lang="en-US" sz="1600" dirty="0"/>
+              <a:t> (CC BY 4.0).</a:t>
+            </a:r>
+          </a:p>
+          <a:p>
+            <a:pPr>
+              <a:spcBef>
+                <a:spcPts val="400"/>
+              </a:spcBef>
+            </a:pPr>
+            <a:r>
+              <a:rPr lang="en-US" sz="1600" b="1" dirty="0"/>
+              <a:t>The requested citation the overall tutorial is: </a:t>
+            </a:r>
+            <a:r>
+              <a:rPr lang="en-US" sz="1600" dirty="0"/>
+              <a:t>Anshu Dubey, David E. Bernholdt, Todd Gamblin, and Jared O’Neal, Software Productivity and Sustainability track, in Argonne Training Program on Extreme-Scale Computing, St. Charles, Illinois, 2024. DOI: </a:t>
+            </a:r>
+            <a:r>
+              <a:rPr lang="en-US" sz="1600" dirty="0">
+                <a:hlinkClick r:id="rId4"/>
+              </a:rPr>
+              <a:t>10.6084/m9.figshare.26384188</a:t>
+            </a:r>
+            <a:r>
+              <a:rPr lang="en-US" sz="1600" dirty="0"/>
+              <a:t>.</a:t>
+            </a:r>
+            <a:endParaRPr lang="en-US" sz="1600" b="0" i="0" dirty="0">
+              <a:solidFill>
+                <a:srgbClr val="111111"/>
+              </a:solidFill>
+              <a:effectLst/>
+              <a:latin typeface="+mn-lt"/>
+            </a:endParaRPr>
+          </a:p>
+          <a:p>
+            <a:pPr>
+              <a:spcBef>
+                <a:spcPts val="400"/>
+              </a:spcBef>
+            </a:pPr>
+            <a:r>
+              <a:rPr lang="en-US" sz="1600" dirty="0"/>
+              <a:t>Individual modules may be cited as </a:t>
+            </a:r>
+            <a:r>
+              <a:rPr lang="en-US" sz="1600" i="1" dirty="0"/>
+              <a:t>Speaker, Module Title</a:t>
+            </a:r>
+            <a:r>
+              <a:rPr lang="en-US" sz="1600" dirty="0"/>
+              <a:t>, in </a:t>
+            </a:r>
+            <a:r>
+              <a:rPr lang="en-US" sz="1600" b="0" i="1" dirty="0">
                 <a:solidFill>
-                  <a:srgbClr val="FF0000"/>
+                  <a:srgbClr val="111111"/>
                 </a:solidFill>
+                <a:effectLst/>
+                <a:latin typeface="+mn-lt"/>
               </a:rPr>
-              <a:t>Definition: Refactoring is a disciplined technique for restructuring an existing body of code, altering its internal structure without changing its external behavior.</a:t>
-            </a:r>
-          </a:p>
-          <a:p>
-            <a:r>
-              <a:rPr lang="en-US" dirty="0"/>
-              <a:t>Different from development</a:t>
-            </a:r>
-          </a:p>
-          <a:p>
-            <a:pPr lvl="1"/>
-            <a:r>
-              <a:rPr lang="en-US" dirty="0"/>
-              <a:t>You have a working code </a:t>
-            </a:r>
-          </a:p>
-          <a:p>
-            <a:pPr lvl="1"/>
-            <a:r>
-              <a:rPr lang="en-US" dirty="0"/>
-              <a:t>You know and understand the behavior</a:t>
-            </a:r>
-          </a:p>
-          <a:p>
-            <a:pPr lvl="1"/>
-            <a:r>
-              <a:rPr lang="en-US" dirty="0"/>
-              <a:t>You have a baseline that you can use for comparison</a:t>
-            </a:r>
-          </a:p>
-          <a:p>
-            <a:endParaRPr lang="en-US" dirty="0"/>
-          </a:p>
-          <a:p>
-            <a:pPr lvl="1"/>
-            <a:endParaRPr lang="en-US" dirty="0"/>
-          </a:p>
-          <a:p>
-            <a:pPr lvl="2"/>
-            <a:endParaRPr lang="en-US" dirty="0"/>
+              <a:t>Tutorial Title</a:t>
+            </a:r>
+            <a:r>
+              <a:rPr lang="en-US" sz="1600" dirty="0"/>
+              <a:t>, …</a:t>
+            </a:r>
+          </a:p>
+          <a:p>
+            <a:pPr marL="0" indent="0">
+              <a:spcBef>
+                <a:spcPts val="800"/>
+              </a:spcBef>
+              <a:buNone/>
+            </a:pPr>
+            <a:r>
+              <a:rPr lang="en-US" sz="2000" b="1" dirty="0"/>
+              <a:t>Acknowledgements</a:t>
+            </a:r>
+          </a:p>
+          <a:p>
+            <a:pPr>
+              <a:spcBef>
+                <a:spcPts val="400"/>
+              </a:spcBef>
+            </a:pPr>
+            <a:r>
+              <a:rPr lang="en-US" sz="1400" dirty="0"/>
+              <a:t>This work was supported by the U.S. Department of Energy Office of Science, Office of Advanced Scientific Computing Research (ASCR), and by the Exascale Computing Project (17-SC-20-SC), a collaborative effort of the U.S. Department of Energy Office of Science and the National Nuclear Security Administration</a:t>
+            </a:r>
+            <a:r>
+              <a:rPr lang="en-US" sz="1400" i="1" dirty="0"/>
+              <a:t>.</a:t>
+            </a:r>
+          </a:p>
+          <a:p>
+            <a:pPr>
+              <a:spcBef>
+                <a:spcPts val="400"/>
+              </a:spcBef>
+            </a:pPr>
+            <a:r>
+              <a:rPr lang="en-US" sz="1400" b="0" i="0" dirty="0">
+                <a:effectLst/>
+                <a:latin typeface="+mn-lt"/>
+              </a:rPr>
+              <a:t>This work was supported by the U.S. Department of Energy, Office of Science, Office of Advanced Scientific Computing Research, Next-Generation Scientific Software Technologies (NGSST) program.</a:t>
+            </a:r>
+          </a:p>
+          <a:p>
+            <a:pPr>
+              <a:spcBef>
+                <a:spcPts val="400"/>
+              </a:spcBef>
+            </a:pPr>
+            <a:r>
+              <a:rPr lang="en-US" sz="1400" dirty="0"/>
+              <a:t>This work was performed in part at the Argonne National Laboratory, which is managed by UChicago Argonne, LLC for the U.S. Department of Energy under Contract No. DE-AC02-06CH11357.</a:t>
+            </a:r>
+          </a:p>
+          <a:p>
+            <a:pPr>
+              <a:spcBef>
+                <a:spcPts val="400"/>
+              </a:spcBef>
+            </a:pPr>
+            <a:r>
+              <a:rPr lang="en-US" sz="1400" dirty="0"/>
+              <a:t>This work was performed in part at the Lawrence Livermore National Laboratory, which is managed by Lawrence Livermore National Security, LLC for the U.S. Department of Energy under Contract No. DE-AC52-07NA27344.</a:t>
+            </a:r>
+          </a:p>
+          <a:p>
+            <a:pPr>
+              <a:spcBef>
+                <a:spcPts val="400"/>
+              </a:spcBef>
+            </a:pPr>
+            <a:r>
+              <a:rPr lang="en-US" sz="1400" dirty="0"/>
+              <a:t>This work was performed in part at the Los Alamos National Laboratory, which is managed by Triad National Security, LLC for the U.S. Department of Energy under Contract No.89233218CNA000001</a:t>
+            </a:r>
+          </a:p>
+          <a:p>
+            <a:pPr>
+              <a:spcBef>
+                <a:spcPts val="400"/>
+              </a:spcBef>
+            </a:pPr>
+            <a:r>
+              <a:rPr lang="en-US" sz="1400" dirty="0"/>
+              <a:t>This work was performed in part at the Oak Ridge National Laboratory, which is managed by UT-Battelle, LLC for the U.S. Department of Energy under Contract No. DE-AC05-00OR22725.</a:t>
+            </a:r>
+          </a:p>
+          <a:p>
+            <a:pPr>
+              <a:spcBef>
+                <a:spcPts val="400"/>
+              </a:spcBef>
+            </a:pPr>
+            <a:r>
+              <a:rPr lang="en-US" sz="1400" dirty="0"/>
+              <a:t>This work was performed in part at Sandia National Laboratories. Sandia National Laboratories is a multi-mission laboratory managed and operated by National Technology and Engineering Solutions of Sandia, LLC., a wholly owned subsidiary of Honeywell International, Inc., for the U.S. Department of Energy’s National Nuclear Security Administration under contract DE-NA0003525.</a:t>
+            </a:r>
           </a:p>
         </p:txBody>
       </p:sp>
-      <p:sp>
-        <p:nvSpPr>
-          <p:cNvPr id="2" name="Title 1"/>
-          <p:cNvSpPr>
-            <a:spLocks noGrp="1"/>
-          </p:cNvSpPr>
-          <p:nvPr>
-            <p:ph type="title"/>
-          </p:nvPr>
-        </p:nvSpPr>
-        <p:spPr/>
-        <p:txBody>
-          <a:bodyPr/>
-          <a:lstStyle/>
-          <a:p>
-            <a:r>
-              <a:rPr lang="en-US" dirty="0"/>
-              <a:t>What is Refactoring </a:t>
-            </a:r>
-            <a:br>
-              <a:rPr lang="en-US" dirty="0"/>
-            </a:br>
-            <a:endParaRPr lang="en-US" dirty="0"/>
-          </a:p>
-        </p:txBody>
-      </p:sp>
+      <p:pic>
+        <p:nvPicPr>
+          <p:cNvPr id="4" name="Picture 2" descr="https://licensebuttons.net/l/by/4.0/88x31.png">
+            <a:extLst>
+              <a:ext uri="{FF2B5EF4-FFF2-40B4-BE49-F238E27FC236}">
+                <a16:creationId xmlns:a16="http://schemas.microsoft.com/office/drawing/2014/main" id="{61840015-22A0-4634-A2DE-AA05F998FD3A}"/>
+              </a:ext>
+            </a:extLst>
+          </p:cNvPr>
+          <p:cNvPicPr>
+            <a:picLocks noChangeAspect="1" noChangeArrowheads="1"/>
+          </p:cNvPicPr>
+          <p:nvPr/>
+        </p:nvPicPr>
+        <p:blipFill>
+          <a:blip r:embed="rId5">
+            <a:extLst>
+              <a:ext uri="{28A0092B-C50C-407E-A947-70E740481C1C}">
+                <a14:useLocalDpi xmlns:a14="http://schemas.microsoft.com/office/drawing/2010/main" val="0"/>
+              </a:ext>
+            </a:extLst>
+          </a:blip>
+          <a:srcRect/>
+          <a:stretch>
+            <a:fillRect/>
+          </a:stretch>
+        </p:blipFill>
+        <p:spPr bwMode="auto">
+          <a:xfrm>
+            <a:off x="10230336" y="879673"/>
+            <a:ext cx="838200" cy="295275"/>
+          </a:xfrm>
+          <a:prstGeom prst="rect">
+            <a:avLst/>
+          </a:prstGeom>
+          <a:noFill/>
+          <a:extLst>
+            <a:ext uri="{909E8E84-426E-40DD-AFC4-6F175D3DCCD1}">
+              <a14:hiddenFill xmlns:a14="http://schemas.microsoft.com/office/drawing/2010/main">
+                <a:solidFill>
+                  <a:srgbClr val="FFFFFF"/>
+                </a:solidFill>
+              </a14:hiddenFill>
+            </a:ext>
+          </a:extLst>
+        </p:spPr>
+      </p:pic>
     </p:spTree>
     <p:extLst>
       <p:ext uri="{BB962C8B-B14F-4D97-AF65-F5344CB8AC3E}">
-        <p14:creationId xmlns:p14="http://schemas.microsoft.com/office/powerpoint/2010/main" val="1165708642"/>
+        <p14:creationId xmlns:p14="http://schemas.microsoft.com/office/powerpoint/2010/main" val="688247269"/>
       </p:ext>
     </p:extLst>
   </p:cSld>
   <p:clrMapOvr>
     <a:masterClrMapping/>
   </p:clrMapOvr>
-  <mc:AlternateContent xmlns:mc="http://schemas.openxmlformats.org/markup-compatibility/2006" xmlns:p14="http://schemas.microsoft.com/office/powerpoint/2010/main">
-    <mc:Choice Requires="p14">
-      <p:transition p14:dur="250">
-        <p:fade/>
-      </p:transition>
-    </mc:Choice>
-    <mc:Fallback xmlns="">
-      <p:transition>
-        <p:fade/>
-      </p:transition>
-    </mc:Fallback>
-  </mc:AlternateContent>
 </p:sld>
 </file>
 
-<file path=ppt/slides/slide30.xml><?xml version="1.0" encoding="utf-8"?>
+<file path=ppt/slides/slide20.xml><?xml version="1.0" encoding="utf-8"?>
 <p:sld xmlns:a="http://schemas.openxmlformats.org/drawingml/2006/main" xmlns:r="http://schemas.openxmlformats.org/officeDocument/2006/relationships" xmlns:p="http://schemas.openxmlformats.org/presentationml/2006/main">
   <p:cSld>
     <p:spTree>
@@ -22473,7 +18998,7 @@
 </p:sld>
 </file>
 
-<file path=ppt/slides/slide31.xml><?xml version="1.0" encoding="utf-8"?>
+<file path=ppt/slides/slide21.xml><?xml version="1.0" encoding="utf-8"?>
 <p:sld xmlns:a="http://schemas.openxmlformats.org/drawingml/2006/main" xmlns:r="http://schemas.openxmlformats.org/officeDocument/2006/relationships" xmlns:p="http://schemas.openxmlformats.org/presentationml/2006/main">
   <p:cSld>
     <p:spTree>
@@ -25360,7 +21885,7 @@
 </p:sld>
 </file>
 
-<file path=ppt/slides/slide32.xml><?xml version="1.0" encoding="utf-8"?>
+<file path=ppt/slides/slide22.xml><?xml version="1.0" encoding="utf-8"?>
 <p:sld xmlns:a="http://schemas.openxmlformats.org/drawingml/2006/main" xmlns:r="http://schemas.openxmlformats.org/officeDocument/2006/relationships" xmlns:p="http://schemas.openxmlformats.org/presentationml/2006/main">
   <p:cSld>
     <p:spTree>
@@ -25599,7 +22124,7 @@
 </p:sld>
 </file>
 
-<file path=ppt/slides/slide33.xml><?xml version="1.0" encoding="utf-8"?>
+<file path=ppt/slides/slide23.xml><?xml version="1.0" encoding="utf-8"?>
 <p:sld xmlns:a="http://schemas.openxmlformats.org/drawingml/2006/main" xmlns:r="http://schemas.openxmlformats.org/officeDocument/2006/relationships" xmlns:p="http://schemas.openxmlformats.org/presentationml/2006/main">
   <p:cSld>
     <p:spTree>
@@ -25911,7 +22436,7 @@
 </p:sld>
 </file>
 
-<file path=ppt/slides/slide34.xml><?xml version="1.0" encoding="utf-8"?>
+<file path=ppt/slides/slide24.xml><?xml version="1.0" encoding="utf-8"?>
 <p:sld xmlns:a="http://schemas.openxmlformats.org/drawingml/2006/main" xmlns:r="http://schemas.openxmlformats.org/officeDocument/2006/relationships" xmlns:p="http://schemas.openxmlformats.org/presentationml/2006/main">
   <p:cSld>
     <p:spTree>
@@ -26117,7 +22642,7 @@
 </p:sld>
 </file>
 
-<file path=ppt/slides/slide35.xml><?xml version="1.0" encoding="utf-8"?>
+<file path=ppt/slides/slide25.xml><?xml version="1.0" encoding="utf-8"?>
 <p:sld xmlns:a="http://schemas.openxmlformats.org/drawingml/2006/main" xmlns:r="http://schemas.openxmlformats.org/officeDocument/2006/relationships" xmlns:p="http://schemas.openxmlformats.org/presentationml/2006/main">
   <p:cSld>
     <p:spTree>
@@ -26346,7 +22871,7 @@
 </p:sld>
 </file>
 
-<file path=ppt/slides/slide36.xml><?xml version="1.0" encoding="utf-8"?>
+<file path=ppt/slides/slide26.xml><?xml version="1.0" encoding="utf-8"?>
 <p:sld xmlns:a="http://schemas.openxmlformats.org/drawingml/2006/main" xmlns:r="http://schemas.openxmlformats.org/officeDocument/2006/relationships" xmlns:p="http://schemas.openxmlformats.org/presentationml/2006/main">
   <p:cSld>
     <p:spTree>
@@ -26641,7 +23166,7 @@
 </p:sld>
 </file>
 
-<file path=ppt/slides/slide37.xml><?xml version="1.0" encoding="utf-8"?>
+<file path=ppt/slides/slide27.xml><?xml version="1.0" encoding="utf-8"?>
 <p:sld xmlns:a="http://schemas.openxmlformats.org/drawingml/2006/main" xmlns:r="http://schemas.openxmlformats.org/officeDocument/2006/relationships" xmlns:p="http://schemas.openxmlformats.org/presentationml/2006/main">
   <p:cSld>
     <p:spTree>
@@ -26880,7 +23405,7 @@
 </p:sld>
 </file>
 
-<file path=ppt/slides/slide38.xml><?xml version="1.0" encoding="utf-8"?>
+<file path=ppt/slides/slide28.xml><?xml version="1.0" encoding="utf-8"?>
 <p:sld xmlns:a="http://schemas.openxmlformats.org/drawingml/2006/main" xmlns:r="http://schemas.openxmlformats.org/officeDocument/2006/relationships" xmlns:p="http://schemas.openxmlformats.org/presentationml/2006/main">
   <p:cSld>
     <p:spTree>
@@ -27165,7 +23690,7 @@
 </p:sld>
 </file>
 
-<file path=ppt/slides/slide39.xml><?xml version="1.0" encoding="utf-8"?>
+<file path=ppt/slides/slide29.xml><?xml version="1.0" encoding="utf-8"?>
 <p:sld xmlns:a="http://schemas.openxmlformats.org/drawingml/2006/main" xmlns:r="http://schemas.openxmlformats.org/officeDocument/2006/relationships" xmlns:p="http://schemas.openxmlformats.org/presentationml/2006/main">
   <p:cSld>
     <p:spTree>
@@ -27393,6 +23918,405 @@
       </p:transition>
     </mc:Fallback>
   </mc:AlternateContent>
+</p:sld>
+</file>
+
+<file path=ppt/slides/slide3.xml><?xml version="1.0" encoding="utf-8"?>
+<p:sld xmlns:a="http://schemas.openxmlformats.org/drawingml/2006/main" xmlns:r="http://schemas.openxmlformats.org/officeDocument/2006/relationships" xmlns:p="http://schemas.openxmlformats.org/presentationml/2006/main">
+  <p:cSld>
+    <p:spTree>
+      <p:nvGrpSpPr>
+        <p:cNvPr id="1" name=""/>
+        <p:cNvGrpSpPr/>
+        <p:nvPr/>
+      </p:nvGrpSpPr>
+      <p:grpSpPr>
+        <a:xfrm>
+          <a:off x="0" y="0"/>
+          <a:ext cx="0" cy="0"/>
+          <a:chOff x="0" y="0"/>
+          <a:chExt cx="0" cy="0"/>
+        </a:xfrm>
+      </p:grpSpPr>
+      <p:sp>
+        <p:nvSpPr>
+          <p:cNvPr id="8" name="Content Placeholder 2">
+            <a:extLst>
+              <a:ext uri="{FF2B5EF4-FFF2-40B4-BE49-F238E27FC236}">
+                <a16:creationId xmlns:a16="http://schemas.microsoft.com/office/drawing/2014/main" id="{5D30512F-71BE-C842-A3D2-4229E91863BB}"/>
+              </a:ext>
+            </a:extLst>
+          </p:cNvPr>
+          <p:cNvSpPr>
+            <a:spLocks noGrp="1"/>
+          </p:cNvSpPr>
+          <p:nvPr>
+            <p:ph idx="1"/>
+          </p:nvPr>
+        </p:nvSpPr>
+        <p:spPr>
+          <a:xfrm>
+            <a:off x="609443" y="1699995"/>
+            <a:ext cx="5881298" cy="4422776"/>
+          </a:xfrm>
+        </p:spPr>
+        <p:txBody>
+          <a:bodyPr/>
+          <a:lstStyle/>
+          <a:p>
+            <a:pPr marL="0" indent="0">
+              <a:buNone/>
+            </a:pPr>
+            <a:r>
+              <a:rPr lang="en-US" dirty="0">
+                <a:solidFill>
+                  <a:srgbClr val="FF0000"/>
+                </a:solidFill>
+              </a:rPr>
+              <a:t>Definition: Refactoring is a disciplined technique for restructuring an existing body of code, altering its internal structure without changing its external behavior.</a:t>
+            </a:r>
+          </a:p>
+          <a:p>
+            <a:r>
+              <a:rPr lang="en-US" dirty="0"/>
+              <a:t>Different from development</a:t>
+            </a:r>
+          </a:p>
+          <a:p>
+            <a:pPr lvl="1"/>
+            <a:r>
+              <a:rPr lang="en-US" dirty="0"/>
+              <a:t>You have a working code </a:t>
+            </a:r>
+          </a:p>
+          <a:p>
+            <a:pPr lvl="1"/>
+            <a:r>
+              <a:rPr lang="en-US" dirty="0"/>
+              <a:t>You know and understand the behavior</a:t>
+            </a:r>
+          </a:p>
+          <a:p>
+            <a:pPr lvl="1"/>
+            <a:r>
+              <a:rPr lang="en-US" dirty="0"/>
+              <a:t>You have a baseline that you can use for comparison</a:t>
+            </a:r>
+          </a:p>
+          <a:p>
+            <a:endParaRPr lang="en-US" dirty="0"/>
+          </a:p>
+          <a:p>
+            <a:pPr lvl="1"/>
+            <a:endParaRPr lang="en-US" dirty="0"/>
+          </a:p>
+          <a:p>
+            <a:pPr lvl="2"/>
+            <a:endParaRPr lang="en-US" dirty="0"/>
+          </a:p>
+        </p:txBody>
+      </p:sp>
+      <p:sp>
+        <p:nvSpPr>
+          <p:cNvPr id="2" name="Title 1"/>
+          <p:cNvSpPr>
+            <a:spLocks noGrp="1"/>
+          </p:cNvSpPr>
+          <p:nvPr>
+            <p:ph type="title"/>
+          </p:nvPr>
+        </p:nvSpPr>
+        <p:spPr/>
+        <p:txBody>
+          <a:bodyPr/>
+          <a:lstStyle/>
+          <a:p>
+            <a:r>
+              <a:rPr lang="en-US" dirty="0"/>
+              <a:t>What is Refactoring </a:t>
+            </a:r>
+            <a:br>
+              <a:rPr lang="en-US" dirty="0"/>
+            </a:br>
+            <a:endParaRPr lang="en-US" dirty="0"/>
+          </a:p>
+        </p:txBody>
+      </p:sp>
+    </p:spTree>
+    <p:extLst>
+      <p:ext uri="{BB962C8B-B14F-4D97-AF65-F5344CB8AC3E}">
+        <p14:creationId xmlns:p14="http://schemas.microsoft.com/office/powerpoint/2010/main" val="1165708642"/>
+      </p:ext>
+    </p:extLst>
+  </p:cSld>
+  <p:clrMapOvr>
+    <a:masterClrMapping/>
+  </p:clrMapOvr>
+  <mc:AlternateContent xmlns:mc="http://schemas.openxmlformats.org/markup-compatibility/2006" xmlns:p14="http://schemas.microsoft.com/office/powerpoint/2010/main">
+    <mc:Choice Requires="p14">
+      <p:transition p14:dur="250">
+        <p:fade/>
+      </p:transition>
+    </mc:Choice>
+    <mc:Fallback xmlns="">
+      <p:transition>
+        <p:fade/>
+      </p:transition>
+    </mc:Fallback>
+  </mc:AlternateContent>
+</p:sld>
+</file>
+
+<file path=ppt/slides/slide30.xml><?xml version="1.0" encoding="utf-8"?>
+<p:sld xmlns:a="http://schemas.openxmlformats.org/drawingml/2006/main" xmlns:r="http://schemas.openxmlformats.org/officeDocument/2006/relationships" xmlns:p="http://schemas.openxmlformats.org/presentationml/2006/main">
+  <p:cSld>
+    <p:spTree>
+      <p:nvGrpSpPr>
+        <p:cNvPr id="1" name=""/>
+        <p:cNvGrpSpPr/>
+        <p:nvPr/>
+      </p:nvGrpSpPr>
+      <p:grpSpPr>
+        <a:xfrm>
+          <a:off x="0" y="0"/>
+          <a:ext cx="0" cy="0"/>
+          <a:chOff x="0" y="0"/>
+          <a:chExt cx="0" cy="0"/>
+        </a:xfrm>
+      </p:grpSpPr>
+      <p:sp>
+        <p:nvSpPr>
+          <p:cNvPr id="2" name="Title 1"/>
+          <p:cNvSpPr>
+            <a:spLocks noGrp="1"/>
+          </p:cNvSpPr>
+          <p:nvPr>
+            <p:ph type="title"/>
+          </p:nvPr>
+        </p:nvSpPr>
+        <p:spPr/>
+        <p:txBody>
+          <a:bodyPr/>
+          <a:lstStyle/>
+          <a:p>
+            <a:r>
+              <a:rPr lang="en-US" dirty="0"/>
+              <a:t>Steps in the Process</a:t>
+            </a:r>
+          </a:p>
+        </p:txBody>
+      </p:sp>
+      <p:pic>
+        <p:nvPicPr>
+          <p:cNvPr id="10" name="Content Placeholder 6">
+            <a:extLst>
+              <a:ext uri="{FF2B5EF4-FFF2-40B4-BE49-F238E27FC236}">
+                <a16:creationId xmlns:a16="http://schemas.microsoft.com/office/drawing/2014/main" id="{62426650-9F82-EB44-8ED8-BA2D3B851310}"/>
+              </a:ext>
+            </a:extLst>
+          </p:cNvPr>
+          <p:cNvPicPr>
+            <a:picLocks noChangeAspect="1"/>
+          </p:cNvPicPr>
+          <p:nvPr/>
+        </p:nvPicPr>
+        <p:blipFill>
+          <a:blip r:embed="rId2"/>
+          <a:stretch>
+            <a:fillRect/>
+          </a:stretch>
+        </p:blipFill>
+        <p:spPr>
+          <a:xfrm>
+            <a:off x="1302460" y="1258433"/>
+            <a:ext cx="6812840" cy="4697051"/>
+          </a:xfrm>
+          <a:prstGeom prst="rect">
+            <a:avLst/>
+          </a:prstGeom>
+        </p:spPr>
+      </p:pic>
+    </p:spTree>
+    <p:extLst>
+      <p:ext uri="{BB962C8B-B14F-4D97-AF65-F5344CB8AC3E}">
+        <p14:creationId xmlns:p14="http://schemas.microsoft.com/office/powerpoint/2010/main" val="614372201"/>
+      </p:ext>
+    </p:extLst>
+  </p:cSld>
+  <p:clrMapOvr>
+    <a:masterClrMapping/>
+  </p:clrMapOvr>
+  <mc:AlternateContent xmlns:mc="http://schemas.openxmlformats.org/markup-compatibility/2006" xmlns:p14="http://schemas.microsoft.com/office/powerpoint/2010/main">
+    <mc:Choice Requires="p14">
+      <p:transition p14:dur="250">
+        <p:fade/>
+      </p:transition>
+    </mc:Choice>
+    <mc:Fallback xmlns="">
+      <p:transition>
+        <p:fade/>
+      </p:transition>
+    </mc:Fallback>
+  </mc:AlternateContent>
+</p:sld>
+</file>
+
+<file path=ppt/slides/slide31.xml><?xml version="1.0" encoding="utf-8"?>
+<p:sld xmlns:a="http://schemas.openxmlformats.org/drawingml/2006/main" xmlns:r="http://schemas.openxmlformats.org/officeDocument/2006/relationships" xmlns:p="http://schemas.openxmlformats.org/presentationml/2006/main">
+  <p:cSld>
+    <p:spTree>
+      <p:nvGrpSpPr>
+        <p:cNvPr id="1" name=""/>
+        <p:cNvGrpSpPr/>
+        <p:nvPr/>
+      </p:nvGrpSpPr>
+      <p:grpSpPr>
+        <a:xfrm>
+          <a:off x="0" y="0"/>
+          <a:ext cx="0" cy="0"/>
+          <a:chOff x="0" y="0"/>
+          <a:chExt cx="0" cy="0"/>
+        </a:xfrm>
+      </p:grpSpPr>
+      <p:sp>
+        <p:nvSpPr>
+          <p:cNvPr id="3" name="Title 2">
+            <a:extLst>
+              <a:ext uri="{FF2B5EF4-FFF2-40B4-BE49-F238E27FC236}">
+                <a16:creationId xmlns:a16="http://schemas.microsoft.com/office/drawing/2014/main" id="{54026D64-CF81-4590-8E7D-51586DE803B8}"/>
+              </a:ext>
+            </a:extLst>
+          </p:cNvPr>
+          <p:cNvSpPr>
+            <a:spLocks noGrp="1"/>
+          </p:cNvSpPr>
+          <p:nvPr>
+            <p:ph type="title"/>
+          </p:nvPr>
+        </p:nvSpPr>
+        <p:spPr>
+          <a:xfrm>
+            <a:off x="365760" y="411480"/>
+            <a:ext cx="11372473" cy="914400"/>
+          </a:xfrm>
+        </p:spPr>
+        <p:txBody>
+          <a:bodyPr/>
+          <a:lstStyle/>
+          <a:p>
+            <a:r>
+              <a:rPr lang="en-US"/>
+              <a:t>To Have a Good </a:t>
+            </a:r>
+            <a:r>
+              <a:rPr lang="en-US" dirty="0"/>
+              <a:t>O</a:t>
+            </a:r>
+            <a:r>
+              <a:rPr lang="en-US"/>
+              <a:t>utcome from Refactoring</a:t>
+            </a:r>
+            <a:endParaRPr lang="en-US" dirty="0"/>
+          </a:p>
+        </p:txBody>
+      </p:sp>
+      <p:sp>
+        <p:nvSpPr>
+          <p:cNvPr id="4" name="Content Placeholder 3">
+            <a:extLst>
+              <a:ext uri="{FF2B5EF4-FFF2-40B4-BE49-F238E27FC236}">
+                <a16:creationId xmlns:a16="http://schemas.microsoft.com/office/drawing/2014/main" id="{F0098609-3DB0-410A-ACC1-6699EBD68CF4}"/>
+              </a:ext>
+            </a:extLst>
+          </p:cNvPr>
+          <p:cNvSpPr>
+            <a:spLocks noGrp="1"/>
+          </p:cNvSpPr>
+          <p:nvPr>
+            <p:ph idx="1"/>
+          </p:nvPr>
+        </p:nvSpPr>
+        <p:spPr>
+          <a:xfrm>
+            <a:off x="365760" y="1737360"/>
+            <a:ext cx="11369809" cy="4047778"/>
+          </a:xfrm>
+        </p:spPr>
+        <p:txBody>
+          <a:bodyPr/>
+          <a:lstStyle/>
+          <a:p>
+            <a:pPr marL="457200" indent="-457200">
+              <a:buFont typeface="+mj-lt"/>
+              <a:buAutoNum type="arabicPeriod"/>
+            </a:pPr>
+            <a:r>
+              <a:rPr lang="en-US" dirty="0"/>
+              <a:t>Know why</a:t>
+            </a:r>
+          </a:p>
+          <a:p>
+            <a:pPr marL="457200" indent="-457200">
+              <a:buFont typeface="+mj-lt"/>
+              <a:buAutoNum type="arabicPeriod"/>
+            </a:pPr>
+            <a:r>
+              <a:rPr lang="en-US" dirty="0"/>
+              <a:t>Know how much</a:t>
+            </a:r>
+          </a:p>
+          <a:p>
+            <a:pPr marL="457200" indent="-457200">
+              <a:buFont typeface="+mj-lt"/>
+              <a:buAutoNum type="arabicPeriod"/>
+            </a:pPr>
+            <a:r>
+              <a:rPr lang="en-US" dirty="0"/>
+              <a:t>Know the cost</a:t>
+            </a:r>
+          </a:p>
+          <a:p>
+            <a:pPr marL="457200" indent="-457200">
+              <a:buFont typeface="+mj-lt"/>
+              <a:buAutoNum type="arabicPeriod"/>
+            </a:pPr>
+            <a:r>
+              <a:rPr lang="en-US" dirty="0"/>
+              <a:t>Plan</a:t>
+            </a:r>
+          </a:p>
+          <a:p>
+            <a:pPr marL="457200" indent="-457200">
+              <a:buFont typeface="+mj-lt"/>
+              <a:buAutoNum type="arabicPeriod"/>
+            </a:pPr>
+            <a:r>
+              <a:rPr lang="en-US" dirty="0"/>
+              <a:t>Have strong testing and verification</a:t>
+            </a:r>
+          </a:p>
+          <a:p>
+            <a:pPr marL="457200" indent="-457200">
+              <a:buFont typeface="+mj-lt"/>
+              <a:buAutoNum type="arabicPeriod"/>
+            </a:pPr>
+            <a:r>
+              <a:rPr lang="en-US" dirty="0"/>
+              <a:t>Get buy-in from stakeholders</a:t>
+            </a:r>
+          </a:p>
+        </p:txBody>
+      </p:sp>
+    </p:spTree>
+    <p:extLst>
+      <p:ext uri="{BB962C8B-B14F-4D97-AF65-F5344CB8AC3E}">
+        <p14:creationId xmlns:p14="http://schemas.microsoft.com/office/powerpoint/2010/main" val="2352381746"/>
+      </p:ext>
+    </p:extLst>
+  </p:cSld>
+  <p:clrMapOvr>
+    <a:masterClrMapping/>
+  </p:clrMapOvr>
 </p:sld>
 </file>
 
@@ -27847,259 +24771,6 @@
       </p:transition>
     </mc:Fallback>
   </mc:AlternateContent>
-</p:sld>
-</file>
-
-<file path=ppt/slides/slide40.xml><?xml version="1.0" encoding="utf-8"?>
-<p:sld xmlns:a="http://schemas.openxmlformats.org/drawingml/2006/main" xmlns:r="http://schemas.openxmlformats.org/officeDocument/2006/relationships" xmlns:p="http://schemas.openxmlformats.org/presentationml/2006/main">
-  <p:cSld>
-    <p:spTree>
-      <p:nvGrpSpPr>
-        <p:cNvPr id="1" name=""/>
-        <p:cNvGrpSpPr/>
-        <p:nvPr/>
-      </p:nvGrpSpPr>
-      <p:grpSpPr>
-        <a:xfrm>
-          <a:off x="0" y="0"/>
-          <a:ext cx="0" cy="0"/>
-          <a:chOff x="0" y="0"/>
-          <a:chExt cx="0" cy="0"/>
-        </a:xfrm>
-      </p:grpSpPr>
-      <p:sp>
-        <p:nvSpPr>
-          <p:cNvPr id="2" name="Title 1"/>
-          <p:cNvSpPr>
-            <a:spLocks noGrp="1"/>
-          </p:cNvSpPr>
-          <p:nvPr>
-            <p:ph type="title"/>
-          </p:nvPr>
-        </p:nvSpPr>
-        <p:spPr/>
-        <p:txBody>
-          <a:bodyPr/>
-          <a:lstStyle/>
-          <a:p>
-            <a:r>
-              <a:rPr lang="en-US" dirty="0"/>
-              <a:t>Steps in the Process</a:t>
-            </a:r>
-          </a:p>
-        </p:txBody>
-      </p:sp>
-      <p:pic>
-        <p:nvPicPr>
-          <p:cNvPr id="10" name="Content Placeholder 6">
-            <a:extLst>
-              <a:ext uri="{FF2B5EF4-FFF2-40B4-BE49-F238E27FC236}">
-                <a16:creationId xmlns:a16="http://schemas.microsoft.com/office/drawing/2014/main" id="{62426650-9F82-EB44-8ED8-BA2D3B851310}"/>
-              </a:ext>
-            </a:extLst>
-          </p:cNvPr>
-          <p:cNvPicPr>
-            <a:picLocks noChangeAspect="1"/>
-          </p:cNvPicPr>
-          <p:nvPr/>
-        </p:nvPicPr>
-        <p:blipFill>
-          <a:blip r:embed="rId2"/>
-          <a:stretch>
-            <a:fillRect/>
-          </a:stretch>
-        </p:blipFill>
-        <p:spPr>
-          <a:xfrm>
-            <a:off x="1302460" y="1258433"/>
-            <a:ext cx="6812840" cy="4697051"/>
-          </a:xfrm>
-          <a:prstGeom prst="rect">
-            <a:avLst/>
-          </a:prstGeom>
-        </p:spPr>
-      </p:pic>
-    </p:spTree>
-    <p:extLst>
-      <p:ext uri="{BB962C8B-B14F-4D97-AF65-F5344CB8AC3E}">
-        <p14:creationId xmlns:p14="http://schemas.microsoft.com/office/powerpoint/2010/main" val="614372201"/>
-      </p:ext>
-    </p:extLst>
-  </p:cSld>
-  <p:clrMapOvr>
-    <a:masterClrMapping/>
-  </p:clrMapOvr>
-  <mc:AlternateContent xmlns:mc="http://schemas.openxmlformats.org/markup-compatibility/2006" xmlns:p14="http://schemas.microsoft.com/office/powerpoint/2010/main">
-    <mc:Choice Requires="p14">
-      <p:transition p14:dur="250">
-        <p:fade/>
-      </p:transition>
-    </mc:Choice>
-    <mc:Fallback xmlns="">
-      <p:transition>
-        <p:fade/>
-      </p:transition>
-    </mc:Fallback>
-  </mc:AlternateContent>
-</p:sld>
-</file>
-
-<file path=ppt/slides/slide41.xml><?xml version="1.0" encoding="utf-8"?>
-<p:sld xmlns:a="http://schemas.openxmlformats.org/drawingml/2006/main" xmlns:r="http://schemas.openxmlformats.org/officeDocument/2006/relationships" xmlns:p="http://schemas.openxmlformats.org/presentationml/2006/main">
-  <p:cSld>
-    <p:spTree>
-      <p:nvGrpSpPr>
-        <p:cNvPr id="1" name=""/>
-        <p:cNvGrpSpPr/>
-        <p:nvPr/>
-      </p:nvGrpSpPr>
-      <p:grpSpPr>
-        <a:xfrm>
-          <a:off x="0" y="0"/>
-          <a:ext cx="0" cy="0"/>
-          <a:chOff x="0" y="0"/>
-          <a:chExt cx="0" cy="0"/>
-        </a:xfrm>
-      </p:grpSpPr>
-      <p:sp>
-        <p:nvSpPr>
-          <p:cNvPr id="3" name="Title 2">
-            <a:extLst>
-              <a:ext uri="{FF2B5EF4-FFF2-40B4-BE49-F238E27FC236}">
-                <a16:creationId xmlns:a16="http://schemas.microsoft.com/office/drawing/2014/main" id="{54026D64-CF81-4590-8E7D-51586DE803B8}"/>
-              </a:ext>
-            </a:extLst>
-          </p:cNvPr>
-          <p:cNvSpPr>
-            <a:spLocks noGrp="1"/>
-          </p:cNvSpPr>
-          <p:nvPr>
-            <p:ph type="title"/>
-          </p:nvPr>
-        </p:nvSpPr>
-        <p:spPr>
-          <a:xfrm>
-            <a:off x="365760" y="411480"/>
-            <a:ext cx="11372473" cy="914400"/>
-          </a:xfrm>
-        </p:spPr>
-        <p:txBody>
-          <a:bodyPr/>
-          <a:lstStyle/>
-          <a:p>
-            <a:r>
-              <a:rPr lang="en-US"/>
-              <a:t>To Have a Good </a:t>
-            </a:r>
-            <a:r>
-              <a:rPr lang="en-US" dirty="0"/>
-              <a:t>O</a:t>
-            </a:r>
-            <a:r>
-              <a:rPr lang="en-US"/>
-              <a:t>utcome from Refactoring</a:t>
-            </a:r>
-            <a:endParaRPr lang="en-US" dirty="0"/>
-          </a:p>
-        </p:txBody>
-      </p:sp>
-      <p:sp>
-        <p:nvSpPr>
-          <p:cNvPr id="4" name="Content Placeholder 3">
-            <a:extLst>
-              <a:ext uri="{FF2B5EF4-FFF2-40B4-BE49-F238E27FC236}">
-                <a16:creationId xmlns:a16="http://schemas.microsoft.com/office/drawing/2014/main" id="{F0098609-3DB0-410A-ACC1-6699EBD68CF4}"/>
-              </a:ext>
-            </a:extLst>
-          </p:cNvPr>
-          <p:cNvSpPr>
-            <a:spLocks noGrp="1"/>
-          </p:cNvSpPr>
-          <p:nvPr>
-            <p:ph idx="1"/>
-          </p:nvPr>
-        </p:nvSpPr>
-        <p:spPr>
-          <a:xfrm>
-            <a:off x="365760" y="1737360"/>
-            <a:ext cx="11369809" cy="4047778"/>
-          </a:xfrm>
-        </p:spPr>
-        <p:txBody>
-          <a:bodyPr/>
-          <a:lstStyle/>
-          <a:p>
-            <a:pPr marL="457200" indent="-457200">
-              <a:buFont typeface="+mj-lt"/>
-              <a:buAutoNum type="arabicPeriod"/>
-            </a:pPr>
-            <a:r>
-              <a:rPr lang="en-US" dirty="0"/>
-              <a:t>Know why</a:t>
-            </a:r>
-          </a:p>
-          <a:p>
-            <a:pPr marL="457200" indent="-457200">
-              <a:buFont typeface="+mj-lt"/>
-              <a:buAutoNum type="arabicPeriod"/>
-            </a:pPr>
-            <a:r>
-              <a:rPr lang="en-US" dirty="0"/>
-              <a:t>Know how much</a:t>
-            </a:r>
-          </a:p>
-          <a:p>
-            <a:pPr marL="457200" indent="-457200">
-              <a:buFont typeface="+mj-lt"/>
-              <a:buAutoNum type="arabicPeriod"/>
-            </a:pPr>
-            <a:r>
-              <a:rPr lang="en-US" dirty="0"/>
-              <a:t>Know the cost</a:t>
-            </a:r>
-          </a:p>
-          <a:p>
-            <a:pPr marL="457200" indent="-457200">
-              <a:buFont typeface="+mj-lt"/>
-              <a:buAutoNum type="arabicPeriod"/>
-            </a:pPr>
-            <a:r>
-              <a:rPr lang="en-US" dirty="0"/>
-              <a:t>Plan</a:t>
-            </a:r>
-          </a:p>
-          <a:p>
-            <a:pPr marL="457200" indent="-457200">
-              <a:buFont typeface="+mj-lt"/>
-              <a:buAutoNum type="arabicPeriod"/>
-            </a:pPr>
-            <a:r>
-              <a:rPr lang="en-US" dirty="0"/>
-              <a:t>Have strong testing and verification</a:t>
-            </a:r>
-          </a:p>
-          <a:p>
-            <a:pPr marL="457200" indent="-457200">
-              <a:buFont typeface="+mj-lt"/>
-              <a:buAutoNum type="arabicPeriod"/>
-            </a:pPr>
-            <a:r>
-              <a:rPr lang="en-US" dirty="0"/>
-              <a:t>Get buy-in from stakeholders</a:t>
-            </a:r>
-          </a:p>
-        </p:txBody>
-      </p:sp>
-    </p:spTree>
-    <p:extLst>
-      <p:ext uri="{BB962C8B-B14F-4D97-AF65-F5344CB8AC3E}">
-        <p14:creationId xmlns:p14="http://schemas.microsoft.com/office/powerpoint/2010/main" val="2352381746"/>
-      </p:ext>
-    </p:extLst>
-  </p:cSld>
-  <p:clrMapOvr>
-    <a:masterClrMapping/>
-  </p:clrMapOvr>
 </p:sld>
 </file>
 
@@ -32399,36 +29070,6 @@
           <a:chExt cx="0" cy="0"/>
         </a:xfrm>
       </p:grpSpPr>
-      <p:pic>
-        <p:nvPicPr>
-          <p:cNvPr id="4" name="Picture 3">
-            <a:extLst>
-              <a:ext uri="{FF2B5EF4-FFF2-40B4-BE49-F238E27FC236}">
-                <a16:creationId xmlns:a16="http://schemas.microsoft.com/office/drawing/2014/main" id="{FB38DDAD-3F9C-AC4F-A5FD-450E33F06672}"/>
-              </a:ext>
-            </a:extLst>
-          </p:cNvPr>
-          <p:cNvPicPr>
-            <a:picLocks noChangeAspect="1"/>
-          </p:cNvPicPr>
-          <p:nvPr/>
-        </p:nvPicPr>
-        <p:blipFill>
-          <a:blip r:embed="rId2"/>
-          <a:stretch>
-            <a:fillRect/>
-          </a:stretch>
-        </p:blipFill>
-        <p:spPr>
-          <a:xfrm>
-            <a:off x="395926" y="1124654"/>
-            <a:ext cx="7315200" cy="4141410"/>
-          </a:xfrm>
-          <a:prstGeom prst="rect">
-            <a:avLst/>
-          </a:prstGeom>
-        </p:spPr>
-      </p:pic>
       <p:sp>
         <p:nvSpPr>
           <p:cNvPr id="3" name="Title 1">
@@ -32478,8 +29119,8 @@
         </p:nvSpPr>
         <p:spPr bwMode="auto">
           <a:xfrm>
-            <a:off x="7711126" y="1006836"/>
-            <a:ext cx="3653560" cy="4338049"/>
+            <a:off x="6949440" y="1006836"/>
+            <a:ext cx="4415246" cy="5153934"/>
           </a:xfrm>
           <a:prstGeom prst="rect">
             <a:avLst/>
@@ -32687,32 +29328,67 @@
             </a:pPr>
             <a:r>
               <a:rPr lang="en-US" dirty="0"/>
-              <a:t>Consider two versions of this code…</a:t>
+              <a:t>We created a code that moves particles in a prescribed fashion and only handles periodic boundaries</a:t>
             </a:r>
           </a:p>
           <a:p>
             <a:pPr marL="342900" indent="-342900"/>
             <a:r>
               <a:rPr lang="en-US" dirty="0"/>
-              <a:t>One is a single file with monolithic code</a:t>
+              <a:t>If we want to use other methods, we need to break that out into a function</a:t>
             </a:r>
           </a:p>
           <a:p>
             <a:pPr marL="342900" indent="-342900"/>
             <a:r>
               <a:rPr lang="en-US" dirty="0"/>
-              <a:t>The other is modularized reusable maintainable code</a:t>
-            </a:r>
-          </a:p>
-          <a:p>
-            <a:pPr marL="342900" indent="-342900"/>
-            <a:r>
-              <a:rPr lang="en-US" dirty="0"/>
-              <a:t>If we had only the first version, we would be refactoring to get to the second</a:t>
-            </a:r>
+              <a:t>If we want to also handle outflow boundary condition, we need to allow for particles getting lost</a:t>
+            </a:r>
+          </a:p>
+          <a:p>
+            <a:pPr marL="0" indent="0">
+              <a:buNone/>
+            </a:pPr>
+            <a:endParaRPr lang="en-US" dirty="0"/>
           </a:p>
         </p:txBody>
       </p:sp>
+      <p:pic>
+        <p:nvPicPr>
+          <p:cNvPr id="2" name="Picture 1">
+            <a:extLst>
+              <a:ext uri="{FF2B5EF4-FFF2-40B4-BE49-F238E27FC236}">
+                <a16:creationId xmlns:a16="http://schemas.microsoft.com/office/drawing/2014/main" id="{2FF625E1-46A9-A8D6-166B-605DF63373CA}"/>
+              </a:ext>
+            </a:extLst>
+          </p:cNvPr>
+          <p:cNvPicPr>
+            <a:picLocks noChangeAspect="1"/>
+          </p:cNvPicPr>
+          <p:nvPr/>
+        </p:nvPicPr>
+        <p:blipFill>
+          <a:blip r:embed="rId2">
+            <a:extLst>
+              <a:ext uri="{28A0092B-C50C-407E-A947-70E740481C1C}">
+                <a14:useLocalDpi xmlns:a14="http://schemas.microsoft.com/office/drawing/2010/main" val="0"/>
+              </a:ext>
+            </a:extLst>
+          </a:blip>
+          <a:stretch>
+            <a:fillRect/>
+          </a:stretch>
+        </p:blipFill>
+        <p:spPr>
+          <a:xfrm>
+            <a:off x="365760" y="1006836"/>
+            <a:ext cx="6422975" cy="5636714"/>
+          </a:xfrm>
+          <a:prstGeom prst="rect">
+            <a:avLst/>
+          </a:prstGeom>
+        </p:spPr>
+      </p:pic>
     </p:spTree>
     <p:extLst>
       <p:ext uri="{BB962C8B-B14F-4D97-AF65-F5344CB8AC3E}">
@@ -33639,6 +30315,21 @@
 </file>
 
 <file path=customXml/item1.xml><?xml version="1.0" encoding="utf-8"?>
+<p:properties xmlns:p="http://schemas.microsoft.com/office/2006/metadata/properties" xmlns:xsi="http://www.w3.org/2001/XMLSchema-instance" xmlns:pc="http://schemas.microsoft.com/office/infopath/2007/PartnerControls">
+  <documentManagement/>
+</p:properties>
+</file>
+
+<file path=customXml/item2.xml><?xml version="1.0" encoding="utf-8"?>
+<?mso-contentType ?>
+<FormTemplates xmlns="http://schemas.microsoft.com/sharepoint/v3/contenttype/forms">
+  <Display>DocumentLibraryForm</Display>
+  <Edit>DocumentLibraryForm</Edit>
+  <New>DocumentLibraryForm</New>
+</FormTemplates>
+</file>
+
+<file path=customXml/item3.xml><?xml version="1.0" encoding="utf-8"?>
 <ct:contentTypeSchema xmlns:ct="http://schemas.microsoft.com/office/2006/metadata/contentType" xmlns:ma="http://schemas.microsoft.com/office/2006/metadata/properties/metaAttributes" ct:_="" ma:_="" ma:contentTypeName="Document" ma:contentTypeID="0x010100565464437F680748A68B85EB6594EA7D" ma:contentTypeVersion="0" ma:contentTypeDescription="Create a new document." ma:contentTypeScope="" ma:versionID="fe3f4dd58d5914c51cfc6deaa8ad845c">
   <xsd:schema xmlns:xsd="http://www.w3.org/2001/XMLSchema" xmlns:p="http://schemas.microsoft.com/office/2006/metadata/properties" targetNamespace="http://schemas.microsoft.com/office/2006/metadata/properties" ma:root="true" ma:fieldsID="4aeb20c0e3442673af7ee10786458764">
     <xsd:element name="properties">
@@ -33687,32 +30378,17 @@
 </ct:contentTypeSchema>
 </file>
 
-<file path=customXml/item2.xml><?xml version="1.0" encoding="utf-8"?>
-<?mso-contentType ?>
-<FormTemplates xmlns="http://schemas.microsoft.com/sharepoint/v3/contenttype/forms">
-  <Display>DocumentLibraryForm</Display>
-  <Edit>DocumentLibraryForm</Edit>
-  <New>DocumentLibraryForm</New>
-</FormTemplates>
-</file>
-
-<file path=customXml/item3.xml><?xml version="1.0" encoding="utf-8"?>
-<p:properties xmlns:p="http://schemas.microsoft.com/office/2006/metadata/properties" xmlns:xsi="http://www.w3.org/2001/XMLSchema-instance" xmlns:pc="http://schemas.microsoft.com/office/infopath/2007/PartnerControls">
-  <documentManagement/>
-</p:properties>
-</file>
-
 <file path=customXml/itemProps1.xml><?xml version="1.0" encoding="utf-8"?>
-<ds:datastoreItem xmlns:ds="http://schemas.openxmlformats.org/officeDocument/2006/customXml" ds:itemID="{E8DB7DEB-074E-4EE8-9B6E-FD277323109C}">
+<ds:datastoreItem xmlns:ds="http://schemas.openxmlformats.org/officeDocument/2006/customXml" ds:itemID="{A50EC660-24D0-43A0-AE5E-E274115E726B}">
   <ds:schemaRefs>
-    <ds:schemaRef ds:uri="http://schemas.microsoft.com/office/2006/metadata/contentType"/>
-    <ds:schemaRef ds:uri="http://schemas.microsoft.com/office/2006/metadata/properties/metaAttributes"/>
-    <ds:schemaRef ds:uri="http://www.w3.org/2001/XMLSchema"/>
+    <ds:schemaRef ds:uri="http://purl.org/dc/elements/1.1/"/>
     <ds:schemaRef ds:uri="http://schemas.microsoft.com/office/2006/metadata/properties"/>
+    <ds:schemaRef ds:uri="http://purl.org/dc/terms/"/>
     <ds:schemaRef ds:uri="http://schemas.openxmlformats.org/package/2006/metadata/core-properties"/>
-    <ds:schemaRef ds:uri="http://purl.org/dc/elements/1.1/"/>
-    <ds:schemaRef ds:uri="http://purl.org/dc/terms/"/>
-    <ds:schemaRef ds:uri="http://schemas.microsoft.com/office/internal/2005/internalDocumentation"/>
+    <ds:schemaRef ds:uri="http://schemas.microsoft.com/office/2006/documentManagement/types"/>
+    <ds:schemaRef ds:uri="http://www.w3.org/XML/1998/namespace"/>
+    <ds:schemaRef ds:uri="http://purl.org/dc/dcmitype/"/>
+    <ds:schemaRef ds:uri="http://schemas.microsoft.com/office/infopath/2007/PartnerControls"/>
   </ds:schemaRefs>
 </ds:datastoreItem>
 </file>
@@ -33726,16 +30402,16 @@
 </file>
 
 <file path=customXml/itemProps3.xml><?xml version="1.0" encoding="utf-8"?>
-<ds:datastoreItem xmlns:ds="http://schemas.openxmlformats.org/officeDocument/2006/customXml" ds:itemID="{A50EC660-24D0-43A0-AE5E-E274115E726B}">
+<ds:datastoreItem xmlns:ds="http://schemas.openxmlformats.org/officeDocument/2006/customXml" ds:itemID="{E8DB7DEB-074E-4EE8-9B6E-FD277323109C}">
   <ds:schemaRefs>
+    <ds:schemaRef ds:uri="http://schemas.microsoft.com/office/2006/metadata/contentType"/>
+    <ds:schemaRef ds:uri="http://schemas.microsoft.com/office/2006/metadata/properties/metaAttributes"/>
+    <ds:schemaRef ds:uri="http://www.w3.org/2001/XMLSchema"/>
+    <ds:schemaRef ds:uri="http://schemas.microsoft.com/office/2006/metadata/properties"/>
+    <ds:schemaRef ds:uri="http://schemas.openxmlformats.org/package/2006/metadata/core-properties"/>
     <ds:schemaRef ds:uri="http://purl.org/dc/elements/1.1/"/>
-    <ds:schemaRef ds:uri="http://schemas.microsoft.com/office/2006/metadata/properties"/>
     <ds:schemaRef ds:uri="http://purl.org/dc/terms/"/>
-    <ds:schemaRef ds:uri="http://schemas.openxmlformats.org/package/2006/metadata/core-properties"/>
-    <ds:schemaRef ds:uri="http://schemas.microsoft.com/office/2006/documentManagement/types"/>
-    <ds:schemaRef ds:uri="http://www.w3.org/XML/1998/namespace"/>
-    <ds:schemaRef ds:uri="http://purl.org/dc/dcmitype/"/>
-    <ds:schemaRef ds:uri="http://schemas.microsoft.com/office/infopath/2007/PartnerControls"/>
+    <ds:schemaRef ds:uri="http://schemas.microsoft.com/office/internal/2005/internalDocumentation"/>
   </ds:schemaRefs>
 </ds:datastoreItem>
 </file>
--- a/refactoring.pptx
+++ b/refactoring.pptx
@@ -12,7 +12,7 @@
   </p:handoutMasterIdLst>
   <p:sldIdLst>
     <p:sldId id="661" r:id="rId5"/>
-    <p:sldId id="320" r:id="rId6"/>
+    <p:sldId id="668" r:id="rId6"/>
     <p:sldId id="610" r:id="rId7"/>
     <p:sldId id="625" r:id="rId8"/>
     <p:sldId id="495" r:id="rId9"/>
@@ -285,7 +285,7 @@
           <a:p>
             <a:fld id="{0B842F42-2CE9-4E35-95C1-410DC08A50B1}" type="datetimeFigureOut">
               <a:rPr lang="en-US" smtClean="0"/>
-              <a:t>8/5/25</a:t>
+              <a:t>8/5/2025</a:t>
             </a:fld>
             <a:endParaRPr lang="en-US"/>
           </a:p>
@@ -450,7 +450,7 @@
           <a:p>
             <a:fld id="{6F282904-F315-4730-8D91-37D99E141A6F}" type="datetimeFigureOut">
               <a:rPr lang="en-US" smtClean="0"/>
-              <a:t>8/5/25</a:t>
+              <a:t>8/5/2025</a:t>
             </a:fld>
             <a:endParaRPr lang="en-US"/>
           </a:p>
@@ -5810,7 +5810,7 @@
                 <a:effectLst/>
                 <a:latin typeface="+mn-lt"/>
               </a:rPr>
-              <a:t>Software Productivity and Sustainability track @ Argonne Training Program on Extreme-Scale Computing summer school</a:t>
+              <a:t>Software Sustainability track @ Argonne Training Program on Extreme-Scale Computing summer school</a:t>
             </a:r>
           </a:p>
         </p:txBody>
@@ -16684,13 +16684,13 @@
             </a:r>
             <a:r>
               <a:rPr lang="en-US" sz="1600" dirty="0"/>
-              <a:t>Anshu Dubey, David E. Bernholdt, Todd Gamblin, and Jared O’Neal, Software Productivity and Sustainability track, in Argonne Training Program on Extreme-Scale Computing, St. Charles, Illinois, 2024. DOI: </a:t>
+              <a:t>Anshu Dubey, David E. Bernholdt, and Todd Gamblin, Software Sustainability track, in Argonne Training Program on Extreme-Scale Computing, St. Charles, Illinois, 2025. DOI: </a:t>
             </a:r>
             <a:r>
               <a:rPr lang="en-US" sz="1600" dirty="0">
                 <a:hlinkClick r:id="rId4"/>
               </a:rPr>
-              <a:t>10.6084/m9.figshare.26384188</a:t>
+              <a:t>10.6084/m9.figshare.29816981</a:t>
             </a:r>
             <a:r>
               <a:rPr lang="en-US" sz="1600" dirty="0"/>
@@ -16885,7 +16885,7 @@
     </p:spTree>
     <p:extLst>
       <p:ext uri="{BB962C8B-B14F-4D97-AF65-F5344CB8AC3E}">
-        <p14:creationId xmlns:p14="http://schemas.microsoft.com/office/powerpoint/2010/main" val="688247269"/>
+        <p14:creationId xmlns:p14="http://schemas.microsoft.com/office/powerpoint/2010/main" val="978726433"/>
       </p:ext>
     </p:extLst>
   </p:cSld>
@@ -29368,7 +29368,7 @@
           <p:nvPr/>
         </p:nvPicPr>
         <p:blipFill>
-          <a:blip r:embed="rId2">
+          <a:blip r:embed="rId2" cstate="print">
             <a:extLst>
               <a:ext uri="{28A0092B-C50C-407E-A947-70E740481C1C}">
                 <a14:useLocalDpi xmlns:a14="http://schemas.microsoft.com/office/drawing/2010/main" val="0"/>
@@ -30315,18 +30315,18 @@
 </file>
 
 <file path=customXml/item1.xml><?xml version="1.0" encoding="utf-8"?>
-<p:properties xmlns:p="http://schemas.microsoft.com/office/2006/metadata/properties" xmlns:xsi="http://www.w3.org/2001/XMLSchema-instance" xmlns:pc="http://schemas.microsoft.com/office/infopath/2007/PartnerControls">
-  <documentManagement/>
-</p:properties>
-</file>
-
-<file path=customXml/item2.xml><?xml version="1.0" encoding="utf-8"?>
 <?mso-contentType ?>
 <FormTemplates xmlns="http://schemas.microsoft.com/sharepoint/v3/contenttype/forms">
   <Display>DocumentLibraryForm</Display>
   <Edit>DocumentLibraryForm</Edit>
   <New>DocumentLibraryForm</New>
 </FormTemplates>
+</file>
+
+<file path=customXml/item2.xml><?xml version="1.0" encoding="utf-8"?>
+<p:properties xmlns:p="http://schemas.microsoft.com/office/2006/metadata/properties" xmlns:xsi="http://www.w3.org/2001/XMLSchema-instance" xmlns:pc="http://schemas.microsoft.com/office/infopath/2007/PartnerControls">
+  <documentManagement/>
+</p:properties>
 </file>
 
 <file path=customXml/item3.xml><?xml version="1.0" encoding="utf-8"?>
@@ -30379,6 +30379,14 @@
 </file>
 
 <file path=customXml/itemProps1.xml><?xml version="1.0" encoding="utf-8"?>
+<ds:datastoreItem xmlns:ds="http://schemas.openxmlformats.org/officeDocument/2006/customXml" ds:itemID="{19E20559-B232-4371-8690-E3D8007EDB82}">
+  <ds:schemaRefs>
+    <ds:schemaRef ds:uri="http://schemas.microsoft.com/sharepoint/v3/contenttype/forms"/>
+  </ds:schemaRefs>
+</ds:datastoreItem>
+</file>
+
+<file path=customXml/itemProps2.xml><?xml version="1.0" encoding="utf-8"?>
 <ds:datastoreItem xmlns:ds="http://schemas.openxmlformats.org/officeDocument/2006/customXml" ds:itemID="{A50EC660-24D0-43A0-AE5E-E274115E726B}">
   <ds:schemaRefs>
     <ds:schemaRef ds:uri="http://purl.org/dc/elements/1.1/"/>
@@ -30389,14 +30397,6 @@
     <ds:schemaRef ds:uri="http://www.w3.org/XML/1998/namespace"/>
     <ds:schemaRef ds:uri="http://purl.org/dc/dcmitype/"/>
     <ds:schemaRef ds:uri="http://schemas.microsoft.com/office/infopath/2007/PartnerControls"/>
-  </ds:schemaRefs>
-</ds:datastoreItem>
-</file>
-
-<file path=customXml/itemProps2.xml><?xml version="1.0" encoding="utf-8"?>
-<ds:datastoreItem xmlns:ds="http://schemas.openxmlformats.org/officeDocument/2006/customXml" ds:itemID="{19E20559-B232-4371-8690-E3D8007EDB82}">
-  <ds:schemaRefs>
-    <ds:schemaRef ds:uri="http://schemas.microsoft.com/sharepoint/v3/contenttype/forms"/>
   </ds:schemaRefs>
 </ds:datastoreItem>
 </file>

--- a/refactoring.pptx
+++ b/refactoring.pptx
@@ -1834,127 +1834,12 @@
           </a:prstGeom>
         </p:spPr>
       </p:pic>
-      <p:grpSp>
-        <p:nvGrpSpPr>
-          <p:cNvPr id="5" name="Group 4">
+      <p:pic>
+        <p:nvPicPr>
+          <p:cNvPr id="31" name="Picture 30">
             <a:extLst>
               <a:ext uri="{FF2B5EF4-FFF2-40B4-BE49-F238E27FC236}">
-                <a16:creationId xmlns:a16="http://schemas.microsoft.com/office/drawing/2014/main" id="{2211A969-E7EA-13C3-D014-C029084F4EFB}"/>
-              </a:ext>
-            </a:extLst>
-          </p:cNvPr>
-          <p:cNvGrpSpPr/>
-          <p:nvPr userDrawn="1"/>
-        </p:nvGrpSpPr>
-        <p:grpSpPr>
-          <a:xfrm>
-            <a:off x="366259" y="3655396"/>
-            <a:ext cx="2214716" cy="356329"/>
-            <a:chOff x="341278" y="3628835"/>
-            <a:chExt cx="2214716" cy="356329"/>
-          </a:xfrm>
-        </p:grpSpPr>
-        <p:pic>
-          <p:nvPicPr>
-            <p:cNvPr id="7" name="Picture 2">
-              <a:extLst>
-                <a:ext uri="{FF2B5EF4-FFF2-40B4-BE49-F238E27FC236}">
-                  <a16:creationId xmlns:a16="http://schemas.microsoft.com/office/drawing/2014/main" id="{D16A6A85-AECD-6121-D004-ECB79BC13076}"/>
-                </a:ext>
-              </a:extLst>
-            </p:cNvPr>
-            <p:cNvPicPr>
-              <a:picLocks noChangeAspect="1" noChangeArrowheads="1"/>
-            </p:cNvPicPr>
-            <p:nvPr userDrawn="1"/>
-          </p:nvPicPr>
-          <p:blipFill>
-            <a:blip r:embed="rId4">
-              <a:extLst>
-                <a:ext uri="{28A0092B-C50C-407E-A947-70E740481C1C}">
-                  <a14:useLocalDpi xmlns:a14="http://schemas.microsoft.com/office/drawing/2010/main" val="0"/>
-                </a:ext>
-              </a:extLst>
-            </a:blip>
-            <a:srcRect/>
-            <a:stretch>
-              <a:fillRect/>
-            </a:stretch>
-          </p:blipFill>
-          <p:spPr bwMode="auto">
-            <a:xfrm>
-              <a:off x="341278" y="3628835"/>
-              <a:ext cx="1005840" cy="356329"/>
-            </a:xfrm>
-            <a:prstGeom prst="rect">
-              <a:avLst/>
-            </a:prstGeom>
-            <a:noFill/>
-            <a:extLst>
-              <a:ext uri="{909E8E84-426E-40DD-AFC4-6F175D3DCCD1}">
-                <a14:hiddenFill xmlns:a14="http://schemas.microsoft.com/office/drawing/2010/main">
-                  <a:solidFill>
-                    <a:srgbClr val="FFFFFF"/>
-                  </a:solidFill>
-                </a14:hiddenFill>
-              </a:ext>
-            </a:extLst>
-          </p:spPr>
-        </p:pic>
-        <p:pic>
-          <p:nvPicPr>
-            <p:cNvPr id="10" name="Picture 4">
-              <a:extLst>
-                <a:ext uri="{FF2B5EF4-FFF2-40B4-BE49-F238E27FC236}">
-                  <a16:creationId xmlns:a16="http://schemas.microsoft.com/office/drawing/2014/main" id="{87D2793C-01C6-B180-3495-5A2067445539}"/>
-                </a:ext>
-              </a:extLst>
-            </p:cNvPr>
-            <p:cNvPicPr>
-              <a:picLocks noChangeAspect="1" noChangeArrowheads="1"/>
-            </p:cNvPicPr>
-            <p:nvPr userDrawn="1"/>
-          </p:nvPicPr>
-          <p:blipFill>
-            <a:blip r:embed="rId5" cstate="print">
-              <a:extLst>
-                <a:ext uri="{28A0092B-C50C-407E-A947-70E740481C1C}">
-                  <a14:useLocalDpi xmlns:a14="http://schemas.microsoft.com/office/drawing/2010/main" val="0"/>
-                </a:ext>
-              </a:extLst>
-            </a:blip>
-            <a:srcRect/>
-            <a:stretch>
-              <a:fillRect/>
-            </a:stretch>
-          </p:blipFill>
-          <p:spPr bwMode="auto">
-            <a:xfrm>
-              <a:off x="1550154" y="3690079"/>
-              <a:ext cx="1005840" cy="233840"/>
-            </a:xfrm>
-            <a:prstGeom prst="rect">
-              <a:avLst/>
-            </a:prstGeom>
-            <a:noFill/>
-            <a:extLst>
-              <a:ext uri="{909E8E84-426E-40DD-AFC4-6F175D3DCCD1}">
-                <a14:hiddenFill xmlns:a14="http://schemas.microsoft.com/office/drawing/2010/main">
-                  <a:solidFill>
-                    <a:srgbClr val="FFFFFF"/>
-                  </a:solidFill>
-                </a14:hiddenFill>
-              </a:ext>
-            </a:extLst>
-          </p:spPr>
-        </p:pic>
-      </p:grpSp>
-      <p:pic>
-        <p:nvPicPr>
-          <p:cNvPr id="18" name="Picture 17" descr="A black and white sign with blue text&#10;&#10;Description automatically generated">
-            <a:extLst>
-              <a:ext uri="{FF2B5EF4-FFF2-40B4-BE49-F238E27FC236}">
-                <a16:creationId xmlns:a16="http://schemas.microsoft.com/office/drawing/2014/main" id="{90ECFB80-075A-EDC0-363D-3CE459F436D1}"/>
+                <a16:creationId xmlns:a16="http://schemas.microsoft.com/office/drawing/2014/main" id="{F6BAEEDA-B6C4-7DDA-6A83-26F20E08F28B}"/>
               </a:ext>
             </a:extLst>
           </p:cNvPr>
@@ -1964,8 +1849,17 @@
           <p:nvPr userDrawn="1"/>
         </p:nvPicPr>
         <p:blipFill>
-          <a:blip r:embed="rId6" cstate="print">
+          <a:blip r:embed="rId4" cstate="print">
             <a:extLst>
+              <a:ext uri="{BEBA8EAE-BF5A-486C-A8C5-ECC9F3942E4B}">
+                <a14:imgProps xmlns:a14="http://schemas.microsoft.com/office/drawing/2010/main">
+                  <a14:imgLayer r:embed="rId5">
+                    <a14:imgEffect>
+                      <a14:brightnessContrast bright="100000"/>
+                    </a14:imgEffect>
+                  </a14:imgLayer>
+                </a14:imgProps>
+              </a:ext>
               <a:ext uri="{28A0092B-C50C-407E-A947-70E740481C1C}">
                 <a14:useLocalDpi xmlns:a14="http://schemas.microsoft.com/office/drawing/2010/main" val="0"/>
               </a:ext>
@@ -1977,8 +1871,8 @@
         </p:blipFill>
         <p:spPr>
           <a:xfrm>
-            <a:off x="970697" y="4125123"/>
-            <a:ext cx="1005840" cy="324328"/>
+            <a:off x="9536165" y="6321694"/>
+            <a:ext cx="2409477" cy="401008"/>
           </a:xfrm>
           <a:prstGeom prst="rect">
             <a:avLst/>
@@ -1987,10 +1881,10 @@
       </p:pic>
       <p:sp>
         <p:nvSpPr>
-          <p:cNvPr id="19" name="TextBox 18">
+          <p:cNvPr id="8" name="TextBox 7">
             <a:extLst>
               <a:ext uri="{FF2B5EF4-FFF2-40B4-BE49-F238E27FC236}">
-                <a16:creationId xmlns:a16="http://schemas.microsoft.com/office/drawing/2014/main" id="{23984D22-2BE9-C684-93D1-920B201DC418}"/>
+                <a16:creationId xmlns:a16="http://schemas.microsoft.com/office/drawing/2014/main" id="{C5F5D814-D023-0C77-62AF-7101AD3419A6}"/>
               </a:ext>
             </a:extLst>
           </p:cNvPr>
@@ -1999,7 +1893,7 @@
         </p:nvSpPr>
         <p:spPr>
           <a:xfrm>
-            <a:off x="901538" y="1776974"/>
+            <a:off x="901538" y="1454246"/>
             <a:ext cx="1144159" cy="350865"/>
           </a:xfrm>
           <a:prstGeom prst="rect">
@@ -2027,10 +1921,10 @@
       </p:sp>
       <p:sp>
         <p:nvSpPr>
-          <p:cNvPr id="24" name="TextBox 23">
+          <p:cNvPr id="12" name="TextBox 11">
             <a:extLst>
               <a:ext uri="{FF2B5EF4-FFF2-40B4-BE49-F238E27FC236}">
-                <a16:creationId xmlns:a16="http://schemas.microsoft.com/office/drawing/2014/main" id="{9EA65A86-1694-D0BE-3C46-045E2B00D094}"/>
+                <a16:creationId xmlns:a16="http://schemas.microsoft.com/office/drawing/2014/main" id="{B5D8D9CE-072B-C278-A349-03A28D3CA873}"/>
               </a:ext>
             </a:extLst>
           </p:cNvPr>
@@ -2039,48 +1933,8 @@
         </p:nvSpPr>
         <p:spPr>
           <a:xfrm>
-            <a:off x="28657" y="2079048"/>
-            <a:ext cx="2889921" cy="932563"/>
-          </a:xfrm>
-          <a:prstGeom prst="rect">
-            <a:avLst/>
-          </a:prstGeom>
-          <a:noFill/>
-        </p:spPr>
-        <p:txBody>
-          <a:bodyPr wrap="square" lIns="118872" tIns="91440" rIns="118872" bIns="91440" rtlCol="0" anchor="ctr" anchorCtr="0">
-            <a:spAutoFit/>
-          </a:bodyPr>
-          <a:lstStyle/>
-          <a:p>
-            <a:pPr algn="l">
-              <a:lnSpc>
-                <a:spcPct val="90000"/>
-              </a:lnSpc>
-            </a:pPr>
-            <a:r>
-              <a:rPr lang="en-US" b="1" dirty="0"/>
-              <a:t>COLABS: Collaboration for Better Software for Science</a:t>
-            </a:r>
-          </a:p>
-        </p:txBody>
-      </p:sp>
-      <p:sp>
-        <p:nvSpPr>
-          <p:cNvPr id="25" name="TextBox 24">
-            <a:extLst>
-              <a:ext uri="{FF2B5EF4-FFF2-40B4-BE49-F238E27FC236}">
-                <a16:creationId xmlns:a16="http://schemas.microsoft.com/office/drawing/2014/main" id="{7C98D32A-D229-5172-E298-9AF976ACE627}"/>
-              </a:ext>
-            </a:extLst>
-          </p:cNvPr>
-          <p:cNvSpPr txBox="1"/>
-          <p:nvPr userDrawn="1"/>
-        </p:nvSpPr>
-        <p:spPr>
-          <a:xfrm>
-            <a:off x="676315" y="3191133"/>
-            <a:ext cx="1594604" cy="350865"/>
+            <a:off x="948025" y="2646131"/>
+            <a:ext cx="1051185" cy="350865"/>
           </a:xfrm>
           <a:prstGeom prst="rect">
             <a:avLst/>
@@ -2100,17 +1954,17 @@
             </a:pPr>
             <a:r>
               <a:rPr lang="en-US" sz="1200" i="1" dirty="0"/>
-              <a:t>In collaboration with</a:t>
+              <a:t>Members of</a:t>
             </a:r>
           </a:p>
         </p:txBody>
       </p:sp>
       <p:sp>
         <p:nvSpPr>
-          <p:cNvPr id="26" name="TextBox 25">
+          <p:cNvPr id="15" name="TextBox 14">
             <a:extLst>
               <a:ext uri="{FF2B5EF4-FFF2-40B4-BE49-F238E27FC236}">
-                <a16:creationId xmlns:a16="http://schemas.microsoft.com/office/drawing/2014/main" id="{64D46951-9F99-A303-D249-27B751A562DB}"/>
+                <a16:creationId xmlns:a16="http://schemas.microsoft.com/office/drawing/2014/main" id="{85E13C4D-0FCB-AD8A-F919-219CD45F5E4E}"/>
               </a:ext>
             </a:extLst>
           </p:cNvPr>
@@ -2119,7 +1973,7 @@
         </p:nvSpPr>
         <p:spPr>
           <a:xfrm>
-            <a:off x="572120" y="4562849"/>
+            <a:off x="572120" y="4624321"/>
             <a:ext cx="1802994" cy="350865"/>
           </a:xfrm>
           <a:prstGeom prst="rect">
@@ -2147,10 +2001,10 @@
       </p:sp>
       <p:grpSp>
         <p:nvGrpSpPr>
-          <p:cNvPr id="27" name="Group 26">
+          <p:cNvPr id="16" name="Group 15">
             <a:extLst>
               <a:ext uri="{FF2B5EF4-FFF2-40B4-BE49-F238E27FC236}">
-                <a16:creationId xmlns:a16="http://schemas.microsoft.com/office/drawing/2014/main" id="{CC665AB1-818C-15F6-A435-7A7C14109262}"/>
+                <a16:creationId xmlns:a16="http://schemas.microsoft.com/office/drawing/2014/main" id="{7289C683-CE7C-A99C-90B4-4FDEE2708869}"/>
               </a:ext>
             </a:extLst>
           </p:cNvPr>
@@ -2167,10 +2021,10 @@
         </p:grpSpPr>
         <p:pic>
           <p:nvPicPr>
-            <p:cNvPr id="28" name="Picture 27">
+            <p:cNvPr id="17" name="Picture 16">
               <a:extLst>
                 <a:ext uri="{FF2B5EF4-FFF2-40B4-BE49-F238E27FC236}">
-                  <a16:creationId xmlns:a16="http://schemas.microsoft.com/office/drawing/2014/main" id="{D8D4DA06-93FC-7C79-22C0-69CD6E71946F}"/>
+                  <a16:creationId xmlns:a16="http://schemas.microsoft.com/office/drawing/2014/main" id="{C37C7687-369C-B25A-E795-965CAC0F0430}"/>
                 </a:ext>
               </a:extLst>
             </p:cNvPr>
@@ -2180,7 +2034,7 @@
             <p:nvPr userDrawn="1"/>
           </p:nvPicPr>
           <p:blipFill>
-            <a:blip r:embed="rId7" cstate="print">
+            <a:blip r:embed="rId6" cstate="print">
               <a:extLst>
                 <a:ext uri="{28A0092B-C50C-407E-A947-70E740481C1C}">
                   <a14:useLocalDpi xmlns:a14="http://schemas.microsoft.com/office/drawing/2010/main" val="0"/>
@@ -2203,10 +2057,10 @@
         </p:pic>
         <p:pic>
           <p:nvPicPr>
-            <p:cNvPr id="29" name="Picture 28" descr="A picture containing shape&#10;&#10;Description automatically generated">
+            <p:cNvPr id="30" name="Picture 29" descr="A picture containing shape&#10;&#10;Description automatically generated">
               <a:extLst>
                 <a:ext uri="{FF2B5EF4-FFF2-40B4-BE49-F238E27FC236}">
-                  <a16:creationId xmlns:a16="http://schemas.microsoft.com/office/drawing/2014/main" id="{3A576A20-C17C-D6D5-507F-A7C5D2EE03B7}"/>
+                  <a16:creationId xmlns:a16="http://schemas.microsoft.com/office/drawing/2014/main" id="{4B33E9E5-DA31-2040-6905-662BE26E895B}"/>
                 </a:ext>
               </a:extLst>
             </p:cNvPr>
@@ -2216,7 +2070,7 @@
             <p:nvPr userDrawn="1"/>
           </p:nvPicPr>
           <p:blipFill>
-            <a:blip r:embed="rId8">
+            <a:blip r:embed="rId7">
               <a:extLst>
                 <a:ext uri="{28A0092B-C50C-407E-A947-70E740481C1C}">
                   <a14:useLocalDpi xmlns:a14="http://schemas.microsoft.com/office/drawing/2010/main" val="0"/>
@@ -2238,12 +2092,263 @@
           </p:spPr>
         </p:pic>
       </p:grpSp>
+      <p:grpSp>
+        <p:nvGrpSpPr>
+          <p:cNvPr id="32" name="Group 31">
+            <a:extLst>
+              <a:ext uri="{FF2B5EF4-FFF2-40B4-BE49-F238E27FC236}">
+                <a16:creationId xmlns:a16="http://schemas.microsoft.com/office/drawing/2014/main" id="{207C4F59-640F-DF87-D6D1-98C999629E33}"/>
+              </a:ext>
+            </a:extLst>
+          </p:cNvPr>
+          <p:cNvGrpSpPr/>
+          <p:nvPr userDrawn="1"/>
+        </p:nvGrpSpPr>
+        <p:grpSpPr>
+          <a:xfrm>
+            <a:off x="-69503" y="1892144"/>
+            <a:ext cx="2985270" cy="790169"/>
+            <a:chOff x="-69503" y="2214872"/>
+            <a:chExt cx="2985270" cy="790169"/>
+          </a:xfrm>
+        </p:grpSpPr>
+        <p:pic>
+          <p:nvPicPr>
+            <p:cNvPr id="33" name="Picture 4">
+              <a:extLst>
+                <a:ext uri="{FF2B5EF4-FFF2-40B4-BE49-F238E27FC236}">
+                  <a16:creationId xmlns:a16="http://schemas.microsoft.com/office/drawing/2014/main" id="{FC66403F-CB60-0332-773E-4539ADA0C9F5}"/>
+                </a:ext>
+              </a:extLst>
+            </p:cNvPr>
+            <p:cNvPicPr>
+              <a:picLocks noChangeAspect="1" noChangeArrowheads="1"/>
+            </p:cNvPicPr>
+            <p:nvPr userDrawn="1"/>
+          </p:nvPicPr>
+          <p:blipFill>
+            <a:blip r:embed="rId8" cstate="print">
+              <a:extLst>
+                <a:ext uri="{28A0092B-C50C-407E-A947-70E740481C1C}">
+                  <a14:useLocalDpi xmlns:a14="http://schemas.microsoft.com/office/drawing/2010/main" val="0"/>
+                </a:ext>
+              </a:extLst>
+            </a:blip>
+            <a:srcRect/>
+            <a:stretch>
+              <a:fillRect/>
+            </a:stretch>
+          </p:blipFill>
+          <p:spPr bwMode="auto">
+            <a:xfrm>
+              <a:off x="1484438" y="2317122"/>
+              <a:ext cx="1371600" cy="318873"/>
+            </a:xfrm>
+            <a:prstGeom prst="rect">
+              <a:avLst/>
+            </a:prstGeom>
+            <a:noFill/>
+            <a:extLst>
+              <a:ext uri="{909E8E84-426E-40DD-AFC4-6F175D3DCCD1}">
+                <a14:hiddenFill xmlns:a14="http://schemas.microsoft.com/office/drawing/2010/main">
+                  <a:solidFill>
+                    <a:srgbClr val="FFFFFF"/>
+                  </a:solidFill>
+                </a14:hiddenFill>
+              </a:ext>
+            </a:extLst>
+          </p:spPr>
+        </p:pic>
+        <p:pic>
+          <p:nvPicPr>
+            <p:cNvPr id="34" name="Picture 2" descr="A picture containing graphics, logo, font, symbol&#10;&#10;Description automatically generated">
+              <a:extLst>
+                <a:ext uri="{FF2B5EF4-FFF2-40B4-BE49-F238E27FC236}">
+                  <a16:creationId xmlns:a16="http://schemas.microsoft.com/office/drawing/2014/main" id="{3E2AFFBD-3575-2847-9AAF-6E6A96862D76}"/>
+                </a:ext>
+              </a:extLst>
+            </p:cNvPr>
+            <p:cNvPicPr>
+              <a:picLocks noChangeAspect="1" noChangeArrowheads="1"/>
+            </p:cNvPicPr>
+            <p:nvPr userDrawn="1"/>
+          </p:nvPicPr>
+          <p:blipFill>
+            <a:blip r:embed="rId9" cstate="print">
+              <a:extLst>
+                <a:ext uri="{28A0092B-C50C-407E-A947-70E740481C1C}">
+                  <a14:useLocalDpi xmlns:a14="http://schemas.microsoft.com/office/drawing/2010/main" val="0"/>
+                </a:ext>
+              </a:extLst>
+            </a:blip>
+            <a:srcRect/>
+            <a:stretch>
+              <a:fillRect/>
+            </a:stretch>
+          </p:blipFill>
+          <p:spPr bwMode="auto">
+            <a:xfrm>
+              <a:off x="321595" y="2214872"/>
+              <a:ext cx="841248" cy="523372"/>
+            </a:xfrm>
+            <a:prstGeom prst="rect">
+              <a:avLst/>
+            </a:prstGeom>
+            <a:noFill/>
+            <a:extLst>
+              <a:ext uri="{909E8E84-426E-40DD-AFC4-6F175D3DCCD1}">
+                <a14:hiddenFill xmlns:a14="http://schemas.microsoft.com/office/drawing/2010/main">
+                  <a:solidFill>
+                    <a:srgbClr val="FFFFFF"/>
+                  </a:solidFill>
+                </a14:hiddenFill>
+              </a:ext>
+            </a:extLst>
+          </p:spPr>
+        </p:pic>
+        <p:sp>
+          <p:nvSpPr>
+            <p:cNvPr id="35" name="TextBox 34">
+              <a:extLst>
+                <a:ext uri="{FF2B5EF4-FFF2-40B4-BE49-F238E27FC236}">
+                  <a16:creationId xmlns:a16="http://schemas.microsoft.com/office/drawing/2014/main" id="{5E39CEC8-98B1-7568-653D-E9AE26511499}"/>
+                </a:ext>
+              </a:extLst>
+            </p:cNvPr>
+            <p:cNvSpPr txBox="1"/>
+            <p:nvPr userDrawn="1"/>
+          </p:nvSpPr>
+          <p:spPr>
+            <a:xfrm>
+              <a:off x="-69503" y="2668026"/>
+              <a:ext cx="1631472" cy="337015"/>
+            </a:xfrm>
+            <a:prstGeom prst="rect">
+              <a:avLst/>
+            </a:prstGeom>
+            <a:noFill/>
+          </p:spPr>
+          <p:txBody>
+            <a:bodyPr wrap="none" lIns="118872" tIns="91440" rIns="118872" bIns="91440" rtlCol="0" anchor="ctr" anchorCtr="0">
+              <a:spAutoFit/>
+            </a:bodyPr>
+            <a:lstStyle/>
+            <a:p>
+              <a:pPr algn="l">
+                <a:lnSpc>
+                  <a:spcPct val="90000"/>
+                </a:lnSpc>
+              </a:pPr>
+              <a:r>
+                <a:rPr lang="en-US" sz="1050" i="1" dirty="0">
+                  <a:hlinkClick r:id="rId10"/>
+                </a:rPr>
+                <a:t>https://pesoproject.org</a:t>
+              </a:r>
+              <a:endParaRPr lang="en-US" sz="1050" i="1" dirty="0"/>
+            </a:p>
+          </p:txBody>
+        </p:sp>
+        <p:sp>
+          <p:nvSpPr>
+            <p:cNvPr id="36" name="TextBox 35">
+              <a:extLst>
+                <a:ext uri="{FF2B5EF4-FFF2-40B4-BE49-F238E27FC236}">
+                  <a16:creationId xmlns:a16="http://schemas.microsoft.com/office/drawing/2014/main" id="{212AE08A-8A6C-79CC-3F21-161F7C72E3FF}"/>
+                </a:ext>
+              </a:extLst>
+            </p:cNvPr>
+            <p:cNvSpPr txBox="1"/>
+            <p:nvPr userDrawn="1"/>
+          </p:nvSpPr>
+          <p:spPr>
+            <a:xfrm>
+              <a:off x="1423755" y="2668026"/>
+              <a:ext cx="1492012" cy="337015"/>
+            </a:xfrm>
+            <a:prstGeom prst="rect">
+              <a:avLst/>
+            </a:prstGeom>
+            <a:noFill/>
+          </p:spPr>
+          <p:txBody>
+            <a:bodyPr wrap="none" lIns="118872" tIns="91440" rIns="118872" bIns="91440" rtlCol="0" anchor="ctr" anchorCtr="0">
+              <a:spAutoFit/>
+            </a:bodyPr>
+            <a:lstStyle/>
+            <a:p>
+              <a:pPr algn="l">
+                <a:lnSpc>
+                  <a:spcPct val="90000"/>
+                </a:lnSpc>
+              </a:pPr>
+              <a:r>
+                <a:rPr lang="en-US" sz="1050" i="1" dirty="0">
+                  <a:hlinkClick r:id="rId11"/>
+                </a:rPr>
+                <a:t>https://rapids.lbl.gov</a:t>
+              </a:r>
+              <a:endParaRPr lang="en-US" sz="1050" i="1" dirty="0"/>
+            </a:p>
+          </p:txBody>
+        </p:sp>
+      </p:grpSp>
+      <p:sp>
+        <p:nvSpPr>
+          <p:cNvPr id="37" name="TextBox 36">
+            <a:extLst>
+              <a:ext uri="{FF2B5EF4-FFF2-40B4-BE49-F238E27FC236}">
+                <a16:creationId xmlns:a16="http://schemas.microsoft.com/office/drawing/2014/main" id="{158D4700-C4CE-C2F9-D0A7-06799F81F594}"/>
+              </a:ext>
+            </a:extLst>
+          </p:cNvPr>
+          <p:cNvSpPr txBox="1"/>
+          <p:nvPr userDrawn="1"/>
+        </p:nvSpPr>
+        <p:spPr>
+          <a:xfrm>
+            <a:off x="166031" y="4011401"/>
+            <a:ext cx="2605511" cy="655564"/>
+          </a:xfrm>
+          <a:prstGeom prst="rect">
+            <a:avLst/>
+          </a:prstGeom>
+          <a:noFill/>
+        </p:spPr>
+        <p:txBody>
+          <a:bodyPr wrap="square" lIns="118872" tIns="91440" rIns="118872" bIns="91440" rtlCol="0" anchor="ctr" anchorCtr="0">
+            <a:spAutoFit/>
+          </a:bodyPr>
+          <a:lstStyle/>
+          <a:p>
+            <a:pPr algn="ctr">
+              <a:lnSpc>
+                <a:spcPct val="90000"/>
+              </a:lnSpc>
+            </a:pPr>
+            <a:r>
+              <a:rPr lang="en-US" sz="1200" i="1" dirty="0"/>
+              <a:t>Consortium for the Advancement of Scientific Software</a:t>
+            </a:r>
+            <a:br>
+              <a:rPr lang="en-US" sz="1200" i="1" dirty="0"/>
+            </a:br>
+            <a:r>
+              <a:rPr lang="en-US" sz="1000" i="1" dirty="0">
+                <a:hlinkClick r:id="rId12"/>
+              </a:rPr>
+              <a:t>https://cass.community</a:t>
+            </a:r>
+            <a:endParaRPr lang="en-US" sz="1200" i="1" dirty="0"/>
+          </a:p>
+        </p:txBody>
+      </p:sp>
       <p:pic>
         <p:nvPicPr>
-          <p:cNvPr id="31" name="Picture 30">
+          <p:cNvPr id="38" name="Picture 37" descr="A picture containing arrow&#10;&#10;AI-generated content may be incorrect.">
             <a:extLst>
               <a:ext uri="{FF2B5EF4-FFF2-40B4-BE49-F238E27FC236}">
-                <a16:creationId xmlns:a16="http://schemas.microsoft.com/office/drawing/2014/main" id="{F6BAEEDA-B6C4-7DDA-6A83-26F20E08F28B}"/>
+                <a16:creationId xmlns:a16="http://schemas.microsoft.com/office/drawing/2014/main" id="{C35E018A-A812-4862-A6E5-340C47A4832A}"/>
               </a:ext>
             </a:extLst>
           </p:cNvPr>
@@ -2253,17 +2358,8 @@
           <p:nvPr userDrawn="1"/>
         </p:nvPicPr>
         <p:blipFill>
-          <a:blip r:embed="rId9" cstate="print">
+          <a:blip r:embed="rId13" cstate="print">
             <a:extLst>
-              <a:ext uri="{BEBA8EAE-BF5A-486C-A8C5-ECC9F3942E4B}">
-                <a14:imgProps xmlns:a14="http://schemas.microsoft.com/office/drawing/2010/main">
-                  <a14:imgLayer r:embed="rId10">
-                    <a14:imgEffect>
-                      <a14:brightnessContrast bright="100000"/>
-                    </a14:imgEffect>
-                  </a14:imgLayer>
-                </a14:imgProps>
-              </a:ext>
               <a:ext uri="{28A0092B-C50C-407E-A947-70E740481C1C}">
                 <a14:useLocalDpi xmlns:a14="http://schemas.microsoft.com/office/drawing/2010/main" val="0"/>
               </a:ext>
@@ -2275,8 +2371,8 @@
         </p:blipFill>
         <p:spPr>
           <a:xfrm>
-            <a:off x="9536165" y="6321694"/>
-            <a:ext cx="2409477" cy="401008"/>
+            <a:off x="849769" y="2974535"/>
+            <a:ext cx="1238034" cy="1128739"/>
           </a:xfrm>
           <a:prstGeom prst="rect">
             <a:avLst/>
@@ -2774,163 +2870,12 @@
           </a:prstGeom>
         </p:spPr>
       </p:pic>
-      <p:grpSp>
-        <p:nvGrpSpPr>
-          <p:cNvPr id="21" name="Group 20">
+      <p:sp>
+        <p:nvSpPr>
+          <p:cNvPr id="12" name="TextBox 11">
             <a:extLst>
               <a:ext uri="{FF2B5EF4-FFF2-40B4-BE49-F238E27FC236}">
-                <a16:creationId xmlns:a16="http://schemas.microsoft.com/office/drawing/2014/main" id="{23F39736-1AFA-8528-C9E3-41B55EABEDCA}"/>
-              </a:ext>
-            </a:extLst>
-          </p:cNvPr>
-          <p:cNvGrpSpPr/>
-          <p:nvPr userDrawn="1"/>
-        </p:nvGrpSpPr>
-        <p:grpSpPr>
-          <a:xfrm>
-            <a:off x="366259" y="3655396"/>
-            <a:ext cx="2214716" cy="356329"/>
-            <a:chOff x="341278" y="3628835"/>
-            <a:chExt cx="2214716" cy="356329"/>
-          </a:xfrm>
-        </p:grpSpPr>
-        <p:pic>
-          <p:nvPicPr>
-            <p:cNvPr id="6" name="Picture 2">
-              <a:extLst>
-                <a:ext uri="{FF2B5EF4-FFF2-40B4-BE49-F238E27FC236}">
-                  <a16:creationId xmlns:a16="http://schemas.microsoft.com/office/drawing/2014/main" id="{EF0692E1-7D85-78AD-9CB9-EDC5C0A1CD96}"/>
-                </a:ext>
-              </a:extLst>
-            </p:cNvPr>
-            <p:cNvPicPr>
-              <a:picLocks noChangeAspect="1" noChangeArrowheads="1"/>
-            </p:cNvPicPr>
-            <p:nvPr userDrawn="1"/>
-          </p:nvPicPr>
-          <p:blipFill>
-            <a:blip r:embed="rId6">
-              <a:extLst>
-                <a:ext uri="{28A0092B-C50C-407E-A947-70E740481C1C}">
-                  <a14:useLocalDpi xmlns:a14="http://schemas.microsoft.com/office/drawing/2010/main" val="0"/>
-                </a:ext>
-              </a:extLst>
-            </a:blip>
-            <a:srcRect/>
-            <a:stretch>
-              <a:fillRect/>
-            </a:stretch>
-          </p:blipFill>
-          <p:spPr bwMode="auto">
-            <a:xfrm>
-              <a:off x="341278" y="3628835"/>
-              <a:ext cx="1005840" cy="356329"/>
-            </a:xfrm>
-            <a:prstGeom prst="rect">
-              <a:avLst/>
-            </a:prstGeom>
-            <a:noFill/>
-            <a:extLst>
-              <a:ext uri="{909E8E84-426E-40DD-AFC4-6F175D3DCCD1}">
-                <a14:hiddenFill xmlns:a14="http://schemas.microsoft.com/office/drawing/2010/main">
-                  <a:solidFill>
-                    <a:srgbClr val="FFFFFF"/>
-                  </a:solidFill>
-                </a14:hiddenFill>
-              </a:ext>
-            </a:extLst>
-          </p:spPr>
-        </p:pic>
-        <p:pic>
-          <p:nvPicPr>
-            <p:cNvPr id="7" name="Picture 4">
-              <a:extLst>
-                <a:ext uri="{FF2B5EF4-FFF2-40B4-BE49-F238E27FC236}">
-                  <a16:creationId xmlns:a16="http://schemas.microsoft.com/office/drawing/2014/main" id="{05CDAB3D-B8D6-9AC9-8507-6F95230AEE45}"/>
-                </a:ext>
-              </a:extLst>
-            </p:cNvPr>
-            <p:cNvPicPr>
-              <a:picLocks noChangeAspect="1" noChangeArrowheads="1"/>
-            </p:cNvPicPr>
-            <p:nvPr userDrawn="1"/>
-          </p:nvPicPr>
-          <p:blipFill>
-            <a:blip r:embed="rId7" cstate="print">
-              <a:extLst>
-                <a:ext uri="{28A0092B-C50C-407E-A947-70E740481C1C}">
-                  <a14:useLocalDpi xmlns:a14="http://schemas.microsoft.com/office/drawing/2010/main" val="0"/>
-                </a:ext>
-              </a:extLst>
-            </a:blip>
-            <a:srcRect/>
-            <a:stretch>
-              <a:fillRect/>
-            </a:stretch>
-          </p:blipFill>
-          <p:spPr bwMode="auto">
-            <a:xfrm>
-              <a:off x="1550154" y="3690079"/>
-              <a:ext cx="1005840" cy="233840"/>
-            </a:xfrm>
-            <a:prstGeom prst="rect">
-              <a:avLst/>
-            </a:prstGeom>
-            <a:noFill/>
-            <a:extLst>
-              <a:ext uri="{909E8E84-426E-40DD-AFC4-6F175D3DCCD1}">
-                <a14:hiddenFill xmlns:a14="http://schemas.microsoft.com/office/drawing/2010/main">
-                  <a:solidFill>
-                    <a:srgbClr val="FFFFFF"/>
-                  </a:solidFill>
-                </a14:hiddenFill>
-              </a:ext>
-            </a:extLst>
-          </p:spPr>
-        </p:pic>
-      </p:grpSp>
-      <p:pic>
-        <p:nvPicPr>
-          <p:cNvPr id="11" name="Picture 10" descr="A black and white sign with blue text&#10;&#10;Description automatically generated">
-            <a:extLst>
-              <a:ext uri="{FF2B5EF4-FFF2-40B4-BE49-F238E27FC236}">
-                <a16:creationId xmlns:a16="http://schemas.microsoft.com/office/drawing/2014/main" id="{A50B83FE-88FB-1C61-17CC-A58C0BE092BF}"/>
-              </a:ext>
-            </a:extLst>
-          </p:cNvPr>
-          <p:cNvPicPr>
-            <a:picLocks noChangeAspect="1"/>
-          </p:cNvPicPr>
-          <p:nvPr userDrawn="1"/>
-        </p:nvPicPr>
-        <p:blipFill>
-          <a:blip r:embed="rId8" cstate="print">
-            <a:extLst>
-              <a:ext uri="{28A0092B-C50C-407E-A947-70E740481C1C}">
-                <a14:useLocalDpi xmlns:a14="http://schemas.microsoft.com/office/drawing/2010/main" val="0"/>
-              </a:ext>
-            </a:extLst>
-          </a:blip>
-          <a:stretch>
-            <a:fillRect/>
-          </a:stretch>
-        </p:blipFill>
-        <p:spPr>
-          <a:xfrm>
-            <a:off x="970697" y="4125123"/>
-            <a:ext cx="1005840" cy="324328"/>
-          </a:xfrm>
-          <a:prstGeom prst="rect">
-            <a:avLst/>
-          </a:prstGeom>
-        </p:spPr>
-      </p:pic>
-      <p:sp>
-        <p:nvSpPr>
-          <p:cNvPr id="8" name="TextBox 7">
-            <a:extLst>
-              <a:ext uri="{FF2B5EF4-FFF2-40B4-BE49-F238E27FC236}">
-                <a16:creationId xmlns:a16="http://schemas.microsoft.com/office/drawing/2014/main" id="{DBDB4EA8-7E00-EB97-386F-806F04EDC41A}"/>
+                <a16:creationId xmlns:a16="http://schemas.microsoft.com/office/drawing/2014/main" id="{2FF8162C-FE3B-2F12-EFB5-7DF3B974D63A}"/>
               </a:ext>
             </a:extLst>
           </p:cNvPr>
@@ -2939,7 +2884,7 @@
         </p:nvSpPr>
         <p:spPr>
           <a:xfrm>
-            <a:off x="901538" y="1776974"/>
+            <a:off x="901538" y="1454246"/>
             <a:ext cx="1144159" cy="350865"/>
           </a:xfrm>
           <a:prstGeom prst="rect">
@@ -2967,10 +2912,10 @@
       </p:sp>
       <p:sp>
         <p:nvSpPr>
-          <p:cNvPr id="9" name="TextBox 8">
+          <p:cNvPr id="19" name="TextBox 18">
             <a:extLst>
               <a:ext uri="{FF2B5EF4-FFF2-40B4-BE49-F238E27FC236}">
-                <a16:creationId xmlns:a16="http://schemas.microsoft.com/office/drawing/2014/main" id="{9C6AA8F1-3D17-46A7-8926-BC4892D4C51C}"/>
+                <a16:creationId xmlns:a16="http://schemas.microsoft.com/office/drawing/2014/main" id="{D2820F98-3B22-7A7C-C5D3-A451E4190BE0}"/>
               </a:ext>
             </a:extLst>
           </p:cNvPr>
@@ -2979,48 +2924,8 @@
         </p:nvSpPr>
         <p:spPr>
           <a:xfrm>
-            <a:off x="28657" y="2079048"/>
-            <a:ext cx="2889921" cy="932563"/>
-          </a:xfrm>
-          <a:prstGeom prst="rect">
-            <a:avLst/>
-          </a:prstGeom>
-          <a:noFill/>
-        </p:spPr>
-        <p:txBody>
-          <a:bodyPr wrap="square" lIns="118872" tIns="91440" rIns="118872" bIns="91440" rtlCol="0" anchor="ctr" anchorCtr="0">
-            <a:spAutoFit/>
-          </a:bodyPr>
-          <a:lstStyle/>
-          <a:p>
-            <a:pPr algn="l">
-              <a:lnSpc>
-                <a:spcPct val="90000"/>
-              </a:lnSpc>
-            </a:pPr>
-            <a:r>
-              <a:rPr lang="en-US" b="1" dirty="0"/>
-              <a:t>COLABS: Collaboration for Better Software for Science</a:t>
-            </a:r>
-          </a:p>
-        </p:txBody>
-      </p:sp>
-      <p:sp>
-        <p:nvSpPr>
-          <p:cNvPr id="10" name="TextBox 9">
-            <a:extLst>
-              <a:ext uri="{FF2B5EF4-FFF2-40B4-BE49-F238E27FC236}">
-                <a16:creationId xmlns:a16="http://schemas.microsoft.com/office/drawing/2014/main" id="{CE38D39D-3F53-1EF5-8F58-4DF913CFD07D}"/>
-              </a:ext>
-            </a:extLst>
-          </p:cNvPr>
-          <p:cNvSpPr txBox="1"/>
-          <p:nvPr userDrawn="1"/>
-        </p:nvSpPr>
-        <p:spPr>
-          <a:xfrm>
-            <a:off x="676315" y="3191133"/>
-            <a:ext cx="1594604" cy="350865"/>
+            <a:off x="948025" y="2646131"/>
+            <a:ext cx="1051185" cy="350865"/>
           </a:xfrm>
           <a:prstGeom prst="rect">
             <a:avLst/>
@@ -3040,17 +2945,17 @@
             </a:pPr>
             <a:r>
               <a:rPr lang="en-US" sz="1200" i="1" dirty="0"/>
-              <a:t>In collaboration with</a:t>
+              <a:t>Members of</a:t>
             </a:r>
           </a:p>
         </p:txBody>
       </p:sp>
       <p:sp>
         <p:nvSpPr>
-          <p:cNvPr id="15" name="TextBox 14">
+          <p:cNvPr id="23" name="TextBox 22">
             <a:extLst>
               <a:ext uri="{FF2B5EF4-FFF2-40B4-BE49-F238E27FC236}">
-                <a16:creationId xmlns:a16="http://schemas.microsoft.com/office/drawing/2014/main" id="{38A567DA-27A0-BFAF-CB9E-0EA56E125664}"/>
+                <a16:creationId xmlns:a16="http://schemas.microsoft.com/office/drawing/2014/main" id="{C39CAFBB-B26F-D973-C4F5-75C0DBD17BC8}"/>
               </a:ext>
             </a:extLst>
           </p:cNvPr>
@@ -3059,7 +2964,7 @@
         </p:nvSpPr>
         <p:spPr>
           <a:xfrm>
-            <a:off x="572120" y="4562849"/>
+            <a:off x="572120" y="4624321"/>
             <a:ext cx="1802994" cy="350865"/>
           </a:xfrm>
           <a:prstGeom prst="rect">
@@ -3087,10 +2992,10 @@
       </p:sp>
       <p:grpSp>
         <p:nvGrpSpPr>
-          <p:cNvPr id="20" name="Group 19">
+          <p:cNvPr id="24" name="Group 23">
             <a:extLst>
               <a:ext uri="{FF2B5EF4-FFF2-40B4-BE49-F238E27FC236}">
-                <a16:creationId xmlns:a16="http://schemas.microsoft.com/office/drawing/2014/main" id="{63A83523-6C92-DDA5-E072-BAC75B3276B6}"/>
+                <a16:creationId xmlns:a16="http://schemas.microsoft.com/office/drawing/2014/main" id="{273B7CB2-1661-339F-C3CF-B7841A4249CF}"/>
               </a:ext>
             </a:extLst>
           </p:cNvPr>
@@ -3107,10 +3012,10 @@
         </p:grpSpPr>
         <p:pic>
           <p:nvPicPr>
-            <p:cNvPr id="17" name="Picture 16">
+            <p:cNvPr id="25" name="Picture 24">
               <a:extLst>
                 <a:ext uri="{FF2B5EF4-FFF2-40B4-BE49-F238E27FC236}">
-                  <a16:creationId xmlns:a16="http://schemas.microsoft.com/office/drawing/2014/main" id="{70EB972A-C812-2D11-E993-9648F06DCD53}"/>
+                  <a16:creationId xmlns:a16="http://schemas.microsoft.com/office/drawing/2014/main" id="{20E1B50D-7456-26E6-E71B-C2EFC86CD852}"/>
                 </a:ext>
               </a:extLst>
             </p:cNvPr>
@@ -3120,7 +3025,7 @@
             <p:nvPr userDrawn="1"/>
           </p:nvPicPr>
           <p:blipFill>
-            <a:blip r:embed="rId9" cstate="print">
+            <a:blip r:embed="rId6" cstate="print">
               <a:extLst>
                 <a:ext uri="{28A0092B-C50C-407E-A947-70E740481C1C}">
                   <a14:useLocalDpi xmlns:a14="http://schemas.microsoft.com/office/drawing/2010/main" val="0"/>
@@ -3143,10 +3048,10 @@
         </p:pic>
         <p:pic>
           <p:nvPicPr>
-            <p:cNvPr id="18" name="Picture 17" descr="A picture containing shape&#10;&#10;Description automatically generated">
+            <p:cNvPr id="26" name="Picture 25" descr="A picture containing shape&#10;&#10;Description automatically generated">
               <a:extLst>
                 <a:ext uri="{FF2B5EF4-FFF2-40B4-BE49-F238E27FC236}">
-                  <a16:creationId xmlns:a16="http://schemas.microsoft.com/office/drawing/2014/main" id="{DC5CC62A-5FBA-A239-536C-E231ED3105F0}"/>
+                  <a16:creationId xmlns:a16="http://schemas.microsoft.com/office/drawing/2014/main" id="{CCF4F055-BFB5-5FA7-5DAE-B7C31519A851}"/>
                 </a:ext>
               </a:extLst>
             </p:cNvPr>
@@ -3156,7 +3061,7 @@
             <p:nvPr userDrawn="1"/>
           </p:nvPicPr>
           <p:blipFill>
-            <a:blip r:embed="rId10">
+            <a:blip r:embed="rId7">
               <a:extLst>
                 <a:ext uri="{28A0092B-C50C-407E-A947-70E740481C1C}">
                   <a14:useLocalDpi xmlns:a14="http://schemas.microsoft.com/office/drawing/2010/main" val="0"/>
@@ -3178,6 +3083,293 @@
           </p:spPr>
         </p:pic>
       </p:grpSp>
+      <p:grpSp>
+        <p:nvGrpSpPr>
+          <p:cNvPr id="27" name="Group 26">
+            <a:extLst>
+              <a:ext uri="{FF2B5EF4-FFF2-40B4-BE49-F238E27FC236}">
+                <a16:creationId xmlns:a16="http://schemas.microsoft.com/office/drawing/2014/main" id="{D346F560-6C4A-637B-95AE-00BA10A56548}"/>
+              </a:ext>
+            </a:extLst>
+          </p:cNvPr>
+          <p:cNvGrpSpPr/>
+          <p:nvPr userDrawn="1"/>
+        </p:nvGrpSpPr>
+        <p:grpSpPr>
+          <a:xfrm>
+            <a:off x="-69503" y="1892144"/>
+            <a:ext cx="2985270" cy="790169"/>
+            <a:chOff x="-69503" y="2214872"/>
+            <a:chExt cx="2985270" cy="790169"/>
+          </a:xfrm>
+        </p:grpSpPr>
+        <p:pic>
+          <p:nvPicPr>
+            <p:cNvPr id="28" name="Picture 4">
+              <a:extLst>
+                <a:ext uri="{FF2B5EF4-FFF2-40B4-BE49-F238E27FC236}">
+                  <a16:creationId xmlns:a16="http://schemas.microsoft.com/office/drawing/2014/main" id="{32D9E63D-4D7F-616E-6CFA-84EF3251CEDC}"/>
+                </a:ext>
+              </a:extLst>
+            </p:cNvPr>
+            <p:cNvPicPr>
+              <a:picLocks noChangeAspect="1" noChangeArrowheads="1"/>
+            </p:cNvPicPr>
+            <p:nvPr userDrawn="1"/>
+          </p:nvPicPr>
+          <p:blipFill>
+            <a:blip r:embed="rId8" cstate="print">
+              <a:extLst>
+                <a:ext uri="{28A0092B-C50C-407E-A947-70E740481C1C}">
+                  <a14:useLocalDpi xmlns:a14="http://schemas.microsoft.com/office/drawing/2010/main" val="0"/>
+                </a:ext>
+              </a:extLst>
+            </a:blip>
+            <a:srcRect/>
+            <a:stretch>
+              <a:fillRect/>
+            </a:stretch>
+          </p:blipFill>
+          <p:spPr bwMode="auto">
+            <a:xfrm>
+              <a:off x="1484438" y="2317122"/>
+              <a:ext cx="1371600" cy="318873"/>
+            </a:xfrm>
+            <a:prstGeom prst="rect">
+              <a:avLst/>
+            </a:prstGeom>
+            <a:noFill/>
+            <a:extLst>
+              <a:ext uri="{909E8E84-426E-40DD-AFC4-6F175D3DCCD1}">
+                <a14:hiddenFill xmlns:a14="http://schemas.microsoft.com/office/drawing/2010/main">
+                  <a:solidFill>
+                    <a:srgbClr val="FFFFFF"/>
+                  </a:solidFill>
+                </a14:hiddenFill>
+              </a:ext>
+            </a:extLst>
+          </p:spPr>
+        </p:pic>
+        <p:pic>
+          <p:nvPicPr>
+            <p:cNvPr id="29" name="Picture 2" descr="A picture containing graphics, logo, font, symbol&#10;&#10;Description automatically generated">
+              <a:extLst>
+                <a:ext uri="{FF2B5EF4-FFF2-40B4-BE49-F238E27FC236}">
+                  <a16:creationId xmlns:a16="http://schemas.microsoft.com/office/drawing/2014/main" id="{C3DD0F40-8227-1760-99FF-A46AF01BB816}"/>
+                </a:ext>
+              </a:extLst>
+            </p:cNvPr>
+            <p:cNvPicPr>
+              <a:picLocks noChangeAspect="1" noChangeArrowheads="1"/>
+            </p:cNvPicPr>
+            <p:nvPr userDrawn="1"/>
+          </p:nvPicPr>
+          <p:blipFill>
+            <a:blip r:embed="rId9" cstate="print">
+              <a:extLst>
+                <a:ext uri="{28A0092B-C50C-407E-A947-70E740481C1C}">
+                  <a14:useLocalDpi xmlns:a14="http://schemas.microsoft.com/office/drawing/2010/main" val="0"/>
+                </a:ext>
+              </a:extLst>
+            </a:blip>
+            <a:srcRect/>
+            <a:stretch>
+              <a:fillRect/>
+            </a:stretch>
+          </p:blipFill>
+          <p:spPr bwMode="auto">
+            <a:xfrm>
+              <a:off x="321595" y="2214872"/>
+              <a:ext cx="841248" cy="523372"/>
+            </a:xfrm>
+            <a:prstGeom prst="rect">
+              <a:avLst/>
+            </a:prstGeom>
+            <a:noFill/>
+            <a:extLst>
+              <a:ext uri="{909E8E84-426E-40DD-AFC4-6F175D3DCCD1}">
+                <a14:hiddenFill xmlns:a14="http://schemas.microsoft.com/office/drawing/2010/main">
+                  <a:solidFill>
+                    <a:srgbClr val="FFFFFF"/>
+                  </a:solidFill>
+                </a14:hiddenFill>
+              </a:ext>
+            </a:extLst>
+          </p:spPr>
+        </p:pic>
+        <p:sp>
+          <p:nvSpPr>
+            <p:cNvPr id="30" name="TextBox 29">
+              <a:extLst>
+                <a:ext uri="{FF2B5EF4-FFF2-40B4-BE49-F238E27FC236}">
+                  <a16:creationId xmlns:a16="http://schemas.microsoft.com/office/drawing/2014/main" id="{CC397930-9AA6-7A6A-76AA-0832111D6B80}"/>
+                </a:ext>
+              </a:extLst>
+            </p:cNvPr>
+            <p:cNvSpPr txBox="1"/>
+            <p:nvPr userDrawn="1"/>
+          </p:nvSpPr>
+          <p:spPr>
+            <a:xfrm>
+              <a:off x="-69503" y="2668026"/>
+              <a:ext cx="1631472" cy="337015"/>
+            </a:xfrm>
+            <a:prstGeom prst="rect">
+              <a:avLst/>
+            </a:prstGeom>
+            <a:noFill/>
+          </p:spPr>
+          <p:txBody>
+            <a:bodyPr wrap="none" lIns="118872" tIns="91440" rIns="118872" bIns="91440" rtlCol="0" anchor="ctr" anchorCtr="0">
+              <a:spAutoFit/>
+            </a:bodyPr>
+            <a:lstStyle/>
+            <a:p>
+              <a:pPr algn="l">
+                <a:lnSpc>
+                  <a:spcPct val="90000"/>
+                </a:lnSpc>
+              </a:pPr>
+              <a:r>
+                <a:rPr lang="en-US" sz="1050" i="1" dirty="0">
+                  <a:hlinkClick r:id="rId10"/>
+                </a:rPr>
+                <a:t>https://pesoproject.org</a:t>
+              </a:r>
+              <a:endParaRPr lang="en-US" sz="1050" i="1" dirty="0"/>
+            </a:p>
+          </p:txBody>
+        </p:sp>
+        <p:sp>
+          <p:nvSpPr>
+            <p:cNvPr id="31" name="TextBox 30">
+              <a:extLst>
+                <a:ext uri="{FF2B5EF4-FFF2-40B4-BE49-F238E27FC236}">
+                  <a16:creationId xmlns:a16="http://schemas.microsoft.com/office/drawing/2014/main" id="{3D9CC300-2021-70DB-ED4C-4241A2BFF3CD}"/>
+                </a:ext>
+              </a:extLst>
+            </p:cNvPr>
+            <p:cNvSpPr txBox="1"/>
+            <p:nvPr userDrawn="1"/>
+          </p:nvSpPr>
+          <p:spPr>
+            <a:xfrm>
+              <a:off x="1423755" y="2668026"/>
+              <a:ext cx="1492012" cy="337015"/>
+            </a:xfrm>
+            <a:prstGeom prst="rect">
+              <a:avLst/>
+            </a:prstGeom>
+            <a:noFill/>
+          </p:spPr>
+          <p:txBody>
+            <a:bodyPr wrap="none" lIns="118872" tIns="91440" rIns="118872" bIns="91440" rtlCol="0" anchor="ctr" anchorCtr="0">
+              <a:spAutoFit/>
+            </a:bodyPr>
+            <a:lstStyle/>
+            <a:p>
+              <a:pPr algn="l">
+                <a:lnSpc>
+                  <a:spcPct val="90000"/>
+                </a:lnSpc>
+              </a:pPr>
+              <a:r>
+                <a:rPr lang="en-US" sz="1050" i="1" dirty="0">
+                  <a:hlinkClick r:id="rId11"/>
+                </a:rPr>
+                <a:t>https://rapids.lbl.gov</a:t>
+              </a:r>
+              <a:endParaRPr lang="en-US" sz="1050" i="1" dirty="0"/>
+            </a:p>
+          </p:txBody>
+        </p:sp>
+      </p:grpSp>
+      <p:sp>
+        <p:nvSpPr>
+          <p:cNvPr id="32" name="TextBox 31">
+            <a:extLst>
+              <a:ext uri="{FF2B5EF4-FFF2-40B4-BE49-F238E27FC236}">
+                <a16:creationId xmlns:a16="http://schemas.microsoft.com/office/drawing/2014/main" id="{1913CA0B-B952-F608-0A2C-CCD7844E5E43}"/>
+              </a:ext>
+            </a:extLst>
+          </p:cNvPr>
+          <p:cNvSpPr txBox="1"/>
+          <p:nvPr userDrawn="1"/>
+        </p:nvSpPr>
+        <p:spPr>
+          <a:xfrm>
+            <a:off x="166031" y="4011401"/>
+            <a:ext cx="2605511" cy="655564"/>
+          </a:xfrm>
+          <a:prstGeom prst="rect">
+            <a:avLst/>
+          </a:prstGeom>
+          <a:noFill/>
+        </p:spPr>
+        <p:txBody>
+          <a:bodyPr wrap="square" lIns="118872" tIns="91440" rIns="118872" bIns="91440" rtlCol="0" anchor="ctr" anchorCtr="0">
+            <a:spAutoFit/>
+          </a:bodyPr>
+          <a:lstStyle/>
+          <a:p>
+            <a:pPr algn="ctr">
+              <a:lnSpc>
+                <a:spcPct val="90000"/>
+              </a:lnSpc>
+            </a:pPr>
+            <a:r>
+              <a:rPr lang="en-US" sz="1200" i="1" dirty="0"/>
+              <a:t>Consortium for the Advancement of Scientific Software</a:t>
+            </a:r>
+            <a:br>
+              <a:rPr lang="en-US" sz="1200" i="1" dirty="0"/>
+            </a:br>
+            <a:r>
+              <a:rPr lang="en-US" sz="1000" i="1" dirty="0">
+                <a:hlinkClick r:id="rId12"/>
+              </a:rPr>
+              <a:t>https://cass.community</a:t>
+            </a:r>
+            <a:endParaRPr lang="en-US" sz="1200" i="1" dirty="0"/>
+          </a:p>
+        </p:txBody>
+      </p:sp>
+      <p:pic>
+        <p:nvPicPr>
+          <p:cNvPr id="33" name="Picture 32" descr="A picture containing arrow&#10;&#10;AI-generated content may be incorrect.">
+            <a:extLst>
+              <a:ext uri="{FF2B5EF4-FFF2-40B4-BE49-F238E27FC236}">
+                <a16:creationId xmlns:a16="http://schemas.microsoft.com/office/drawing/2014/main" id="{B7F73F98-CA13-FB35-8581-26AFB4E15F1A}"/>
+              </a:ext>
+            </a:extLst>
+          </p:cNvPr>
+          <p:cNvPicPr>
+            <a:picLocks noChangeAspect="1"/>
+          </p:cNvPicPr>
+          <p:nvPr userDrawn="1"/>
+        </p:nvPicPr>
+        <p:blipFill>
+          <a:blip r:embed="rId13" cstate="print">
+            <a:extLst>
+              <a:ext uri="{28A0092B-C50C-407E-A947-70E740481C1C}">
+                <a14:useLocalDpi xmlns:a14="http://schemas.microsoft.com/office/drawing/2010/main" val="0"/>
+              </a:ext>
+            </a:extLst>
+          </a:blip>
+          <a:stretch>
+            <a:fillRect/>
+          </a:stretch>
+        </p:blipFill>
+        <p:spPr>
+          <a:xfrm>
+            <a:off x="849769" y="2974535"/>
+            <a:ext cx="1238034" cy="1128739"/>
+          </a:xfrm>
+          <a:prstGeom prst="rect">
+            <a:avLst/>
+          </a:prstGeom>
+        </p:spPr>
+      </p:pic>
     </p:spTree>
     <p:extLst>
       <p:ext uri="{BB962C8B-B14F-4D97-AF65-F5344CB8AC3E}">
@@ -30324,12 +30516,6 @@
 </file>
 
 <file path=customXml/item2.xml><?xml version="1.0" encoding="utf-8"?>
-<p:properties xmlns:p="http://schemas.microsoft.com/office/2006/metadata/properties" xmlns:xsi="http://www.w3.org/2001/XMLSchema-instance" xmlns:pc="http://schemas.microsoft.com/office/infopath/2007/PartnerControls">
-  <documentManagement/>
-</p:properties>
-</file>
-
-<file path=customXml/item3.xml><?xml version="1.0" encoding="utf-8"?>
 <ct:contentTypeSchema xmlns:ct="http://schemas.microsoft.com/office/2006/metadata/contentType" xmlns:ma="http://schemas.microsoft.com/office/2006/metadata/properties/metaAttributes" ct:_="" ma:_="" ma:contentTypeName="Document" ma:contentTypeID="0x010100565464437F680748A68B85EB6594EA7D" ma:contentTypeVersion="0" ma:contentTypeDescription="Create a new document." ma:contentTypeScope="" ma:versionID="fe3f4dd58d5914c51cfc6deaa8ad845c">
   <xsd:schema xmlns:xsd="http://www.w3.org/2001/XMLSchema" xmlns:p="http://schemas.microsoft.com/office/2006/metadata/properties" targetNamespace="http://schemas.microsoft.com/office/2006/metadata/properties" ma:root="true" ma:fieldsID="4aeb20c0e3442673af7ee10786458764">
     <xsd:element name="properties">
@@ -30378,6 +30564,12 @@
 </ct:contentTypeSchema>
 </file>
 
+<file path=customXml/item3.xml><?xml version="1.0" encoding="utf-8"?>
+<p:properties xmlns:p="http://schemas.microsoft.com/office/2006/metadata/properties" xmlns:xsi="http://www.w3.org/2001/XMLSchema-instance" xmlns:pc="http://schemas.microsoft.com/office/infopath/2007/PartnerControls">
+  <documentManagement/>
+</p:properties>
+</file>
+
 <file path=customXml/itemProps1.xml><?xml version="1.0" encoding="utf-8"?>
 <ds:datastoreItem xmlns:ds="http://schemas.openxmlformats.org/officeDocument/2006/customXml" ds:itemID="{19E20559-B232-4371-8690-E3D8007EDB82}">
   <ds:schemaRefs>
@@ -30387,6 +30579,21 @@
 </file>
 
 <file path=customXml/itemProps2.xml><?xml version="1.0" encoding="utf-8"?>
+<ds:datastoreItem xmlns:ds="http://schemas.openxmlformats.org/officeDocument/2006/customXml" ds:itemID="{E8DB7DEB-074E-4EE8-9B6E-FD277323109C}">
+  <ds:schemaRefs>
+    <ds:schemaRef ds:uri="http://schemas.microsoft.com/office/2006/metadata/contentType"/>
+    <ds:schemaRef ds:uri="http://schemas.microsoft.com/office/2006/metadata/properties/metaAttributes"/>
+    <ds:schemaRef ds:uri="http://www.w3.org/2001/XMLSchema"/>
+    <ds:schemaRef ds:uri="http://schemas.microsoft.com/office/2006/metadata/properties"/>
+    <ds:schemaRef ds:uri="http://schemas.openxmlformats.org/package/2006/metadata/core-properties"/>
+    <ds:schemaRef ds:uri="http://purl.org/dc/elements/1.1/"/>
+    <ds:schemaRef ds:uri="http://purl.org/dc/terms/"/>
+    <ds:schemaRef ds:uri="http://schemas.microsoft.com/office/internal/2005/internalDocumentation"/>
+  </ds:schemaRefs>
+</ds:datastoreItem>
+</file>
+
+<file path=customXml/itemProps3.xml><?xml version="1.0" encoding="utf-8"?>
 <ds:datastoreItem xmlns:ds="http://schemas.openxmlformats.org/officeDocument/2006/customXml" ds:itemID="{A50EC660-24D0-43A0-AE5E-E274115E726B}">
   <ds:schemaRefs>
     <ds:schemaRef ds:uri="http://purl.org/dc/elements/1.1/"/>
@@ -30399,19 +30606,4 @@
     <ds:schemaRef ds:uri="http://schemas.microsoft.com/office/infopath/2007/PartnerControls"/>
   </ds:schemaRefs>
 </ds:datastoreItem>
-</file>
-
-<file path=customXml/itemProps3.xml><?xml version="1.0" encoding="utf-8"?>
-<ds:datastoreItem xmlns:ds="http://schemas.openxmlformats.org/officeDocument/2006/customXml" ds:itemID="{E8DB7DEB-074E-4EE8-9B6E-FD277323109C}">
-  <ds:schemaRefs>
-    <ds:schemaRef ds:uri="http://schemas.microsoft.com/office/2006/metadata/contentType"/>
-    <ds:schemaRef ds:uri="http://schemas.microsoft.com/office/2006/metadata/properties/metaAttributes"/>
-    <ds:schemaRef ds:uri="http://www.w3.org/2001/XMLSchema"/>
-    <ds:schemaRef ds:uri="http://schemas.microsoft.com/office/2006/metadata/properties"/>
-    <ds:schemaRef ds:uri="http://schemas.openxmlformats.org/package/2006/metadata/core-properties"/>
-    <ds:schemaRef ds:uri="http://purl.org/dc/elements/1.1/"/>
-    <ds:schemaRef ds:uri="http://purl.org/dc/terms/"/>
-    <ds:schemaRef ds:uri="http://schemas.microsoft.com/office/internal/2005/internalDocumentation"/>
-  </ds:schemaRefs>
-</ds:datastoreItem>
 </file>
--- a/refactoring.pptx
+++ b/refactoring.pptx
@@ -11,7 +11,7 @@
     <p:handoutMasterId r:id="rId37"/>
   </p:handoutMasterIdLst>
   <p:sldIdLst>
-    <p:sldId id="661" r:id="rId5"/>
+    <p:sldId id="256" r:id="rId5"/>
     <p:sldId id="668" r:id="rId6"/>
     <p:sldId id="610" r:id="rId7"/>
     <p:sldId id="625" r:id="rId8"/>
@@ -285,7 +285,7 @@
           <a:p>
             <a:fld id="{0B842F42-2CE9-4E35-95C1-410DC08A50B1}" type="datetimeFigureOut">
               <a:rPr lang="en-US" smtClean="0"/>
-              <a:t>8/5/2025</a:t>
+              <a:t>1/16/26</a:t>
             </a:fld>
             <a:endParaRPr lang="en-US"/>
           </a:p>
@@ -450,7 +450,7 @@
           <a:p>
             <a:fld id="{6F282904-F315-4730-8D91-37D99E141A6F}" type="datetimeFigureOut">
               <a:rPr lang="en-US" smtClean="0"/>
-              <a:t>8/5/2025</a:t>
+              <a:t>1/16/26</a:t>
             </a:fld>
             <a:endParaRPr lang="en-US"/>
           </a:p>
@@ -5783,10 +5783,10 @@
       </p:grpSpPr>
       <p:sp>
         <p:nvSpPr>
-          <p:cNvPr id="5" name="Title 3">
+          <p:cNvPr id="3" name="Text Placeholder 2">
             <a:extLst>
               <a:ext uri="{FF2B5EF4-FFF2-40B4-BE49-F238E27FC236}">
-                <a16:creationId xmlns:a16="http://schemas.microsoft.com/office/drawing/2014/main" id="{7D03A5FE-AFA2-5E74-3EC3-4FF7F3A7F3B6}"/>
+                <a16:creationId xmlns:a16="http://schemas.microsoft.com/office/drawing/2014/main" id="{A99BF10E-A133-4BAB-A18B-C7563472A356}"/>
               </a:ext>
             </a:extLst>
           </p:cNvPr>
@@ -5794,7 +5794,7 @@
             <a:spLocks noGrp="1"/>
           </p:cNvSpPr>
           <p:nvPr>
-            <p:ph type="ctrTitle"/>
+            <p:ph type="body" sz="quarter" idx="10"/>
           </p:nvPr>
         </p:nvSpPr>
         <p:spPr/>
@@ -5802,19 +5802,16 @@
           <a:bodyPr/>
           <a:lstStyle/>
           <a:p>
-            <a:r>
-              <a:rPr lang="en-US" dirty="0"/>
-              <a:t>Refactoring Scientific Software</a:t>
-            </a:r>
+            <a:endParaRPr lang="en-US" dirty="0"/>
           </a:p>
         </p:txBody>
       </p:sp>
       <p:sp>
         <p:nvSpPr>
-          <p:cNvPr id="2" name="Text Placeholder 1">
+          <p:cNvPr id="4" name="Text Placeholder 3">
             <a:extLst>
               <a:ext uri="{FF2B5EF4-FFF2-40B4-BE49-F238E27FC236}">
-                <a16:creationId xmlns:a16="http://schemas.microsoft.com/office/drawing/2014/main" id="{6AD4168A-C6C6-5469-438B-4509B9E4393D}"/>
+                <a16:creationId xmlns:a16="http://schemas.microsoft.com/office/drawing/2014/main" id="{CAA49102-FA8F-46A7-83A0-A9A05667E16E}"/>
               </a:ext>
             </a:extLst>
           </p:cNvPr>
@@ -5844,10 +5841,10 @@
       </p:sp>
       <p:sp>
         <p:nvSpPr>
-          <p:cNvPr id="4" name="Text Placeholder 3">
+          <p:cNvPr id="5" name="Text Placeholder 4">
             <a:extLst>
               <a:ext uri="{FF2B5EF4-FFF2-40B4-BE49-F238E27FC236}">
-                <a16:creationId xmlns:a16="http://schemas.microsoft.com/office/drawing/2014/main" id="{4D760C23-BF94-E141-C8E3-3BDF0553462C}"/>
+                <a16:creationId xmlns:a16="http://schemas.microsoft.com/office/drawing/2014/main" id="{65EE6617-5516-4E55-AE7E-7E31417CEDFF}"/>
               </a:ext>
             </a:extLst>
           </p:cNvPr>
@@ -5860,7 +5857,7 @@
         </p:nvSpPr>
         <p:spPr>
           <a:xfrm>
-            <a:off x="5221641" y="2134517"/>
+            <a:off x="5176191" y="2140952"/>
             <a:ext cx="1690167" cy="376085"/>
           </a:xfrm>
         </p:spPr>
@@ -5880,7 +5877,7 @@
           <p:cNvPr id="6" name="Text Placeholder 5">
             <a:extLst>
               <a:ext uri="{FF2B5EF4-FFF2-40B4-BE49-F238E27FC236}">
-                <a16:creationId xmlns:a16="http://schemas.microsoft.com/office/drawing/2014/main" id="{3FE14AF9-8D43-3BB1-2A81-B900709503A7}"/>
+                <a16:creationId xmlns:a16="http://schemas.microsoft.com/office/drawing/2014/main" id="{A2D55B71-8B0F-4FB0-8981-1394D64313AD}"/>
               </a:ext>
             </a:extLst>
           </p:cNvPr>
@@ -5905,10 +5902,102 @@
       </p:sp>
       <p:sp>
         <p:nvSpPr>
-          <p:cNvPr id="8" name="Text Placeholder 7">
+          <p:cNvPr id="9" name="Text Placeholder 9">
             <a:extLst>
               <a:ext uri="{FF2B5EF4-FFF2-40B4-BE49-F238E27FC236}">
-                <a16:creationId xmlns:a16="http://schemas.microsoft.com/office/drawing/2014/main" id="{F9F42C30-B1A4-9806-3AFE-CB6EF48900E8}"/>
+                <a16:creationId xmlns:a16="http://schemas.microsoft.com/office/drawing/2014/main" id="{02248880-3C3D-A32A-998B-10044170EB4C}"/>
+              </a:ext>
+            </a:extLst>
+          </p:cNvPr>
+          <p:cNvSpPr>
+            <a:spLocks noGrp="1"/>
+          </p:cNvSpPr>
+          <p:nvPr>
+            <p:ph type="body" sz="quarter" idx="14"/>
+          </p:nvPr>
+        </p:nvSpPr>
+        <p:spPr>
+          <a:xfrm>
+            <a:off x="3176925" y="3161813"/>
+            <a:ext cx="8292316" cy="646331"/>
+          </a:xfrm>
+        </p:spPr>
+        <p:txBody>
+          <a:bodyPr/>
+          <a:lstStyle/>
+          <a:p>
+            <a:pPr>
+              <a:spcBef>
+                <a:spcPts val="2800"/>
+              </a:spcBef>
+            </a:pPr>
+            <a:r>
+              <a:rPr lang="en-US" sz="2000" b="0" i="0" dirty="0">
+                <a:solidFill>
+                  <a:srgbClr val="111111"/>
+                </a:solidFill>
+                <a:effectLst/>
+                <a:latin typeface="+mn-lt"/>
+              </a:rPr>
+              <a:t>Better Software for Reproducible Science tutorial @ SCA/HPC-Asia 2026 Conferenc</a:t>
+            </a:r>
+            <a:r>
+              <a:rPr lang="en-US" dirty="0">
+                <a:solidFill>
+                  <a:srgbClr val="111111"/>
+                </a:solidFill>
+              </a:rPr>
+              <a:t>e, Osaka, Japan</a:t>
+            </a:r>
+            <a:endParaRPr lang="en-US" sz="2000" b="0" i="0" dirty="0">
+              <a:solidFill>
+                <a:srgbClr val="111111"/>
+              </a:solidFill>
+              <a:effectLst/>
+              <a:latin typeface="+mn-lt"/>
+            </a:endParaRPr>
+          </a:p>
+        </p:txBody>
+      </p:sp>
+      <p:sp>
+        <p:nvSpPr>
+          <p:cNvPr id="8" name="Title 3">
+            <a:extLst>
+              <a:ext uri="{FF2B5EF4-FFF2-40B4-BE49-F238E27FC236}">
+                <a16:creationId xmlns:a16="http://schemas.microsoft.com/office/drawing/2014/main" id="{E156347F-6BFC-BA41-31EF-E72B1756A7FF}"/>
+              </a:ext>
+            </a:extLst>
+          </p:cNvPr>
+          <p:cNvSpPr>
+            <a:spLocks noGrp="1"/>
+          </p:cNvSpPr>
+          <p:nvPr>
+            <p:ph type="ctrTitle"/>
+          </p:nvPr>
+        </p:nvSpPr>
+        <p:spPr>
+          <a:xfrm>
+            <a:off x="3177633" y="503144"/>
+            <a:ext cx="8292316" cy="1030930"/>
+          </a:xfrm>
+        </p:spPr>
+        <p:txBody>
+          <a:bodyPr/>
+          <a:lstStyle/>
+          <a:p>
+            <a:r>
+              <a:rPr lang="en-US" dirty="0"/>
+              <a:t>Refactoring Scientific Software</a:t>
+            </a:r>
+          </a:p>
+        </p:txBody>
+      </p:sp>
+      <p:sp>
+        <p:nvSpPr>
+          <p:cNvPr id="13" name="Text Placeholder 7">
+            <a:extLst>
+              <a:ext uri="{FF2B5EF4-FFF2-40B4-BE49-F238E27FC236}">
+                <a16:creationId xmlns:a16="http://schemas.microsoft.com/office/drawing/2014/main" id="{2A58DA0F-7B1F-8A89-7A56-EA70AA2EB23A}"/>
               </a:ext>
             </a:extLst>
           </p:cNvPr>
@@ -5936,81 +6025,10 @@
           </a:p>
         </p:txBody>
       </p:sp>
-      <p:sp>
-        <p:nvSpPr>
-          <p:cNvPr id="10" name="Text Placeholder 9">
-            <a:extLst>
-              <a:ext uri="{FF2B5EF4-FFF2-40B4-BE49-F238E27FC236}">
-                <a16:creationId xmlns:a16="http://schemas.microsoft.com/office/drawing/2014/main" id="{60A9E9A3-6A95-DE36-174A-E8BE6F2F7F2A}"/>
-              </a:ext>
-            </a:extLst>
-          </p:cNvPr>
-          <p:cNvSpPr>
-            <a:spLocks noGrp="1"/>
-          </p:cNvSpPr>
-          <p:nvPr>
-            <p:ph type="body" sz="quarter" idx="10"/>
-          </p:nvPr>
-        </p:nvSpPr>
-        <p:spPr/>
-        <p:txBody>
-          <a:bodyPr/>
-          <a:lstStyle/>
-          <a:p>
-            <a:endParaRPr lang="en-US"/>
-          </a:p>
-        </p:txBody>
-      </p:sp>
-      <p:sp>
-        <p:nvSpPr>
-          <p:cNvPr id="7" name="TextBox 6">
-            <a:extLst>
-              <a:ext uri="{FF2B5EF4-FFF2-40B4-BE49-F238E27FC236}">
-                <a16:creationId xmlns:a16="http://schemas.microsoft.com/office/drawing/2014/main" id="{CF510F9B-ECC0-48AA-EEEC-787005932834}"/>
-              </a:ext>
-            </a:extLst>
-          </p:cNvPr>
-          <p:cNvSpPr txBox="1"/>
-          <p:nvPr/>
-        </p:nvSpPr>
-        <p:spPr>
-          <a:xfrm>
-            <a:off x="3176924" y="3096499"/>
-            <a:ext cx="7201516" cy="646331"/>
-          </a:xfrm>
-          <a:prstGeom prst="rect">
-            <a:avLst/>
-          </a:prstGeom>
-          <a:noFill/>
-        </p:spPr>
-        <p:txBody>
-          <a:bodyPr wrap="square">
-            <a:spAutoFit/>
-          </a:bodyPr>
-          <a:lstStyle/>
-          <a:p>
-            <a:pPr>
-              <a:spcBef>
-                <a:spcPts val="2800"/>
-              </a:spcBef>
-            </a:pPr>
-            <a:r>
-              <a:rPr lang="en-US" sz="1800" b="0" i="0" dirty="0">
-                <a:solidFill>
-                  <a:srgbClr val="111111"/>
-                </a:solidFill>
-                <a:effectLst/>
-                <a:latin typeface="+mn-lt"/>
-              </a:rPr>
-              <a:t>Software Sustainability track @ Argonne Training Program on Extreme-Scale Computing summer school</a:t>
-            </a:r>
-          </a:p>
-        </p:txBody>
-      </p:sp>
     </p:spTree>
     <p:extLst>
       <p:ext uri="{BB962C8B-B14F-4D97-AF65-F5344CB8AC3E}">
-        <p14:creationId xmlns:p14="http://schemas.microsoft.com/office/powerpoint/2010/main" val="3316912077"/>
+        <p14:creationId xmlns:p14="http://schemas.microsoft.com/office/powerpoint/2010/main" val="2767525821"/>
       </p:ext>
     </p:extLst>
   </p:cSld>
@@ -30516,6 +30534,12 @@
 </file>
 
 <file path=customXml/item2.xml><?xml version="1.0" encoding="utf-8"?>
+<p:properties xmlns:p="http://schemas.microsoft.com/office/2006/metadata/properties" xmlns:xsi="http://www.w3.org/2001/XMLSchema-instance" xmlns:pc="http://schemas.microsoft.com/office/infopath/2007/PartnerControls">
+  <documentManagement/>
+</p:properties>
+</file>
+
+<file path=customXml/item3.xml><?xml version="1.0" encoding="utf-8"?>
 <ct:contentTypeSchema xmlns:ct="http://schemas.microsoft.com/office/2006/metadata/contentType" xmlns:ma="http://schemas.microsoft.com/office/2006/metadata/properties/metaAttributes" ct:_="" ma:_="" ma:contentTypeName="Document" ma:contentTypeID="0x010100565464437F680748A68B85EB6594EA7D" ma:contentTypeVersion="0" ma:contentTypeDescription="Create a new document." ma:contentTypeScope="" ma:versionID="fe3f4dd58d5914c51cfc6deaa8ad845c">
   <xsd:schema xmlns:xsd="http://www.w3.org/2001/XMLSchema" xmlns:p="http://schemas.microsoft.com/office/2006/metadata/properties" targetNamespace="http://schemas.microsoft.com/office/2006/metadata/properties" ma:root="true" ma:fieldsID="4aeb20c0e3442673af7ee10786458764">
     <xsd:element name="properties">
@@ -30564,12 +30588,6 @@
 </ct:contentTypeSchema>
 </file>
 
-<file path=customXml/item3.xml><?xml version="1.0" encoding="utf-8"?>
-<p:properties xmlns:p="http://schemas.microsoft.com/office/2006/metadata/properties" xmlns:xsi="http://www.w3.org/2001/XMLSchema-instance" xmlns:pc="http://schemas.microsoft.com/office/infopath/2007/PartnerControls">
-  <documentManagement/>
-</p:properties>
-</file>
-
 <file path=customXml/itemProps1.xml><?xml version="1.0" encoding="utf-8"?>
 <ds:datastoreItem xmlns:ds="http://schemas.openxmlformats.org/officeDocument/2006/customXml" ds:itemID="{19E20559-B232-4371-8690-E3D8007EDB82}">
   <ds:schemaRefs>
@@ -30579,6 +30597,21 @@
 </file>
 
 <file path=customXml/itemProps2.xml><?xml version="1.0" encoding="utf-8"?>
+<ds:datastoreItem xmlns:ds="http://schemas.openxmlformats.org/officeDocument/2006/customXml" ds:itemID="{A50EC660-24D0-43A0-AE5E-E274115E726B}">
+  <ds:schemaRefs>
+    <ds:schemaRef ds:uri="http://purl.org/dc/elements/1.1/"/>
+    <ds:schemaRef ds:uri="http://schemas.microsoft.com/office/2006/metadata/properties"/>
+    <ds:schemaRef ds:uri="http://purl.org/dc/terms/"/>
+    <ds:schemaRef ds:uri="http://schemas.openxmlformats.org/package/2006/metadata/core-properties"/>
+    <ds:schemaRef ds:uri="http://schemas.microsoft.com/office/2006/documentManagement/types"/>
+    <ds:schemaRef ds:uri="http://www.w3.org/XML/1998/namespace"/>
+    <ds:schemaRef ds:uri="http://purl.org/dc/dcmitype/"/>
+    <ds:schemaRef ds:uri="http://schemas.microsoft.com/office/infopath/2007/PartnerControls"/>
+  </ds:schemaRefs>
+</ds:datastoreItem>
+</file>
+
+<file path=customXml/itemProps3.xml><?xml version="1.0" encoding="utf-8"?>
 <ds:datastoreItem xmlns:ds="http://schemas.openxmlformats.org/officeDocument/2006/customXml" ds:itemID="{E8DB7DEB-074E-4EE8-9B6E-FD277323109C}">
   <ds:schemaRefs>
     <ds:schemaRef ds:uri="http://schemas.microsoft.com/office/2006/metadata/contentType"/>
@@ -30591,19 +30624,4 @@
     <ds:schemaRef ds:uri="http://schemas.microsoft.com/office/internal/2005/internalDocumentation"/>
   </ds:schemaRefs>
 </ds:datastoreItem>
-</file>
-
-<file path=customXml/itemProps3.xml><?xml version="1.0" encoding="utf-8"?>
-<ds:datastoreItem xmlns:ds="http://schemas.openxmlformats.org/officeDocument/2006/customXml" ds:itemID="{A50EC660-24D0-43A0-AE5E-E274115E726B}">
-  <ds:schemaRefs>
-    <ds:schemaRef ds:uri="http://purl.org/dc/elements/1.1/"/>
-    <ds:schemaRef ds:uri="http://schemas.microsoft.com/office/2006/metadata/properties"/>
-    <ds:schemaRef ds:uri="http://purl.org/dc/terms/"/>
-    <ds:schemaRef ds:uri="http://schemas.openxmlformats.org/package/2006/metadata/core-properties"/>
-    <ds:schemaRef ds:uri="http://schemas.microsoft.com/office/2006/documentManagement/types"/>
-    <ds:schemaRef ds:uri="http://www.w3.org/XML/1998/namespace"/>
-    <ds:schemaRef ds:uri="http://purl.org/dc/dcmitype/"/>
-    <ds:schemaRef ds:uri="http://schemas.microsoft.com/office/infopath/2007/PartnerControls"/>
-  </ds:schemaRefs>
-</ds:datastoreItem>
 </file>
--- a/refactoring.pptx
+++ b/refactoring.pptx
@@ -12,7 +12,7 @@
   </p:handoutMasterIdLst>
   <p:sldIdLst>
     <p:sldId id="256" r:id="rId5"/>
-    <p:sldId id="668" r:id="rId6"/>
+    <p:sldId id="320" r:id="rId6"/>
     <p:sldId id="610" r:id="rId7"/>
     <p:sldId id="625" r:id="rId8"/>
     <p:sldId id="495" r:id="rId9"/>
@@ -285,7 +285,7 @@
           <a:p>
             <a:fld id="{0B842F42-2CE9-4E35-95C1-410DC08A50B1}" type="datetimeFigureOut">
               <a:rPr lang="en-US" smtClean="0"/>
-              <a:t>1/16/26</a:t>
+              <a:t>8/2/2026</a:t>
             </a:fld>
             <a:endParaRPr lang="en-US"/>
           </a:p>
@@ -450,7 +450,7 @@
           <a:p>
             <a:fld id="{6F282904-F315-4730-8D91-37D99E141A6F}" type="datetimeFigureOut">
               <a:rPr lang="en-US" smtClean="0"/>
-              <a:t>1/16/26</a:t>
+              <a:t>8/2/2026</a:t>
             </a:fld>
             <a:endParaRPr lang="en-US"/>
           </a:p>
@@ -1800,42 +1800,6 @@
       </p:sp>
       <p:pic>
         <p:nvPicPr>
-          <p:cNvPr id="3" name="Picture 2">
-            <a:extLst>
-              <a:ext uri="{FF2B5EF4-FFF2-40B4-BE49-F238E27FC236}">
-                <a16:creationId xmlns:a16="http://schemas.microsoft.com/office/drawing/2014/main" id="{E5A81C43-A5B9-D933-9CA0-B9EBBA5B6295}"/>
-              </a:ext>
-            </a:extLst>
-          </p:cNvPr>
-          <p:cNvPicPr>
-            <a:picLocks noChangeAspect="1"/>
-          </p:cNvPicPr>
-          <p:nvPr userDrawn="1"/>
-        </p:nvPicPr>
-        <p:blipFill>
-          <a:blip r:embed="rId3" cstate="print">
-            <a:extLst>
-              <a:ext uri="{28A0092B-C50C-407E-A947-70E740481C1C}">
-                <a14:useLocalDpi xmlns:a14="http://schemas.microsoft.com/office/drawing/2010/main" val="0"/>
-              </a:ext>
-            </a:extLst>
-          </a:blip>
-          <a:stretch>
-            <a:fillRect/>
-          </a:stretch>
-        </p:blipFill>
-        <p:spPr>
-          <a:xfrm>
-            <a:off x="418659" y="158509"/>
-            <a:ext cx="2109916" cy="905256"/>
-          </a:xfrm>
-          <a:prstGeom prst="rect">
-            <a:avLst/>
-          </a:prstGeom>
-        </p:spPr>
-      </p:pic>
-      <p:pic>
-        <p:nvPicPr>
           <p:cNvPr id="31" name="Picture 30">
             <a:extLst>
               <a:ext uri="{FF2B5EF4-FFF2-40B4-BE49-F238E27FC236}">
@@ -1849,11 +1813,11 @@
           <p:nvPr userDrawn="1"/>
         </p:nvPicPr>
         <p:blipFill>
-          <a:blip r:embed="rId4" cstate="print">
+          <a:blip r:embed="rId3" cstate="print">
             <a:extLst>
               <a:ext uri="{BEBA8EAE-BF5A-486C-A8C5-ECC9F3942E4B}">
                 <a14:imgProps xmlns:a14="http://schemas.microsoft.com/office/drawing/2010/main">
-                  <a14:imgLayer r:embed="rId5">
+                  <a14:imgLayer r:embed="rId4">
                     <a14:imgEffect>
                       <a14:brightnessContrast bright="100000"/>
                     </a14:imgEffect>
@@ -1879,12 +1843,48 @@
           </a:prstGeom>
         </p:spPr>
       </p:pic>
+      <p:pic>
+        <p:nvPicPr>
+          <p:cNvPr id="5" name="Picture 4">
+            <a:extLst>
+              <a:ext uri="{FF2B5EF4-FFF2-40B4-BE49-F238E27FC236}">
+                <a16:creationId xmlns:a16="http://schemas.microsoft.com/office/drawing/2014/main" id="{A500A7AD-A439-9DBF-A79E-EE8A4250143E}"/>
+              </a:ext>
+            </a:extLst>
+          </p:cNvPr>
+          <p:cNvPicPr>
+            <a:picLocks noChangeAspect="1"/>
+          </p:cNvPicPr>
+          <p:nvPr userDrawn="1"/>
+        </p:nvPicPr>
+        <p:blipFill>
+          <a:blip r:embed="rId5" cstate="print">
+            <a:extLst>
+              <a:ext uri="{28A0092B-C50C-407E-A947-70E740481C1C}">
+                <a14:useLocalDpi xmlns:a14="http://schemas.microsoft.com/office/drawing/2010/main" val="0"/>
+              </a:ext>
+            </a:extLst>
+          </a:blip>
+          <a:stretch>
+            <a:fillRect/>
+          </a:stretch>
+        </p:blipFill>
+        <p:spPr>
+          <a:xfrm>
+            <a:off x="296061" y="158509"/>
+            <a:ext cx="2109916" cy="905256"/>
+          </a:xfrm>
+          <a:prstGeom prst="rect">
+            <a:avLst/>
+          </a:prstGeom>
+        </p:spPr>
+      </p:pic>
       <p:sp>
         <p:nvSpPr>
-          <p:cNvPr id="8" name="TextBox 7">
+          <p:cNvPr id="7" name="TextBox 6">
             <a:extLst>
               <a:ext uri="{FF2B5EF4-FFF2-40B4-BE49-F238E27FC236}">
-                <a16:creationId xmlns:a16="http://schemas.microsoft.com/office/drawing/2014/main" id="{C5F5D814-D023-0C77-62AF-7101AD3419A6}"/>
+                <a16:creationId xmlns:a16="http://schemas.microsoft.com/office/drawing/2014/main" id="{FB44DC9F-7539-E840-88A8-C7B43824C81F}"/>
               </a:ext>
             </a:extLst>
           </p:cNvPr>
@@ -1893,7 +1893,7 @@
         </p:nvSpPr>
         <p:spPr>
           <a:xfrm>
-            <a:off x="901538" y="1454246"/>
+            <a:off x="778940" y="1454246"/>
             <a:ext cx="1144159" cy="350865"/>
           </a:xfrm>
           <a:prstGeom prst="rect">
@@ -1921,10 +1921,10 @@
       </p:sp>
       <p:sp>
         <p:nvSpPr>
-          <p:cNvPr id="12" name="TextBox 11">
+          <p:cNvPr id="10" name="TextBox 9">
             <a:extLst>
               <a:ext uri="{FF2B5EF4-FFF2-40B4-BE49-F238E27FC236}">
-                <a16:creationId xmlns:a16="http://schemas.microsoft.com/office/drawing/2014/main" id="{B5D8D9CE-072B-C278-A349-03A28D3CA873}"/>
+                <a16:creationId xmlns:a16="http://schemas.microsoft.com/office/drawing/2014/main" id="{361B6646-501A-EC80-DC44-34C59530B335}"/>
               </a:ext>
             </a:extLst>
           </p:cNvPr>
@@ -1933,8 +1933,8 @@
         </p:nvSpPr>
         <p:spPr>
           <a:xfrm>
-            <a:off x="948025" y="2646131"/>
-            <a:ext cx="1051185" cy="350865"/>
+            <a:off x="863899" y="2646131"/>
+            <a:ext cx="974241" cy="350865"/>
           </a:xfrm>
           <a:prstGeom prst="rect">
             <a:avLst/>
@@ -1954,17 +1954,17 @@
             </a:pPr>
             <a:r>
               <a:rPr lang="en-US" sz="1200" i="1" dirty="0"/>
-              <a:t>Members of</a:t>
+              <a:t>Member of</a:t>
             </a:r>
           </a:p>
         </p:txBody>
       </p:sp>
       <p:sp>
         <p:nvSpPr>
-          <p:cNvPr id="15" name="TextBox 14">
+          <p:cNvPr id="18" name="TextBox 17">
             <a:extLst>
               <a:ext uri="{FF2B5EF4-FFF2-40B4-BE49-F238E27FC236}">
-                <a16:creationId xmlns:a16="http://schemas.microsoft.com/office/drawing/2014/main" id="{85E13C4D-0FCB-AD8A-F919-219CD45F5E4E}"/>
+                <a16:creationId xmlns:a16="http://schemas.microsoft.com/office/drawing/2014/main" id="{B6F633AC-EEA0-A973-C5EF-855894DE0105}"/>
               </a:ext>
             </a:extLst>
           </p:cNvPr>
@@ -1973,7 +1973,7 @@
         </p:nvSpPr>
         <p:spPr>
           <a:xfrm>
-            <a:off x="572120" y="4624321"/>
+            <a:off x="449522" y="4624321"/>
             <a:ext cx="1802994" cy="350865"/>
           </a:xfrm>
           <a:prstGeom prst="rect">
@@ -2001,10 +2001,10 @@
       </p:sp>
       <p:grpSp>
         <p:nvGrpSpPr>
-          <p:cNvPr id="16" name="Group 15">
+          <p:cNvPr id="19" name="Group 18">
             <a:extLst>
               <a:ext uri="{FF2B5EF4-FFF2-40B4-BE49-F238E27FC236}">
-                <a16:creationId xmlns:a16="http://schemas.microsoft.com/office/drawing/2014/main" id="{7289C683-CE7C-A99C-90B4-4FDEE2708869}"/>
+                <a16:creationId xmlns:a16="http://schemas.microsoft.com/office/drawing/2014/main" id="{E7943264-26AF-9347-A41C-66D3E775E85C}"/>
               </a:ext>
             </a:extLst>
           </p:cNvPr>
@@ -2013,7 +2013,7 @@
         </p:nvGrpSpPr>
         <p:grpSpPr>
           <a:xfrm>
-            <a:off x="355043" y="5027111"/>
+            <a:off x="232445" y="5027111"/>
             <a:ext cx="2237149" cy="457200"/>
             <a:chOff x="343050" y="5128711"/>
             <a:chExt cx="2237149" cy="457200"/>
@@ -2021,10 +2021,10 @@
         </p:grpSpPr>
         <p:pic>
           <p:nvPicPr>
-            <p:cNvPr id="17" name="Picture 16">
+            <p:cNvPr id="24" name="Picture 23">
               <a:extLst>
                 <a:ext uri="{FF2B5EF4-FFF2-40B4-BE49-F238E27FC236}">
-                  <a16:creationId xmlns:a16="http://schemas.microsoft.com/office/drawing/2014/main" id="{C37C7687-369C-B25A-E795-965CAC0F0430}"/>
+                  <a16:creationId xmlns:a16="http://schemas.microsoft.com/office/drawing/2014/main" id="{AAB63604-C388-4D35-3F4F-C3F1553C8175}"/>
                 </a:ext>
               </a:extLst>
             </p:cNvPr>
@@ -2057,10 +2057,10 @@
         </p:pic>
         <p:pic>
           <p:nvPicPr>
-            <p:cNvPr id="30" name="Picture 29" descr="A picture containing shape&#10;&#10;Description automatically generated">
+            <p:cNvPr id="25" name="Picture 24" descr="A picture containing shape&#10;&#10;Description automatically generated">
               <a:extLst>
                 <a:ext uri="{FF2B5EF4-FFF2-40B4-BE49-F238E27FC236}">
-                  <a16:creationId xmlns:a16="http://schemas.microsoft.com/office/drawing/2014/main" id="{4B33E9E5-DA31-2040-6905-662BE26E895B}"/>
+                  <a16:creationId xmlns:a16="http://schemas.microsoft.com/office/drawing/2014/main" id="{52AC66E1-8AF4-2CB5-46C1-43BA3D869271}"/>
                 </a:ext>
               </a:extLst>
             </p:cNvPr>
@@ -2092,213 +2092,59 @@
           </p:spPr>
         </p:pic>
       </p:grpSp>
-      <p:grpSp>
-        <p:nvGrpSpPr>
-          <p:cNvPr id="32" name="Group 31">
+      <p:pic>
+        <p:nvPicPr>
+          <p:cNvPr id="26" name="Picture 2" descr="A picture containing graphics, logo, font, symbol&#10;&#10;Description automatically generated">
             <a:extLst>
               <a:ext uri="{FF2B5EF4-FFF2-40B4-BE49-F238E27FC236}">
-                <a16:creationId xmlns:a16="http://schemas.microsoft.com/office/drawing/2014/main" id="{207C4F59-640F-DF87-D6D1-98C999629E33}"/>
+                <a16:creationId xmlns:a16="http://schemas.microsoft.com/office/drawing/2014/main" id="{E4079972-8219-DCD7-95BA-DF35B43C8A0F}"/>
               </a:ext>
             </a:extLst>
           </p:cNvPr>
-          <p:cNvGrpSpPr/>
+          <p:cNvPicPr>
+            <a:picLocks noChangeAspect="1" noChangeArrowheads="1"/>
+          </p:cNvPicPr>
           <p:nvPr userDrawn="1"/>
-        </p:nvGrpSpPr>
-        <p:grpSpPr>
-          <a:xfrm>
-            <a:off x="-69503" y="1892144"/>
-            <a:ext cx="2985270" cy="790169"/>
-            <a:chOff x="-69503" y="2214872"/>
-            <a:chExt cx="2985270" cy="790169"/>
-          </a:xfrm>
-        </p:grpSpPr>
-        <p:pic>
-          <p:nvPicPr>
-            <p:cNvPr id="33" name="Picture 4">
-              <a:extLst>
-                <a:ext uri="{FF2B5EF4-FFF2-40B4-BE49-F238E27FC236}">
-                  <a16:creationId xmlns:a16="http://schemas.microsoft.com/office/drawing/2014/main" id="{FC66403F-CB60-0332-773E-4539ADA0C9F5}"/>
-                </a:ext>
-              </a:extLst>
-            </p:cNvPr>
-            <p:cNvPicPr>
-              <a:picLocks noChangeAspect="1" noChangeArrowheads="1"/>
-            </p:cNvPicPr>
-            <p:nvPr userDrawn="1"/>
-          </p:nvPicPr>
-          <p:blipFill>
-            <a:blip r:embed="rId8" cstate="print">
-              <a:extLst>
-                <a:ext uri="{28A0092B-C50C-407E-A947-70E740481C1C}">
-                  <a14:useLocalDpi xmlns:a14="http://schemas.microsoft.com/office/drawing/2010/main" val="0"/>
-                </a:ext>
-              </a:extLst>
-            </a:blip>
-            <a:srcRect/>
-            <a:stretch>
-              <a:fillRect/>
-            </a:stretch>
-          </p:blipFill>
-          <p:spPr bwMode="auto">
-            <a:xfrm>
-              <a:off x="1484438" y="2317122"/>
-              <a:ext cx="1371600" cy="318873"/>
-            </a:xfrm>
-            <a:prstGeom prst="rect">
-              <a:avLst/>
-            </a:prstGeom>
-            <a:noFill/>
+        </p:nvPicPr>
+        <p:blipFill>
+          <a:blip r:embed="rId8" cstate="print">
             <a:extLst>
-              <a:ext uri="{909E8E84-426E-40DD-AFC4-6F175D3DCCD1}">
-                <a14:hiddenFill xmlns:a14="http://schemas.microsoft.com/office/drawing/2010/main">
-                  <a:solidFill>
-                    <a:srgbClr val="FFFFFF"/>
-                  </a:solidFill>
-                </a14:hiddenFill>
+              <a:ext uri="{28A0092B-C50C-407E-A947-70E740481C1C}">
+                <a14:useLocalDpi xmlns:a14="http://schemas.microsoft.com/office/drawing/2010/main" val="0"/>
               </a:ext>
             </a:extLst>
-          </p:spPr>
-        </p:pic>
-        <p:pic>
-          <p:nvPicPr>
-            <p:cNvPr id="34" name="Picture 2" descr="A picture containing graphics, logo, font, symbol&#10;&#10;Description automatically generated">
-              <a:extLst>
-                <a:ext uri="{FF2B5EF4-FFF2-40B4-BE49-F238E27FC236}">
-                  <a16:creationId xmlns:a16="http://schemas.microsoft.com/office/drawing/2014/main" id="{3E2AFFBD-3575-2847-9AAF-6E6A96862D76}"/>
-                </a:ext>
-              </a:extLst>
-            </p:cNvPr>
-            <p:cNvPicPr>
-              <a:picLocks noChangeAspect="1" noChangeArrowheads="1"/>
-            </p:cNvPicPr>
-            <p:nvPr userDrawn="1"/>
-          </p:nvPicPr>
-          <p:blipFill>
-            <a:blip r:embed="rId9" cstate="print">
-              <a:extLst>
-                <a:ext uri="{28A0092B-C50C-407E-A947-70E740481C1C}">
-                  <a14:useLocalDpi xmlns:a14="http://schemas.microsoft.com/office/drawing/2010/main" val="0"/>
-                </a:ext>
-              </a:extLst>
-            </a:blip>
-            <a:srcRect/>
-            <a:stretch>
-              <a:fillRect/>
-            </a:stretch>
-          </p:blipFill>
-          <p:spPr bwMode="auto">
-            <a:xfrm>
-              <a:off x="321595" y="2214872"/>
-              <a:ext cx="841248" cy="523372"/>
-            </a:xfrm>
-            <a:prstGeom prst="rect">
-              <a:avLst/>
-            </a:prstGeom>
-            <a:noFill/>
-            <a:extLst>
-              <a:ext uri="{909E8E84-426E-40DD-AFC4-6F175D3DCCD1}">
-                <a14:hiddenFill xmlns:a14="http://schemas.microsoft.com/office/drawing/2010/main">
-                  <a:solidFill>
-                    <a:srgbClr val="FFFFFF"/>
-                  </a:solidFill>
-                </a14:hiddenFill>
-              </a:ext>
-            </a:extLst>
-          </p:spPr>
-        </p:pic>
-        <p:sp>
-          <p:nvSpPr>
-            <p:cNvPr id="35" name="TextBox 34">
-              <a:extLst>
-                <a:ext uri="{FF2B5EF4-FFF2-40B4-BE49-F238E27FC236}">
-                  <a16:creationId xmlns:a16="http://schemas.microsoft.com/office/drawing/2014/main" id="{5E39CEC8-98B1-7568-653D-E9AE26511499}"/>
-                </a:ext>
-              </a:extLst>
-            </p:cNvPr>
-            <p:cNvSpPr txBox="1"/>
-            <p:nvPr userDrawn="1"/>
-          </p:nvSpPr>
-          <p:spPr>
-            <a:xfrm>
-              <a:off x="-69503" y="2668026"/>
-              <a:ext cx="1631472" cy="337015"/>
-            </a:xfrm>
-            <a:prstGeom prst="rect">
-              <a:avLst/>
-            </a:prstGeom>
-            <a:noFill/>
-          </p:spPr>
-          <p:txBody>
-            <a:bodyPr wrap="none" lIns="118872" tIns="91440" rIns="118872" bIns="91440" rtlCol="0" anchor="ctr" anchorCtr="0">
-              <a:spAutoFit/>
-            </a:bodyPr>
-            <a:lstStyle/>
-            <a:p>
-              <a:pPr algn="l">
-                <a:lnSpc>
-                  <a:spcPct val="90000"/>
-                </a:lnSpc>
-              </a:pPr>
-              <a:r>
-                <a:rPr lang="en-US" sz="1050" i="1" dirty="0">
-                  <a:hlinkClick r:id="rId10"/>
-                </a:rPr>
-                <a:t>https://pesoproject.org</a:t>
-              </a:r>
-              <a:endParaRPr lang="en-US" sz="1050" i="1" dirty="0"/>
-            </a:p>
-          </p:txBody>
-        </p:sp>
-        <p:sp>
-          <p:nvSpPr>
-            <p:cNvPr id="36" name="TextBox 35">
-              <a:extLst>
-                <a:ext uri="{FF2B5EF4-FFF2-40B4-BE49-F238E27FC236}">
-                  <a16:creationId xmlns:a16="http://schemas.microsoft.com/office/drawing/2014/main" id="{212AE08A-8A6C-79CC-3F21-161F7C72E3FF}"/>
-                </a:ext>
-              </a:extLst>
-            </p:cNvPr>
-            <p:cNvSpPr txBox="1"/>
-            <p:nvPr userDrawn="1"/>
-          </p:nvSpPr>
-          <p:spPr>
-            <a:xfrm>
-              <a:off x="1423755" y="2668026"/>
-              <a:ext cx="1492012" cy="337015"/>
-            </a:xfrm>
-            <a:prstGeom prst="rect">
-              <a:avLst/>
-            </a:prstGeom>
-            <a:noFill/>
-          </p:spPr>
-          <p:txBody>
-            <a:bodyPr wrap="none" lIns="118872" tIns="91440" rIns="118872" bIns="91440" rtlCol="0" anchor="ctr" anchorCtr="0">
-              <a:spAutoFit/>
-            </a:bodyPr>
-            <a:lstStyle/>
-            <a:p>
-              <a:pPr algn="l">
-                <a:lnSpc>
-                  <a:spcPct val="90000"/>
-                </a:lnSpc>
-              </a:pPr>
-              <a:r>
-                <a:rPr lang="en-US" sz="1050" i="1" dirty="0">
-                  <a:hlinkClick r:id="rId11"/>
-                </a:rPr>
-                <a:t>https://rapids.lbl.gov</a:t>
-              </a:r>
-              <a:endParaRPr lang="en-US" sz="1050" i="1" dirty="0"/>
-            </a:p>
-          </p:txBody>
-        </p:sp>
-      </p:grpSp>
+          </a:blip>
+          <a:srcRect/>
+          <a:stretch>
+            <a:fillRect/>
+          </a:stretch>
+        </p:blipFill>
+        <p:spPr bwMode="auto">
+          <a:xfrm>
+            <a:off x="930395" y="1892144"/>
+            <a:ext cx="841248" cy="523372"/>
+          </a:xfrm>
+          <a:prstGeom prst="rect">
+            <a:avLst/>
+          </a:prstGeom>
+          <a:noFill/>
+          <a:extLst>
+            <a:ext uri="{909E8E84-426E-40DD-AFC4-6F175D3DCCD1}">
+              <a14:hiddenFill xmlns:a14="http://schemas.microsoft.com/office/drawing/2010/main">
+                <a:solidFill>
+                  <a:srgbClr val="FFFFFF"/>
+                </a:solidFill>
+              </a14:hiddenFill>
+            </a:ext>
+          </a:extLst>
+        </p:spPr>
+      </p:pic>
       <p:sp>
         <p:nvSpPr>
-          <p:cNvPr id="37" name="TextBox 36">
+          <p:cNvPr id="27" name="TextBox 26">
             <a:extLst>
               <a:ext uri="{FF2B5EF4-FFF2-40B4-BE49-F238E27FC236}">
-                <a16:creationId xmlns:a16="http://schemas.microsoft.com/office/drawing/2014/main" id="{158D4700-C4CE-C2F9-D0A7-06799F81F594}"/>
+                <a16:creationId xmlns:a16="http://schemas.microsoft.com/office/drawing/2014/main" id="{47E37F57-5BB2-E45F-F76E-68C5CC4F05E7}"/>
               </a:ext>
             </a:extLst>
           </p:cNvPr>
@@ -2307,7 +2153,50 @@
         </p:nvSpPr>
         <p:spPr>
           <a:xfrm>
-            <a:off x="166031" y="4011401"/>
+            <a:off x="535283" y="2345298"/>
+            <a:ext cx="1631472" cy="337015"/>
+          </a:xfrm>
+          <a:prstGeom prst="rect">
+            <a:avLst/>
+          </a:prstGeom>
+          <a:noFill/>
+        </p:spPr>
+        <p:txBody>
+          <a:bodyPr wrap="none" lIns="118872" tIns="91440" rIns="118872" bIns="91440" rtlCol="0" anchor="ctr" anchorCtr="0">
+            <a:spAutoFit/>
+          </a:bodyPr>
+          <a:lstStyle/>
+          <a:p>
+            <a:pPr algn="l">
+              <a:lnSpc>
+                <a:spcPct val="90000"/>
+              </a:lnSpc>
+            </a:pPr>
+            <a:r>
+              <a:rPr lang="en-US" sz="1050" i="1" dirty="0">
+                <a:hlinkClick r:id="rId9"/>
+              </a:rPr>
+              <a:t>https://pesoproject.org</a:t>
+            </a:r>
+            <a:endParaRPr lang="en-US" sz="1050" i="1" dirty="0"/>
+          </a:p>
+        </p:txBody>
+      </p:sp>
+      <p:sp>
+        <p:nvSpPr>
+          <p:cNvPr id="28" name="TextBox 27">
+            <a:extLst>
+              <a:ext uri="{FF2B5EF4-FFF2-40B4-BE49-F238E27FC236}">
+                <a16:creationId xmlns:a16="http://schemas.microsoft.com/office/drawing/2014/main" id="{61FDFBA3-80E8-8E37-DEC9-AAA38E9064B5}"/>
+              </a:ext>
+            </a:extLst>
+          </p:cNvPr>
+          <p:cNvSpPr txBox="1"/>
+          <p:nvPr userDrawn="1"/>
+        </p:nvSpPr>
+        <p:spPr>
+          <a:xfrm>
+            <a:off x="48264" y="4011401"/>
             <a:ext cx="2605511" cy="655564"/>
           </a:xfrm>
           <a:prstGeom prst="rect">
@@ -2335,7 +2224,7 @@
             </a:br>
             <a:r>
               <a:rPr lang="en-US" sz="1000" i="1" dirty="0">
-                <a:hlinkClick r:id="rId12"/>
+                <a:hlinkClick r:id="rId10"/>
               </a:rPr>
               <a:t>https://cass.community</a:t>
             </a:r>
@@ -2345,10 +2234,10 @@
       </p:sp>
       <p:pic>
         <p:nvPicPr>
-          <p:cNvPr id="38" name="Picture 37" descr="A picture containing arrow&#10;&#10;AI-generated content may be incorrect.">
+          <p:cNvPr id="29" name="Picture 28" descr="A picture containing arrow&#10;&#10;AI-generated content may be incorrect.">
             <a:extLst>
               <a:ext uri="{FF2B5EF4-FFF2-40B4-BE49-F238E27FC236}">
-                <a16:creationId xmlns:a16="http://schemas.microsoft.com/office/drawing/2014/main" id="{C35E018A-A812-4862-A6E5-340C47A4832A}"/>
+                <a16:creationId xmlns:a16="http://schemas.microsoft.com/office/drawing/2014/main" id="{385D6AD8-4764-8B7E-8DD1-1154933CB01C}"/>
               </a:ext>
             </a:extLst>
           </p:cNvPr>
@@ -2358,7 +2247,7 @@
           <p:nvPr userDrawn="1"/>
         </p:nvPicPr>
         <p:blipFill>
-          <a:blip r:embed="rId13" cstate="print">
+          <a:blip r:embed="rId11" cstate="print">
             <a:extLst>
               <a:ext uri="{28A0092B-C50C-407E-A947-70E740481C1C}">
                 <a14:useLocalDpi xmlns:a14="http://schemas.microsoft.com/office/drawing/2010/main" val="0"/>
@@ -2371,7 +2260,7 @@
         </p:blipFill>
         <p:spPr>
           <a:xfrm>
-            <a:off x="849769" y="2974535"/>
+            <a:off x="732002" y="2974535"/>
             <a:ext cx="1238034" cy="1128739"/>
           </a:xfrm>
           <a:prstGeom prst="rect">
@@ -2836,10 +2725,10 @@
       </p:sp>
       <p:pic>
         <p:nvPicPr>
-          <p:cNvPr id="5" name="Picture 4">
+          <p:cNvPr id="6" name="Picture 5">
             <a:extLst>
               <a:ext uri="{FF2B5EF4-FFF2-40B4-BE49-F238E27FC236}">
-                <a16:creationId xmlns:a16="http://schemas.microsoft.com/office/drawing/2014/main" id="{39A0B7EC-D4C0-0A37-EF93-54309C1E7E8C}"/>
+                <a16:creationId xmlns:a16="http://schemas.microsoft.com/office/drawing/2014/main" id="{60EF9AE0-4B6F-9F47-747A-59BD194C894C}"/>
               </a:ext>
             </a:extLst>
           </p:cNvPr>
@@ -2862,7 +2751,7 @@
         </p:blipFill>
         <p:spPr>
           <a:xfrm>
-            <a:off x="418659" y="158509"/>
+            <a:off x="296061" y="158509"/>
             <a:ext cx="2109916" cy="905256"/>
           </a:xfrm>
           <a:prstGeom prst="rect">
@@ -2872,10 +2761,10 @@
       </p:pic>
       <p:sp>
         <p:nvSpPr>
-          <p:cNvPr id="12" name="TextBox 11">
+          <p:cNvPr id="7" name="TextBox 6">
             <a:extLst>
               <a:ext uri="{FF2B5EF4-FFF2-40B4-BE49-F238E27FC236}">
-                <a16:creationId xmlns:a16="http://schemas.microsoft.com/office/drawing/2014/main" id="{2FF8162C-FE3B-2F12-EFB5-7DF3B974D63A}"/>
+                <a16:creationId xmlns:a16="http://schemas.microsoft.com/office/drawing/2014/main" id="{17B1AF5D-C9EE-7615-4B1F-B74BF801EA40}"/>
               </a:ext>
             </a:extLst>
           </p:cNvPr>
@@ -2884,7 +2773,7 @@
         </p:nvSpPr>
         <p:spPr>
           <a:xfrm>
-            <a:off x="901538" y="1454246"/>
+            <a:off x="778940" y="1454246"/>
             <a:ext cx="1144159" cy="350865"/>
           </a:xfrm>
           <a:prstGeom prst="rect">
@@ -2912,10 +2801,10 @@
       </p:sp>
       <p:sp>
         <p:nvSpPr>
-          <p:cNvPr id="19" name="TextBox 18">
+          <p:cNvPr id="8" name="TextBox 7">
             <a:extLst>
               <a:ext uri="{FF2B5EF4-FFF2-40B4-BE49-F238E27FC236}">
-                <a16:creationId xmlns:a16="http://schemas.microsoft.com/office/drawing/2014/main" id="{D2820F98-3B22-7A7C-C5D3-A451E4190BE0}"/>
+                <a16:creationId xmlns:a16="http://schemas.microsoft.com/office/drawing/2014/main" id="{78C6E4F7-A494-D62A-6C6C-D62AED18227F}"/>
               </a:ext>
             </a:extLst>
           </p:cNvPr>
@@ -2924,8 +2813,8 @@
         </p:nvSpPr>
         <p:spPr>
           <a:xfrm>
-            <a:off x="948025" y="2646131"/>
-            <a:ext cx="1051185" cy="350865"/>
+            <a:off x="863899" y="2646131"/>
+            <a:ext cx="974241" cy="350865"/>
           </a:xfrm>
           <a:prstGeom prst="rect">
             <a:avLst/>
@@ -2945,17 +2834,17 @@
             </a:pPr>
             <a:r>
               <a:rPr lang="en-US" sz="1200" i="1" dirty="0"/>
-              <a:t>Members of</a:t>
+              <a:t>Member of</a:t>
             </a:r>
           </a:p>
         </p:txBody>
       </p:sp>
       <p:sp>
         <p:nvSpPr>
-          <p:cNvPr id="23" name="TextBox 22">
+          <p:cNvPr id="9" name="TextBox 8">
             <a:extLst>
               <a:ext uri="{FF2B5EF4-FFF2-40B4-BE49-F238E27FC236}">
-                <a16:creationId xmlns:a16="http://schemas.microsoft.com/office/drawing/2014/main" id="{C39CAFBB-B26F-D973-C4F5-75C0DBD17BC8}"/>
+                <a16:creationId xmlns:a16="http://schemas.microsoft.com/office/drawing/2014/main" id="{1A212EA0-CB7E-A8D5-3E18-377D20F982EF}"/>
               </a:ext>
             </a:extLst>
           </p:cNvPr>
@@ -2964,7 +2853,7 @@
         </p:nvSpPr>
         <p:spPr>
           <a:xfrm>
-            <a:off x="572120" y="4624321"/>
+            <a:off x="449522" y="4624321"/>
             <a:ext cx="1802994" cy="350865"/>
           </a:xfrm>
           <a:prstGeom prst="rect">
@@ -2992,10 +2881,10 @@
       </p:sp>
       <p:grpSp>
         <p:nvGrpSpPr>
-          <p:cNvPr id="24" name="Group 23">
+          <p:cNvPr id="10" name="Group 9">
             <a:extLst>
               <a:ext uri="{FF2B5EF4-FFF2-40B4-BE49-F238E27FC236}">
-                <a16:creationId xmlns:a16="http://schemas.microsoft.com/office/drawing/2014/main" id="{273B7CB2-1661-339F-C3CF-B7841A4249CF}"/>
+                <a16:creationId xmlns:a16="http://schemas.microsoft.com/office/drawing/2014/main" id="{E0B4F92E-904D-57B2-29B1-F0B7EC030DAE}"/>
               </a:ext>
             </a:extLst>
           </p:cNvPr>
@@ -3004,7 +2893,7 @@
         </p:nvGrpSpPr>
         <p:grpSpPr>
           <a:xfrm>
-            <a:off x="355043" y="5027111"/>
+            <a:off x="232445" y="5027111"/>
             <a:ext cx="2237149" cy="457200"/>
             <a:chOff x="343050" y="5128711"/>
             <a:chExt cx="2237149" cy="457200"/>
@@ -3012,10 +2901,10 @@
         </p:grpSpPr>
         <p:pic>
           <p:nvPicPr>
-            <p:cNvPr id="25" name="Picture 24">
+            <p:cNvPr id="11" name="Picture 10">
               <a:extLst>
                 <a:ext uri="{FF2B5EF4-FFF2-40B4-BE49-F238E27FC236}">
-                  <a16:creationId xmlns:a16="http://schemas.microsoft.com/office/drawing/2014/main" id="{20E1B50D-7456-26E6-E71B-C2EFC86CD852}"/>
+                  <a16:creationId xmlns:a16="http://schemas.microsoft.com/office/drawing/2014/main" id="{6AC71928-9267-7CFE-35A8-6CD1DB001564}"/>
                 </a:ext>
               </a:extLst>
             </p:cNvPr>
@@ -3048,10 +2937,10 @@
         </p:pic>
         <p:pic>
           <p:nvPicPr>
-            <p:cNvPr id="26" name="Picture 25" descr="A picture containing shape&#10;&#10;Description automatically generated">
+            <p:cNvPr id="15" name="Picture 14" descr="A picture containing shape&#10;&#10;Description automatically generated">
               <a:extLst>
                 <a:ext uri="{FF2B5EF4-FFF2-40B4-BE49-F238E27FC236}">
-                  <a16:creationId xmlns:a16="http://schemas.microsoft.com/office/drawing/2014/main" id="{CCF4F055-BFB5-5FA7-5DAE-B7C31519A851}"/>
+                  <a16:creationId xmlns:a16="http://schemas.microsoft.com/office/drawing/2014/main" id="{B30AA384-1BBB-0CEA-BFB0-F101BAD60C91}"/>
                 </a:ext>
               </a:extLst>
             </p:cNvPr>
@@ -3083,213 +2972,59 @@
           </p:spPr>
         </p:pic>
       </p:grpSp>
-      <p:grpSp>
-        <p:nvGrpSpPr>
-          <p:cNvPr id="27" name="Group 26">
+      <p:pic>
+        <p:nvPicPr>
+          <p:cNvPr id="17" name="Picture 2" descr="A picture containing graphics, logo, font, symbol&#10;&#10;Description automatically generated">
             <a:extLst>
               <a:ext uri="{FF2B5EF4-FFF2-40B4-BE49-F238E27FC236}">
-                <a16:creationId xmlns:a16="http://schemas.microsoft.com/office/drawing/2014/main" id="{D346F560-6C4A-637B-95AE-00BA10A56548}"/>
+                <a16:creationId xmlns:a16="http://schemas.microsoft.com/office/drawing/2014/main" id="{4FB792EA-D32A-08C6-3FBD-FC1AF81F262E}"/>
               </a:ext>
             </a:extLst>
           </p:cNvPr>
-          <p:cNvGrpSpPr/>
+          <p:cNvPicPr>
+            <a:picLocks noChangeAspect="1" noChangeArrowheads="1"/>
+          </p:cNvPicPr>
           <p:nvPr userDrawn="1"/>
-        </p:nvGrpSpPr>
-        <p:grpSpPr>
-          <a:xfrm>
-            <a:off x="-69503" y="1892144"/>
-            <a:ext cx="2985270" cy="790169"/>
-            <a:chOff x="-69503" y="2214872"/>
-            <a:chExt cx="2985270" cy="790169"/>
-          </a:xfrm>
-        </p:grpSpPr>
-        <p:pic>
-          <p:nvPicPr>
-            <p:cNvPr id="28" name="Picture 4">
-              <a:extLst>
-                <a:ext uri="{FF2B5EF4-FFF2-40B4-BE49-F238E27FC236}">
-                  <a16:creationId xmlns:a16="http://schemas.microsoft.com/office/drawing/2014/main" id="{32D9E63D-4D7F-616E-6CFA-84EF3251CEDC}"/>
-                </a:ext>
-              </a:extLst>
-            </p:cNvPr>
-            <p:cNvPicPr>
-              <a:picLocks noChangeAspect="1" noChangeArrowheads="1"/>
-            </p:cNvPicPr>
-            <p:nvPr userDrawn="1"/>
-          </p:nvPicPr>
-          <p:blipFill>
-            <a:blip r:embed="rId8" cstate="print">
-              <a:extLst>
-                <a:ext uri="{28A0092B-C50C-407E-A947-70E740481C1C}">
-                  <a14:useLocalDpi xmlns:a14="http://schemas.microsoft.com/office/drawing/2010/main" val="0"/>
-                </a:ext>
-              </a:extLst>
-            </a:blip>
-            <a:srcRect/>
-            <a:stretch>
-              <a:fillRect/>
-            </a:stretch>
-          </p:blipFill>
-          <p:spPr bwMode="auto">
-            <a:xfrm>
-              <a:off x="1484438" y="2317122"/>
-              <a:ext cx="1371600" cy="318873"/>
-            </a:xfrm>
-            <a:prstGeom prst="rect">
-              <a:avLst/>
-            </a:prstGeom>
-            <a:noFill/>
+        </p:nvPicPr>
+        <p:blipFill>
+          <a:blip r:embed="rId8" cstate="print">
             <a:extLst>
-              <a:ext uri="{909E8E84-426E-40DD-AFC4-6F175D3DCCD1}">
-                <a14:hiddenFill xmlns:a14="http://schemas.microsoft.com/office/drawing/2010/main">
-                  <a:solidFill>
-                    <a:srgbClr val="FFFFFF"/>
-                  </a:solidFill>
-                </a14:hiddenFill>
+              <a:ext uri="{28A0092B-C50C-407E-A947-70E740481C1C}">
+                <a14:useLocalDpi xmlns:a14="http://schemas.microsoft.com/office/drawing/2010/main" val="0"/>
               </a:ext>
             </a:extLst>
-          </p:spPr>
-        </p:pic>
-        <p:pic>
-          <p:nvPicPr>
-            <p:cNvPr id="29" name="Picture 2" descr="A picture containing graphics, logo, font, symbol&#10;&#10;Description automatically generated">
-              <a:extLst>
-                <a:ext uri="{FF2B5EF4-FFF2-40B4-BE49-F238E27FC236}">
-                  <a16:creationId xmlns:a16="http://schemas.microsoft.com/office/drawing/2014/main" id="{C3DD0F40-8227-1760-99FF-A46AF01BB816}"/>
-                </a:ext>
-              </a:extLst>
-            </p:cNvPr>
-            <p:cNvPicPr>
-              <a:picLocks noChangeAspect="1" noChangeArrowheads="1"/>
-            </p:cNvPicPr>
-            <p:nvPr userDrawn="1"/>
-          </p:nvPicPr>
-          <p:blipFill>
-            <a:blip r:embed="rId9" cstate="print">
-              <a:extLst>
-                <a:ext uri="{28A0092B-C50C-407E-A947-70E740481C1C}">
-                  <a14:useLocalDpi xmlns:a14="http://schemas.microsoft.com/office/drawing/2010/main" val="0"/>
-                </a:ext>
-              </a:extLst>
-            </a:blip>
-            <a:srcRect/>
-            <a:stretch>
-              <a:fillRect/>
-            </a:stretch>
-          </p:blipFill>
-          <p:spPr bwMode="auto">
-            <a:xfrm>
-              <a:off x="321595" y="2214872"/>
-              <a:ext cx="841248" cy="523372"/>
-            </a:xfrm>
-            <a:prstGeom prst="rect">
-              <a:avLst/>
-            </a:prstGeom>
-            <a:noFill/>
-            <a:extLst>
-              <a:ext uri="{909E8E84-426E-40DD-AFC4-6F175D3DCCD1}">
-                <a14:hiddenFill xmlns:a14="http://schemas.microsoft.com/office/drawing/2010/main">
-                  <a:solidFill>
-                    <a:srgbClr val="FFFFFF"/>
-                  </a:solidFill>
-                </a14:hiddenFill>
-              </a:ext>
-            </a:extLst>
-          </p:spPr>
-        </p:pic>
-        <p:sp>
-          <p:nvSpPr>
-            <p:cNvPr id="30" name="TextBox 29">
-              <a:extLst>
-                <a:ext uri="{FF2B5EF4-FFF2-40B4-BE49-F238E27FC236}">
-                  <a16:creationId xmlns:a16="http://schemas.microsoft.com/office/drawing/2014/main" id="{CC397930-9AA6-7A6A-76AA-0832111D6B80}"/>
-                </a:ext>
-              </a:extLst>
-            </p:cNvPr>
-            <p:cNvSpPr txBox="1"/>
-            <p:nvPr userDrawn="1"/>
-          </p:nvSpPr>
-          <p:spPr>
-            <a:xfrm>
-              <a:off x="-69503" y="2668026"/>
-              <a:ext cx="1631472" cy="337015"/>
-            </a:xfrm>
-            <a:prstGeom prst="rect">
-              <a:avLst/>
-            </a:prstGeom>
-            <a:noFill/>
-          </p:spPr>
-          <p:txBody>
-            <a:bodyPr wrap="none" lIns="118872" tIns="91440" rIns="118872" bIns="91440" rtlCol="0" anchor="ctr" anchorCtr="0">
-              <a:spAutoFit/>
-            </a:bodyPr>
-            <a:lstStyle/>
-            <a:p>
-              <a:pPr algn="l">
-                <a:lnSpc>
-                  <a:spcPct val="90000"/>
-                </a:lnSpc>
-              </a:pPr>
-              <a:r>
-                <a:rPr lang="en-US" sz="1050" i="1" dirty="0">
-                  <a:hlinkClick r:id="rId10"/>
-                </a:rPr>
-                <a:t>https://pesoproject.org</a:t>
-              </a:r>
-              <a:endParaRPr lang="en-US" sz="1050" i="1" dirty="0"/>
-            </a:p>
-          </p:txBody>
-        </p:sp>
-        <p:sp>
-          <p:nvSpPr>
-            <p:cNvPr id="31" name="TextBox 30">
-              <a:extLst>
-                <a:ext uri="{FF2B5EF4-FFF2-40B4-BE49-F238E27FC236}">
-                  <a16:creationId xmlns:a16="http://schemas.microsoft.com/office/drawing/2014/main" id="{3D9CC300-2021-70DB-ED4C-4241A2BFF3CD}"/>
-                </a:ext>
-              </a:extLst>
-            </p:cNvPr>
-            <p:cNvSpPr txBox="1"/>
-            <p:nvPr userDrawn="1"/>
-          </p:nvSpPr>
-          <p:spPr>
-            <a:xfrm>
-              <a:off x="1423755" y="2668026"/>
-              <a:ext cx="1492012" cy="337015"/>
-            </a:xfrm>
-            <a:prstGeom prst="rect">
-              <a:avLst/>
-            </a:prstGeom>
-            <a:noFill/>
-          </p:spPr>
-          <p:txBody>
-            <a:bodyPr wrap="none" lIns="118872" tIns="91440" rIns="118872" bIns="91440" rtlCol="0" anchor="ctr" anchorCtr="0">
-              <a:spAutoFit/>
-            </a:bodyPr>
-            <a:lstStyle/>
-            <a:p>
-              <a:pPr algn="l">
-                <a:lnSpc>
-                  <a:spcPct val="90000"/>
-                </a:lnSpc>
-              </a:pPr>
-              <a:r>
-                <a:rPr lang="en-US" sz="1050" i="1" dirty="0">
-                  <a:hlinkClick r:id="rId11"/>
-                </a:rPr>
-                <a:t>https://rapids.lbl.gov</a:t>
-              </a:r>
-              <a:endParaRPr lang="en-US" sz="1050" i="1" dirty="0"/>
-            </a:p>
-          </p:txBody>
-        </p:sp>
-      </p:grpSp>
+          </a:blip>
+          <a:srcRect/>
+          <a:stretch>
+            <a:fillRect/>
+          </a:stretch>
+        </p:blipFill>
+        <p:spPr bwMode="auto">
+          <a:xfrm>
+            <a:off x="930395" y="1892144"/>
+            <a:ext cx="841248" cy="523372"/>
+          </a:xfrm>
+          <a:prstGeom prst="rect">
+            <a:avLst/>
+          </a:prstGeom>
+          <a:noFill/>
+          <a:extLst>
+            <a:ext uri="{909E8E84-426E-40DD-AFC4-6F175D3DCCD1}">
+              <a14:hiddenFill xmlns:a14="http://schemas.microsoft.com/office/drawing/2010/main">
+                <a:solidFill>
+                  <a:srgbClr val="FFFFFF"/>
+                </a:solidFill>
+              </a14:hiddenFill>
+            </a:ext>
+          </a:extLst>
+        </p:spPr>
+      </p:pic>
       <p:sp>
         <p:nvSpPr>
-          <p:cNvPr id="32" name="TextBox 31">
+          <p:cNvPr id="18" name="TextBox 17">
             <a:extLst>
               <a:ext uri="{FF2B5EF4-FFF2-40B4-BE49-F238E27FC236}">
-                <a16:creationId xmlns:a16="http://schemas.microsoft.com/office/drawing/2014/main" id="{1913CA0B-B952-F608-0A2C-CCD7844E5E43}"/>
+                <a16:creationId xmlns:a16="http://schemas.microsoft.com/office/drawing/2014/main" id="{217C07DA-D587-667D-151C-984B914C86A6}"/>
               </a:ext>
             </a:extLst>
           </p:cNvPr>
@@ -3298,7 +3033,50 @@
         </p:nvSpPr>
         <p:spPr>
           <a:xfrm>
-            <a:off x="166031" y="4011401"/>
+            <a:off x="535283" y="2345298"/>
+            <a:ext cx="1631472" cy="337015"/>
+          </a:xfrm>
+          <a:prstGeom prst="rect">
+            <a:avLst/>
+          </a:prstGeom>
+          <a:noFill/>
+        </p:spPr>
+        <p:txBody>
+          <a:bodyPr wrap="none" lIns="118872" tIns="91440" rIns="118872" bIns="91440" rtlCol="0" anchor="ctr" anchorCtr="0">
+            <a:spAutoFit/>
+          </a:bodyPr>
+          <a:lstStyle/>
+          <a:p>
+            <a:pPr algn="l">
+              <a:lnSpc>
+                <a:spcPct val="90000"/>
+              </a:lnSpc>
+            </a:pPr>
+            <a:r>
+              <a:rPr lang="en-US" sz="1050" i="1" dirty="0">
+                <a:hlinkClick r:id="rId9"/>
+              </a:rPr>
+              <a:t>https://pesoproject.org</a:t>
+            </a:r>
+            <a:endParaRPr lang="en-US" sz="1050" i="1" dirty="0"/>
+          </a:p>
+        </p:txBody>
+      </p:sp>
+      <p:sp>
+        <p:nvSpPr>
+          <p:cNvPr id="20" name="TextBox 19">
+            <a:extLst>
+              <a:ext uri="{FF2B5EF4-FFF2-40B4-BE49-F238E27FC236}">
+                <a16:creationId xmlns:a16="http://schemas.microsoft.com/office/drawing/2014/main" id="{AA5D1E85-1850-E4B4-F511-C254447B5490}"/>
+              </a:ext>
+            </a:extLst>
+          </p:cNvPr>
+          <p:cNvSpPr txBox="1"/>
+          <p:nvPr userDrawn="1"/>
+        </p:nvSpPr>
+        <p:spPr>
+          <a:xfrm>
+            <a:off x="48264" y="4011401"/>
             <a:ext cx="2605511" cy="655564"/>
           </a:xfrm>
           <a:prstGeom prst="rect">
@@ -3326,7 +3104,7 @@
             </a:br>
             <a:r>
               <a:rPr lang="en-US" sz="1000" i="1" dirty="0">
-                <a:hlinkClick r:id="rId12"/>
+                <a:hlinkClick r:id="rId10"/>
               </a:rPr>
               <a:t>https://cass.community</a:t>
             </a:r>
@@ -3336,10 +3114,10 @@
       </p:sp>
       <p:pic>
         <p:nvPicPr>
-          <p:cNvPr id="33" name="Picture 32" descr="A picture containing arrow&#10;&#10;AI-generated content may be incorrect.">
+          <p:cNvPr id="21" name="Picture 20" descr="A picture containing arrow&#10;&#10;AI-generated content may be incorrect.">
             <a:extLst>
               <a:ext uri="{FF2B5EF4-FFF2-40B4-BE49-F238E27FC236}">
-                <a16:creationId xmlns:a16="http://schemas.microsoft.com/office/drawing/2014/main" id="{B7F73F98-CA13-FB35-8581-26AFB4E15F1A}"/>
+                <a16:creationId xmlns:a16="http://schemas.microsoft.com/office/drawing/2014/main" id="{28040F87-B305-0E89-E938-0FF0D86D4128}"/>
               </a:ext>
             </a:extLst>
           </p:cNvPr>
@@ -3349,7 +3127,7 @@
           <p:nvPr userDrawn="1"/>
         </p:nvPicPr>
         <p:blipFill>
-          <a:blip r:embed="rId13" cstate="print">
+          <a:blip r:embed="rId11" cstate="print">
             <a:extLst>
               <a:ext uri="{28A0092B-C50C-407E-A947-70E740481C1C}">
                 <a14:useLocalDpi xmlns:a14="http://schemas.microsoft.com/office/drawing/2010/main" val="0"/>
@@ -3362,7 +3140,7 @@
         </p:blipFill>
         <p:spPr>
           <a:xfrm>
-            <a:off x="849769" y="2974535"/>
+            <a:off x="732002" y="2974535"/>
             <a:ext cx="1238034" cy="1128739"/>
           </a:xfrm>
           <a:prstGeom prst="rect">
@@ -5825,7 +5603,7 @@
         <p:spPr>
           <a:xfrm>
             <a:off x="3176924" y="2085870"/>
-            <a:ext cx="2034531" cy="424732"/>
+            <a:ext cx="2752677" cy="424732"/>
           </a:xfrm>
         </p:spPr>
         <p:txBody>
@@ -5834,7 +5612,7 @@
           <a:p>
             <a:r>
               <a:rPr lang="en-US" dirty="0"/>
-              <a:t>Anshu Dubey</a:t>
+              <a:t>David E. Bernholdt</a:t>
             </a:r>
           </a:p>
         </p:txBody>
@@ -5857,7 +5635,7 @@
         </p:nvSpPr>
         <p:spPr>
           <a:xfrm>
-            <a:off x="5176191" y="2140952"/>
+            <a:off x="5858116" y="2140952"/>
             <a:ext cx="1690167" cy="376085"/>
           </a:xfrm>
         </p:spPr>
@@ -5867,7 +5645,7 @@
           <a:p>
             <a:r>
               <a:rPr lang="en-US" dirty="0"/>
-              <a:t>(she/her)</a:t>
+              <a:t>(he/him)</a:t>
             </a:r>
           </a:p>
         </p:txBody>
@@ -5895,7 +5673,7 @@
           <a:p>
             <a:r>
               <a:rPr lang="en-US" dirty="0"/>
-              <a:t>Argonne National Laboratory</a:t>
+              <a:t>Oak Ridge National Laboratory</a:t>
             </a:r>
           </a:p>
         </p:txBody>
@@ -5932,29 +5710,13 @@
               </a:spcBef>
             </a:pPr>
             <a:r>
-              <a:rPr lang="en-US" sz="2000" b="0" i="0" dirty="0">
-                <a:solidFill>
-                  <a:srgbClr val="111111"/>
-                </a:solidFill>
-                <a:effectLst/>
-                <a:latin typeface="+mn-lt"/>
-              </a:rPr>
-              <a:t>Better Software for Reproducible Science tutorial @ SCA/HPC-Asia 2026 Conferenc</a:t>
-            </a:r>
-            <a:r>
-              <a:rPr lang="en-US" dirty="0">
-                <a:solidFill>
-                  <a:srgbClr val="111111"/>
-                </a:solidFill>
-              </a:rPr>
-              <a:t>e, Osaka, Japan</a:t>
-            </a:r>
-            <a:endParaRPr lang="en-US" sz="2000" b="0" i="0" dirty="0">
+              <a:rPr lang="en-US" dirty="0"/>
+              <a:t>Software Sustainability track @ Argonne Training Program on Extreme-Scale Computing summer school</a:t>
+            </a:r>
+            <a:endParaRPr lang="en-US" dirty="0">
               <a:solidFill>
                 <a:srgbClr val="111111"/>
               </a:solidFill>
-              <a:effectLst/>
-              <a:latin typeface="+mn-lt"/>
             </a:endParaRPr>
           </a:p>
         </p:txBody>
@@ -6011,7 +5773,7 @@
         <p:spPr>
           <a:xfrm>
             <a:off x="3176924" y="4242168"/>
-            <a:ext cx="8292316" cy="369332"/>
+            <a:ext cx="8292316" cy="646331"/>
           </a:xfrm>
         </p:spPr>
         <p:txBody>
@@ -6020,7 +5782,7 @@
           <a:p>
             <a:r>
               <a:rPr lang="en-US" sz="2000" dirty="0"/>
-              <a:t>Contributors: Anshu Dubey (ANL), Jared O’Neal</a:t>
+              <a:t>Contributors: David E. Bernholdt (ORNL), Anshu Dubey (ANL), Jared O’Neal</a:t>
             </a:r>
           </a:p>
         </p:txBody>
@@ -6039,7 +5801,7 @@
 </file>
 
 <file path=ppt/slides/slide10.xml><?xml version="1.0" encoding="utf-8"?>
-<p:sld xmlns:a="http://schemas.openxmlformats.org/drawingml/2006/main" xmlns:r="http://schemas.openxmlformats.org/officeDocument/2006/relationships" xmlns:p="http://schemas.openxmlformats.org/presentationml/2006/main">
+<p:sld xmlns:a="http://schemas.openxmlformats.org/drawingml/2006/main" xmlns:r="http://schemas.openxmlformats.org/officeDocument/2006/relationships" xmlns:p="http://schemas.openxmlformats.org/presentationml/2006/main" show="0">
   <p:cSld>
     <p:spTree>
       <p:nvGrpSpPr>
@@ -6663,13 +6425,13 @@
   <p:clrMapOvr>
     <a:masterClrMapping/>
   </p:clrMapOvr>
-  <mc:AlternateContent xmlns:mc="http://schemas.openxmlformats.org/markup-compatibility/2006" xmlns:p14="http://schemas.microsoft.com/office/powerpoint/2010/main">
-    <mc:Choice Requires="p14">
+  <mc:AlternateContent xmlns:mc="http://schemas.openxmlformats.org/markup-compatibility/2006">
+    <mc:Choice xmlns:p14="http://schemas.microsoft.com/office/powerpoint/2010/main" Requires="p14">
       <p:transition p14:dur="250">
         <p:fade/>
       </p:transition>
     </mc:Choice>
-    <mc:Fallback xmlns="">
+    <mc:Fallback>
       <p:transition>
         <p:fade/>
       </p:transition>
@@ -6679,7 +6441,7 @@
 </file>
 
 <file path=ppt/slides/slide11.xml><?xml version="1.0" encoding="utf-8"?>
-<p:sld xmlns:a="http://schemas.openxmlformats.org/drawingml/2006/main" xmlns:r="http://schemas.openxmlformats.org/officeDocument/2006/relationships" xmlns:p="http://schemas.openxmlformats.org/presentationml/2006/main">
+<p:sld xmlns:a="http://schemas.openxmlformats.org/drawingml/2006/main" xmlns:r="http://schemas.openxmlformats.org/officeDocument/2006/relationships" xmlns:p="http://schemas.openxmlformats.org/presentationml/2006/main" show="0">
   <p:cSld>
     <p:spTree>
       <p:nvGrpSpPr>
@@ -7544,13 +7306,13 @@
   <p:clrMapOvr>
     <a:masterClrMapping/>
   </p:clrMapOvr>
-  <mc:AlternateContent xmlns:mc="http://schemas.openxmlformats.org/markup-compatibility/2006" xmlns:p14="http://schemas.microsoft.com/office/powerpoint/2010/main">
-    <mc:Choice Requires="p14">
+  <mc:AlternateContent xmlns:mc="http://schemas.openxmlformats.org/markup-compatibility/2006">
+    <mc:Choice xmlns:p14="http://schemas.microsoft.com/office/powerpoint/2010/main" Requires="p14">
       <p:transition p14:dur="250">
         <p:fade/>
       </p:transition>
     </mc:Choice>
-    <mc:Fallback xmlns="">
+    <mc:Fallback>
       <p:transition>
         <p:fade/>
       </p:transition>
@@ -7560,7 +7322,7 @@
 </file>
 
 <file path=ppt/slides/slide12.xml><?xml version="1.0" encoding="utf-8"?>
-<p:sld xmlns:a="http://schemas.openxmlformats.org/drawingml/2006/main" xmlns:r="http://schemas.openxmlformats.org/officeDocument/2006/relationships" xmlns:p="http://schemas.openxmlformats.org/presentationml/2006/main">
+<p:sld xmlns:a="http://schemas.openxmlformats.org/drawingml/2006/main" xmlns:r="http://schemas.openxmlformats.org/officeDocument/2006/relationships" xmlns:p="http://schemas.openxmlformats.org/presentationml/2006/main" show="0">
   <p:cSld>
     <p:spTree>
       <p:nvGrpSpPr>
@@ -8499,13 +8261,13 @@
   <p:clrMapOvr>
     <a:masterClrMapping/>
   </p:clrMapOvr>
-  <mc:AlternateContent xmlns:mc="http://schemas.openxmlformats.org/markup-compatibility/2006" xmlns:p14="http://schemas.microsoft.com/office/powerpoint/2010/main">
-    <mc:Choice Requires="p14">
+  <mc:AlternateContent xmlns:mc="http://schemas.openxmlformats.org/markup-compatibility/2006">
+    <mc:Choice xmlns:p14="http://schemas.microsoft.com/office/powerpoint/2010/main" Requires="p14">
       <p:transition p14:dur="250">
         <p:fade/>
       </p:transition>
     </mc:Choice>
-    <mc:Fallback xmlns="">
+    <mc:Fallback>
       <p:transition>
         <p:fade/>
       </p:transition>
@@ -16806,7 +16568,7 @@
         </p:nvSpPr>
         <p:spPr>
           <a:xfrm>
-            <a:off x="363096" y="112911"/>
+            <a:off x="363096" y="411282"/>
             <a:ext cx="11372473" cy="914400"/>
           </a:xfrm>
         </p:spPr>
@@ -16839,7 +16601,7 @@
         </p:nvSpPr>
         <p:spPr>
           <a:xfrm>
-            <a:off x="409507" y="570111"/>
+            <a:off x="409507" y="868482"/>
             <a:ext cx="11369809" cy="4047778"/>
           </a:xfrm>
         </p:spPr>
@@ -16894,13 +16656,13 @@
             </a:r>
             <a:r>
               <a:rPr lang="en-US" sz="1600" dirty="0"/>
-              <a:t>Anshu Dubey, David E. Bernholdt, and Todd Gamblin, Software Sustainability track, in Argonne Training Program on Extreme-Scale Computing, St. Charles, Illinois, 2025. DOI: </a:t>
+              <a:t>David E. Bernholdt, Software Sustainability track, in Argonne Training Program on Extreme-Scale Computing, St. Charles, Illinois, 2026. DOI: </a:t>
             </a:r>
             <a:r>
               <a:rPr lang="en-US" sz="1600" dirty="0">
                 <a:hlinkClick r:id="rId4"/>
               </a:rPr>
-              <a:t>10.6084/m9.figshare.29816981</a:t>
+              <a:t>10.6084/m9.figshare.33139910</a:t>
             </a:r>
             <a:r>
               <a:rPr lang="en-US" sz="1600" dirty="0"/>
@@ -16967,11 +16729,15 @@
             </a:pPr>
             <a:r>
               <a:rPr lang="en-US" sz="1400" dirty="0"/>
-              <a:t>This work was supported by the U.S. Department of Energy Office of Science, Office of Advanced Scientific Computing Research (ASCR), and by the Exascale Computing Project (17-SC-20-SC), a collaborative effort of the U.S. Department of Energy Office of Science and the National Nuclear Security Administration</a:t>
-            </a:r>
-            <a:r>
-              <a:rPr lang="en-US" sz="1400" i="1" dirty="0"/>
-              <a:t>.</a:t>
+              <a:t>This work was supported by the U.S. Department of Energy, Office of Science, Office of Advanced Scientific Computing Research, Next-Generation Scientific Software Technologies (NGSST) and Scientific Discovery through Advanced Computing (</a:t>
+            </a:r>
+            <a:r>
+              <a:rPr lang="en-US" sz="1400" dirty="0" err="1"/>
+              <a:t>SciDAC</a:t>
+            </a:r>
+            <a:r>
+              <a:rPr lang="en-US" sz="1400" dirty="0"/>
+              <a:t>) programs.</a:t>
             </a:r>
           </a:p>
           <a:p>
@@ -16981,11 +16747,12 @@
               </a:spcBef>
             </a:pPr>
             <a:r>
-              <a:rPr lang="en-US" sz="1400" b="0" i="0" dirty="0">
-                <a:effectLst/>
-                <a:latin typeface="+mn-lt"/>
-              </a:rPr>
-              <a:t>This work was supported by the U.S. Department of Energy, Office of Science, Office of Advanced Scientific Computing Research, Next-Generation Scientific Software Technologies (NGSST) program.</a:t>
+              <a:rPr lang="en-US" sz="1400" dirty="0"/>
+              <a:t>This work was supported by the U.S. Department of Energy Office of Science, Office of Advanced Scientific Computing Research (ASCR), and by the Exascale Computing Project (17-SC-20-SC), a collaborative effort of the U.S. Department of Energy Office of Science and the National Nuclear Security Administration</a:t>
+            </a:r>
+            <a:r>
+              <a:rPr lang="en-US" sz="1400" i="1" dirty="0"/>
+              <a:t>.</a:t>
             </a:r>
           </a:p>
           <a:p>
@@ -17095,7 +16862,7 @@
     </p:spTree>
     <p:extLst>
       <p:ext uri="{BB962C8B-B14F-4D97-AF65-F5344CB8AC3E}">
-        <p14:creationId xmlns:p14="http://schemas.microsoft.com/office/powerpoint/2010/main" val="978726433"/>
+        <p14:creationId xmlns:p14="http://schemas.microsoft.com/office/powerpoint/2010/main" val="3509392345"/>
       </p:ext>
     </p:extLst>
   </p:cSld>
@@ -29264,7 +29031,7 @@
 </file>
 
 <file path=ppt/slides/slide9.xml><?xml version="1.0" encoding="utf-8"?>
-<p:sld xmlns:a="http://schemas.openxmlformats.org/drawingml/2006/main" xmlns:r="http://schemas.openxmlformats.org/officeDocument/2006/relationships" xmlns:p="http://schemas.openxmlformats.org/presentationml/2006/main">
+<p:sld xmlns:a="http://schemas.openxmlformats.org/drawingml/2006/main" xmlns:r="http://schemas.openxmlformats.org/officeDocument/2006/relationships" xmlns:p="http://schemas.openxmlformats.org/presentationml/2006/main" show="0">
   <p:cSld>
     <p:spTree>
       <p:nvGrpSpPr>
@@ -30525,18 +30292,18 @@
 </file>
 
 <file path=customXml/item1.xml><?xml version="1.0" encoding="utf-8"?>
+<p:properties xmlns:p="http://schemas.microsoft.com/office/2006/metadata/properties" xmlns:xsi="http://www.w3.org/2001/XMLSchema-instance" xmlns:pc="http://schemas.microsoft.com/office/infopath/2007/PartnerControls">
+  <documentManagement/>
+</p:properties>
+</file>
+
+<file path=customXml/item2.xml><?xml version="1.0" encoding="utf-8"?>
 <?mso-contentType ?>
 <FormTemplates xmlns="http://schemas.microsoft.com/sharepoint/v3/contenttype/forms">
   <Display>DocumentLibraryForm</Display>
   <Edit>DocumentLibraryForm</Edit>
   <New>DocumentLibraryForm</New>
 </FormTemplates>
-</file>
-
-<file path=customXml/item2.xml><?xml version="1.0" encoding="utf-8"?>
-<p:properties xmlns:p="http://schemas.microsoft.com/office/2006/metadata/properties" xmlns:xsi="http://www.w3.org/2001/XMLSchema-instance" xmlns:pc="http://schemas.microsoft.com/office/infopath/2007/PartnerControls">
-  <documentManagement/>
-</p:properties>
 </file>
 
 <file path=customXml/item3.xml><?xml version="1.0" encoding="utf-8"?>
@@ -30589,14 +30356,6 @@
 </file>
 
 <file path=customXml/itemProps1.xml><?xml version="1.0" encoding="utf-8"?>
-<ds:datastoreItem xmlns:ds="http://schemas.openxmlformats.org/officeDocument/2006/customXml" ds:itemID="{19E20559-B232-4371-8690-E3D8007EDB82}">
-  <ds:schemaRefs>
-    <ds:schemaRef ds:uri="http://schemas.microsoft.com/sharepoint/v3/contenttype/forms"/>
-  </ds:schemaRefs>
-</ds:datastoreItem>
-</file>
-
-<file path=customXml/itemProps2.xml><?xml version="1.0" encoding="utf-8"?>
 <ds:datastoreItem xmlns:ds="http://schemas.openxmlformats.org/officeDocument/2006/customXml" ds:itemID="{A50EC660-24D0-43A0-AE5E-E274115E726B}">
   <ds:schemaRefs>
     <ds:schemaRef ds:uri="http://purl.org/dc/elements/1.1/"/>
@@ -30607,6 +30366,14 @@
     <ds:schemaRef ds:uri="http://www.w3.org/XML/1998/namespace"/>
     <ds:schemaRef ds:uri="http://purl.org/dc/dcmitype/"/>
     <ds:schemaRef ds:uri="http://schemas.microsoft.com/office/infopath/2007/PartnerControls"/>
+  </ds:schemaRefs>
+</ds:datastoreItem>
+</file>
+
+<file path=customXml/itemProps2.xml><?xml version="1.0" encoding="utf-8"?>
+<ds:datastoreItem xmlns:ds="http://schemas.openxmlformats.org/officeDocument/2006/customXml" ds:itemID="{19E20559-B232-4371-8690-E3D8007EDB82}">
+  <ds:schemaRefs>
+    <ds:schemaRef ds:uri="http://schemas.microsoft.com/sharepoint/v3/contenttype/forms"/>
   </ds:schemaRefs>
 </ds:datastoreItem>
 </file>

--- a/refactoring.pptx
+++ b/refactoring.pptx
@@ -285,7 +285,7 @@
           <a:p>
             <a:fld id="{0B842F42-2CE9-4E35-95C1-410DC08A50B1}" type="datetimeFigureOut">
               <a:rPr lang="en-US" smtClean="0"/>
-              <a:t>8/2/2026</a:t>
+              <a:t>8/4/2026</a:t>
             </a:fld>
             <a:endParaRPr lang="en-US"/>
           </a:p>
@@ -450,7 +450,7 @@
           <a:p>
             <a:fld id="{6F282904-F315-4730-8D91-37D99E141A6F}" type="datetimeFigureOut">
               <a:rPr lang="en-US" smtClean="0"/>
-              <a:t>8/2/2026</a:t>
+              <a:t>8/4/2026</a:t>
             </a:fld>
             <a:endParaRPr lang="en-US"/>
           </a:p>
@@ -6425,13 +6425,13 @@
   <p:clrMapOvr>
     <a:masterClrMapping/>
   </p:clrMapOvr>
-  <mc:AlternateContent xmlns:mc="http://schemas.openxmlformats.org/markup-compatibility/2006">
-    <mc:Choice xmlns:p14="http://schemas.microsoft.com/office/powerpoint/2010/main" Requires="p14">
+  <mc:AlternateContent xmlns:mc="http://schemas.openxmlformats.org/markup-compatibility/2006" xmlns:p14="http://schemas.microsoft.com/office/powerpoint/2010/main">
+    <mc:Choice Requires="p14">
       <p:transition p14:dur="250">
         <p:fade/>
       </p:transition>
     </mc:Choice>
-    <mc:Fallback>
+    <mc:Fallback xmlns="">
       <p:transition>
         <p:fade/>
       </p:transition>
@@ -7306,13 +7306,13 @@
   <p:clrMapOvr>
     <a:masterClrMapping/>
   </p:clrMapOvr>
-  <mc:AlternateContent xmlns:mc="http://schemas.openxmlformats.org/markup-compatibility/2006">
-    <mc:Choice xmlns:p14="http://schemas.microsoft.com/office/powerpoint/2010/main" Requires="p14">
+  <mc:AlternateContent xmlns:mc="http://schemas.openxmlformats.org/markup-compatibility/2006" xmlns:p14="http://schemas.microsoft.com/office/powerpoint/2010/main">
+    <mc:Choice Requires="p14">
       <p:transition p14:dur="250">
         <p:fade/>
       </p:transition>
     </mc:Choice>
-    <mc:Fallback>
+    <mc:Fallback xmlns="">
       <p:transition>
         <p:fade/>
       </p:transition>
@@ -8261,13 +8261,13 @@
   <p:clrMapOvr>
     <a:masterClrMapping/>
   </p:clrMapOvr>
-  <mc:AlternateContent xmlns:mc="http://schemas.openxmlformats.org/markup-compatibility/2006">
-    <mc:Choice xmlns:p14="http://schemas.microsoft.com/office/powerpoint/2010/main" Requires="p14">
+  <mc:AlternateContent xmlns:mc="http://schemas.openxmlformats.org/markup-compatibility/2006" xmlns:p14="http://schemas.microsoft.com/office/powerpoint/2010/main">
+    <mc:Choice Requires="p14">
       <p:transition p14:dur="250">
         <p:fade/>
       </p:transition>
     </mc:Choice>
-    <mc:Fallback>
+    <mc:Fallback xmlns="">
       <p:transition>
         <p:fade/>
       </p:transition>
@@ -30298,15 +30298,6 @@
 </file>
 
 <file path=customXml/item2.xml><?xml version="1.0" encoding="utf-8"?>
-<?mso-contentType ?>
-<FormTemplates xmlns="http://schemas.microsoft.com/sharepoint/v3/contenttype/forms">
-  <Display>DocumentLibraryForm</Display>
-  <Edit>DocumentLibraryForm</Edit>
-  <New>DocumentLibraryForm</New>
-</FormTemplates>
-</file>
-
-<file path=customXml/item3.xml><?xml version="1.0" encoding="utf-8"?>
 <ct:contentTypeSchema xmlns:ct="http://schemas.microsoft.com/office/2006/metadata/contentType" xmlns:ma="http://schemas.microsoft.com/office/2006/metadata/properties/metaAttributes" ct:_="" ma:_="" ma:contentTypeName="Document" ma:contentTypeID="0x010100565464437F680748A68B85EB6594EA7D" ma:contentTypeVersion="0" ma:contentTypeDescription="Create a new document." ma:contentTypeScope="" ma:versionID="fe3f4dd58d5914c51cfc6deaa8ad845c">
   <xsd:schema xmlns:xsd="http://www.w3.org/2001/XMLSchema" xmlns:p="http://schemas.microsoft.com/office/2006/metadata/properties" targetNamespace="http://schemas.microsoft.com/office/2006/metadata/properties" ma:root="true" ma:fieldsID="4aeb20c0e3442673af7ee10786458764">
     <xsd:element name="properties">
@@ -30355,6 +30346,15 @@
 </ct:contentTypeSchema>
 </file>
 
+<file path=customXml/item3.xml><?xml version="1.0" encoding="utf-8"?>
+<?mso-contentType ?>
+<FormTemplates xmlns="http://schemas.microsoft.com/sharepoint/v3/contenttype/forms">
+  <Display>DocumentLibraryForm</Display>
+  <Edit>DocumentLibraryForm</Edit>
+  <New>DocumentLibraryForm</New>
+</FormTemplates>
+</file>
+
 <file path=customXml/itemProps1.xml><?xml version="1.0" encoding="utf-8"?>
 <ds:datastoreItem xmlns:ds="http://schemas.openxmlformats.org/officeDocument/2006/customXml" ds:itemID="{A50EC660-24D0-43A0-AE5E-E274115E726B}">
   <ds:schemaRefs>
@@ -30371,14 +30371,6 @@
 </file>
 
 <file path=customXml/itemProps2.xml><?xml version="1.0" encoding="utf-8"?>
-<ds:datastoreItem xmlns:ds="http://schemas.openxmlformats.org/officeDocument/2006/customXml" ds:itemID="{19E20559-B232-4371-8690-E3D8007EDB82}">
-  <ds:schemaRefs>
-    <ds:schemaRef ds:uri="http://schemas.microsoft.com/sharepoint/v3/contenttype/forms"/>
-  </ds:schemaRefs>
-</ds:datastoreItem>
-</file>
-
-<file path=customXml/itemProps3.xml><?xml version="1.0" encoding="utf-8"?>
 <ds:datastoreItem xmlns:ds="http://schemas.openxmlformats.org/officeDocument/2006/customXml" ds:itemID="{E8DB7DEB-074E-4EE8-9B6E-FD277323109C}">
   <ds:schemaRefs>
     <ds:schemaRef ds:uri="http://schemas.microsoft.com/office/2006/metadata/contentType"/>
@@ -30391,4 +30383,12 @@
     <ds:schemaRef ds:uri="http://schemas.microsoft.com/office/internal/2005/internalDocumentation"/>
   </ds:schemaRefs>
 </ds:datastoreItem>
+</file>
+
+<file path=customXml/itemProps3.xml><?xml version="1.0" encoding="utf-8"?>
+<ds:datastoreItem xmlns:ds="http://schemas.openxmlformats.org/officeDocument/2006/customXml" ds:itemID="{19E20559-B232-4371-8690-E3D8007EDB82}">
+  <ds:schemaRefs>
+    <ds:schemaRef ds:uri="http://schemas.microsoft.com/sharepoint/v3/contenttype/forms"/>
+  </ds:schemaRefs>
+</ds:datastoreItem>
 </file>